--- a/examples/gps-lean-xiangzong/output/GPS精益_筑基势起_向总汇报.pptx
+++ b/examples/gps-lean-xiangzong/output/GPS精益_筑基势起_向总汇报.pptx
@@ -11,10 +11,6 @@
     <p:sldId id="259" r:id="rId10"/>
     <p:sldId id="260" r:id="rId11"/>
     <p:sldId id="261" r:id="rId12"/>
-    <p:sldId id="262" r:id="rId13"/>
-    <p:sldId id="263" r:id="rId14"/>
-    <p:sldId id="264" r:id="rId15"/>
-    <p:sldId id="265" r:id="rId16"/>
   </p:sldIdLst>
   <p:sldSz cx="12191695" cy="6858000" type="screen4x3"/>
   <p:notesSz cx="6858000" cy="9144000"/>
@@ -3114,7 +3110,7 @@
             </a:avLst>
           </a:prstGeom>
           <a:solidFill>
-            <a:srgbClr val="0B2A3F"/>
+            <a:srgbClr val="FFFFFF"/>
           </a:solidFill>
           <a:ln>
             <a:noFill/>
@@ -3150,8 +3146,8 @@
         </p:nvSpPr>
         <p:spPr>
           <a:xfrm>
-            <a:off x="640080" y="914400"/>
-            <a:ext cx="9144000" cy="365760"/>
+            <a:off x="411480" y="228600"/>
+            <a:ext cx="10972800" cy="411480"/>
           </a:xfrm>
           <a:prstGeom prst="rect">
             <a:avLst/>
@@ -3166,191 +3162,28 @@
           <a:p>
             <a:pPr algn="l"/>
             <a:r>
-              <a:rPr sz="1600" b="1">
-                <a:solidFill>
-                  <a:srgbClr val="E07A2F"/>
+              <a:rPr sz="2600" b="1">
+                <a:solidFill>
+                  <a:srgbClr val="1B3A5F"/>
                 </a:solidFill>
                 <a:latin typeface="Microsoft YaHei"/>
                 <a:ea typeface="Microsoft YaHei"/>
               </a:rPr>
-              <a:t>GPS 精益管理系统</a:t>
-            </a:r>
-          </a:p>
-        </p:txBody>
-      </p:sp>
-      <p:sp>
-        <p:nvSpPr>
-          <p:cNvPr id="4" name="TextBox 3"/>
-          <p:cNvSpPr txBox="1"/>
-          <p:nvPr/>
-        </p:nvSpPr>
-        <p:spPr>
-          <a:xfrm>
-            <a:off x="640080" y="1463040"/>
-            <a:ext cx="10058400" cy="731520"/>
-          </a:xfrm>
-          <a:prstGeom prst="rect">
-            <a:avLst/>
-          </a:prstGeom>
-          <a:noFill/>
-        </p:spPr>
-        <p:txBody>
-          <a:bodyPr wrap="square">
-            <a:spAutoFit/>
-          </a:bodyPr>
-          <a:lstStyle/>
-          <a:p>
-            <a:pPr algn="l"/>
-            <a:r>
-              <a:rPr sz="4000" b="1">
-                <a:solidFill>
-                  <a:srgbClr val="FFFFFF"/>
-                </a:solidFill>
-                <a:latin typeface="Microsoft YaHei"/>
-                <a:ea typeface="Microsoft YaHei"/>
-              </a:rPr>
-              <a:t>筑基 →「势起」</a:t>
-            </a:r>
-          </a:p>
-        </p:txBody>
-      </p:sp>
-      <p:sp>
-        <p:nvSpPr>
-          <p:cNvPr id="5" name="TextBox 4"/>
-          <p:cNvSpPr txBox="1"/>
-          <p:nvPr/>
-        </p:nvSpPr>
-        <p:spPr>
-          <a:xfrm>
-            <a:off x="640080" y="2286000"/>
-            <a:ext cx="10058400" cy="457200"/>
-          </a:xfrm>
-          <a:prstGeom prst="rect">
-            <a:avLst/>
-          </a:prstGeom>
-          <a:noFill/>
-        </p:spPr>
-        <p:txBody>
-          <a:bodyPr wrap="square">
-            <a:spAutoFit/>
-          </a:bodyPr>
-          <a:lstStyle/>
-          <a:p>
-            <a:pPr algn="l"/>
-            <a:r>
-              <a:rPr sz="2200" b="0">
-                <a:solidFill>
-                  <a:srgbClr val="D6E4EE"/>
-                </a:solidFill>
-                <a:latin typeface="Microsoft YaHei"/>
-                <a:ea typeface="Microsoft YaHei"/>
-              </a:rPr>
-              <a:t>2026 下半年精益全域推进方案</a:t>
-            </a:r>
-          </a:p>
-        </p:txBody>
-      </p:sp>
-      <p:sp>
-        <p:nvSpPr>
-          <p:cNvPr id="6" name="TextBox 5"/>
-          <p:cNvSpPr txBox="1"/>
-          <p:nvPr/>
-        </p:nvSpPr>
-        <p:spPr>
-          <a:xfrm>
-            <a:off x="640080" y="3108960"/>
-            <a:ext cx="10058400" cy="731520"/>
-          </a:xfrm>
-          <a:prstGeom prst="rect">
-            <a:avLst/>
-          </a:prstGeom>
-          <a:noFill/>
-        </p:spPr>
-        <p:txBody>
-          <a:bodyPr wrap="square">
-            <a:spAutoFit/>
-          </a:bodyPr>
-          <a:lstStyle/>
-          <a:p>
-            <a:pPr algn="l"/>
-            <a:r>
-              <a:rPr sz="1600" b="0">
-                <a:solidFill>
-                  <a:srgbClr val="A8C5D4"/>
-                </a:solidFill>
-                <a:latin typeface="Microsoft YaHei"/>
-                <a:ea typeface="Microsoft YaHei"/>
-              </a:rPr>
-              <a:t>以「453」体系框架启航精益转型
-锚定「真善美」价值主张 · 打造第二生产力引擎</a:t>
-            </a:r>
-          </a:p>
-        </p:txBody>
-      </p:sp>
-      <p:sp>
-        <p:nvSpPr>
-          <p:cNvPr id="7" name="TextBox 6"/>
-          <p:cNvSpPr txBox="1"/>
-          <p:nvPr/>
-        </p:nvSpPr>
-        <p:spPr>
-          <a:xfrm>
-            <a:off x="640080" y="6035040"/>
-            <a:ext cx="5486400" cy="274320"/>
-          </a:xfrm>
-          <a:prstGeom prst="rect">
-            <a:avLst/>
-          </a:prstGeom>
-          <a:noFill/>
-        </p:spPr>
-        <p:txBody>
-          <a:bodyPr wrap="square">
-            <a:spAutoFit/>
-          </a:bodyPr>
-          <a:lstStyle/>
-          <a:p>
-            <a:pPr algn="l"/>
-            <a:r>
-              <a:rPr sz="1200" b="0">
-                <a:solidFill>
-                  <a:srgbClr val="7FA0B4"/>
-                </a:solidFill>
-                <a:latin typeface="Microsoft YaHei"/>
-                <a:ea typeface="Microsoft YaHei"/>
-              </a:rPr>
-              <a:t>汇报对象：向总</a:t>
-            </a:r>
-          </a:p>
-        </p:txBody>
-      </p:sp>
-    </p:spTree>
-  </p:cSld>
-  <p:clrMapOvr>
-    <a:masterClrMapping/>
-  </p:clrMapOvr>
-</p:sld>
-</file>
-
-<file path=ppt/slides/slide10.xml><?xml version="1.0" encoding="utf-8"?>
-<p:sld xmlns:a="http://schemas.openxmlformats.org/drawingml/2006/main" xmlns:p="http://schemas.openxmlformats.org/presentationml/2006/main" xmlns:r="http://schemas.openxmlformats.org/officeDocument/2006/relationships">
-  <p:cSld>
-    <p:spTree>
-      <p:nvGrpSpPr>
-        <p:cNvPr id="1" name=""/>
-        <p:cNvGrpSpPr/>
-        <p:nvPr/>
-      </p:nvGrpSpPr>
-      <p:grpSpPr/>
-      <p:sp>
-        <p:nvSpPr>
-          <p:cNvPr id="2" name="Rounded Rectangle 1"/>
+              <a:t>当前精益推进现存真实痛点</a:t>
+            </a:r>
+          </a:p>
+        </p:txBody>
+      </p:sp>
+      <p:sp>
+        <p:nvSpPr>
+          <p:cNvPr id="4" name="Rounded Rectangle 3"/>
           <p:cNvSpPr/>
           <p:nvPr/>
         </p:nvSpPr>
         <p:spPr>
           <a:xfrm>
-            <a:off x="0" y="0"/>
-            <a:ext cx="12191695" cy="6858000"/>
+            <a:off x="365760" y="822960"/>
+            <a:ext cx="5669280" cy="1600200"/>
           </a:xfrm>
           <a:prstGeom prst="roundRect">
             <a:avLst>
@@ -3358,10 +3191,12 @@
             </a:avLst>
           </a:prstGeom>
           <a:solidFill>
-            <a:srgbClr val="0B2A3F"/>
+            <a:srgbClr val="FFFFFF"/>
           </a:solidFill>
-          <a:ln>
-            <a:noFill/>
+          <a:ln w="15875">
+            <a:solidFill>
+              <a:srgbClr val="E8EEF2"/>
+            </a:solidFill>
           </a:ln>
         </p:spPr>
         <p:style>
@@ -3388,14 +3223,14 @@
       </p:sp>
       <p:sp>
         <p:nvSpPr>
-          <p:cNvPr id="3" name="TextBox 2"/>
+          <p:cNvPr id="5" name="TextBox 4"/>
           <p:cNvSpPr txBox="1"/>
           <p:nvPr/>
         </p:nvSpPr>
         <p:spPr>
           <a:xfrm>
-            <a:off x="640080" y="1188720"/>
-            <a:ext cx="10058400" cy="365760"/>
+            <a:off x="548640" y="960120"/>
+            <a:ext cx="5303520" cy="320040"/>
           </a:xfrm>
           <a:prstGeom prst="rect">
             <a:avLst/>
@@ -3410,28 +3245,28 @@
           <a:p>
             <a:pPr algn="l"/>
             <a:r>
-              <a:rPr sz="1600" b="1">
-                <a:solidFill>
-                  <a:srgbClr val="E07A2F"/>
+              <a:rPr sz="1400" b="1">
+                <a:solidFill>
+                  <a:srgbClr val="E87A2E"/>
                 </a:solidFill>
                 <a:latin typeface="Microsoft YaHei"/>
                 <a:ea typeface="Microsoft YaHei"/>
               </a:rPr>
-              <a:t>下一步</a:t>
-            </a:r>
-          </a:p>
-        </p:txBody>
-      </p:sp>
-      <p:sp>
-        <p:nvSpPr>
-          <p:cNvPr id="4" name="TextBox 3"/>
+              <a:t>01 落地不均衡，标杆与常态两极分化</a:t>
+            </a:r>
+          </a:p>
+        </p:txBody>
+      </p:sp>
+      <p:sp>
+        <p:nvSpPr>
+          <p:cNvPr id="6" name="TextBox 5"/>
           <p:cNvSpPr txBox="1"/>
           <p:nvPr/>
         </p:nvSpPr>
         <p:spPr>
           <a:xfrm>
-            <a:off x="640080" y="1737360"/>
-            <a:ext cx="10058400" cy="640080"/>
+            <a:off x="548640" y="1325880"/>
+            <a:ext cx="5303520" cy="960120"/>
           </a:xfrm>
           <a:prstGeom prst="rect">
             <a:avLst/>
@@ -3446,64 +3281,28 @@
           <a:p>
             <a:pPr algn="l"/>
             <a:r>
-              <a:rPr sz="3600" b="1">
-                <a:solidFill>
-                  <a:srgbClr val="FFFFFF"/>
+              <a:rPr sz="1200" b="0">
+                <a:solidFill>
+                  <a:srgbClr val="5D6D7E"/>
                 </a:solidFill>
                 <a:latin typeface="Microsoft YaHei"/>
                 <a:ea typeface="Microsoft YaHei"/>
               </a:rPr>
-              <a:t>从「势起」到「势成」</a:t>
-            </a:r>
-          </a:p>
-        </p:txBody>
-      </p:sp>
-      <p:sp>
-        <p:nvSpPr>
-          <p:cNvPr id="5" name="TextBox 4"/>
-          <p:cNvSpPr txBox="1"/>
-          <p:nvPr/>
-        </p:nvSpPr>
-        <p:spPr>
-          <a:xfrm>
-            <a:off x="640080" y="2560320"/>
-            <a:ext cx="10058400" cy="457200"/>
-          </a:xfrm>
-          <a:prstGeom prst="rect">
-            <a:avLst/>
-          </a:prstGeom>
-          <a:noFill/>
-        </p:spPr>
-        <p:txBody>
-          <a:bodyPr wrap="square">
-            <a:spAutoFit/>
-          </a:bodyPr>
-          <a:lstStyle/>
-          <a:p>
-            <a:pPr algn="l"/>
-            <a:r>
-              <a:rPr sz="1600" b="0">
-                <a:solidFill>
-                  <a:srgbClr val="A8C5D4"/>
-                </a:solidFill>
-                <a:latin typeface="Microsoft YaHei"/>
-                <a:ea typeface="Microsoft YaHei"/>
-              </a:rPr>
-              <a:t>以四级联动贯通组织，以五大体系固化机制，以三阶段兑现价值</a:t>
-            </a:r>
-          </a:p>
-        </p:txBody>
-      </p:sp>
-      <p:sp>
-        <p:nvSpPr>
-          <p:cNvPr id="6" name="Rounded Rectangle 5"/>
+              <a:t>标杆产线成果显著，但多数产线仍停留在表层5S整改；深层次浪费与工艺瓶颈未触及，存在「重展示、轻落地、难持续」的形式化问题。</a:t>
+            </a:r>
+          </a:p>
+        </p:txBody>
+      </p:sp>
+      <p:sp>
+        <p:nvSpPr>
+          <p:cNvPr id="7" name="Rounded Rectangle 6"/>
           <p:cNvSpPr/>
           <p:nvPr/>
         </p:nvSpPr>
         <p:spPr>
           <a:xfrm>
-            <a:off x="640080" y="3474720"/>
-            <a:ext cx="3474720" cy="1463040"/>
+            <a:off x="365760" y="2560320"/>
+            <a:ext cx="5669280" cy="1600200"/>
           </a:xfrm>
           <a:prstGeom prst="roundRect">
             <a:avLst>
@@ -3511,10 +3310,12 @@
             </a:avLst>
           </a:prstGeom>
           <a:solidFill>
-            <a:srgbClr val="143D58"/>
+            <a:srgbClr val="FFFFFF"/>
           </a:solidFill>
-          <a:ln>
-            <a:noFill/>
+          <a:ln w="15875">
+            <a:solidFill>
+              <a:srgbClr val="E8EEF2"/>
+            </a:solidFill>
           </a:ln>
         </p:spPr>
         <p:style>
@@ -3541,14 +3342,14 @@
       </p:sp>
       <p:sp>
         <p:nvSpPr>
-          <p:cNvPr id="7" name="TextBox 6"/>
+          <p:cNvPr id="8" name="TextBox 7"/>
           <p:cNvSpPr txBox="1"/>
           <p:nvPr/>
         </p:nvSpPr>
         <p:spPr>
           <a:xfrm>
-            <a:off x="914400" y="3749039"/>
-            <a:ext cx="2926080" cy="365760"/>
+            <a:off x="548640" y="2697480"/>
+            <a:ext cx="5303520" cy="320040"/>
           </a:xfrm>
           <a:prstGeom prst="rect">
             <a:avLst/>
@@ -3563,28 +3364,28 @@
           <a:p>
             <a:pPr algn="l"/>
             <a:r>
-              <a:rPr sz="1800" b="1">
-                <a:solidFill>
-                  <a:srgbClr val="FFFFFF"/>
+              <a:rPr sz="1400" b="1">
+                <a:solidFill>
+                  <a:srgbClr val="E87A2E"/>
                 </a:solidFill>
                 <a:latin typeface="Microsoft YaHei"/>
                 <a:ea typeface="Microsoft YaHei"/>
               </a:rPr>
-              <a:t>统一标准</a:t>
-            </a:r>
-          </a:p>
-        </p:txBody>
-      </p:sp>
-      <p:sp>
-        <p:nvSpPr>
-          <p:cNvPr id="8" name="TextBox 7"/>
+              <a:t>02 改善偏单点，系统性攻坚能力不足</a:t>
+            </a:r>
+          </a:p>
+        </p:txBody>
+      </p:sp>
+      <p:sp>
+        <p:nvSpPr>
+          <p:cNvPr id="9" name="TextBox 8"/>
           <p:cNvSpPr txBox="1"/>
           <p:nvPr/>
         </p:nvSpPr>
         <p:spPr>
           <a:xfrm>
-            <a:off x="914400" y="4251960"/>
-            <a:ext cx="2926080" cy="365760"/>
+            <a:off x="548640" y="3063240"/>
+            <a:ext cx="5303520" cy="960120"/>
           </a:xfrm>
           <a:prstGeom prst="rect">
             <a:avLst/>
@@ -3599,28 +3400,28 @@
           <a:p>
             <a:pPr algn="l"/>
             <a:r>
-              <a:rPr sz="1300" b="0">
-                <a:solidFill>
-                  <a:srgbClr val="A8C5D4"/>
+              <a:rPr sz="1200" b="0">
+                <a:solidFill>
+                  <a:srgbClr val="5D6D7E"/>
                 </a:solidFill>
                 <a:latin typeface="Microsoft YaHei"/>
                 <a:ea typeface="Microsoft YaHei"/>
               </a:rPr>
-              <a:t>工具、模板、考核一把尺子</a:t>
-            </a:r>
-          </a:p>
-        </p:txBody>
-      </p:sp>
-      <p:sp>
-        <p:nvSpPr>
-          <p:cNvPr id="9" name="Rounded Rectangle 8"/>
+              <a:t>改善多为碎片化整改，对拉晶高能耗、切片断线损耗等核心技术痛点攻坚不够，难以从根本上拉动良率与成本等关键指标。</a:t>
+            </a:r>
+          </a:p>
+        </p:txBody>
+      </p:sp>
+      <p:sp>
+        <p:nvSpPr>
+          <p:cNvPr id="10" name="Rounded Rectangle 9"/>
           <p:cNvSpPr/>
           <p:nvPr/>
         </p:nvSpPr>
         <p:spPr>
           <a:xfrm>
-            <a:off x="4389120" y="3474720"/>
-            <a:ext cx="3474720" cy="1463040"/>
+            <a:off x="365760" y="4297680"/>
+            <a:ext cx="5669280" cy="1600200"/>
           </a:xfrm>
           <a:prstGeom prst="roundRect">
             <a:avLst>
@@ -3628,10 +3429,12 @@
             </a:avLst>
           </a:prstGeom>
           <a:solidFill>
-            <a:srgbClr val="143D58"/>
+            <a:srgbClr val="FFFFFF"/>
           </a:solidFill>
-          <a:ln>
-            <a:noFill/>
+          <a:ln w="15875">
+            <a:solidFill>
+              <a:srgbClr val="E8EEF2"/>
+            </a:solidFill>
           </a:ln>
         </p:spPr>
         <p:style>
@@ -3658,14 +3461,14 @@
       </p:sp>
       <p:sp>
         <p:nvSpPr>
-          <p:cNvPr id="10" name="TextBox 9"/>
+          <p:cNvPr id="11" name="TextBox 10"/>
           <p:cNvSpPr txBox="1"/>
           <p:nvPr/>
         </p:nvSpPr>
         <p:spPr>
           <a:xfrm>
-            <a:off x="4663440" y="3749039"/>
-            <a:ext cx="2926080" cy="365760"/>
+            <a:off x="548640" y="4434840"/>
+            <a:ext cx="5303520" cy="320040"/>
           </a:xfrm>
           <a:prstGeom prst="rect">
             <a:avLst/>
@@ -3680,28 +3483,28 @@
           <a:p>
             <a:pPr algn="l"/>
             <a:r>
-              <a:rPr sz="1800" b="1">
-                <a:solidFill>
-                  <a:srgbClr val="FFFFFF"/>
+              <a:rPr sz="1400" b="1">
+                <a:solidFill>
+                  <a:srgbClr val="E87A2E"/>
                 </a:solidFill>
                 <a:latin typeface="Microsoft YaHei"/>
                 <a:ea typeface="Microsoft YaHei"/>
               </a:rPr>
-              <a:t>攻坚课题</a:t>
-            </a:r>
-          </a:p>
-        </p:txBody>
-      </p:sp>
-      <p:sp>
-        <p:nvSpPr>
-          <p:cNvPr id="11" name="TextBox 10"/>
+              <a:t>03 全员氛围不足，自主改善意识薄弱</a:t>
+            </a:r>
+          </a:p>
+        </p:txBody>
+      </p:sp>
+      <p:sp>
+        <p:nvSpPr>
+          <p:cNvPr id="12" name="TextBox 11"/>
           <p:cNvSpPr txBox="1"/>
           <p:nvPr/>
         </p:nvSpPr>
         <p:spPr>
           <a:xfrm>
-            <a:off x="4663440" y="4251960"/>
-            <a:ext cx="2926080" cy="365760"/>
+            <a:off x="548640" y="4800600"/>
+            <a:ext cx="5303520" cy="960120"/>
           </a:xfrm>
           <a:prstGeom prst="rect">
             <a:avLst/>
@@ -3716,28 +3519,28 @@
           <a:p>
             <a:pPr algn="l"/>
             <a:r>
-              <a:rPr sz="1300" b="0">
-                <a:solidFill>
-                  <a:srgbClr val="A8C5D4"/>
+              <a:rPr sz="1200" b="0">
+                <a:solidFill>
+                  <a:srgbClr val="5D6D7E"/>
                 </a:solidFill>
                 <a:latin typeface="Microsoft YaHei"/>
                 <a:ea typeface="Microsoft YaHei"/>
               </a:rPr>
-              <a:t>硅损·切片·组件·OEE·数字化</a:t>
-            </a:r>
-          </a:p>
-        </p:txBody>
-      </p:sp>
-      <p:sp>
-        <p:nvSpPr>
-          <p:cNvPr id="12" name="Rounded Rectangle 11"/>
+              <a:t>推进仍依赖管理推动与专班督导，一线员工多为「被动执行」模式，尚未形成「主动找浪费、主动提改善、主动创价值」的精益文化。</a:t>
+            </a:r>
+          </a:p>
+        </p:txBody>
+      </p:sp>
+      <p:sp>
+        <p:nvSpPr>
+          <p:cNvPr id="13" name="Rounded Rectangle 12"/>
           <p:cNvSpPr/>
           <p:nvPr/>
         </p:nvSpPr>
         <p:spPr>
           <a:xfrm>
-            <a:off x="8138159" y="3474720"/>
-            <a:ext cx="3474720" cy="1463040"/>
+            <a:off x="6263640" y="822960"/>
+            <a:ext cx="5669280" cy="1600200"/>
           </a:xfrm>
           <a:prstGeom prst="roundRect">
             <a:avLst>
@@ -3745,10 +3548,12 @@
             </a:avLst>
           </a:prstGeom>
           <a:solidFill>
-            <a:srgbClr val="143D58"/>
+            <a:srgbClr val="FFFFFF"/>
           </a:solidFill>
-          <a:ln>
-            <a:noFill/>
+          <a:ln w="15875">
+            <a:solidFill>
+              <a:srgbClr val="E8EEF2"/>
+            </a:solidFill>
           </a:ln>
         </p:spPr>
         <p:style>
@@ -3775,14 +3580,14 @@
       </p:sp>
       <p:sp>
         <p:nvSpPr>
-          <p:cNvPr id="13" name="TextBox 12"/>
+          <p:cNvPr id="14" name="TextBox 13"/>
           <p:cNvSpPr txBox="1"/>
           <p:nvPr/>
         </p:nvSpPr>
         <p:spPr>
           <a:xfrm>
-            <a:off x="8412479" y="3749039"/>
-            <a:ext cx="2926080" cy="365760"/>
+            <a:off x="6446520" y="960120"/>
+            <a:ext cx="5303520" cy="320040"/>
           </a:xfrm>
           <a:prstGeom prst="rect">
             <a:avLst/>
@@ -3797,28 +3602,28 @@
           <a:p>
             <a:pPr algn="l"/>
             <a:r>
-              <a:rPr sz="1800" b="1">
-                <a:solidFill>
-                  <a:srgbClr val="FFFFFF"/>
+              <a:rPr sz="1400" b="1">
+                <a:solidFill>
+                  <a:srgbClr val="E87A2E"/>
                 </a:solidFill>
                 <a:latin typeface="Microsoft YaHei"/>
                 <a:ea typeface="Microsoft YaHei"/>
               </a:rPr>
-              <a:t>长效闭环</a:t>
-            </a:r>
-          </a:p>
-        </p:txBody>
-      </p:sp>
-      <p:sp>
-        <p:nvSpPr>
-          <p:cNvPr id="14" name="TextBox 13"/>
+              <a:t>04 机制落地不彻底，考核未闭环</a:t>
+            </a:r>
+          </a:p>
+        </p:txBody>
+      </p:sp>
+      <p:sp>
+        <p:nvSpPr>
+          <p:cNvPr id="15" name="TextBox 14"/>
           <p:cNvSpPr txBox="1"/>
           <p:nvPr/>
         </p:nvSpPr>
         <p:spPr>
           <a:xfrm>
-            <a:off x="8412479" y="4251960"/>
-            <a:ext cx="2926080" cy="365760"/>
+            <a:off x="6446520" y="1325880"/>
+            <a:ext cx="5303520" cy="960120"/>
           </a:xfrm>
           <a:prstGeom prst="rect">
             <a:avLst/>
@@ -3833,28 +3638,75 @@
           <a:p>
             <a:pPr algn="l"/>
             <a:r>
-              <a:rPr sz="1300" b="0">
-                <a:solidFill>
-                  <a:srgbClr val="A8C5D4"/>
+              <a:rPr sz="1200" b="0">
+                <a:solidFill>
+                  <a:srgbClr val="5D6D7E"/>
                 </a:solidFill>
                 <a:latin typeface="Microsoft YaHei"/>
                 <a:ea typeface="Microsoft YaHei"/>
               </a:rPr>
-              <a:t>真数据·善攻坚·美现场</a:t>
-            </a:r>
-          </a:p>
-        </p:txBody>
-      </p:sp>
-      <p:sp>
-        <p:nvSpPr>
-          <p:cNvPr id="15" name="TextBox 14"/>
+              <a:t>精益落地与人才晋升、基地评价挂钩常流于形式，缺乏量化指标支撑与清晰奖惩机制，导致管理关注度不一、基层执行驱动力不足。</a:t>
+            </a:r>
+          </a:p>
+        </p:txBody>
+      </p:sp>
+      <p:sp>
+        <p:nvSpPr>
+          <p:cNvPr id="16" name="Rounded Rectangle 15"/>
+          <p:cNvSpPr/>
+          <p:nvPr/>
+        </p:nvSpPr>
+        <p:spPr>
+          <a:xfrm>
+            <a:off x="6263640" y="2560320"/>
+            <a:ext cx="5669280" cy="1600200"/>
+          </a:xfrm>
+          <a:prstGeom prst="roundRect">
+            <a:avLst>
+              <a:gd name="adj" fmla="val 8000"/>
+            </a:avLst>
+          </a:prstGeom>
+          <a:solidFill>
+            <a:srgbClr val="FFFFFF"/>
+          </a:solidFill>
+          <a:ln w="15875">
+            <a:solidFill>
+              <a:srgbClr val="E8EEF2"/>
+            </a:solidFill>
+          </a:ln>
+        </p:spPr>
+        <p:style>
+          <a:lnRef idx="1">
+            <a:schemeClr val="accent1"/>
+          </a:lnRef>
+          <a:fillRef idx="3">
+            <a:schemeClr val="accent1"/>
+          </a:fillRef>
+          <a:effectRef idx="2">
+            <a:schemeClr val="accent1"/>
+          </a:effectRef>
+          <a:fontRef idx="minor">
+            <a:schemeClr val="lt1"/>
+          </a:fontRef>
+        </p:style>
+        <p:txBody>
+          <a:bodyPr rtlCol="0" anchor="ctr"/>
+          <a:lstStyle/>
+          <a:p>
+            <a:pPr algn="ctr"/>
+          </a:p>
+        </p:txBody>
+      </p:sp>
+      <p:sp>
+        <p:nvSpPr>
+          <p:cNvPr id="17" name="TextBox 16"/>
           <p:cNvSpPr txBox="1"/>
           <p:nvPr/>
         </p:nvSpPr>
         <p:spPr>
           <a:xfrm>
-            <a:off x="640080" y="5669280"/>
-            <a:ext cx="9144000" cy="365760"/>
+            <a:off x="6446520" y="2697480"/>
+            <a:ext cx="5303520" cy="320040"/>
           </a:xfrm>
           <a:prstGeom prst="rect">
             <a:avLst/>
@@ -3869,14 +3721,134 @@
           <a:p>
             <a:pPr algn="l"/>
             <a:r>
-              <a:rPr sz="1800" b="1">
-                <a:solidFill>
-                  <a:srgbClr val="FFFFFF"/>
+              <a:rPr sz="1400" b="1">
+                <a:solidFill>
+                  <a:srgbClr val="E87A2E"/>
                 </a:solidFill>
                 <a:latin typeface="Microsoft YaHei"/>
                 <a:ea typeface="Microsoft YaHei"/>
               </a:rPr>
-              <a:t>请向总审阅指导</a:t>
+              <a:t>05 精益信息化缺失，改善难沉淀</a:t>
+            </a:r>
+          </a:p>
+        </p:txBody>
+      </p:sp>
+      <p:sp>
+        <p:nvSpPr>
+          <p:cNvPr id="18" name="TextBox 17"/>
+          <p:cNvSpPr txBox="1"/>
+          <p:nvPr/>
+        </p:nvSpPr>
+        <p:spPr>
+          <a:xfrm>
+            <a:off x="6446520" y="3063240"/>
+            <a:ext cx="5303520" cy="960120"/>
+          </a:xfrm>
+          <a:prstGeom prst="rect">
+            <a:avLst/>
+          </a:prstGeom>
+          <a:noFill/>
+        </p:spPr>
+        <p:txBody>
+          <a:bodyPr wrap="square">
+            <a:spAutoFit/>
+          </a:bodyPr>
+          <a:lstStyle/>
+          <a:p>
+            <a:pPr algn="l"/>
+            <a:r>
+              <a:rPr sz="1200" b="0">
+                <a:solidFill>
+                  <a:srgbClr val="5D6D7E"/>
+                </a:solidFill>
+                <a:latin typeface="Microsoft YaHei"/>
+                <a:ea typeface="Microsoft YaHei"/>
+              </a:rPr>
+              <a:t>改善经验难沉淀、难复制，数据与现场脱节，缺少统一数字化看板与闭环系统，难以支撑精益从「运动式」走向「常态化」。</a:t>
+            </a:r>
+          </a:p>
+        </p:txBody>
+      </p:sp>
+      <p:sp>
+        <p:nvSpPr>
+          <p:cNvPr id="19" name="Rounded Rectangle 18"/>
+          <p:cNvSpPr/>
+          <p:nvPr/>
+        </p:nvSpPr>
+        <p:spPr>
+          <a:xfrm>
+            <a:off x="6263640" y="4297680"/>
+            <a:ext cx="5669280" cy="2148840"/>
+          </a:xfrm>
+          <a:prstGeom prst="roundRect">
+            <a:avLst>
+              <a:gd name="adj" fmla="val 8000"/>
+            </a:avLst>
+          </a:prstGeom>
+          <a:solidFill>
+            <a:srgbClr val="FFF4EB"/>
+          </a:solidFill>
+          <a:ln w="15875">
+            <a:solidFill>
+              <a:srgbClr val="E87A2E"/>
+            </a:solidFill>
+          </a:ln>
+        </p:spPr>
+        <p:style>
+          <a:lnRef idx="1">
+            <a:schemeClr val="accent1"/>
+          </a:lnRef>
+          <a:fillRef idx="3">
+            <a:schemeClr val="accent1"/>
+          </a:fillRef>
+          <a:effectRef idx="2">
+            <a:schemeClr val="accent1"/>
+          </a:effectRef>
+          <a:fontRef idx="minor">
+            <a:schemeClr val="lt1"/>
+          </a:fontRef>
+        </p:style>
+        <p:txBody>
+          <a:bodyPr rtlCol="0" anchor="ctr"/>
+          <a:lstStyle/>
+          <a:p>
+            <a:pPr algn="ctr"/>
+          </a:p>
+        </p:txBody>
+      </p:sp>
+      <p:sp>
+        <p:nvSpPr>
+          <p:cNvPr id="20" name="TextBox 19"/>
+          <p:cNvSpPr txBox="1"/>
+          <p:nvPr/>
+        </p:nvSpPr>
+        <p:spPr>
+          <a:xfrm>
+            <a:off x="6492240" y="4526280"/>
+            <a:ext cx="5212080" cy="1737360"/>
+          </a:xfrm>
+          <a:prstGeom prst="rect">
+            <a:avLst/>
+          </a:prstGeom>
+          <a:noFill/>
+        </p:spPr>
+        <p:txBody>
+          <a:bodyPr wrap="square">
+            <a:spAutoFit/>
+          </a:bodyPr>
+          <a:lstStyle/>
+          <a:p>
+            <a:pPr algn="l"/>
+            <a:r>
+              <a:rPr sz="1200" b="0">
+                <a:solidFill>
+                  <a:srgbClr val="2C3E50"/>
+                </a:solidFill>
+                <a:latin typeface="Microsoft YaHei"/>
+                <a:ea typeface="Microsoft YaHei"/>
+              </a:rPr>
+              <a:t>精益生产本质是消除浪费与持续改善；实践中仍面临从表层整改到深层次攻坚的多重执行挑战。
+闭环机制与数据沉淀是精益从「运动式」走向「常态化」的关键，破除形式主义、回归价值创造。</a:t>
             </a:r>
           </a:p>
         </p:txBody>
@@ -3916,7 +3888,7 @@
             </a:avLst>
           </a:prstGeom>
           <a:solidFill>
-            <a:srgbClr val="F5F7FA"/>
+            <a:srgbClr val="FFFFFF"/>
           </a:solidFill>
           <a:ln>
             <a:noFill/>
@@ -3952,8 +3924,8 @@
         </p:nvSpPr>
         <p:spPr>
           <a:xfrm>
-            <a:off x="457200" y="274320"/>
-            <a:ext cx="10972800" cy="457200"/>
+            <a:off x="411480" y="182880"/>
+            <a:ext cx="10972800" cy="365760"/>
           </a:xfrm>
           <a:prstGeom prst="rect">
             <a:avLst/>
@@ -3968,28 +3940,100 @@
           <a:p>
             <a:pPr algn="l"/>
             <a:r>
-              <a:rPr sz="2600" b="1">
-                <a:solidFill>
-                  <a:srgbClr val="0B2A3F"/>
+              <a:rPr sz="2400" b="1">
+                <a:solidFill>
+                  <a:srgbClr val="1B3A5F"/>
                 </a:solidFill>
                 <a:latin typeface="Microsoft YaHei"/>
                 <a:ea typeface="Microsoft YaHei"/>
               </a:rPr>
-              <a:t>当前精益推进现存真实痛点</a:t>
-            </a:r>
-          </a:p>
-        </p:txBody>
-      </p:sp>
-      <p:sp>
-        <p:nvSpPr>
-          <p:cNvPr id="4" name="Rounded Rectangle 3"/>
+              <a:t>筑基 →「势起」</a:t>
+            </a:r>
+          </a:p>
+        </p:txBody>
+      </p:sp>
+      <p:sp>
+        <p:nvSpPr>
+          <p:cNvPr id="4" name="TextBox 3"/>
+          <p:cNvSpPr txBox="1"/>
+          <p:nvPr/>
+        </p:nvSpPr>
+        <p:spPr>
+          <a:xfrm>
+            <a:off x="411480" y="594360"/>
+            <a:ext cx="11338560" cy="640080"/>
+          </a:xfrm>
+          <a:prstGeom prst="rect">
+            <a:avLst/>
+          </a:prstGeom>
+          <a:noFill/>
+        </p:spPr>
+        <p:txBody>
+          <a:bodyPr wrap="square">
+            <a:spAutoFit/>
+          </a:bodyPr>
+          <a:lstStyle/>
+          <a:p>
+            <a:pPr algn="l"/>
+            <a:r>
+              <a:rPr sz="1200" b="0">
+                <a:solidFill>
+                  <a:srgbClr val="5D6D7E"/>
+                </a:solidFill>
+                <a:latin typeface="Microsoft YaHei"/>
+                <a:ea typeface="Microsoft YaHei"/>
+              </a:rPr>
+              <a:t>自2025年9月以来，GPS精益体系已从「探索与单点整改」迈入「体系起势与机制落地」阶段。2026年为关键推进年：精益作为「第二生产力」，以「453」框架启航精益转型，践行「真善美」价值主张。</a:t>
+            </a:r>
+          </a:p>
+        </p:txBody>
+      </p:sp>
+      <p:sp>
+        <p:nvSpPr>
+          <p:cNvPr id="5" name="TextBox 4"/>
+          <p:cNvSpPr txBox="1"/>
+          <p:nvPr/>
+        </p:nvSpPr>
+        <p:spPr>
+          <a:xfrm>
+            <a:off x="411480" y="1280160"/>
+            <a:ext cx="3657600" cy="274320"/>
+          </a:xfrm>
+          <a:prstGeom prst="rect">
+            <a:avLst/>
+          </a:prstGeom>
+          <a:noFill/>
+        </p:spPr>
+        <p:txBody>
+          <a:bodyPr wrap="square">
+            <a:spAutoFit/>
+          </a:bodyPr>
+          <a:lstStyle/>
+          <a:p>
+            <a:pPr algn="l"/>
+            <a:r>
+              <a:rPr sz="1300" b="1">
+                <a:solidFill>
+                  <a:srgbClr val="E87A2E"/>
+                </a:solidFill>
+                <a:latin typeface="Microsoft YaHei"/>
+                <a:ea typeface="Microsoft YaHei"/>
+              </a:rPr>
+              <a:t>四级架构</a:t>
+            </a:r>
+          </a:p>
+        </p:txBody>
+      </p:sp>
+      <p:sp>
+        <p:nvSpPr>
+          <p:cNvPr id="6" name="Rounded Rectangle 5"/>
           <p:cNvSpPr/>
           <p:nvPr/>
         </p:nvSpPr>
         <p:spPr>
           <a:xfrm>
-            <a:off x="411480" y="1005840"/>
-            <a:ext cx="3657600" cy="2194560"/>
+            <a:off x="411480" y="1600200"/>
+            <a:ext cx="2788920" cy="1051560"/>
           </a:xfrm>
           <a:prstGeom prst="roundRect">
             <a:avLst>
@@ -3999,9 +4043,9 @@
           <a:solidFill>
             <a:srgbClr val="FFFFFF"/>
           </a:solidFill>
-          <a:ln w="12700">
+          <a:ln w="15875">
             <a:solidFill>
-              <a:srgbClr val="D5DEE7"/>
+              <a:srgbClr val="E8EEF2"/>
             </a:solidFill>
           </a:ln>
         </p:spPr>
@@ -4029,14 +4073,14 @@
       </p:sp>
       <p:sp>
         <p:nvSpPr>
-          <p:cNvPr id="5" name="TextBox 4"/>
+          <p:cNvPr id="7" name="TextBox 6"/>
           <p:cNvSpPr txBox="1"/>
           <p:nvPr/>
         </p:nvSpPr>
         <p:spPr>
           <a:xfrm>
-            <a:off x="594360" y="1234440"/>
-            <a:ext cx="3291840" cy="365760"/>
+            <a:off x="521208" y="1737360"/>
+            <a:ext cx="2560320" cy="274320"/>
           </a:xfrm>
           <a:prstGeom prst="rect">
             <a:avLst/>
@@ -4051,28 +4095,28 @@
           <a:p>
             <a:pPr algn="l"/>
             <a:r>
-              <a:rPr sz="1600" b="1">
-                <a:solidFill>
-                  <a:srgbClr val="E07A2F"/>
+              <a:rPr sz="1300" b="1">
+                <a:solidFill>
+                  <a:srgbClr val="1B3A5F"/>
                 </a:solidFill>
                 <a:latin typeface="Microsoft YaHei"/>
                 <a:ea typeface="Microsoft YaHei"/>
               </a:rPr>
-              <a:t>01 落地不均衡</a:t>
-            </a:r>
-          </a:p>
-        </p:txBody>
-      </p:sp>
-      <p:sp>
-        <p:nvSpPr>
-          <p:cNvPr id="6" name="TextBox 5"/>
+              <a:t>决策层·战略引领</a:t>
+            </a:r>
+          </a:p>
+        </p:txBody>
+      </p:sp>
+      <p:sp>
+        <p:nvSpPr>
+          <p:cNvPr id="8" name="TextBox 7"/>
           <p:cNvSpPr txBox="1"/>
           <p:nvPr/>
         </p:nvSpPr>
         <p:spPr>
           <a:xfrm>
-            <a:off x="594360" y="1737360"/>
-            <a:ext cx="3291840" cy="1280160"/>
+            <a:off x="521208" y="2103120"/>
+            <a:ext cx="2560320" cy="411480"/>
           </a:xfrm>
           <a:prstGeom prst="rect">
             <a:avLst/>
@@ -4087,28 +4131,28 @@
           <a:p>
             <a:pPr algn="l"/>
             <a:r>
-              <a:rPr sz="1300" b="0">
-                <a:solidFill>
-                  <a:srgbClr val="5A6A7A"/>
+              <a:rPr sz="1100" b="0">
+                <a:solidFill>
+                  <a:srgbClr val="5D6D7E"/>
                 </a:solidFill>
                 <a:latin typeface="Microsoft YaHei"/>
                 <a:ea typeface="Microsoft YaHei"/>
               </a:rPr>
-              <a:t>标杆与常态两极分化：多数产线停在表层 5S，深层次浪费未触及。</a:t>
-            </a:r>
-          </a:p>
-        </p:txBody>
-      </p:sp>
-      <p:sp>
-        <p:nvSpPr>
-          <p:cNvPr id="7" name="Rounded Rectangle 6"/>
+              <a:t>确立战略/审批课题/资源政策支持</a:t>
+            </a:r>
+          </a:p>
+        </p:txBody>
+      </p:sp>
+      <p:sp>
+        <p:nvSpPr>
+          <p:cNvPr id="9" name="Rounded Rectangle 8"/>
           <p:cNvSpPr/>
           <p:nvPr/>
         </p:nvSpPr>
         <p:spPr>
           <a:xfrm>
-            <a:off x="4251960" y="1005840"/>
-            <a:ext cx="3657600" cy="2194560"/>
+            <a:off x="3337560" y="1600200"/>
+            <a:ext cx="2788920" cy="1051560"/>
           </a:xfrm>
           <a:prstGeom prst="roundRect">
             <a:avLst>
@@ -4118,9 +4162,9 @@
           <a:solidFill>
             <a:srgbClr val="FFFFFF"/>
           </a:solidFill>
-          <a:ln w="12700">
+          <a:ln w="15875">
             <a:solidFill>
-              <a:srgbClr val="D5DEE7"/>
+              <a:srgbClr val="E8EEF2"/>
             </a:solidFill>
           </a:ln>
         </p:spPr>
@@ -4148,14 +4192,14 @@
       </p:sp>
       <p:sp>
         <p:nvSpPr>
-          <p:cNvPr id="8" name="TextBox 7"/>
+          <p:cNvPr id="10" name="TextBox 9"/>
           <p:cNvSpPr txBox="1"/>
           <p:nvPr/>
         </p:nvSpPr>
         <p:spPr>
           <a:xfrm>
-            <a:off x="4434840" y="1234440"/>
-            <a:ext cx="3291840" cy="365760"/>
+            <a:off x="3447288" y="1737360"/>
+            <a:ext cx="2560320" cy="274320"/>
           </a:xfrm>
           <a:prstGeom prst="rect">
             <a:avLst/>
@@ -4170,28 +4214,28 @@
           <a:p>
             <a:pPr algn="l"/>
             <a:r>
-              <a:rPr sz="1600" b="1">
-                <a:solidFill>
-                  <a:srgbClr val="E07A2F"/>
+              <a:rPr sz="1300" b="1">
+                <a:solidFill>
+                  <a:srgbClr val="1B3A5F"/>
                 </a:solidFill>
                 <a:latin typeface="Microsoft YaHei"/>
                 <a:ea typeface="Microsoft YaHei"/>
               </a:rPr>
-              <a:t>02 改善偏单点</a:t>
-            </a:r>
-          </a:p>
-        </p:txBody>
-      </p:sp>
-      <p:sp>
-        <p:nvSpPr>
-          <p:cNvPr id="9" name="TextBox 8"/>
+              <a:t>推进层·体系赋能</a:t>
+            </a:r>
+          </a:p>
+        </p:txBody>
+      </p:sp>
+      <p:sp>
+        <p:nvSpPr>
+          <p:cNvPr id="11" name="TextBox 10"/>
           <p:cNvSpPr txBox="1"/>
           <p:nvPr/>
         </p:nvSpPr>
         <p:spPr>
           <a:xfrm>
-            <a:off x="4434840" y="1737360"/>
-            <a:ext cx="3291840" cy="1280160"/>
+            <a:off x="3447288" y="2103120"/>
+            <a:ext cx="2560320" cy="411480"/>
           </a:xfrm>
           <a:prstGeom prst="rect">
             <a:avLst/>
@@ -4206,28 +4250,28 @@
           <a:p>
             <a:pPr algn="l"/>
             <a:r>
-              <a:rPr sz="1300" b="0">
-                <a:solidFill>
-                  <a:srgbClr val="5A6A7A"/>
+              <a:rPr sz="1100" b="0">
+                <a:solidFill>
+                  <a:srgbClr val="5D6D7E"/>
                 </a:solidFill>
                 <a:latin typeface="Microsoft YaHei"/>
                 <a:ea typeface="Microsoft YaHei"/>
               </a:rPr>
-              <a:t>对拉晶能耗、切片断线等核心痛点攻坚不足，难拉动良率与成本。</a:t>
-            </a:r>
-          </a:p>
-        </p:txBody>
-      </p:sp>
-      <p:sp>
-        <p:nvSpPr>
-          <p:cNvPr id="10" name="Rounded Rectangle 9"/>
+              <a:t>体系规划/方法导入/督导与育人</a:t>
+            </a:r>
+          </a:p>
+        </p:txBody>
+      </p:sp>
+      <p:sp>
+        <p:nvSpPr>
+          <p:cNvPr id="12" name="Rounded Rectangle 11"/>
           <p:cNvSpPr/>
           <p:nvPr/>
         </p:nvSpPr>
         <p:spPr>
           <a:xfrm>
-            <a:off x="8092440" y="1005840"/>
-            <a:ext cx="3657600" cy="2194560"/>
+            <a:off x="6263640" y="1600200"/>
+            <a:ext cx="2788920" cy="1051560"/>
           </a:xfrm>
           <a:prstGeom prst="roundRect">
             <a:avLst>
@@ -4237,9 +4281,9 @@
           <a:solidFill>
             <a:srgbClr val="FFFFFF"/>
           </a:solidFill>
-          <a:ln w="12700">
+          <a:ln w="15875">
             <a:solidFill>
-              <a:srgbClr val="D5DEE7"/>
+              <a:srgbClr val="E8EEF2"/>
             </a:solidFill>
           </a:ln>
         </p:spPr>
@@ -4267,14 +4311,14 @@
       </p:sp>
       <p:sp>
         <p:nvSpPr>
-          <p:cNvPr id="11" name="TextBox 10"/>
+          <p:cNvPr id="13" name="TextBox 12"/>
           <p:cNvSpPr txBox="1"/>
           <p:nvPr/>
         </p:nvSpPr>
         <p:spPr>
           <a:xfrm>
-            <a:off x="8275320" y="1234440"/>
-            <a:ext cx="3291840" cy="365760"/>
+            <a:off x="6373368" y="1737360"/>
+            <a:ext cx="2560320" cy="274320"/>
           </a:xfrm>
           <a:prstGeom prst="rect">
             <a:avLst/>
@@ -4289,28 +4333,28 @@
           <a:p>
             <a:pPr algn="l"/>
             <a:r>
-              <a:rPr sz="1600" b="1">
-                <a:solidFill>
-                  <a:srgbClr val="E07A2F"/>
+              <a:rPr sz="1300" b="1">
+                <a:solidFill>
+                  <a:srgbClr val="1B3A5F"/>
                 </a:solidFill>
                 <a:latin typeface="Microsoft YaHei"/>
                 <a:ea typeface="Microsoft YaHei"/>
               </a:rPr>
-              <a:t>03 全员氛围不足</a:t>
-            </a:r>
-          </a:p>
-        </p:txBody>
-      </p:sp>
-      <p:sp>
-        <p:nvSpPr>
-          <p:cNvPr id="12" name="TextBox 11"/>
+              <a:t>执行层·攻坚落地</a:t>
+            </a:r>
+          </a:p>
+        </p:txBody>
+      </p:sp>
+      <p:sp>
+        <p:nvSpPr>
+          <p:cNvPr id="14" name="TextBox 13"/>
           <p:cNvSpPr txBox="1"/>
           <p:nvPr/>
         </p:nvSpPr>
         <p:spPr>
           <a:xfrm>
-            <a:off x="8275320" y="1737360"/>
-            <a:ext cx="3291840" cy="1280160"/>
+            <a:off x="6373368" y="2103120"/>
+            <a:ext cx="2560320" cy="411480"/>
           </a:xfrm>
           <a:prstGeom prst="rect">
             <a:avLst/>
@@ -4325,28 +4369,28 @@
           <a:p>
             <a:pPr algn="l"/>
             <a:r>
-              <a:rPr sz="1300" b="0">
-                <a:solidFill>
-                  <a:srgbClr val="5A6A7A"/>
+              <a:rPr sz="1100" b="0">
+                <a:solidFill>
+                  <a:srgbClr val="5D6D7E"/>
                 </a:solidFill>
                 <a:latin typeface="Microsoft YaHei"/>
                 <a:ea typeface="Microsoft YaHei"/>
               </a:rPr>
-              <a:t>推进靠管理推动，一线被动执行，自主改善文化未形成。</a:t>
-            </a:r>
-          </a:p>
-        </p:txBody>
-      </p:sp>
-      <p:sp>
-        <p:nvSpPr>
-          <p:cNvPr id="13" name="Rounded Rectangle 12"/>
+              <a:t>基地主责/目标分解/资源协同</a:t>
+            </a:r>
+          </a:p>
+        </p:txBody>
+      </p:sp>
+      <p:sp>
+        <p:nvSpPr>
+          <p:cNvPr id="15" name="Rounded Rectangle 14"/>
           <p:cNvSpPr/>
           <p:nvPr/>
         </p:nvSpPr>
         <p:spPr>
           <a:xfrm>
-            <a:off x="411480" y="3474720"/>
-            <a:ext cx="3657600" cy="2194560"/>
+            <a:off x="9189720" y="1600200"/>
+            <a:ext cx="2788920" cy="1051560"/>
           </a:xfrm>
           <a:prstGeom prst="roundRect">
             <a:avLst>
@@ -4356,9 +4400,9 @@
           <a:solidFill>
             <a:srgbClr val="FFFFFF"/>
           </a:solidFill>
-          <a:ln w="12700">
+          <a:ln w="15875">
             <a:solidFill>
-              <a:srgbClr val="D5DEE7"/>
+              <a:srgbClr val="E8EEF2"/>
             </a:solidFill>
           </a:ln>
         </p:spPr>
@@ -4386,14 +4430,14 @@
       </p:sp>
       <p:sp>
         <p:nvSpPr>
-          <p:cNvPr id="14" name="TextBox 13"/>
+          <p:cNvPr id="16" name="TextBox 15"/>
           <p:cNvSpPr txBox="1"/>
           <p:nvPr/>
         </p:nvSpPr>
         <p:spPr>
           <a:xfrm>
-            <a:off x="594360" y="3703320"/>
-            <a:ext cx="3291840" cy="365760"/>
+            <a:off x="9299448" y="1737360"/>
+            <a:ext cx="2560320" cy="274320"/>
           </a:xfrm>
           <a:prstGeom prst="rect">
             <a:avLst/>
@@ -4408,28 +4452,28 @@
           <a:p>
             <a:pPr algn="l"/>
             <a:r>
-              <a:rPr sz="1600" b="1">
-                <a:solidFill>
-                  <a:srgbClr val="E07A2F"/>
+              <a:rPr sz="1300" b="1">
+                <a:solidFill>
+                  <a:srgbClr val="1B3A5F"/>
                 </a:solidFill>
                 <a:latin typeface="Microsoft YaHei"/>
                 <a:ea typeface="Microsoft YaHei"/>
               </a:rPr>
-              <a:t>04 机制未闭环</a:t>
-            </a:r>
-          </a:p>
-        </p:txBody>
-      </p:sp>
-      <p:sp>
-        <p:nvSpPr>
-          <p:cNvPr id="15" name="TextBox 14"/>
+              <a:t>落地层·现场改善</a:t>
+            </a:r>
+          </a:p>
+        </p:txBody>
+      </p:sp>
+      <p:sp>
+        <p:nvSpPr>
+          <p:cNvPr id="17" name="TextBox 16"/>
           <p:cNvSpPr txBox="1"/>
           <p:nvPr/>
         </p:nvSpPr>
         <p:spPr>
           <a:xfrm>
-            <a:off x="594360" y="4206240"/>
-            <a:ext cx="3291840" cy="1280160"/>
+            <a:off x="9299448" y="2103120"/>
+            <a:ext cx="2560320" cy="411480"/>
           </a:xfrm>
           <a:prstGeom prst="rect">
             <a:avLst/>
@@ -4444,28 +4488,64 @@
           <a:p>
             <a:pPr algn="l"/>
             <a:r>
-              <a:rPr sz="1300" b="0">
-                <a:solidFill>
-                  <a:srgbClr val="5A6A7A"/>
+              <a:rPr sz="1100" b="0">
+                <a:solidFill>
+                  <a:srgbClr val="5D6D7E"/>
                 </a:solidFill>
                 <a:latin typeface="Microsoft YaHei"/>
                 <a:ea typeface="Microsoft YaHei"/>
               </a:rPr>
-              <a:t>与晋升/基地评价挂钩流于形式，缺量化指标与奖惩。</a:t>
-            </a:r>
-          </a:p>
-        </p:txBody>
-      </p:sp>
-      <p:sp>
-        <p:nvSpPr>
-          <p:cNvPr id="16" name="Rounded Rectangle 15"/>
+              <a:t>班组SOP/现场提案改善</a:t>
+            </a:r>
+          </a:p>
+        </p:txBody>
+      </p:sp>
+      <p:sp>
+        <p:nvSpPr>
+          <p:cNvPr id="18" name="TextBox 17"/>
+          <p:cNvSpPr txBox="1"/>
+          <p:nvPr/>
+        </p:nvSpPr>
+        <p:spPr>
+          <a:xfrm>
+            <a:off x="411480" y="2880360"/>
+            <a:ext cx="3657600" cy="274320"/>
+          </a:xfrm>
+          <a:prstGeom prst="rect">
+            <a:avLst/>
+          </a:prstGeom>
+          <a:noFill/>
+        </p:spPr>
+        <p:txBody>
+          <a:bodyPr wrap="square">
+            <a:spAutoFit/>
+          </a:bodyPr>
+          <a:lstStyle/>
+          <a:p>
+            <a:pPr algn="l"/>
+            <a:r>
+              <a:rPr sz="1300" b="1">
+                <a:solidFill>
+                  <a:srgbClr val="E87A2E"/>
+                </a:solidFill>
+                <a:latin typeface="Microsoft YaHei"/>
+                <a:ea typeface="Microsoft YaHei"/>
+              </a:rPr>
+              <a:t>五大体系</a:t>
+            </a:r>
+          </a:p>
+        </p:txBody>
+      </p:sp>
+      <p:sp>
+        <p:nvSpPr>
+          <p:cNvPr id="19" name="Rounded Rectangle 18"/>
           <p:cNvSpPr/>
           <p:nvPr/>
         </p:nvSpPr>
         <p:spPr>
           <a:xfrm>
-            <a:off x="4251960" y="3474720"/>
-            <a:ext cx="3657600" cy="2194560"/>
+            <a:off x="411480" y="3200400"/>
+            <a:ext cx="2194560" cy="640080"/>
           </a:xfrm>
           <a:prstGeom prst="roundRect">
             <a:avLst>
@@ -4475,9 +4555,9 @@
           <a:solidFill>
             <a:srgbClr val="FFFFFF"/>
           </a:solidFill>
-          <a:ln w="12700">
+          <a:ln w="15875">
             <a:solidFill>
-              <a:srgbClr val="D5DEE7"/>
+              <a:srgbClr val="E8EEF2"/>
             </a:solidFill>
           </a:ln>
         </p:spPr>
@@ -4505,14 +4585,14 @@
       </p:sp>
       <p:sp>
         <p:nvSpPr>
-          <p:cNvPr id="17" name="TextBox 16"/>
+          <p:cNvPr id="20" name="TextBox 19"/>
           <p:cNvSpPr txBox="1"/>
           <p:nvPr/>
         </p:nvSpPr>
         <p:spPr>
           <a:xfrm>
-            <a:off x="4434840" y="3703320"/>
-            <a:ext cx="3291840" cy="365760"/>
+            <a:off x="411480" y="3337560"/>
+            <a:ext cx="2194560" cy="365760"/>
           </a:xfrm>
           <a:prstGeom prst="rect">
             <a:avLst/>
@@ -4525,66 +4605,30 @@
           </a:bodyPr>
           <a:lstStyle/>
           <a:p>
-            <a:pPr algn="l"/>
-            <a:r>
-              <a:rPr sz="1600" b="1">
-                <a:solidFill>
-                  <a:srgbClr val="E07A2F"/>
+            <a:pPr algn="ctr"/>
+            <a:r>
+              <a:rPr sz="1300" b="1">
+                <a:solidFill>
+                  <a:srgbClr val="1B3A5F"/>
                 </a:solidFill>
                 <a:latin typeface="Microsoft YaHei"/>
                 <a:ea typeface="Microsoft YaHei"/>
               </a:rPr>
-              <a:t>05 信息化缺失</a:t>
-            </a:r>
-          </a:p>
-        </p:txBody>
-      </p:sp>
-      <p:sp>
-        <p:nvSpPr>
-          <p:cNvPr id="18" name="TextBox 17"/>
-          <p:cNvSpPr txBox="1"/>
-          <p:nvPr/>
-        </p:nvSpPr>
-        <p:spPr>
-          <a:xfrm>
-            <a:off x="4434840" y="4206240"/>
-            <a:ext cx="3291840" cy="1280160"/>
-          </a:xfrm>
-          <a:prstGeom prst="rect">
-            <a:avLst/>
-          </a:prstGeom>
-          <a:noFill/>
-        </p:spPr>
-        <p:txBody>
-          <a:bodyPr wrap="square">
-            <a:spAutoFit/>
-          </a:bodyPr>
-          <a:lstStyle/>
-          <a:p>
-            <a:pPr algn="l"/>
-            <a:r>
-              <a:rPr sz="1300" b="0">
-                <a:solidFill>
-                  <a:srgbClr val="5A6A7A"/>
-                </a:solidFill>
-                <a:latin typeface="Microsoft YaHei"/>
-                <a:ea typeface="Microsoft YaHei"/>
-              </a:rPr>
-              <a:t>改善难沉淀、难复制，难以从运动式走向常态化。</a:t>
-            </a:r>
-          </a:p>
-        </p:txBody>
-      </p:sp>
-      <p:sp>
-        <p:nvSpPr>
-          <p:cNvPr id="19" name="Rounded Rectangle 18"/>
+              <a:t>01对标研学</a:t>
+            </a:r>
+          </a:p>
+        </p:txBody>
+      </p:sp>
+      <p:sp>
+        <p:nvSpPr>
+          <p:cNvPr id="21" name="Rounded Rectangle 20"/>
           <p:cNvSpPr/>
           <p:nvPr/>
         </p:nvSpPr>
         <p:spPr>
           <a:xfrm>
-            <a:off x="8092440" y="3474720"/>
-            <a:ext cx="3657600" cy="2194560"/>
+            <a:off x="2743200" y="3200400"/>
+            <a:ext cx="2194560" cy="640080"/>
           </a:xfrm>
           <a:prstGeom prst="roundRect">
             <a:avLst>
@@ -4592,10 +4636,12 @@
             </a:avLst>
           </a:prstGeom>
           <a:solidFill>
-            <a:srgbClr val="0B2A3F"/>
+            <a:srgbClr val="FFFFFF"/>
           </a:solidFill>
-          <a:ln>
-            <a:noFill/>
+          <a:ln w="15875">
+            <a:solidFill>
+              <a:srgbClr val="E8EEF2"/>
+            </a:solidFill>
           </a:ln>
         </p:spPr>
         <p:style>
@@ -4622,14 +4668,14 @@
       </p:sp>
       <p:sp>
         <p:nvSpPr>
-          <p:cNvPr id="20" name="TextBox 19"/>
+          <p:cNvPr id="22" name="TextBox 21"/>
           <p:cNvSpPr txBox="1"/>
           <p:nvPr/>
         </p:nvSpPr>
         <p:spPr>
           <a:xfrm>
-            <a:off x="8321040" y="3749039"/>
-            <a:ext cx="3200400" cy="365760"/>
+            <a:off x="2743200" y="3337560"/>
+            <a:ext cx="2194560" cy="365760"/>
           </a:xfrm>
           <a:prstGeom prst="rect">
             <a:avLst/>
@@ -4642,30 +4688,77 @@
           </a:bodyPr>
           <a:lstStyle/>
           <a:p>
-            <a:pPr algn="l"/>
-            <a:r>
-              <a:rPr sz="1400" b="1">
-                <a:solidFill>
-                  <a:srgbClr val="E07A2F"/>
+            <a:pPr algn="ctr"/>
+            <a:r>
+              <a:rPr sz="1300" b="1">
+                <a:solidFill>
+                  <a:srgbClr val="1B3A5F"/>
                 </a:solidFill>
                 <a:latin typeface="Microsoft YaHei"/>
                 <a:ea typeface="Microsoft YaHei"/>
               </a:rPr>
-              <a:t>关键判断</a:t>
-            </a:r>
-          </a:p>
-        </p:txBody>
-      </p:sp>
-      <p:sp>
-        <p:nvSpPr>
-          <p:cNvPr id="21" name="TextBox 20"/>
+              <a:t>02标杆复制</a:t>
+            </a:r>
+          </a:p>
+        </p:txBody>
+      </p:sp>
+      <p:sp>
+        <p:nvSpPr>
+          <p:cNvPr id="23" name="Rounded Rectangle 22"/>
+          <p:cNvSpPr/>
+          <p:nvPr/>
+        </p:nvSpPr>
+        <p:spPr>
+          <a:xfrm>
+            <a:off x="5074920" y="3200400"/>
+            <a:ext cx="2194560" cy="640080"/>
+          </a:xfrm>
+          <a:prstGeom prst="roundRect">
+            <a:avLst>
+              <a:gd name="adj" fmla="val 8000"/>
+            </a:avLst>
+          </a:prstGeom>
+          <a:solidFill>
+            <a:srgbClr val="FFFFFF"/>
+          </a:solidFill>
+          <a:ln w="15875">
+            <a:solidFill>
+              <a:srgbClr val="E8EEF2"/>
+            </a:solidFill>
+          </a:ln>
+        </p:spPr>
+        <p:style>
+          <a:lnRef idx="1">
+            <a:schemeClr val="accent1"/>
+          </a:lnRef>
+          <a:fillRef idx="3">
+            <a:schemeClr val="accent1"/>
+          </a:fillRef>
+          <a:effectRef idx="2">
+            <a:schemeClr val="accent1"/>
+          </a:effectRef>
+          <a:fontRef idx="minor">
+            <a:schemeClr val="lt1"/>
+          </a:fontRef>
+        </p:style>
+        <p:txBody>
+          <a:bodyPr rtlCol="0" anchor="ctr"/>
+          <a:lstStyle/>
+          <a:p>
+            <a:pPr algn="ctr"/>
+          </a:p>
+        </p:txBody>
+      </p:sp>
+      <p:sp>
+        <p:nvSpPr>
+          <p:cNvPr id="24" name="TextBox 23"/>
           <p:cNvSpPr txBox="1"/>
           <p:nvPr/>
         </p:nvSpPr>
         <p:spPr>
           <a:xfrm>
-            <a:off x="8321040" y="4206240"/>
-            <a:ext cx="3200400" cy="1188720"/>
+            <a:off x="5074920" y="3337560"/>
+            <a:ext cx="2194560" cy="365760"/>
           </a:xfrm>
           <a:prstGeom prst="rect">
             <a:avLst/>
@@ -4678,16 +4771,656 @@
           </a:bodyPr>
           <a:lstStyle/>
           <a:p>
-            <a:pPr algn="l"/>
-            <a:r>
-              <a:rPr sz="1300" b="0">
-                <a:solidFill>
-                  <a:srgbClr val="FFFFFF"/>
+            <a:pPr algn="ctr"/>
+            <a:r>
+              <a:rPr sz="1300" b="1">
+                <a:solidFill>
+                  <a:srgbClr val="1B3A5F"/>
                 </a:solidFill>
                 <a:latin typeface="Microsoft YaHei"/>
                 <a:ea typeface="Microsoft YaHei"/>
               </a:rPr>
-              <a:t>需以闭环机制与数据沉淀，破除形式主义，从表层整改走向深层次攻坚与价值创造。</a:t>
+              <a:t>03人才育成</a:t>
+            </a:r>
+          </a:p>
+        </p:txBody>
+      </p:sp>
+      <p:sp>
+        <p:nvSpPr>
+          <p:cNvPr id="25" name="Rounded Rectangle 24"/>
+          <p:cNvSpPr/>
+          <p:nvPr/>
+        </p:nvSpPr>
+        <p:spPr>
+          <a:xfrm>
+            <a:off x="7406640" y="3200400"/>
+            <a:ext cx="2194560" cy="640080"/>
+          </a:xfrm>
+          <a:prstGeom prst="roundRect">
+            <a:avLst>
+              <a:gd name="adj" fmla="val 8000"/>
+            </a:avLst>
+          </a:prstGeom>
+          <a:solidFill>
+            <a:srgbClr val="FFFFFF"/>
+          </a:solidFill>
+          <a:ln w="15875">
+            <a:solidFill>
+              <a:srgbClr val="E8EEF2"/>
+            </a:solidFill>
+          </a:ln>
+        </p:spPr>
+        <p:style>
+          <a:lnRef idx="1">
+            <a:schemeClr val="accent1"/>
+          </a:lnRef>
+          <a:fillRef idx="3">
+            <a:schemeClr val="accent1"/>
+          </a:fillRef>
+          <a:effectRef idx="2">
+            <a:schemeClr val="accent1"/>
+          </a:effectRef>
+          <a:fontRef idx="minor">
+            <a:schemeClr val="lt1"/>
+          </a:fontRef>
+        </p:style>
+        <p:txBody>
+          <a:bodyPr rtlCol="0" anchor="ctr"/>
+          <a:lstStyle/>
+          <a:p>
+            <a:pPr algn="ctr"/>
+          </a:p>
+        </p:txBody>
+      </p:sp>
+      <p:sp>
+        <p:nvSpPr>
+          <p:cNvPr id="26" name="TextBox 25"/>
+          <p:cNvSpPr txBox="1"/>
+          <p:nvPr/>
+        </p:nvSpPr>
+        <p:spPr>
+          <a:xfrm>
+            <a:off x="7406640" y="3337560"/>
+            <a:ext cx="2194560" cy="365760"/>
+          </a:xfrm>
+          <a:prstGeom prst="rect">
+            <a:avLst/>
+          </a:prstGeom>
+          <a:noFill/>
+        </p:spPr>
+        <p:txBody>
+          <a:bodyPr wrap="square">
+            <a:spAutoFit/>
+          </a:bodyPr>
+          <a:lstStyle/>
+          <a:p>
+            <a:pPr algn="ctr"/>
+            <a:r>
+              <a:rPr sz="1300" b="1">
+                <a:solidFill>
+                  <a:srgbClr val="1B3A5F"/>
+                </a:solidFill>
+                <a:latin typeface="Microsoft YaHei"/>
+                <a:ea typeface="Microsoft YaHei"/>
+              </a:rPr>
+              <a:t>04考核管控</a:t>
+            </a:r>
+          </a:p>
+        </p:txBody>
+      </p:sp>
+      <p:sp>
+        <p:nvSpPr>
+          <p:cNvPr id="27" name="Rounded Rectangle 26"/>
+          <p:cNvSpPr/>
+          <p:nvPr/>
+        </p:nvSpPr>
+        <p:spPr>
+          <a:xfrm>
+            <a:off x="9738359" y="3200400"/>
+            <a:ext cx="2194560" cy="640080"/>
+          </a:xfrm>
+          <a:prstGeom prst="roundRect">
+            <a:avLst>
+              <a:gd name="adj" fmla="val 8000"/>
+            </a:avLst>
+          </a:prstGeom>
+          <a:solidFill>
+            <a:srgbClr val="FFF4EB"/>
+          </a:solidFill>
+          <a:ln w="15875">
+            <a:solidFill>
+              <a:srgbClr val="E87A2E"/>
+            </a:solidFill>
+          </a:ln>
+        </p:spPr>
+        <p:style>
+          <a:lnRef idx="1">
+            <a:schemeClr val="accent1"/>
+          </a:lnRef>
+          <a:fillRef idx="3">
+            <a:schemeClr val="accent1"/>
+          </a:fillRef>
+          <a:effectRef idx="2">
+            <a:schemeClr val="accent1"/>
+          </a:effectRef>
+          <a:fontRef idx="minor">
+            <a:schemeClr val="lt1"/>
+          </a:fontRef>
+        </p:style>
+        <p:txBody>
+          <a:bodyPr rtlCol="0" anchor="ctr"/>
+          <a:lstStyle/>
+          <a:p>
+            <a:pPr algn="ctr"/>
+          </a:p>
+        </p:txBody>
+      </p:sp>
+      <p:sp>
+        <p:nvSpPr>
+          <p:cNvPr id="28" name="TextBox 27"/>
+          <p:cNvSpPr txBox="1"/>
+          <p:nvPr/>
+        </p:nvSpPr>
+        <p:spPr>
+          <a:xfrm>
+            <a:off x="9738359" y="3337560"/>
+            <a:ext cx="2194560" cy="365760"/>
+          </a:xfrm>
+          <a:prstGeom prst="rect">
+            <a:avLst/>
+          </a:prstGeom>
+          <a:noFill/>
+        </p:spPr>
+        <p:txBody>
+          <a:bodyPr wrap="square">
+            <a:spAutoFit/>
+          </a:bodyPr>
+          <a:lstStyle/>
+          <a:p>
+            <a:pPr algn="ctr"/>
+            <a:r>
+              <a:rPr sz="1300" b="1">
+                <a:solidFill>
+                  <a:srgbClr val="1B3A5F"/>
+                </a:solidFill>
+                <a:latin typeface="Microsoft YaHei"/>
+                <a:ea typeface="Microsoft YaHei"/>
+              </a:rPr>
+              <a:t>05价值生产力</a:t>
+            </a:r>
+          </a:p>
+        </p:txBody>
+      </p:sp>
+      <p:sp>
+        <p:nvSpPr>
+          <p:cNvPr id="29" name="TextBox 28"/>
+          <p:cNvSpPr txBox="1"/>
+          <p:nvPr/>
+        </p:nvSpPr>
+        <p:spPr>
+          <a:xfrm>
+            <a:off x="411480" y="4069080"/>
+            <a:ext cx="7315200" cy="274320"/>
+          </a:xfrm>
+          <a:prstGeom prst="rect">
+            <a:avLst/>
+          </a:prstGeom>
+          <a:noFill/>
+        </p:spPr>
+        <p:txBody>
+          <a:bodyPr wrap="square">
+            <a:spAutoFit/>
+          </a:bodyPr>
+          <a:lstStyle/>
+          <a:p>
+            <a:pPr algn="l"/>
+            <a:r>
+              <a:rPr sz="1300" b="1">
+                <a:solidFill>
+                  <a:srgbClr val="E87A2E"/>
+                </a:solidFill>
+                <a:latin typeface="Microsoft YaHei"/>
+                <a:ea typeface="Microsoft YaHei"/>
+              </a:rPr>
+              <a:t>三阶段路径（2026下半年）</a:t>
+            </a:r>
+          </a:p>
+        </p:txBody>
+      </p:sp>
+      <p:sp>
+        <p:nvSpPr>
+          <p:cNvPr id="30" name="Rounded Rectangle 29"/>
+          <p:cNvSpPr/>
+          <p:nvPr/>
+        </p:nvSpPr>
+        <p:spPr>
+          <a:xfrm>
+            <a:off x="411480" y="4434840"/>
+            <a:ext cx="3703320" cy="1097280"/>
+          </a:xfrm>
+          <a:prstGeom prst="roundRect">
+            <a:avLst>
+              <a:gd name="adj" fmla="val 8000"/>
+            </a:avLst>
+          </a:prstGeom>
+          <a:solidFill>
+            <a:srgbClr val="FFFFFF"/>
+          </a:solidFill>
+          <a:ln w="15875">
+            <a:solidFill>
+              <a:srgbClr val="E8EEF2"/>
+            </a:solidFill>
+          </a:ln>
+        </p:spPr>
+        <p:style>
+          <a:lnRef idx="1">
+            <a:schemeClr val="accent1"/>
+          </a:lnRef>
+          <a:fillRef idx="3">
+            <a:schemeClr val="accent1"/>
+          </a:fillRef>
+          <a:effectRef idx="2">
+            <a:schemeClr val="accent1"/>
+          </a:effectRef>
+          <a:fontRef idx="minor">
+            <a:schemeClr val="lt1"/>
+          </a:fontRef>
+        </p:style>
+        <p:txBody>
+          <a:bodyPr rtlCol="0" anchor="ctr"/>
+          <a:lstStyle/>
+          <a:p>
+            <a:pPr algn="ctr"/>
+          </a:p>
+        </p:txBody>
+      </p:sp>
+      <p:sp>
+        <p:nvSpPr>
+          <p:cNvPr id="31" name="TextBox 30"/>
+          <p:cNvSpPr txBox="1"/>
+          <p:nvPr/>
+        </p:nvSpPr>
+        <p:spPr>
+          <a:xfrm>
+            <a:off x="548640" y="4572000"/>
+            <a:ext cx="3383280" cy="274320"/>
+          </a:xfrm>
+          <a:prstGeom prst="rect">
+            <a:avLst/>
+          </a:prstGeom>
+          <a:noFill/>
+        </p:spPr>
+        <p:txBody>
+          <a:bodyPr wrap="square">
+            <a:spAutoFit/>
+          </a:bodyPr>
+          <a:lstStyle/>
+          <a:p>
+            <a:pPr algn="l"/>
+            <a:r>
+              <a:rPr sz="1300" b="1">
+                <a:solidFill>
+                  <a:srgbClr val="1B3A5F"/>
+                </a:solidFill>
+                <a:latin typeface="Microsoft YaHei"/>
+                <a:ea typeface="Microsoft YaHei"/>
+              </a:rPr>
+              <a:t>7–8月 筑基巩固期</a:t>
+            </a:r>
+          </a:p>
+        </p:txBody>
+      </p:sp>
+      <p:sp>
+        <p:nvSpPr>
+          <p:cNvPr id="32" name="TextBox 31"/>
+          <p:cNvSpPr txBox="1"/>
+          <p:nvPr/>
+        </p:nvSpPr>
+        <p:spPr>
+          <a:xfrm>
+            <a:off x="548640" y="4937760"/>
+            <a:ext cx="3383280" cy="365760"/>
+          </a:xfrm>
+          <a:prstGeom prst="rect">
+            <a:avLst/>
+          </a:prstGeom>
+          <a:noFill/>
+        </p:spPr>
+        <p:txBody>
+          <a:bodyPr wrap="square">
+            <a:spAutoFit/>
+          </a:bodyPr>
+          <a:lstStyle/>
+          <a:p>
+            <a:pPr algn="l"/>
+            <a:r>
+              <a:rPr sz="1200" b="0">
+                <a:solidFill>
+                  <a:srgbClr val="5D6D7E"/>
+                </a:solidFill>
+                <a:latin typeface="Microsoft YaHei"/>
+                <a:ea typeface="Microsoft YaHei"/>
+              </a:rPr>
+              <a:t>补短板、定标准、全员培训</a:t>
+            </a:r>
+          </a:p>
+        </p:txBody>
+      </p:sp>
+      <p:sp>
+        <p:nvSpPr>
+          <p:cNvPr id="33" name="Rounded Rectangle 32"/>
+          <p:cNvSpPr/>
+          <p:nvPr/>
+        </p:nvSpPr>
+        <p:spPr>
+          <a:xfrm>
+            <a:off x="4297680" y="4434840"/>
+            <a:ext cx="3703320" cy="1097280"/>
+          </a:xfrm>
+          <a:prstGeom prst="roundRect">
+            <a:avLst>
+              <a:gd name="adj" fmla="val 8000"/>
+            </a:avLst>
+          </a:prstGeom>
+          <a:solidFill>
+            <a:srgbClr val="FFFFFF"/>
+          </a:solidFill>
+          <a:ln w="15875">
+            <a:solidFill>
+              <a:srgbClr val="E8EEF2"/>
+            </a:solidFill>
+          </a:ln>
+        </p:spPr>
+        <p:style>
+          <a:lnRef idx="1">
+            <a:schemeClr val="accent1"/>
+          </a:lnRef>
+          <a:fillRef idx="3">
+            <a:schemeClr val="accent1"/>
+          </a:fillRef>
+          <a:effectRef idx="2">
+            <a:schemeClr val="accent1"/>
+          </a:effectRef>
+          <a:fontRef idx="minor">
+            <a:schemeClr val="lt1"/>
+          </a:fontRef>
+        </p:style>
+        <p:txBody>
+          <a:bodyPr rtlCol="0" anchor="ctr"/>
+          <a:lstStyle/>
+          <a:p>
+            <a:pPr algn="ctr"/>
+          </a:p>
+        </p:txBody>
+      </p:sp>
+      <p:sp>
+        <p:nvSpPr>
+          <p:cNvPr id="34" name="TextBox 33"/>
+          <p:cNvSpPr txBox="1"/>
+          <p:nvPr/>
+        </p:nvSpPr>
+        <p:spPr>
+          <a:xfrm>
+            <a:off x="4434840" y="4572000"/>
+            <a:ext cx="3383280" cy="274320"/>
+          </a:xfrm>
+          <a:prstGeom prst="rect">
+            <a:avLst/>
+          </a:prstGeom>
+          <a:noFill/>
+        </p:spPr>
+        <p:txBody>
+          <a:bodyPr wrap="square">
+            <a:spAutoFit/>
+          </a:bodyPr>
+          <a:lstStyle/>
+          <a:p>
+            <a:pPr algn="l"/>
+            <a:r>
+              <a:rPr sz="1300" b="1">
+                <a:solidFill>
+                  <a:srgbClr val="1B3A5F"/>
+                </a:solidFill>
+                <a:latin typeface="Microsoft YaHei"/>
+                <a:ea typeface="Microsoft YaHei"/>
+              </a:rPr>
+              <a:t>9–10月 攻坚突破期</a:t>
+            </a:r>
+          </a:p>
+        </p:txBody>
+      </p:sp>
+      <p:sp>
+        <p:nvSpPr>
+          <p:cNvPr id="35" name="TextBox 34"/>
+          <p:cNvSpPr txBox="1"/>
+          <p:nvPr/>
+        </p:nvSpPr>
+        <p:spPr>
+          <a:xfrm>
+            <a:off x="4434840" y="4937760"/>
+            <a:ext cx="3383280" cy="365760"/>
+          </a:xfrm>
+          <a:prstGeom prst="rect">
+            <a:avLst/>
+          </a:prstGeom>
+          <a:noFill/>
+        </p:spPr>
+        <p:txBody>
+          <a:bodyPr wrap="square">
+            <a:spAutoFit/>
+          </a:bodyPr>
+          <a:lstStyle/>
+          <a:p>
+            <a:pPr algn="l"/>
+            <a:r>
+              <a:rPr sz="1200" b="0">
+                <a:solidFill>
+                  <a:srgbClr val="5D6D7E"/>
+                </a:solidFill>
+                <a:latin typeface="Microsoft YaHei"/>
+                <a:ea typeface="Microsoft YaHei"/>
+              </a:rPr>
+              <a:t>专项课题，解决核心痛点瓶颈</a:t>
+            </a:r>
+          </a:p>
+        </p:txBody>
+      </p:sp>
+      <p:sp>
+        <p:nvSpPr>
+          <p:cNvPr id="36" name="Rounded Rectangle 35"/>
+          <p:cNvSpPr/>
+          <p:nvPr/>
+        </p:nvSpPr>
+        <p:spPr>
+          <a:xfrm>
+            <a:off x="8183879" y="4434840"/>
+            <a:ext cx="3703320" cy="1097280"/>
+          </a:xfrm>
+          <a:prstGeom prst="roundRect">
+            <a:avLst>
+              <a:gd name="adj" fmla="val 8000"/>
+            </a:avLst>
+          </a:prstGeom>
+          <a:solidFill>
+            <a:srgbClr val="FFFFFF"/>
+          </a:solidFill>
+          <a:ln w="15875">
+            <a:solidFill>
+              <a:srgbClr val="E8EEF2"/>
+            </a:solidFill>
+          </a:ln>
+        </p:spPr>
+        <p:style>
+          <a:lnRef idx="1">
+            <a:schemeClr val="accent1"/>
+          </a:lnRef>
+          <a:fillRef idx="3">
+            <a:schemeClr val="accent1"/>
+          </a:fillRef>
+          <a:effectRef idx="2">
+            <a:schemeClr val="accent1"/>
+          </a:effectRef>
+          <a:fontRef idx="minor">
+            <a:schemeClr val="lt1"/>
+          </a:fontRef>
+        </p:style>
+        <p:txBody>
+          <a:bodyPr rtlCol="0" anchor="ctr"/>
+          <a:lstStyle/>
+          <a:p>
+            <a:pPr algn="ctr"/>
+          </a:p>
+        </p:txBody>
+      </p:sp>
+      <p:sp>
+        <p:nvSpPr>
+          <p:cNvPr id="37" name="TextBox 36"/>
+          <p:cNvSpPr txBox="1"/>
+          <p:nvPr/>
+        </p:nvSpPr>
+        <p:spPr>
+          <a:xfrm>
+            <a:off x="8321039" y="4572000"/>
+            <a:ext cx="3383280" cy="274320"/>
+          </a:xfrm>
+          <a:prstGeom prst="rect">
+            <a:avLst/>
+          </a:prstGeom>
+          <a:noFill/>
+        </p:spPr>
+        <p:txBody>
+          <a:bodyPr wrap="square">
+            <a:spAutoFit/>
+          </a:bodyPr>
+          <a:lstStyle/>
+          <a:p>
+            <a:pPr algn="l"/>
+            <a:r>
+              <a:rPr sz="1300" b="1">
+                <a:solidFill>
+                  <a:srgbClr val="1B3A5F"/>
+                </a:solidFill>
+                <a:latin typeface="Microsoft YaHei"/>
+                <a:ea typeface="Microsoft YaHei"/>
+              </a:rPr>
+              <a:t>11–12月 价值兑现期</a:t>
+            </a:r>
+          </a:p>
+        </p:txBody>
+      </p:sp>
+      <p:sp>
+        <p:nvSpPr>
+          <p:cNvPr id="38" name="TextBox 37"/>
+          <p:cNvSpPr txBox="1"/>
+          <p:nvPr/>
+        </p:nvSpPr>
+        <p:spPr>
+          <a:xfrm>
+            <a:off x="8321039" y="4937760"/>
+            <a:ext cx="3383280" cy="365760"/>
+          </a:xfrm>
+          <a:prstGeom prst="rect">
+            <a:avLst/>
+          </a:prstGeom>
+          <a:noFill/>
+        </p:spPr>
+        <p:txBody>
+          <a:bodyPr wrap="square">
+            <a:spAutoFit/>
+          </a:bodyPr>
+          <a:lstStyle/>
+          <a:p>
+            <a:pPr algn="l"/>
+            <a:r>
+              <a:rPr sz="1200" b="0">
+                <a:solidFill>
+                  <a:srgbClr val="5D6D7E"/>
+                </a:solidFill>
+                <a:latin typeface="Microsoft YaHei"/>
+                <a:ea typeface="Microsoft YaHei"/>
+              </a:rPr>
+              <a:t>固化成果、长效机制、效益验证</a:t>
+            </a:r>
+          </a:p>
+        </p:txBody>
+      </p:sp>
+      <p:sp>
+        <p:nvSpPr>
+          <p:cNvPr id="39" name="Rounded Rectangle 38"/>
+          <p:cNvSpPr/>
+          <p:nvPr/>
+        </p:nvSpPr>
+        <p:spPr>
+          <a:xfrm>
+            <a:off x="411480" y="5760720"/>
+            <a:ext cx="11338560" cy="777240"/>
+          </a:xfrm>
+          <a:prstGeom prst="roundRect">
+            <a:avLst>
+              <a:gd name="adj" fmla="val 8000"/>
+            </a:avLst>
+          </a:prstGeom>
+          <a:solidFill>
+            <a:srgbClr val="1B3A5F"/>
+          </a:solidFill>
+          <a:ln>
+            <a:noFill/>
+          </a:ln>
+        </p:spPr>
+        <p:style>
+          <a:lnRef idx="1">
+            <a:schemeClr val="accent1"/>
+          </a:lnRef>
+          <a:fillRef idx="3">
+            <a:schemeClr val="accent1"/>
+          </a:fillRef>
+          <a:effectRef idx="2">
+            <a:schemeClr val="accent1"/>
+          </a:effectRef>
+          <a:fontRef idx="minor">
+            <a:schemeClr val="lt1"/>
+          </a:fontRef>
+        </p:style>
+        <p:txBody>
+          <a:bodyPr rtlCol="0" anchor="ctr"/>
+          <a:lstStyle/>
+          <a:p>
+            <a:pPr algn="ctr"/>
+          </a:p>
+        </p:txBody>
+      </p:sp>
+      <p:sp>
+        <p:nvSpPr>
+          <p:cNvPr id="40" name="TextBox 39"/>
+          <p:cNvSpPr txBox="1"/>
+          <p:nvPr/>
+        </p:nvSpPr>
+        <p:spPr>
+          <a:xfrm>
+            <a:off x="640080" y="5943600"/>
+            <a:ext cx="10972800" cy="457200"/>
+          </a:xfrm>
+          <a:prstGeom prst="rect">
+            <a:avLst/>
+          </a:prstGeom>
+          <a:noFill/>
+        </p:spPr>
+        <p:txBody>
+          <a:bodyPr wrap="square">
+            <a:spAutoFit/>
+          </a:bodyPr>
+          <a:lstStyle/>
+          <a:p>
+            <a:pPr algn="l"/>
+            <a:r>
+              <a:rPr sz="1400" b="1">
+                <a:solidFill>
+                  <a:srgbClr val="FFFFFF"/>
+                </a:solidFill>
+                <a:latin typeface="Microsoft YaHei"/>
+                <a:ea typeface="Microsoft YaHei"/>
+              </a:rPr>
+              <a:t>453框架 = 四级架构 × 五大体系 × 三阶段路径　｜　打造「第二生产力」</a:t>
             </a:r>
           </a:p>
         </p:txBody>
@@ -4727,7 +5460,7 @@
             </a:avLst>
           </a:prstGeom>
           <a:solidFill>
-            <a:srgbClr val="F5F7FA"/>
+            <a:srgbClr val="FFFFFF"/>
           </a:solidFill>
           <a:ln>
             <a:noFill/>
@@ -4763,8 +5496,8 @@
         </p:nvSpPr>
         <p:spPr>
           <a:xfrm>
-            <a:off x="457200" y="274320"/>
-            <a:ext cx="10972800" cy="411480"/>
+            <a:off x="411480" y="182880"/>
+            <a:ext cx="10972800" cy="365760"/>
           </a:xfrm>
           <a:prstGeom prst="rect">
             <a:avLst/>
@@ -4781,26 +5514,62 @@
             <a:r>
               <a:rPr sz="2400" b="1">
                 <a:solidFill>
-                  <a:srgbClr val="0B2A3F"/>
+                  <a:srgbClr val="1B3A5F"/>
                 </a:solidFill>
                 <a:latin typeface="Microsoft YaHei"/>
                 <a:ea typeface="Microsoft YaHei"/>
               </a:rPr>
-              <a:t>筑基→势起｜GPS 精益 453 总框架</a:t>
-            </a:r>
-          </a:p>
-        </p:txBody>
-      </p:sp>
-      <p:sp>
-        <p:nvSpPr>
-          <p:cNvPr id="4" name="Rounded Rectangle 3"/>
+              <a:t>五大体系</a:t>
+            </a:r>
+          </a:p>
+        </p:txBody>
+      </p:sp>
+      <p:sp>
+        <p:nvSpPr>
+          <p:cNvPr id="4" name="TextBox 3"/>
+          <p:cNvSpPr txBox="1"/>
+          <p:nvPr/>
+        </p:nvSpPr>
+        <p:spPr>
+          <a:xfrm>
+            <a:off x="411480" y="548640"/>
+            <a:ext cx="10972800" cy="274320"/>
+          </a:xfrm>
+          <a:prstGeom prst="rect">
+            <a:avLst/>
+          </a:prstGeom>
+          <a:noFill/>
+        </p:spPr>
+        <p:txBody>
+          <a:bodyPr wrap="square">
+            <a:spAutoFit/>
+          </a:bodyPr>
+          <a:lstStyle/>
+          <a:p>
+            <a:pPr algn="l"/>
+            <a:r>
+              <a:rPr sz="1200" b="0">
+                <a:solidFill>
+                  <a:srgbClr val="5D6D7E"/>
+                </a:solidFill>
+                <a:latin typeface="Microsoft YaHei"/>
+                <a:ea typeface="Microsoft YaHei"/>
+              </a:rPr>
+              <a:t>管理支撑系统：对标 · 复制 · 育成 · 考核</a:t>
+            </a:r>
+          </a:p>
+        </p:txBody>
+      </p:sp>
+      <p:sp>
+        <p:nvSpPr>
+          <p:cNvPr id="5" name="Rounded Rectangle 4"/>
           <p:cNvSpPr/>
           <p:nvPr/>
         </p:nvSpPr>
         <p:spPr>
           <a:xfrm>
-            <a:off x="457200" y="868680"/>
-            <a:ext cx="11247120" cy="822960"/>
+            <a:off x="365760" y="960120"/>
+            <a:ext cx="5715000" cy="2606040"/>
           </a:xfrm>
           <a:prstGeom prst="roundRect">
             <a:avLst>
@@ -4808,10 +5577,12 @@
             </a:avLst>
           </a:prstGeom>
           <a:solidFill>
-            <a:srgbClr val="0B2A3F"/>
+            <a:srgbClr val="FFFFFF"/>
           </a:solidFill>
-          <a:ln>
-            <a:noFill/>
+          <a:ln w="15875">
+            <a:solidFill>
+              <a:srgbClr val="E8EEF2"/>
+            </a:solidFill>
           </a:ln>
         </p:spPr>
         <p:style>
@@ -4838,50 +5609,14 @@
       </p:sp>
       <p:sp>
         <p:nvSpPr>
-          <p:cNvPr id="5" name="TextBox 4"/>
-          <p:cNvSpPr txBox="1"/>
-          <p:nvPr/>
-        </p:nvSpPr>
-        <p:spPr>
-          <a:xfrm>
-            <a:off x="640080" y="1005840"/>
-            <a:ext cx="10972800" cy="548640"/>
-          </a:xfrm>
-          <a:prstGeom prst="rect">
-            <a:avLst/>
-          </a:prstGeom>
-          <a:noFill/>
-        </p:spPr>
-        <p:txBody>
-          <a:bodyPr wrap="square">
-            <a:spAutoFit/>
-          </a:bodyPr>
-          <a:lstStyle/>
-          <a:p>
-            <a:pPr algn="l"/>
-            <a:r>
-              <a:rPr sz="1400" b="0">
-                <a:solidFill>
-                  <a:srgbClr val="FFFFFF"/>
-                </a:solidFill>
-                <a:latin typeface="Microsoft YaHei"/>
-                <a:ea typeface="Microsoft YaHei"/>
-              </a:rPr>
-              <a:t>2026 为关键推进年：以精益为「第二生产力」，用四级架构×五大体系×三阶段路径践真善美。</a:t>
-            </a:r>
-          </a:p>
-        </p:txBody>
-      </p:sp>
-      <p:sp>
-        <p:nvSpPr>
           <p:cNvPr id="6" name="Rounded Rectangle 5"/>
           <p:cNvSpPr/>
           <p:nvPr/>
         </p:nvSpPr>
         <p:spPr>
           <a:xfrm>
-            <a:off x="457200" y="2011680"/>
-            <a:ext cx="2743200" cy="1280160"/>
+            <a:off x="365760" y="960120"/>
+            <a:ext cx="5715000" cy="777240"/>
           </a:xfrm>
           <a:prstGeom prst="roundRect">
             <a:avLst>
@@ -4889,12 +5624,10 @@
             </a:avLst>
           </a:prstGeom>
           <a:solidFill>
-            <a:srgbClr val="FFFFFF"/>
+            <a:srgbClr val="1B3A5F"/>
           </a:solidFill>
-          <a:ln w="12700">
-            <a:solidFill>
-              <a:srgbClr val="D5DEE7"/>
-            </a:solidFill>
+          <a:ln>
+            <a:noFill/>
           </a:ln>
         </p:spPr>
         <p:style>
@@ -4927,8 +5660,8 @@
         </p:nvSpPr>
         <p:spPr>
           <a:xfrm>
-            <a:off x="594360" y="2240280"/>
-            <a:ext cx="2468880" cy="365760"/>
+            <a:off x="548640" y="1097280"/>
+            <a:ext cx="5303520" cy="274320"/>
           </a:xfrm>
           <a:prstGeom prst="rect">
             <a:avLst/>
@@ -4943,14 +5676,14 @@
           <a:p>
             <a:pPr algn="l"/>
             <a:r>
-              <a:rPr sz="1600" b="1">
-                <a:solidFill>
-                  <a:srgbClr val="0B2A3F"/>
+              <a:rPr sz="1500" b="1">
+                <a:solidFill>
+                  <a:srgbClr val="FFFFFF"/>
                 </a:solidFill>
                 <a:latin typeface="Microsoft YaHei"/>
                 <a:ea typeface="Microsoft YaHei"/>
               </a:rPr>
-              <a:t>决策层</a:t>
+              <a:t>01 对标研学体系</a:t>
             </a:r>
           </a:p>
         </p:txBody>
@@ -4963,8 +5696,8 @@
         </p:nvSpPr>
         <p:spPr>
           <a:xfrm>
-            <a:off x="594360" y="2697480"/>
-            <a:ext cx="2468880" cy="365760"/>
+            <a:off x="548640" y="1399032"/>
+            <a:ext cx="5303520" cy="274320"/>
           </a:xfrm>
           <a:prstGeom prst="rect">
             <a:avLst/>
@@ -4979,28 +5712,65 @@
           <a:p>
             <a:pPr algn="l"/>
             <a:r>
-              <a:rPr sz="1400" b="0">
-                <a:solidFill>
-                  <a:srgbClr val="E07A2F"/>
+              <a:rPr sz="1100" b="0">
+                <a:solidFill>
+                  <a:srgbClr val="E87A2E"/>
                 </a:solidFill>
                 <a:latin typeface="Microsoft YaHei"/>
                 <a:ea typeface="Microsoft YaHei"/>
               </a:rPr>
-              <a:t>战略引领</a:t>
-            </a:r>
-          </a:p>
-        </p:txBody>
-      </p:sp>
-      <p:sp>
-        <p:nvSpPr>
-          <p:cNvPr id="9" name="Rounded Rectangle 8"/>
+              <a:t>从「被动学习」到「对标赶超」</a:t>
+            </a:r>
+          </a:p>
+        </p:txBody>
+      </p:sp>
+      <p:sp>
+        <p:nvSpPr>
+          <p:cNvPr id="9" name="TextBox 8"/>
+          <p:cNvSpPr txBox="1"/>
+          <p:nvPr/>
+        </p:nvSpPr>
+        <p:spPr>
+          <a:xfrm>
+            <a:off x="548640" y="1965960"/>
+            <a:ext cx="5303520" cy="1371600"/>
+          </a:xfrm>
+          <a:prstGeom prst="rect">
+            <a:avLst/>
+          </a:prstGeom>
+          <a:noFill/>
+        </p:spPr>
+        <p:txBody>
+          <a:bodyPr wrap="square">
+            <a:spAutoFit/>
+          </a:bodyPr>
+          <a:lstStyle/>
+          <a:p>
+            <a:pPr algn="l"/>
+            <a:r>
+              <a:rPr sz="1200" b="0">
+                <a:solidFill>
+                  <a:srgbClr val="5D6D7E"/>
+                </a:solidFill>
+                <a:latin typeface="Microsoft YaHei"/>
+                <a:ea typeface="Microsoft YaHei"/>
+              </a:rPr>
+              <a:t>三维对标：横向内部基地+纵向工序+制造标杆，识别绩效差距。
+量化整改：聚焦能耗、良率、OEE等核心KPI，月度差距清单与整改计划。</a:t>
+            </a:r>
+          </a:p>
+        </p:txBody>
+      </p:sp>
+      <p:sp>
+        <p:nvSpPr>
+          <p:cNvPr id="10" name="Rounded Rectangle 9"/>
           <p:cNvSpPr/>
           <p:nvPr/>
         </p:nvSpPr>
         <p:spPr>
           <a:xfrm>
-            <a:off x="3383280" y="2011680"/>
-            <a:ext cx="2743200" cy="1280160"/>
+            <a:off x="6309360" y="960120"/>
+            <a:ext cx="5715000" cy="2606040"/>
           </a:xfrm>
           <a:prstGeom prst="roundRect">
             <a:avLst>
@@ -5010,9 +5780,9 @@
           <a:solidFill>
             <a:srgbClr val="FFFFFF"/>
           </a:solidFill>
-          <a:ln w="12700">
+          <a:ln w="15875">
             <a:solidFill>
-              <a:srgbClr val="D5DEE7"/>
+              <a:srgbClr val="E8EEF2"/>
             </a:solidFill>
           </a:ln>
         </p:spPr>
@@ -5040,86 +5810,14 @@
       </p:sp>
       <p:sp>
         <p:nvSpPr>
-          <p:cNvPr id="10" name="TextBox 9"/>
-          <p:cNvSpPr txBox="1"/>
-          <p:nvPr/>
-        </p:nvSpPr>
-        <p:spPr>
-          <a:xfrm>
-            <a:off x="3520440" y="2240280"/>
-            <a:ext cx="2468880" cy="365760"/>
-          </a:xfrm>
-          <a:prstGeom prst="rect">
-            <a:avLst/>
-          </a:prstGeom>
-          <a:noFill/>
-        </p:spPr>
-        <p:txBody>
-          <a:bodyPr wrap="square">
-            <a:spAutoFit/>
-          </a:bodyPr>
-          <a:lstStyle/>
-          <a:p>
-            <a:pPr algn="l"/>
-            <a:r>
-              <a:rPr sz="1600" b="1">
-                <a:solidFill>
-                  <a:srgbClr val="0B2A3F"/>
-                </a:solidFill>
-                <a:latin typeface="Microsoft YaHei"/>
-                <a:ea typeface="Microsoft YaHei"/>
-              </a:rPr>
-              <a:t>推进层</a:t>
-            </a:r>
-          </a:p>
-        </p:txBody>
-      </p:sp>
-      <p:sp>
-        <p:nvSpPr>
-          <p:cNvPr id="11" name="TextBox 10"/>
-          <p:cNvSpPr txBox="1"/>
-          <p:nvPr/>
-        </p:nvSpPr>
-        <p:spPr>
-          <a:xfrm>
-            <a:off x="3520440" y="2697480"/>
-            <a:ext cx="2468880" cy="365760"/>
-          </a:xfrm>
-          <a:prstGeom prst="rect">
-            <a:avLst/>
-          </a:prstGeom>
-          <a:noFill/>
-        </p:spPr>
-        <p:txBody>
-          <a:bodyPr wrap="square">
-            <a:spAutoFit/>
-          </a:bodyPr>
-          <a:lstStyle/>
-          <a:p>
-            <a:pPr algn="l"/>
-            <a:r>
-              <a:rPr sz="1400" b="0">
-                <a:solidFill>
-                  <a:srgbClr val="E07A2F"/>
-                </a:solidFill>
-                <a:latin typeface="Microsoft YaHei"/>
-                <a:ea typeface="Microsoft YaHei"/>
-              </a:rPr>
-              <a:t>体系赋能</a:t>
-            </a:r>
-          </a:p>
-        </p:txBody>
-      </p:sp>
-      <p:sp>
-        <p:nvSpPr>
-          <p:cNvPr id="12" name="Rounded Rectangle 11"/>
+          <p:cNvPr id="11" name="Rounded Rectangle 10"/>
           <p:cNvSpPr/>
           <p:nvPr/>
         </p:nvSpPr>
         <p:spPr>
           <a:xfrm>
-            <a:off x="6309360" y="2011680"/>
-            <a:ext cx="2743200" cy="1280160"/>
+            <a:off x="6309360" y="960120"/>
+            <a:ext cx="5715000" cy="777240"/>
           </a:xfrm>
           <a:prstGeom prst="roundRect">
             <a:avLst>
@@ -5127,12 +5825,10 @@
             </a:avLst>
           </a:prstGeom>
           <a:solidFill>
-            <a:srgbClr val="FFFFFF"/>
+            <a:srgbClr val="1B3A5F"/>
           </a:solidFill>
-          <a:ln w="12700">
-            <a:solidFill>
-              <a:srgbClr val="D5DEE7"/>
-            </a:solidFill>
+          <a:ln>
+            <a:noFill/>
           </a:ln>
         </p:spPr>
         <p:style>
@@ -5159,14 +5855,14 @@
       </p:sp>
       <p:sp>
         <p:nvSpPr>
-          <p:cNvPr id="13" name="TextBox 12"/>
+          <p:cNvPr id="12" name="TextBox 11"/>
           <p:cNvSpPr txBox="1"/>
           <p:nvPr/>
         </p:nvSpPr>
         <p:spPr>
           <a:xfrm>
-            <a:off x="6446520" y="2240280"/>
-            <a:ext cx="2468880" cy="365760"/>
+            <a:off x="6492240" y="1097280"/>
+            <a:ext cx="5303520" cy="274320"/>
           </a:xfrm>
           <a:prstGeom prst="rect">
             <a:avLst/>
@@ -5181,28 +5877,28 @@
           <a:p>
             <a:pPr algn="l"/>
             <a:r>
-              <a:rPr sz="1600" b="1">
-                <a:solidFill>
-                  <a:srgbClr val="0B2A3F"/>
+              <a:rPr sz="1500" b="1">
+                <a:solidFill>
+                  <a:srgbClr val="FFFFFF"/>
                 </a:solidFill>
                 <a:latin typeface="Microsoft YaHei"/>
                 <a:ea typeface="Microsoft YaHei"/>
               </a:rPr>
-              <a:t>执行层</a:t>
-            </a:r>
-          </a:p>
-        </p:txBody>
-      </p:sp>
-      <p:sp>
-        <p:nvSpPr>
-          <p:cNvPr id="14" name="TextBox 13"/>
+              <a:t>02 标杆复制体系</a:t>
+            </a:r>
+          </a:p>
+        </p:txBody>
+      </p:sp>
+      <p:sp>
+        <p:nvSpPr>
+          <p:cNvPr id="13" name="TextBox 12"/>
           <p:cNvSpPr txBox="1"/>
           <p:nvPr/>
         </p:nvSpPr>
         <p:spPr>
           <a:xfrm>
-            <a:off x="6446520" y="2697480"/>
-            <a:ext cx="2468880" cy="365760"/>
+            <a:off x="6492240" y="1399032"/>
+            <a:ext cx="5303520" cy="274320"/>
           </a:xfrm>
           <a:prstGeom prst="rect">
             <a:avLst/>
@@ -5217,14 +5913,51 @@
           <a:p>
             <a:pPr algn="l"/>
             <a:r>
-              <a:rPr sz="1400" b="0">
-                <a:solidFill>
-                  <a:srgbClr val="E07A2F"/>
+              <a:rPr sz="1100" b="0">
+                <a:solidFill>
+                  <a:srgbClr val="E87A2E"/>
                 </a:solidFill>
                 <a:latin typeface="Microsoft YaHei"/>
                 <a:ea typeface="Microsoft YaHei"/>
               </a:rPr>
-              <a:t>攻坚落地</a:t>
+              <a:t>从「单点标杆」到「全域标准化」</a:t>
+            </a:r>
+          </a:p>
+        </p:txBody>
+      </p:sp>
+      <p:sp>
+        <p:nvSpPr>
+          <p:cNvPr id="14" name="TextBox 13"/>
+          <p:cNvSpPr txBox="1"/>
+          <p:nvPr/>
+        </p:nvSpPr>
+        <p:spPr>
+          <a:xfrm>
+            <a:off x="6492240" y="1965960"/>
+            <a:ext cx="5303520" cy="1371600"/>
+          </a:xfrm>
+          <a:prstGeom prst="rect">
+            <a:avLst/>
+          </a:prstGeom>
+          <a:noFill/>
+        </p:spPr>
+        <p:txBody>
+          <a:bodyPr wrap="square">
+            <a:spAutoFit/>
+          </a:bodyPr>
+          <a:lstStyle/>
+          <a:p>
+            <a:pPr algn="l"/>
+            <a:r>
+              <a:rPr sz="1200" b="0">
+                <a:solidFill>
+                  <a:srgbClr val="5D6D7E"/>
+                </a:solidFill>
+                <a:latin typeface="Microsoft YaHei"/>
+                <a:ea typeface="Microsoft YaHei"/>
+              </a:rPr>
+              <a:t>标准化拆解：标杆车间/产线经验沉淀为SOP与点检标准，跨线复制。
+标杆升级：从基础5S走向提质增效、降本与零缺陷，打造行业领先标杆。</a:t>
             </a:r>
           </a:p>
         </p:txBody>
@@ -5237,8 +5970,8 @@
         </p:nvSpPr>
         <p:spPr>
           <a:xfrm>
-            <a:off x="9235440" y="2011680"/>
-            <a:ext cx="2743200" cy="1280160"/>
+            <a:off x="365760" y="3749039"/>
+            <a:ext cx="5715000" cy="2606040"/>
           </a:xfrm>
           <a:prstGeom prst="roundRect">
             <a:avLst>
@@ -5248,9 +5981,9 @@
           <a:solidFill>
             <a:srgbClr val="FFFFFF"/>
           </a:solidFill>
-          <a:ln w="12700">
+          <a:ln w="15875">
             <a:solidFill>
-              <a:srgbClr val="D5DEE7"/>
+              <a:srgbClr val="E8EEF2"/>
             </a:solidFill>
           </a:ln>
         </p:spPr>
@@ -5278,86 +6011,14 @@
       </p:sp>
       <p:sp>
         <p:nvSpPr>
-          <p:cNvPr id="16" name="TextBox 15"/>
-          <p:cNvSpPr txBox="1"/>
-          <p:nvPr/>
-        </p:nvSpPr>
-        <p:spPr>
-          <a:xfrm>
-            <a:off x="9372600" y="2240280"/>
-            <a:ext cx="2468880" cy="365760"/>
-          </a:xfrm>
-          <a:prstGeom prst="rect">
-            <a:avLst/>
-          </a:prstGeom>
-          <a:noFill/>
-        </p:spPr>
-        <p:txBody>
-          <a:bodyPr wrap="square">
-            <a:spAutoFit/>
-          </a:bodyPr>
-          <a:lstStyle/>
-          <a:p>
-            <a:pPr algn="l"/>
-            <a:r>
-              <a:rPr sz="1600" b="1">
-                <a:solidFill>
-                  <a:srgbClr val="0B2A3F"/>
-                </a:solidFill>
-                <a:latin typeface="Microsoft YaHei"/>
-                <a:ea typeface="Microsoft YaHei"/>
-              </a:rPr>
-              <a:t>落地层</a:t>
-            </a:r>
-          </a:p>
-        </p:txBody>
-      </p:sp>
-      <p:sp>
-        <p:nvSpPr>
-          <p:cNvPr id="17" name="TextBox 16"/>
-          <p:cNvSpPr txBox="1"/>
-          <p:nvPr/>
-        </p:nvSpPr>
-        <p:spPr>
-          <a:xfrm>
-            <a:off x="9372600" y="2697480"/>
-            <a:ext cx="2468880" cy="365760"/>
-          </a:xfrm>
-          <a:prstGeom prst="rect">
-            <a:avLst/>
-          </a:prstGeom>
-          <a:noFill/>
-        </p:spPr>
-        <p:txBody>
-          <a:bodyPr wrap="square">
-            <a:spAutoFit/>
-          </a:bodyPr>
-          <a:lstStyle/>
-          <a:p>
-            <a:pPr algn="l"/>
-            <a:r>
-              <a:rPr sz="1400" b="0">
-                <a:solidFill>
-                  <a:srgbClr val="E07A2F"/>
-                </a:solidFill>
-                <a:latin typeface="Microsoft YaHei"/>
-                <a:ea typeface="Microsoft YaHei"/>
-              </a:rPr>
-              <a:t>现场改善</a:t>
-            </a:r>
-          </a:p>
-        </p:txBody>
-      </p:sp>
-      <p:sp>
-        <p:nvSpPr>
-          <p:cNvPr id="18" name="Rounded Rectangle 17"/>
+          <p:cNvPr id="16" name="Rounded Rectangle 15"/>
           <p:cNvSpPr/>
           <p:nvPr/>
         </p:nvSpPr>
         <p:spPr>
           <a:xfrm>
-            <a:off x="457200" y="3657600"/>
-            <a:ext cx="2148840" cy="731520"/>
+            <a:off x="365760" y="3749039"/>
+            <a:ext cx="5715000" cy="777240"/>
           </a:xfrm>
           <a:prstGeom prst="roundRect">
             <a:avLst>
@@ -5365,12 +6026,10 @@
             </a:avLst>
           </a:prstGeom>
           <a:solidFill>
-            <a:srgbClr val="FFFFFF"/>
+            <a:srgbClr val="1B3A5F"/>
           </a:solidFill>
-          <a:ln w="12700">
-            <a:solidFill>
-              <a:srgbClr val="D5DEE7"/>
-            </a:solidFill>
+          <a:ln>
+            <a:noFill/>
           </a:ln>
         </p:spPr>
         <p:style>
@@ -5397,14 +6056,14 @@
       </p:sp>
       <p:sp>
         <p:nvSpPr>
-          <p:cNvPr id="19" name="TextBox 18"/>
+          <p:cNvPr id="17" name="TextBox 16"/>
           <p:cNvSpPr txBox="1"/>
           <p:nvPr/>
         </p:nvSpPr>
         <p:spPr>
           <a:xfrm>
-            <a:off x="457200" y="3840480"/>
-            <a:ext cx="2148840" cy="365760"/>
+            <a:off x="548640" y="3886199"/>
+            <a:ext cx="5303520" cy="274320"/>
           </a:xfrm>
           <a:prstGeom prst="rect">
             <a:avLst/>
@@ -5417,16 +6076,89 @@
           </a:bodyPr>
           <a:lstStyle/>
           <a:p>
-            <a:pPr algn="ctr"/>
-            <a:r>
-              <a:rPr sz="1300" b="1">
-                <a:solidFill>
-                  <a:srgbClr val="0B2A3F"/>
+            <a:pPr algn="l"/>
+            <a:r>
+              <a:rPr sz="1500" b="1">
+                <a:solidFill>
+                  <a:srgbClr val="FFFFFF"/>
                 </a:solidFill>
                 <a:latin typeface="Microsoft YaHei"/>
                 <a:ea typeface="Microsoft YaHei"/>
               </a:rPr>
-              <a:t>01 对标研学</a:t>
+              <a:t>03 人才育成体系</a:t>
+            </a:r>
+          </a:p>
+        </p:txBody>
+      </p:sp>
+      <p:sp>
+        <p:nvSpPr>
+          <p:cNvPr id="18" name="TextBox 17"/>
+          <p:cNvSpPr txBox="1"/>
+          <p:nvPr/>
+        </p:nvSpPr>
+        <p:spPr>
+          <a:xfrm>
+            <a:off x="548640" y="4187951"/>
+            <a:ext cx="5303520" cy="274320"/>
+          </a:xfrm>
+          <a:prstGeom prst="rect">
+            <a:avLst/>
+          </a:prstGeom>
+          <a:noFill/>
+        </p:spPr>
+        <p:txBody>
+          <a:bodyPr wrap="square">
+            <a:spAutoFit/>
+          </a:bodyPr>
+          <a:lstStyle/>
+          <a:p>
+            <a:pPr algn="l"/>
+            <a:r>
+              <a:rPr sz="1100" b="0">
+                <a:solidFill>
+                  <a:srgbClr val="E87A2E"/>
+                </a:solidFill>
+                <a:latin typeface="Microsoft YaHei"/>
+                <a:ea typeface="Microsoft YaHei"/>
+              </a:rPr>
+              <a:t>从「基础普及」到「精英赋能」</a:t>
+            </a:r>
+          </a:p>
+        </p:txBody>
+      </p:sp>
+      <p:sp>
+        <p:nvSpPr>
+          <p:cNvPr id="19" name="TextBox 18"/>
+          <p:cNvSpPr txBox="1"/>
+          <p:nvPr/>
+        </p:nvSpPr>
+        <p:spPr>
+          <a:xfrm>
+            <a:off x="548640" y="4754879"/>
+            <a:ext cx="5303520" cy="1371600"/>
+          </a:xfrm>
+          <a:prstGeom prst="rect">
+            <a:avLst/>
+          </a:prstGeom>
+          <a:noFill/>
+        </p:spPr>
+        <p:txBody>
+          <a:bodyPr wrap="square">
+            <a:spAutoFit/>
+          </a:bodyPr>
+          <a:lstStyle/>
+          <a:p>
+            <a:pPr algn="l"/>
+            <a:r>
+              <a:rPr sz="1200" b="0">
+                <a:solidFill>
+                  <a:srgbClr val="5D6D7E"/>
+                </a:solidFill>
+                <a:latin typeface="Microsoft YaHei"/>
+                <a:ea typeface="Microsoft YaHei"/>
+              </a:rPr>
+              <a:t>三级梯队：精益骨干（执行）+内训师（传播）+精益专班（决策）。
+利益绑定：认证与晋升通道、绩效激励挂钩，形成学会—会用—受益正循环。</a:t>
             </a:r>
           </a:p>
         </p:txBody>
@@ -5439,8 +6171,8 @@
         </p:nvSpPr>
         <p:spPr>
           <a:xfrm>
-            <a:off x="2743200" y="3657600"/>
-            <a:ext cx="2148840" cy="731520"/>
+            <a:off x="6309360" y="3749039"/>
+            <a:ext cx="5715000" cy="2606040"/>
           </a:xfrm>
           <a:prstGeom prst="roundRect">
             <a:avLst>
@@ -5450,9 +6182,9 @@
           <a:solidFill>
             <a:srgbClr val="FFFFFF"/>
           </a:solidFill>
-          <a:ln w="12700">
+          <a:ln w="15875">
             <a:solidFill>
-              <a:srgbClr val="D5DEE7"/>
+              <a:srgbClr val="E8EEF2"/>
             </a:solidFill>
           </a:ln>
         </p:spPr>
@@ -5480,50 +6212,14 @@
       </p:sp>
       <p:sp>
         <p:nvSpPr>
-          <p:cNvPr id="21" name="TextBox 20"/>
-          <p:cNvSpPr txBox="1"/>
-          <p:nvPr/>
-        </p:nvSpPr>
-        <p:spPr>
-          <a:xfrm>
-            <a:off x="2743200" y="3840480"/>
-            <a:ext cx="2148840" cy="365760"/>
-          </a:xfrm>
-          <a:prstGeom prst="rect">
-            <a:avLst/>
-          </a:prstGeom>
-          <a:noFill/>
-        </p:spPr>
-        <p:txBody>
-          <a:bodyPr wrap="square">
-            <a:spAutoFit/>
-          </a:bodyPr>
-          <a:lstStyle/>
-          <a:p>
-            <a:pPr algn="ctr"/>
-            <a:r>
-              <a:rPr sz="1300" b="1">
-                <a:solidFill>
-                  <a:srgbClr val="0B2A3F"/>
-                </a:solidFill>
-                <a:latin typeface="Microsoft YaHei"/>
-                <a:ea typeface="Microsoft YaHei"/>
-              </a:rPr>
-              <a:t>02 标杆复制</a:t>
-            </a:r>
-          </a:p>
-        </p:txBody>
-      </p:sp>
-      <p:sp>
-        <p:nvSpPr>
-          <p:cNvPr id="22" name="Rounded Rectangle 21"/>
+          <p:cNvPr id="21" name="Rounded Rectangle 20"/>
           <p:cNvSpPr/>
           <p:nvPr/>
         </p:nvSpPr>
         <p:spPr>
           <a:xfrm>
-            <a:off x="5029200" y="3657600"/>
-            <a:ext cx="2148840" cy="731520"/>
+            <a:off x="6309360" y="3749039"/>
+            <a:ext cx="5715000" cy="777240"/>
           </a:xfrm>
           <a:prstGeom prst="roundRect">
             <a:avLst>
@@ -5531,12 +6227,10 @@
             </a:avLst>
           </a:prstGeom>
           <a:solidFill>
-            <a:srgbClr val="FFFFFF"/>
+            <a:srgbClr val="1B3A5F"/>
           </a:solidFill>
-          <a:ln w="12700">
-            <a:solidFill>
-              <a:srgbClr val="D5DEE7"/>
-            </a:solidFill>
+          <a:ln>
+            <a:noFill/>
           </a:ln>
         </p:spPr>
         <p:style>
@@ -5563,14 +6257,14 @@
       </p:sp>
       <p:sp>
         <p:nvSpPr>
-          <p:cNvPr id="23" name="TextBox 22"/>
+          <p:cNvPr id="22" name="TextBox 21"/>
           <p:cNvSpPr txBox="1"/>
           <p:nvPr/>
         </p:nvSpPr>
         <p:spPr>
           <a:xfrm>
-            <a:off x="5029200" y="3840480"/>
-            <a:ext cx="2148840" cy="365760"/>
+            <a:off x="6492240" y="3886199"/>
+            <a:ext cx="5303520" cy="274320"/>
           </a:xfrm>
           <a:prstGeom prst="rect">
             <a:avLst/>
@@ -5583,77 +6277,30 @@
           </a:bodyPr>
           <a:lstStyle/>
           <a:p>
-            <a:pPr algn="ctr"/>
-            <a:r>
-              <a:rPr sz="1300" b="1">
-                <a:solidFill>
-                  <a:srgbClr val="0B2A3F"/>
+            <a:pPr algn="l"/>
+            <a:r>
+              <a:rPr sz="1500" b="1">
+                <a:solidFill>
+                  <a:srgbClr val="FFFFFF"/>
                 </a:solidFill>
                 <a:latin typeface="Microsoft YaHei"/>
                 <a:ea typeface="Microsoft YaHei"/>
               </a:rPr>
-              <a:t>03 人才育成</a:t>
-            </a:r>
-          </a:p>
-        </p:txBody>
-      </p:sp>
-      <p:sp>
-        <p:nvSpPr>
-          <p:cNvPr id="24" name="Rounded Rectangle 23"/>
-          <p:cNvSpPr/>
-          <p:nvPr/>
-        </p:nvSpPr>
-        <p:spPr>
-          <a:xfrm>
-            <a:off x="7315200" y="3657600"/>
-            <a:ext cx="2148840" cy="731520"/>
-          </a:xfrm>
-          <a:prstGeom prst="roundRect">
-            <a:avLst>
-              <a:gd name="adj" fmla="val 8000"/>
-            </a:avLst>
-          </a:prstGeom>
-          <a:solidFill>
-            <a:srgbClr val="FFFFFF"/>
-          </a:solidFill>
-          <a:ln w="12700">
-            <a:solidFill>
-              <a:srgbClr val="D5DEE7"/>
-            </a:solidFill>
-          </a:ln>
-        </p:spPr>
-        <p:style>
-          <a:lnRef idx="1">
-            <a:schemeClr val="accent1"/>
-          </a:lnRef>
-          <a:fillRef idx="3">
-            <a:schemeClr val="accent1"/>
-          </a:fillRef>
-          <a:effectRef idx="2">
-            <a:schemeClr val="accent1"/>
-          </a:effectRef>
-          <a:fontRef idx="minor">
-            <a:schemeClr val="lt1"/>
-          </a:fontRef>
-        </p:style>
-        <p:txBody>
-          <a:bodyPr rtlCol="0" anchor="ctr"/>
-          <a:lstStyle/>
-          <a:p>
-            <a:pPr algn="ctr"/>
-          </a:p>
-        </p:txBody>
-      </p:sp>
-      <p:sp>
-        <p:nvSpPr>
-          <p:cNvPr id="25" name="TextBox 24"/>
+              <a:t>04 考核管控体系</a:t>
+            </a:r>
+          </a:p>
+        </p:txBody>
+      </p:sp>
+      <p:sp>
+        <p:nvSpPr>
+          <p:cNvPr id="23" name="TextBox 22"/>
           <p:cNvSpPr txBox="1"/>
           <p:nvPr/>
         </p:nvSpPr>
         <p:spPr>
           <a:xfrm>
-            <a:off x="7315200" y="3840480"/>
-            <a:ext cx="2148840" cy="365760"/>
+            <a:off x="6492240" y="4187951"/>
+            <a:ext cx="5303520" cy="274320"/>
           </a:xfrm>
           <a:prstGeom prst="rect">
             <a:avLst/>
@@ -5666,77 +6313,30 @@
           </a:bodyPr>
           <a:lstStyle/>
           <a:p>
-            <a:pPr algn="ctr"/>
-            <a:r>
-              <a:rPr sz="1300" b="1">
-                <a:solidFill>
-                  <a:srgbClr val="0B2A3F"/>
+            <a:pPr algn="l"/>
+            <a:r>
+              <a:rPr sz="1100" b="0">
+                <a:solidFill>
+                  <a:srgbClr val="E87A2E"/>
                 </a:solidFill>
                 <a:latin typeface="Microsoft YaHei"/>
                 <a:ea typeface="Microsoft YaHei"/>
               </a:rPr>
-              <a:t>04 考核管控</a:t>
-            </a:r>
-          </a:p>
-        </p:txBody>
-      </p:sp>
-      <p:sp>
-        <p:nvSpPr>
-          <p:cNvPr id="26" name="Rounded Rectangle 25"/>
-          <p:cNvSpPr/>
-          <p:nvPr/>
-        </p:nvSpPr>
-        <p:spPr>
-          <a:xfrm>
-            <a:off x="9601200" y="3657600"/>
-            <a:ext cx="2148840" cy="731520"/>
-          </a:xfrm>
-          <a:prstGeom prst="roundRect">
-            <a:avLst>
-              <a:gd name="adj" fmla="val 8000"/>
-            </a:avLst>
-          </a:prstGeom>
-          <a:solidFill>
-            <a:srgbClr val="F3E6D8"/>
-          </a:solidFill>
-          <a:ln w="12700">
-            <a:solidFill>
-              <a:srgbClr val="E07A2F"/>
-            </a:solidFill>
-          </a:ln>
-        </p:spPr>
-        <p:style>
-          <a:lnRef idx="1">
-            <a:schemeClr val="accent1"/>
-          </a:lnRef>
-          <a:fillRef idx="3">
-            <a:schemeClr val="accent1"/>
-          </a:fillRef>
-          <a:effectRef idx="2">
-            <a:schemeClr val="accent1"/>
-          </a:effectRef>
-          <a:fontRef idx="minor">
-            <a:schemeClr val="lt1"/>
-          </a:fontRef>
-        </p:style>
-        <p:txBody>
-          <a:bodyPr rtlCol="0" anchor="ctr"/>
-          <a:lstStyle/>
-          <a:p>
-            <a:pPr algn="ctr"/>
-          </a:p>
-        </p:txBody>
-      </p:sp>
-      <p:sp>
-        <p:nvSpPr>
-          <p:cNvPr id="27" name="TextBox 26"/>
+              <a:t>从「柔性要求」到「刚性闭环」</a:t>
+            </a:r>
+          </a:p>
+        </p:txBody>
+      </p:sp>
+      <p:sp>
+        <p:nvSpPr>
+          <p:cNvPr id="24" name="TextBox 23"/>
           <p:cNvSpPr txBox="1"/>
           <p:nvPr/>
         </p:nvSpPr>
         <p:spPr>
           <a:xfrm>
-            <a:off x="9601200" y="3840480"/>
-            <a:ext cx="2148840" cy="365760"/>
+            <a:off x="6492240" y="4754879"/>
+            <a:ext cx="5303520" cy="1371600"/>
           </a:xfrm>
           <a:prstGeom prst="rect">
             <a:avLst/>
@@ -5749,373 +6349,17 @@
           </a:bodyPr>
           <a:lstStyle/>
           <a:p>
-            <a:pPr algn="ctr"/>
-            <a:r>
-              <a:rPr sz="1300" b="1">
-                <a:solidFill>
-                  <a:srgbClr val="0B2A3F"/>
+            <a:pPr algn="l"/>
+            <a:r>
+              <a:rPr sz="1200" b="0">
+                <a:solidFill>
+                  <a:srgbClr val="5D6D7E"/>
                 </a:solidFill>
                 <a:latin typeface="Microsoft YaHei"/>
                 <a:ea typeface="Microsoft YaHei"/>
               </a:rPr>
-              <a:t>05 价值生产力</a:t>
-            </a:r>
-          </a:p>
-        </p:txBody>
-      </p:sp>
-      <p:sp>
-        <p:nvSpPr>
-          <p:cNvPr id="28" name="Rounded Rectangle 27"/>
-          <p:cNvSpPr/>
-          <p:nvPr/>
-        </p:nvSpPr>
-        <p:spPr>
-          <a:xfrm>
-            <a:off x="457200" y="4754880"/>
-            <a:ext cx="3657600" cy="1463040"/>
-          </a:xfrm>
-          <a:prstGeom prst="roundRect">
-            <a:avLst>
-              <a:gd name="adj" fmla="val 8000"/>
-            </a:avLst>
-          </a:prstGeom>
-          <a:solidFill>
-            <a:srgbClr val="FFFFFF"/>
-          </a:solidFill>
-          <a:ln w="12700">
-            <a:solidFill>
-              <a:srgbClr val="D5DEE7"/>
-            </a:solidFill>
-          </a:ln>
-        </p:spPr>
-        <p:style>
-          <a:lnRef idx="1">
-            <a:schemeClr val="accent1"/>
-          </a:lnRef>
-          <a:fillRef idx="3">
-            <a:schemeClr val="accent1"/>
-          </a:fillRef>
-          <a:effectRef idx="2">
-            <a:schemeClr val="accent1"/>
-          </a:effectRef>
-          <a:fontRef idx="minor">
-            <a:schemeClr val="lt1"/>
-          </a:fontRef>
-        </p:style>
-        <p:txBody>
-          <a:bodyPr rtlCol="0" anchor="ctr"/>
-          <a:lstStyle/>
-          <a:p>
-            <a:pPr algn="ctr"/>
-          </a:p>
-        </p:txBody>
-      </p:sp>
-      <p:sp>
-        <p:nvSpPr>
-          <p:cNvPr id="29" name="TextBox 28"/>
-          <p:cNvSpPr txBox="1"/>
-          <p:nvPr/>
-        </p:nvSpPr>
-        <p:spPr>
-          <a:xfrm>
-            <a:off x="640080" y="4983480"/>
-            <a:ext cx="3291840" cy="365760"/>
-          </a:xfrm>
-          <a:prstGeom prst="rect">
-            <a:avLst/>
-          </a:prstGeom>
-          <a:noFill/>
-        </p:spPr>
-        <p:txBody>
-          <a:bodyPr wrap="square">
-            <a:spAutoFit/>
-          </a:bodyPr>
-          <a:lstStyle/>
-          <a:p>
-            <a:pPr algn="l"/>
-            <a:r>
-              <a:rPr sz="1500" b="1">
-                <a:solidFill>
-                  <a:srgbClr val="0B2A3F"/>
-                </a:solidFill>
-                <a:latin typeface="Microsoft YaHei"/>
-                <a:ea typeface="Microsoft YaHei"/>
-              </a:rPr>
-              <a:t>7–8月 筑基巩固</a:t>
-            </a:r>
-          </a:p>
-        </p:txBody>
-      </p:sp>
-      <p:sp>
-        <p:nvSpPr>
-          <p:cNvPr id="30" name="TextBox 29"/>
-          <p:cNvSpPr txBox="1"/>
-          <p:nvPr/>
-        </p:nvSpPr>
-        <p:spPr>
-          <a:xfrm>
-            <a:off x="640080" y="5440680"/>
-            <a:ext cx="3291840" cy="457200"/>
-          </a:xfrm>
-          <a:prstGeom prst="rect">
-            <a:avLst/>
-          </a:prstGeom>
-          <a:noFill/>
-        </p:spPr>
-        <p:txBody>
-          <a:bodyPr wrap="square">
-            <a:spAutoFit/>
-          </a:bodyPr>
-          <a:lstStyle/>
-          <a:p>
-            <a:pPr algn="l"/>
-            <a:r>
-              <a:rPr sz="1300" b="0">
-                <a:solidFill>
-                  <a:srgbClr val="5A6A7A"/>
-                </a:solidFill>
-                <a:latin typeface="Microsoft YaHei"/>
-                <a:ea typeface="Microsoft YaHei"/>
-              </a:rPr>
-              <a:t>补短板·定标准·全员培训</a:t>
-            </a:r>
-          </a:p>
-        </p:txBody>
-      </p:sp>
-      <p:sp>
-        <p:nvSpPr>
-          <p:cNvPr id="31" name="Rounded Rectangle 30"/>
-          <p:cNvSpPr/>
-          <p:nvPr/>
-        </p:nvSpPr>
-        <p:spPr>
-          <a:xfrm>
-            <a:off x="4297680" y="4754880"/>
-            <a:ext cx="3657600" cy="1463040"/>
-          </a:xfrm>
-          <a:prstGeom prst="roundRect">
-            <a:avLst>
-              <a:gd name="adj" fmla="val 8000"/>
-            </a:avLst>
-          </a:prstGeom>
-          <a:solidFill>
-            <a:srgbClr val="FFFFFF"/>
-          </a:solidFill>
-          <a:ln w="12700">
-            <a:solidFill>
-              <a:srgbClr val="D5DEE7"/>
-            </a:solidFill>
-          </a:ln>
-        </p:spPr>
-        <p:style>
-          <a:lnRef idx="1">
-            <a:schemeClr val="accent1"/>
-          </a:lnRef>
-          <a:fillRef idx="3">
-            <a:schemeClr val="accent1"/>
-          </a:fillRef>
-          <a:effectRef idx="2">
-            <a:schemeClr val="accent1"/>
-          </a:effectRef>
-          <a:fontRef idx="minor">
-            <a:schemeClr val="lt1"/>
-          </a:fontRef>
-        </p:style>
-        <p:txBody>
-          <a:bodyPr rtlCol="0" anchor="ctr"/>
-          <a:lstStyle/>
-          <a:p>
-            <a:pPr algn="ctr"/>
-          </a:p>
-        </p:txBody>
-      </p:sp>
-      <p:sp>
-        <p:nvSpPr>
-          <p:cNvPr id="32" name="TextBox 31"/>
-          <p:cNvSpPr txBox="1"/>
-          <p:nvPr/>
-        </p:nvSpPr>
-        <p:spPr>
-          <a:xfrm>
-            <a:off x="4480560" y="4983480"/>
-            <a:ext cx="3291840" cy="365760"/>
-          </a:xfrm>
-          <a:prstGeom prst="rect">
-            <a:avLst/>
-          </a:prstGeom>
-          <a:noFill/>
-        </p:spPr>
-        <p:txBody>
-          <a:bodyPr wrap="square">
-            <a:spAutoFit/>
-          </a:bodyPr>
-          <a:lstStyle/>
-          <a:p>
-            <a:pPr algn="l"/>
-            <a:r>
-              <a:rPr sz="1500" b="1">
-                <a:solidFill>
-                  <a:srgbClr val="0B2A3F"/>
-                </a:solidFill>
-                <a:latin typeface="Microsoft YaHei"/>
-                <a:ea typeface="Microsoft YaHei"/>
-              </a:rPr>
-              <a:t>9–10月 攻坚突破</a:t>
-            </a:r>
-          </a:p>
-        </p:txBody>
-      </p:sp>
-      <p:sp>
-        <p:nvSpPr>
-          <p:cNvPr id="33" name="TextBox 32"/>
-          <p:cNvSpPr txBox="1"/>
-          <p:nvPr/>
-        </p:nvSpPr>
-        <p:spPr>
-          <a:xfrm>
-            <a:off x="4480560" y="5440680"/>
-            <a:ext cx="3291840" cy="457200"/>
-          </a:xfrm>
-          <a:prstGeom prst="rect">
-            <a:avLst/>
-          </a:prstGeom>
-          <a:noFill/>
-        </p:spPr>
-        <p:txBody>
-          <a:bodyPr wrap="square">
-            <a:spAutoFit/>
-          </a:bodyPr>
-          <a:lstStyle/>
-          <a:p>
-            <a:pPr algn="l"/>
-            <a:r>
-              <a:rPr sz="1300" b="0">
-                <a:solidFill>
-                  <a:srgbClr val="5A6A7A"/>
-                </a:solidFill>
-                <a:latin typeface="Microsoft YaHei"/>
-                <a:ea typeface="Microsoft YaHei"/>
-              </a:rPr>
-              <a:t>专项课题·核心瓶颈</a:t>
-            </a:r>
-          </a:p>
-        </p:txBody>
-      </p:sp>
-      <p:sp>
-        <p:nvSpPr>
-          <p:cNvPr id="34" name="Rounded Rectangle 33"/>
-          <p:cNvSpPr/>
-          <p:nvPr/>
-        </p:nvSpPr>
-        <p:spPr>
-          <a:xfrm>
-            <a:off x="8138160" y="4754880"/>
-            <a:ext cx="3657600" cy="1463040"/>
-          </a:xfrm>
-          <a:prstGeom prst="roundRect">
-            <a:avLst>
-              <a:gd name="adj" fmla="val 8000"/>
-            </a:avLst>
-          </a:prstGeom>
-          <a:solidFill>
-            <a:srgbClr val="FFFFFF"/>
-          </a:solidFill>
-          <a:ln w="12700">
-            <a:solidFill>
-              <a:srgbClr val="D5DEE7"/>
-            </a:solidFill>
-          </a:ln>
-        </p:spPr>
-        <p:style>
-          <a:lnRef idx="1">
-            <a:schemeClr val="accent1"/>
-          </a:lnRef>
-          <a:fillRef idx="3">
-            <a:schemeClr val="accent1"/>
-          </a:fillRef>
-          <a:effectRef idx="2">
-            <a:schemeClr val="accent1"/>
-          </a:effectRef>
-          <a:fontRef idx="minor">
-            <a:schemeClr val="lt1"/>
-          </a:fontRef>
-        </p:style>
-        <p:txBody>
-          <a:bodyPr rtlCol="0" anchor="ctr"/>
-          <a:lstStyle/>
-          <a:p>
-            <a:pPr algn="ctr"/>
-          </a:p>
-        </p:txBody>
-      </p:sp>
-      <p:sp>
-        <p:nvSpPr>
-          <p:cNvPr id="35" name="TextBox 34"/>
-          <p:cNvSpPr txBox="1"/>
-          <p:nvPr/>
-        </p:nvSpPr>
-        <p:spPr>
-          <a:xfrm>
-            <a:off x="8321040" y="4983480"/>
-            <a:ext cx="3291840" cy="365760"/>
-          </a:xfrm>
-          <a:prstGeom prst="rect">
-            <a:avLst/>
-          </a:prstGeom>
-          <a:noFill/>
-        </p:spPr>
-        <p:txBody>
-          <a:bodyPr wrap="square">
-            <a:spAutoFit/>
-          </a:bodyPr>
-          <a:lstStyle/>
-          <a:p>
-            <a:pPr algn="l"/>
-            <a:r>
-              <a:rPr sz="1500" b="1">
-                <a:solidFill>
-                  <a:srgbClr val="0B2A3F"/>
-                </a:solidFill>
-                <a:latin typeface="Microsoft YaHei"/>
-                <a:ea typeface="Microsoft YaHei"/>
-              </a:rPr>
-              <a:t>11–12月 价值兑现</a:t>
-            </a:r>
-          </a:p>
-        </p:txBody>
-      </p:sp>
-      <p:sp>
-        <p:nvSpPr>
-          <p:cNvPr id="36" name="TextBox 35"/>
-          <p:cNvSpPr txBox="1"/>
-          <p:nvPr/>
-        </p:nvSpPr>
-        <p:spPr>
-          <a:xfrm>
-            <a:off x="8321040" y="5440680"/>
-            <a:ext cx="3291840" cy="457200"/>
-          </a:xfrm>
-          <a:prstGeom prst="rect">
-            <a:avLst/>
-          </a:prstGeom>
-          <a:noFill/>
-        </p:spPr>
-        <p:txBody>
-          <a:bodyPr wrap="square">
-            <a:spAutoFit/>
-          </a:bodyPr>
-          <a:lstStyle/>
-          <a:p>
-            <a:pPr algn="l"/>
-            <a:r>
-              <a:rPr sz="1300" b="0">
-                <a:solidFill>
-                  <a:srgbClr val="5A6A7A"/>
-                </a:solidFill>
-                <a:latin typeface="Microsoft YaHei"/>
-                <a:ea typeface="Microsoft YaHei"/>
-              </a:rPr>
-              <a:t>固化成果·效益验证</a:t>
+              <a:t>制度化考核：精益指标纳入正式考核，基地与核心干部量化评价。
+红黑榜：部门负责人主责，公开展示改善结果，奖惩清晰、闭环管理。</a:t>
             </a:r>
           </a:p>
         </p:txBody>
@@ -6155,7 +6399,7 @@
             </a:avLst>
           </a:prstGeom>
           <a:solidFill>
-            <a:srgbClr val="F5F7FA"/>
+            <a:srgbClr val="FFFFFF"/>
           </a:solidFill>
           <a:ln>
             <a:noFill/>
@@ -6191,8 +6435,8 @@
         </p:nvSpPr>
         <p:spPr>
           <a:xfrm>
-            <a:off x="457200" y="274320"/>
-            <a:ext cx="10972800" cy="411480"/>
+            <a:off x="411480" y="182880"/>
+            <a:ext cx="10972800" cy="320040"/>
           </a:xfrm>
           <a:prstGeom prst="rect">
             <a:avLst/>
@@ -6207,28 +6451,64 @@
           <a:p>
             <a:pPr algn="l"/>
             <a:r>
-              <a:rPr sz="2400" b="1">
-                <a:solidFill>
-                  <a:srgbClr val="0B2A3F"/>
+              <a:rPr sz="2000" b="1">
+                <a:solidFill>
+                  <a:srgbClr val="1B3A5F"/>
                 </a:solidFill>
                 <a:latin typeface="Microsoft YaHei"/>
                 <a:ea typeface="Microsoft YaHei"/>
               </a:rPr>
-              <a:t>四级联动架构｜权责清晰、上下贯通</a:t>
-            </a:r>
-          </a:p>
-        </p:txBody>
-      </p:sp>
-      <p:sp>
-        <p:nvSpPr>
-          <p:cNvPr id="4" name="Rounded Rectangle 3"/>
+              <a:t>五大体系</a:t>
+            </a:r>
+          </a:p>
+        </p:txBody>
+      </p:sp>
+      <p:sp>
+        <p:nvSpPr>
+          <p:cNvPr id="4" name="TextBox 3"/>
+          <p:cNvSpPr txBox="1"/>
+          <p:nvPr/>
+        </p:nvSpPr>
+        <p:spPr>
+          <a:xfrm>
+            <a:off x="411480" y="502920"/>
+            <a:ext cx="10972800" cy="320040"/>
+          </a:xfrm>
+          <a:prstGeom prst="rect">
+            <a:avLst/>
+          </a:prstGeom>
+          <a:noFill/>
+        </p:spPr>
+        <p:txBody>
+          <a:bodyPr wrap="square">
+            <a:spAutoFit/>
+          </a:bodyPr>
+          <a:lstStyle/>
+          <a:p>
+            <a:pPr algn="l"/>
+            <a:r>
+              <a:rPr sz="1400" b="1">
+                <a:solidFill>
+                  <a:srgbClr val="E87A2E"/>
+                </a:solidFill>
+                <a:latin typeface="Microsoft YaHei"/>
+                <a:ea typeface="Microsoft YaHei"/>
+              </a:rPr>
+              <a:t>＞ 价值生产力体系：以精益锚定核心课题、助力价值增长</a:t>
+            </a:r>
+          </a:p>
+        </p:txBody>
+      </p:sp>
+      <p:sp>
+        <p:nvSpPr>
+          <p:cNvPr id="5" name="Rounded Rectangle 4"/>
           <p:cNvSpPr/>
           <p:nvPr/>
         </p:nvSpPr>
         <p:spPr>
           <a:xfrm>
-            <a:off x="457200" y="1005840"/>
-            <a:ext cx="11247120" cy="1188720"/>
+            <a:off x="365760" y="960120"/>
+            <a:ext cx="3657600" cy="4297680"/>
           </a:xfrm>
           <a:prstGeom prst="roundRect">
             <a:avLst>
@@ -6236,12 +6516,10 @@
             </a:avLst>
           </a:prstGeom>
           <a:solidFill>
-            <a:srgbClr val="FFFFFF"/>
+            <a:srgbClr val="1B3A5F"/>
           </a:solidFill>
-          <a:ln w="12700">
-            <a:solidFill>
-              <a:srgbClr val="D5DEE7"/>
-            </a:solidFill>
+          <a:ln>
+            <a:noFill/>
           </a:ln>
         </p:spPr>
         <p:style>
@@ -6268,14 +6546,159 @@
       </p:sp>
       <p:sp>
         <p:nvSpPr>
-          <p:cNvPr id="5" name="Rounded Rectangle 4"/>
+          <p:cNvPr id="6" name="TextBox 5"/>
+          <p:cNvSpPr txBox="1"/>
+          <p:nvPr/>
+        </p:nvSpPr>
+        <p:spPr>
+          <a:xfrm>
+            <a:off x="640080" y="1371600"/>
+            <a:ext cx="3108960" cy="365760"/>
+          </a:xfrm>
+          <a:prstGeom prst="rect">
+            <a:avLst/>
+          </a:prstGeom>
+          <a:noFill/>
+        </p:spPr>
+        <p:txBody>
+          <a:bodyPr wrap="square">
+            <a:spAutoFit/>
+          </a:bodyPr>
+          <a:lstStyle/>
+          <a:p>
+            <a:pPr algn="l"/>
+            <a:r>
+              <a:rPr sz="2800" b="1">
+                <a:solidFill>
+                  <a:srgbClr val="E87A2E"/>
+                </a:solidFill>
+                <a:latin typeface="Microsoft YaHei"/>
+                <a:ea typeface="Microsoft YaHei"/>
+              </a:rPr>
+              <a:t>05</a:t>
+            </a:r>
+          </a:p>
+        </p:txBody>
+      </p:sp>
+      <p:sp>
+        <p:nvSpPr>
+          <p:cNvPr id="7" name="TextBox 6"/>
+          <p:cNvSpPr txBox="1"/>
+          <p:nvPr/>
+        </p:nvSpPr>
+        <p:spPr>
+          <a:xfrm>
+            <a:off x="640080" y="2011680"/>
+            <a:ext cx="3108960" cy="914400"/>
+          </a:xfrm>
+          <a:prstGeom prst="rect">
+            <a:avLst/>
+          </a:prstGeom>
+          <a:noFill/>
+        </p:spPr>
+        <p:txBody>
+          <a:bodyPr wrap="square">
+            <a:spAutoFit/>
+          </a:bodyPr>
+          <a:lstStyle/>
+          <a:p>
+            <a:pPr algn="l"/>
+            <a:r>
+              <a:rPr sz="2400" b="1">
+                <a:solidFill>
+                  <a:srgbClr val="FFFFFF"/>
+                </a:solidFill>
+                <a:latin typeface="Microsoft YaHei"/>
+                <a:ea typeface="Microsoft YaHei"/>
+              </a:rPr>
+              <a:t>聚焦五大
+核心课题</a:t>
+            </a:r>
+          </a:p>
+        </p:txBody>
+      </p:sp>
+      <p:sp>
+        <p:nvSpPr>
+          <p:cNvPr id="8" name="TextBox 7"/>
+          <p:cNvSpPr txBox="1"/>
+          <p:nvPr/>
+        </p:nvSpPr>
+        <p:spPr>
+          <a:xfrm>
+            <a:off x="640080" y="3200400"/>
+            <a:ext cx="3108960" cy="365760"/>
+          </a:xfrm>
+          <a:prstGeom prst="rect">
+            <a:avLst/>
+          </a:prstGeom>
+          <a:noFill/>
+        </p:spPr>
+        <p:txBody>
+          <a:bodyPr wrap="square">
+            <a:spAutoFit/>
+          </a:bodyPr>
+          <a:lstStyle/>
+          <a:p>
+            <a:pPr algn="l"/>
+            <a:r>
+              <a:rPr sz="1400" b="0">
+                <a:solidFill>
+                  <a:srgbClr val="A8C5D4"/>
+                </a:solidFill>
+                <a:latin typeface="Microsoft YaHei"/>
+                <a:ea typeface="Microsoft YaHei"/>
+              </a:rPr>
+              <a:t>突破生产瓶颈</a:t>
+            </a:r>
+          </a:p>
+        </p:txBody>
+      </p:sp>
+      <p:sp>
+        <p:nvSpPr>
+          <p:cNvPr id="9" name="TextBox 8"/>
+          <p:cNvSpPr txBox="1"/>
+          <p:nvPr/>
+        </p:nvSpPr>
+        <p:spPr>
+          <a:xfrm>
+            <a:off x="640080" y="3840480"/>
+            <a:ext cx="3108960" cy="1097280"/>
+          </a:xfrm>
+          <a:prstGeom prst="rect">
+            <a:avLst/>
+          </a:prstGeom>
+          <a:noFill/>
+        </p:spPr>
+        <p:txBody>
+          <a:bodyPr wrap="square">
+            <a:spAutoFit/>
+          </a:bodyPr>
+          <a:lstStyle/>
+          <a:p>
+            <a:pPr algn="l"/>
+            <a:r>
+              <a:rPr sz="1200" b="0">
+                <a:solidFill>
+                  <a:srgbClr val="A8C5D4"/>
+                </a:solidFill>
+                <a:latin typeface="Microsoft YaHei"/>
+                <a:ea typeface="Microsoft YaHei"/>
+              </a:rPr>
+              <a:t>推动精益改善转化为产能增量、良率增量、效益增量，打造「第二生产力」引擎。</a:t>
+            </a:r>
+          </a:p>
+        </p:txBody>
+      </p:sp>
+      <p:sp>
+        <p:nvSpPr>
+          <p:cNvPr id="10" name="Rounded Rectangle 9"/>
           <p:cNvSpPr/>
           <p:nvPr/>
         </p:nvSpPr>
         <p:spPr>
           <a:xfrm>
-            <a:off x="457200" y="1005840"/>
-            <a:ext cx="228600" cy="1188720"/>
+            <a:off x="4251960" y="960120"/>
+            <a:ext cx="7543800" cy="777240"/>
           </a:xfrm>
           <a:prstGeom prst="roundRect">
             <a:avLst>
@@ -6283,10 +6706,12 @@
             </a:avLst>
           </a:prstGeom>
           <a:solidFill>
-            <a:srgbClr val="0B2A3F"/>
+            <a:srgbClr val="FFFFFF"/>
           </a:solidFill>
-          <a:ln>
-            <a:noFill/>
+          <a:ln w="15875">
+            <a:solidFill>
+              <a:srgbClr val="E8EEF2"/>
+            </a:solidFill>
           </a:ln>
         </p:spPr>
         <p:style>
@@ -6313,14 +6738,14 @@
       </p:sp>
       <p:sp>
         <p:nvSpPr>
-          <p:cNvPr id="6" name="TextBox 5"/>
+          <p:cNvPr id="11" name="TextBox 10"/>
           <p:cNvSpPr txBox="1"/>
           <p:nvPr/>
         </p:nvSpPr>
         <p:spPr>
           <a:xfrm>
-            <a:off x="914400" y="1234440"/>
-            <a:ext cx="10058400" cy="365760"/>
+            <a:off x="4480560" y="1161288"/>
+            <a:ext cx="7132320" cy="457200"/>
           </a:xfrm>
           <a:prstGeom prst="rect">
             <a:avLst/>
@@ -6335,64 +6760,28 @@
           <a:p>
             <a:pPr algn="l"/>
             <a:r>
-              <a:rPr sz="1800" b="1">
-                <a:solidFill>
-                  <a:srgbClr val="0B2A3F"/>
+              <a:rPr sz="1200" b="1">
+                <a:solidFill>
+                  <a:srgbClr val="1B3A5F"/>
                 </a:solidFill>
                 <a:latin typeface="Microsoft YaHei"/>
                 <a:ea typeface="Microsoft YaHei"/>
               </a:rPr>
-              <a:t>01 决策层 · 战略引领</a:t>
-            </a:r>
-          </a:p>
-        </p:txBody>
-      </p:sp>
-      <p:sp>
-        <p:nvSpPr>
-          <p:cNvPr id="7" name="TextBox 6"/>
-          <p:cNvSpPr txBox="1"/>
-          <p:nvPr/>
-        </p:nvSpPr>
-        <p:spPr>
-          <a:xfrm>
-            <a:off x="914400" y="1645920"/>
-            <a:ext cx="10058400" cy="365760"/>
-          </a:xfrm>
-          <a:prstGeom prst="rect">
-            <a:avLst/>
-          </a:prstGeom>
-          <a:noFill/>
-        </p:spPr>
-        <p:txBody>
-          <a:bodyPr wrap="square">
-            <a:spAutoFit/>
-          </a:bodyPr>
-          <a:lstStyle/>
-          <a:p>
-            <a:pPr algn="l"/>
-            <a:r>
-              <a:rPr sz="1400" b="0">
-                <a:solidFill>
-                  <a:srgbClr val="5A6A7A"/>
-                </a:solidFill>
-                <a:latin typeface="Microsoft YaHei"/>
-                <a:ea typeface="Microsoft YaHei"/>
-              </a:rPr>
-              <a:t>确立战略、审批重大课题、提供资源与政策支持</a:t>
-            </a:r>
-          </a:p>
-        </p:txBody>
-      </p:sp>
-      <p:sp>
-        <p:nvSpPr>
-          <p:cNvPr id="8" name="Rounded Rectangle 7"/>
+              <a:t>01 拉晶硅损优化 — 厘清硅损价值链浪费点；降低切割与磨削余量；提升硅料利用效率。</a:t>
+            </a:r>
+          </a:p>
+        </p:txBody>
+      </p:sp>
+      <p:sp>
+        <p:nvSpPr>
+          <p:cNvPr id="12" name="Rounded Rectangle 11"/>
           <p:cNvSpPr/>
           <p:nvPr/>
         </p:nvSpPr>
         <p:spPr>
           <a:xfrm>
-            <a:off x="457200" y="2331720"/>
-            <a:ext cx="11247120" cy="1188720"/>
+            <a:off x="4251960" y="1828800"/>
+            <a:ext cx="7543800" cy="777240"/>
           </a:xfrm>
           <a:prstGeom prst="roundRect">
             <a:avLst>
@@ -6402,9 +6791,9 @@
           <a:solidFill>
             <a:srgbClr val="FFFFFF"/>
           </a:solidFill>
-          <a:ln w="12700">
+          <a:ln w="15875">
             <a:solidFill>
-              <a:srgbClr val="D5DEE7"/>
+              <a:srgbClr val="E8EEF2"/>
             </a:solidFill>
           </a:ln>
         </p:spPr>
@@ -6432,14 +6821,50 @@
       </p:sp>
       <p:sp>
         <p:nvSpPr>
-          <p:cNvPr id="9" name="Rounded Rectangle 8"/>
+          <p:cNvPr id="13" name="TextBox 12"/>
+          <p:cNvSpPr txBox="1"/>
+          <p:nvPr/>
+        </p:nvSpPr>
+        <p:spPr>
+          <a:xfrm>
+            <a:off x="4480560" y="2029968"/>
+            <a:ext cx="7132320" cy="457200"/>
+          </a:xfrm>
+          <a:prstGeom prst="rect">
+            <a:avLst/>
+          </a:prstGeom>
+          <a:noFill/>
+        </p:spPr>
+        <p:txBody>
+          <a:bodyPr wrap="square">
+            <a:spAutoFit/>
+          </a:bodyPr>
+          <a:lstStyle/>
+          <a:p>
+            <a:pPr algn="l"/>
+            <a:r>
+              <a:rPr sz="1200" b="1">
+                <a:solidFill>
+                  <a:srgbClr val="1B3A5F"/>
+                </a:solidFill>
+                <a:latin typeface="Microsoft YaHei"/>
+                <a:ea typeface="Microsoft YaHei"/>
+              </a:rPr>
+              <a:t>02 切片损耗管控 — 攻克断线、碎片难点；提升硅片切割良率与优品率。</a:t>
+            </a:r>
+          </a:p>
+        </p:txBody>
+      </p:sp>
+      <p:sp>
+        <p:nvSpPr>
+          <p:cNvPr id="14" name="Rounded Rectangle 13"/>
           <p:cNvSpPr/>
           <p:nvPr/>
         </p:nvSpPr>
         <p:spPr>
           <a:xfrm>
-            <a:off x="457200" y="2331720"/>
-            <a:ext cx="228600" cy="1188720"/>
+            <a:off x="4251960" y="2697480"/>
+            <a:ext cx="7543800" cy="777240"/>
           </a:xfrm>
           <a:prstGeom prst="roundRect">
             <a:avLst>
@@ -6447,10 +6872,12 @@
             </a:avLst>
           </a:prstGeom>
           <a:solidFill>
-            <a:srgbClr val="143D58"/>
+            <a:srgbClr val="FFFFFF"/>
           </a:solidFill>
-          <a:ln>
-            <a:noFill/>
+          <a:ln w="15875">
+            <a:solidFill>
+              <a:srgbClr val="E8EEF2"/>
+            </a:solidFill>
           </a:ln>
         </p:spPr>
         <p:style>
@@ -6477,14 +6904,14 @@
       </p:sp>
       <p:sp>
         <p:nvSpPr>
-          <p:cNvPr id="10" name="TextBox 9"/>
+          <p:cNvPr id="15" name="TextBox 14"/>
           <p:cNvSpPr txBox="1"/>
           <p:nvPr/>
         </p:nvSpPr>
         <p:spPr>
           <a:xfrm>
-            <a:off x="914400" y="2560320"/>
-            <a:ext cx="10058400" cy="365760"/>
+            <a:off x="4480560" y="2898648"/>
+            <a:ext cx="7132320" cy="457200"/>
           </a:xfrm>
           <a:prstGeom prst="rect">
             <a:avLst/>
@@ -6499,64 +6926,28 @@
           <a:p>
             <a:pPr algn="l"/>
             <a:r>
-              <a:rPr sz="1800" b="1">
-                <a:solidFill>
-                  <a:srgbClr val="0B2A3F"/>
+              <a:rPr sz="1200" b="1">
+                <a:solidFill>
+                  <a:srgbClr val="1B3A5F"/>
                 </a:solidFill>
                 <a:latin typeface="Microsoft YaHei"/>
                 <a:ea typeface="Microsoft YaHei"/>
               </a:rPr>
-              <a:t>02 推进层 · 体系赋能</a:t>
-            </a:r>
-          </a:p>
-        </p:txBody>
-      </p:sp>
-      <p:sp>
-        <p:nvSpPr>
-          <p:cNvPr id="11" name="TextBox 10"/>
-          <p:cNvSpPr txBox="1"/>
-          <p:nvPr/>
-        </p:nvSpPr>
-        <p:spPr>
-          <a:xfrm>
-            <a:off x="914400" y="2971800"/>
-            <a:ext cx="10058400" cy="365760"/>
-          </a:xfrm>
-          <a:prstGeom prst="rect">
-            <a:avLst/>
-          </a:prstGeom>
-          <a:noFill/>
-        </p:spPr>
-        <p:txBody>
-          <a:bodyPr wrap="square">
-            <a:spAutoFit/>
-          </a:bodyPr>
-          <a:lstStyle/>
-          <a:p>
-            <a:pPr algn="l"/>
-            <a:r>
-              <a:rPr sz="1400" b="0">
-                <a:solidFill>
-                  <a:srgbClr val="5A6A7A"/>
-                </a:solidFill>
-                <a:latin typeface="Microsoft YaHei"/>
-                <a:ea typeface="Microsoft YaHei"/>
-              </a:rPr>
-              <a:t>体系规划、方法导入、项目督导、人才培养</a:t>
-            </a:r>
-          </a:p>
-        </p:txBody>
-      </p:sp>
-      <p:sp>
-        <p:nvSpPr>
-          <p:cNvPr id="12" name="Rounded Rectangle 11"/>
+              <a:t>03 组件质量攻坚 — 管控层压缺陷、隐裂、虚焊及碎片率；保障可靠性与寿命。</a:t>
+            </a:r>
+          </a:p>
+        </p:txBody>
+      </p:sp>
+      <p:sp>
+        <p:nvSpPr>
+          <p:cNvPr id="16" name="Rounded Rectangle 15"/>
           <p:cNvSpPr/>
           <p:nvPr/>
         </p:nvSpPr>
         <p:spPr>
           <a:xfrm>
-            <a:off x="457200" y="3657600"/>
-            <a:ext cx="11247120" cy="1188720"/>
+            <a:off x="4251960" y="3566159"/>
+            <a:ext cx="7543800" cy="777240"/>
           </a:xfrm>
           <a:prstGeom prst="roundRect">
             <a:avLst>
@@ -6566,9 +6957,9 @@
           <a:solidFill>
             <a:srgbClr val="FFFFFF"/>
           </a:solidFill>
-          <a:ln w="12700">
+          <a:ln w="15875">
             <a:solidFill>
-              <a:srgbClr val="D5DEE7"/>
+              <a:srgbClr val="E8EEF2"/>
             </a:solidFill>
           </a:ln>
         </p:spPr>
@@ -6596,14 +6987,50 @@
       </p:sp>
       <p:sp>
         <p:nvSpPr>
-          <p:cNvPr id="13" name="Rounded Rectangle 12"/>
+          <p:cNvPr id="17" name="TextBox 16"/>
+          <p:cNvSpPr txBox="1"/>
+          <p:nvPr/>
+        </p:nvSpPr>
+        <p:spPr>
+          <a:xfrm>
+            <a:off x="4480560" y="3767327"/>
+            <a:ext cx="7132320" cy="457200"/>
+          </a:xfrm>
+          <a:prstGeom prst="rect">
+            <a:avLst/>
+          </a:prstGeom>
+          <a:noFill/>
+        </p:spPr>
+        <p:txBody>
+          <a:bodyPr wrap="square">
+            <a:spAutoFit/>
+          </a:bodyPr>
+          <a:lstStyle/>
+          <a:p>
+            <a:pPr algn="l"/>
+            <a:r>
+              <a:rPr sz="1200" b="1">
+                <a:solidFill>
+                  <a:srgbClr val="1B3A5F"/>
+                </a:solidFill>
+                <a:latin typeface="Microsoft YaHei"/>
+                <a:ea typeface="Microsoft YaHei"/>
+              </a:rPr>
+              <a:t>04 设备效能跃升 — 夯实TPM运行模式；提升OEE；保障设备与产线连续稳定运行。</a:t>
+            </a:r>
+          </a:p>
+        </p:txBody>
+      </p:sp>
+      <p:sp>
+        <p:nvSpPr>
+          <p:cNvPr id="18" name="Rounded Rectangle 17"/>
           <p:cNvSpPr/>
           <p:nvPr/>
         </p:nvSpPr>
         <p:spPr>
           <a:xfrm>
-            <a:off x="457200" y="3657600"/>
-            <a:ext cx="228600" cy="1188720"/>
+            <a:off x="4251960" y="4434840"/>
+            <a:ext cx="7543800" cy="777240"/>
           </a:xfrm>
           <a:prstGeom prst="roundRect">
             <a:avLst>
@@ -6611,10 +7038,12 @@
             </a:avLst>
           </a:prstGeom>
           <a:solidFill>
-            <a:srgbClr val="0D8A7A"/>
+            <a:srgbClr val="FFFFFF"/>
           </a:solidFill>
-          <a:ln>
-            <a:noFill/>
+          <a:ln w="15875">
+            <a:solidFill>
+              <a:srgbClr val="E8EEF2"/>
+            </a:solidFill>
           </a:ln>
         </p:spPr>
         <p:style>
@@ -6641,14 +7070,14 @@
       </p:sp>
       <p:sp>
         <p:nvSpPr>
-          <p:cNvPr id="14" name="TextBox 13"/>
+          <p:cNvPr id="19" name="TextBox 18"/>
           <p:cNvSpPr txBox="1"/>
           <p:nvPr/>
         </p:nvSpPr>
         <p:spPr>
           <a:xfrm>
-            <a:off x="914400" y="3886200"/>
-            <a:ext cx="10058400" cy="365760"/>
+            <a:off x="4480560" y="4636008"/>
+            <a:ext cx="7132320" cy="457200"/>
           </a:xfrm>
           <a:prstGeom prst="rect">
             <a:avLst/>
@@ -6663,64 +7092,28 @@
           <a:p>
             <a:pPr algn="l"/>
             <a:r>
-              <a:rPr sz="1800" b="1">
-                <a:solidFill>
-                  <a:srgbClr val="0B2A3F"/>
+              <a:rPr sz="1200" b="1">
+                <a:solidFill>
+                  <a:srgbClr val="1B3A5F"/>
                 </a:solidFill>
                 <a:latin typeface="Microsoft YaHei"/>
                 <a:ea typeface="Microsoft YaHei"/>
               </a:rPr>
-              <a:t>03 执行层 · 攻坚落地</a:t>
-            </a:r>
-          </a:p>
-        </p:txBody>
-      </p:sp>
-      <p:sp>
-        <p:nvSpPr>
-          <p:cNvPr id="15" name="TextBox 14"/>
-          <p:cNvSpPr txBox="1"/>
-          <p:nvPr/>
-        </p:nvSpPr>
-        <p:spPr>
-          <a:xfrm>
-            <a:off x="914400" y="4297680"/>
-            <a:ext cx="10058400" cy="365760"/>
-          </a:xfrm>
-          <a:prstGeom prst="rect">
-            <a:avLst/>
-          </a:prstGeom>
-          <a:noFill/>
-        </p:spPr>
-        <p:txBody>
-          <a:bodyPr wrap="square">
-            <a:spAutoFit/>
-          </a:bodyPr>
-          <a:lstStyle/>
-          <a:p>
-            <a:pPr algn="l"/>
-            <a:r>
-              <a:rPr sz="1400" b="0">
-                <a:solidFill>
-                  <a:srgbClr val="5A6A7A"/>
-                </a:solidFill>
-                <a:latin typeface="Microsoft YaHei"/>
-                <a:ea typeface="Microsoft YaHei"/>
-              </a:rPr>
-              <a:t>基地一把手主责，目标分解与资源协同，确保出成果</a:t>
-            </a:r>
-          </a:p>
-        </p:txBody>
-      </p:sp>
-      <p:sp>
-        <p:nvSpPr>
-          <p:cNvPr id="16" name="Rounded Rectangle 15"/>
+              <a:t>05 精益数字化+ — 以标准化为基础，拉通顶层数字化模型；整合DMS、TPMS、QMS。</a:t>
+            </a:r>
+          </a:p>
+        </p:txBody>
+      </p:sp>
+      <p:sp>
+        <p:nvSpPr>
+          <p:cNvPr id="20" name="Rounded Rectangle 19"/>
           <p:cNvSpPr/>
           <p:nvPr/>
         </p:nvSpPr>
         <p:spPr>
           <a:xfrm>
-            <a:off x="457200" y="4983479"/>
-            <a:ext cx="11247120" cy="1188720"/>
+            <a:off x="365760" y="5486400"/>
+            <a:ext cx="11430000" cy="1051560"/>
           </a:xfrm>
           <a:prstGeom prst="roundRect">
             <a:avLst>
@@ -6728,11 +7121,11 @@
             </a:avLst>
           </a:prstGeom>
           <a:solidFill>
-            <a:srgbClr val="FFFFFF"/>
+            <a:srgbClr val="FFF4EB"/>
           </a:solidFill>
-          <a:ln w="12700">
+          <a:ln w="15875">
             <a:solidFill>
-              <a:srgbClr val="D5DEE7"/>
+              <a:srgbClr val="E87A2E"/>
             </a:solidFill>
           </a:ln>
         </p:spPr>
@@ -6760,59 +7153,14 @@
       </p:sp>
       <p:sp>
         <p:nvSpPr>
-          <p:cNvPr id="17" name="Rounded Rectangle 16"/>
-          <p:cNvSpPr/>
-          <p:nvPr/>
-        </p:nvSpPr>
-        <p:spPr>
-          <a:xfrm>
-            <a:off x="457200" y="4983479"/>
-            <a:ext cx="228600" cy="1188720"/>
-          </a:xfrm>
-          <a:prstGeom prst="roundRect">
-            <a:avLst>
-              <a:gd name="adj" fmla="val 8000"/>
-            </a:avLst>
-          </a:prstGeom>
-          <a:solidFill>
-            <a:srgbClr val="2E8B57"/>
-          </a:solidFill>
-          <a:ln>
-            <a:noFill/>
-          </a:ln>
-        </p:spPr>
-        <p:style>
-          <a:lnRef idx="1">
-            <a:schemeClr val="accent1"/>
-          </a:lnRef>
-          <a:fillRef idx="3">
-            <a:schemeClr val="accent1"/>
-          </a:fillRef>
-          <a:effectRef idx="2">
-            <a:schemeClr val="accent1"/>
-          </a:effectRef>
-          <a:fontRef idx="minor">
-            <a:schemeClr val="lt1"/>
-          </a:fontRef>
-        </p:style>
-        <p:txBody>
-          <a:bodyPr rtlCol="0" anchor="ctr"/>
-          <a:lstStyle/>
-          <a:p>
-            <a:pPr algn="ctr"/>
-          </a:p>
-        </p:txBody>
-      </p:sp>
-      <p:sp>
-        <p:nvSpPr>
-          <p:cNvPr id="18" name="TextBox 17"/>
+          <p:cNvPr id="21" name="TextBox 20"/>
           <p:cNvSpPr txBox="1"/>
           <p:nvPr/>
         </p:nvSpPr>
         <p:spPr>
           <a:xfrm>
-            <a:off x="914400" y="5212079"/>
-            <a:ext cx="10058400" cy="365760"/>
+            <a:off x="640080" y="5669280"/>
+            <a:ext cx="10972800" cy="274320"/>
           </a:xfrm>
           <a:prstGeom prst="rect">
             <a:avLst/>
@@ -6827,28 +7175,28 @@
           <a:p>
             <a:pPr algn="l"/>
             <a:r>
-              <a:rPr sz="1800" b="1">
-                <a:solidFill>
-                  <a:srgbClr val="0B2A3F"/>
+              <a:rPr sz="1400" b="1">
+                <a:solidFill>
+                  <a:srgbClr val="E87A2E"/>
                 </a:solidFill>
                 <a:latin typeface="Microsoft YaHei"/>
                 <a:ea typeface="Microsoft YaHei"/>
               </a:rPr>
-              <a:t>04 落地层 · 现场改善</a:t>
-            </a:r>
-          </a:p>
-        </p:txBody>
-      </p:sp>
-      <p:sp>
-        <p:nvSpPr>
-          <p:cNvPr id="19" name="TextBox 18"/>
+              <a:t>＞ 实现管理与产能双增长</a:t>
+            </a:r>
+          </a:p>
+        </p:txBody>
+      </p:sp>
+      <p:sp>
+        <p:nvSpPr>
+          <p:cNvPr id="22" name="TextBox 21"/>
           <p:cNvSpPr txBox="1"/>
           <p:nvPr/>
         </p:nvSpPr>
         <p:spPr>
           <a:xfrm>
-            <a:off x="914400" y="5623559"/>
-            <a:ext cx="10058400" cy="365760"/>
+            <a:off x="640080" y="5989320"/>
+            <a:ext cx="10972800" cy="411480"/>
           </a:xfrm>
           <a:prstGeom prst="rect">
             <a:avLst/>
@@ -6863,14 +7211,14 @@
           <a:p>
             <a:pPr algn="l"/>
             <a:r>
-              <a:rPr sz="1400" b="0">
-                <a:solidFill>
-                  <a:srgbClr val="5A6A7A"/>
+              <a:rPr sz="1200" b="0">
+                <a:solidFill>
+                  <a:srgbClr val="2C3E50"/>
                 </a:solidFill>
                 <a:latin typeface="Microsoft YaHei"/>
                 <a:ea typeface="Microsoft YaHei"/>
               </a:rPr>
-              <a:t>班组严守 SOP，工位浪费识别与全员改善提案</a:t>
+              <a:t>推动精益改善转化为实实在在的产能增量、良率增量、效益增量，打造支撑公司业务规模化、高质量发展的「第二生产力」引擎。</a:t>
             </a:r>
           </a:p>
         </p:txBody>
@@ -6910,7 +7258,7 @@
             </a:avLst>
           </a:prstGeom>
           <a:solidFill>
-            <a:srgbClr val="F5F7FA"/>
+            <a:srgbClr val="FFFFFF"/>
           </a:solidFill>
           <a:ln>
             <a:noFill/>
@@ -6946,8 +7294,8 @@
         </p:nvSpPr>
         <p:spPr>
           <a:xfrm>
-            <a:off x="457200" y="274320"/>
-            <a:ext cx="10972800" cy="411480"/>
+            <a:off x="411480" y="137160"/>
+            <a:ext cx="10972800" cy="320040"/>
           </a:xfrm>
           <a:prstGeom prst="rect">
             <a:avLst/>
@@ -6962,14 +7310,14 @@
           <a:p>
             <a:pPr algn="l"/>
             <a:r>
-              <a:rPr sz="2400" b="1">
-                <a:solidFill>
-                  <a:srgbClr val="0B2A3F"/>
+              <a:rPr sz="2200" b="1">
+                <a:solidFill>
+                  <a:srgbClr val="1B3A5F"/>
                 </a:solidFill>
                 <a:latin typeface="Microsoft YaHei"/>
                 <a:ea typeface="Microsoft YaHei"/>
               </a:rPr>
-              <a:t>五大体系｜系统起势的主骨架</a:t>
+              <a:t>三个阶段</a:t>
             </a:r>
           </a:p>
         </p:txBody>
@@ -6982,8 +7330,8 @@
         </p:nvSpPr>
         <p:spPr>
           <a:xfrm>
-            <a:off x="457200" y="914400"/>
-            <a:ext cx="11247120" cy="914400"/>
+            <a:off x="365760" y="548640"/>
+            <a:ext cx="5577840" cy="777240"/>
           </a:xfrm>
           <a:prstGeom prst="roundRect">
             <a:avLst>
@@ -6993,9 +7341,9 @@
           <a:solidFill>
             <a:srgbClr val="FFFFFF"/>
           </a:solidFill>
-          <a:ln w="12700">
+          <a:ln w="15875">
             <a:solidFill>
-              <a:srgbClr val="D5DEE7"/>
+              <a:srgbClr val="E8EEF2"/>
             </a:solidFill>
           </a:ln>
         </p:spPr>
@@ -7023,14 +7371,86 @@
       </p:sp>
       <p:sp>
         <p:nvSpPr>
-          <p:cNvPr id="5" name="Rounded Rectangle 4"/>
+          <p:cNvPr id="5" name="TextBox 4"/>
+          <p:cNvSpPr txBox="1"/>
+          <p:nvPr/>
+        </p:nvSpPr>
+        <p:spPr>
+          <a:xfrm>
+            <a:off x="548640" y="685800"/>
+            <a:ext cx="5212080" cy="274320"/>
+          </a:xfrm>
+          <a:prstGeom prst="rect">
+            <a:avLst/>
+          </a:prstGeom>
+          <a:noFill/>
+        </p:spPr>
+        <p:txBody>
+          <a:bodyPr wrap="square">
+            <a:spAutoFit/>
+          </a:bodyPr>
+          <a:lstStyle/>
+          <a:p>
+            <a:pPr algn="l"/>
+            <a:r>
+              <a:rPr sz="1300" b="1">
+                <a:solidFill>
+                  <a:srgbClr val="1B3A5F"/>
+                </a:solidFill>
+                <a:latin typeface="Microsoft YaHei"/>
+                <a:ea typeface="Microsoft YaHei"/>
+              </a:rPr>
+              <a:t>2026上半年｜筑基起势（0→1）</a:t>
+            </a:r>
+          </a:p>
+        </p:txBody>
+      </p:sp>
+      <p:sp>
+        <p:nvSpPr>
+          <p:cNvPr id="6" name="TextBox 5"/>
+          <p:cNvSpPr txBox="1"/>
+          <p:nvPr/>
+        </p:nvSpPr>
+        <p:spPr>
+          <a:xfrm>
+            <a:off x="548640" y="1005840"/>
+            <a:ext cx="5212080" cy="228600"/>
+          </a:xfrm>
+          <a:prstGeom prst="rect">
+            <a:avLst/>
+          </a:prstGeom>
+          <a:noFill/>
+        </p:spPr>
+        <p:txBody>
+          <a:bodyPr wrap="square">
+            <a:spAutoFit/>
+          </a:bodyPr>
+          <a:lstStyle/>
+          <a:p>
+            <a:pPr algn="l"/>
+            <a:r>
+              <a:rPr sz="1100" b="0">
+                <a:solidFill>
+                  <a:srgbClr val="5D6D7E"/>
+                </a:solidFill>
+                <a:latin typeface="Microsoft YaHei"/>
+                <a:ea typeface="Microsoft YaHei"/>
+              </a:rPr>
+              <a:t>建体系、树标杆、统一组织认知</a:t>
+            </a:r>
+          </a:p>
+        </p:txBody>
+      </p:sp>
+      <p:sp>
+        <p:nvSpPr>
+          <p:cNvPr id="7" name="Rounded Rectangle 6"/>
           <p:cNvSpPr/>
           <p:nvPr/>
         </p:nvSpPr>
         <p:spPr>
           <a:xfrm>
-            <a:off x="457200" y="914400"/>
-            <a:ext cx="228600" cy="914400"/>
+            <a:off x="6172200" y="548640"/>
+            <a:ext cx="5577840" cy="777240"/>
           </a:xfrm>
           <a:prstGeom prst="roundRect">
             <a:avLst>
@@ -7038,7 +7458,7 @@
             </a:avLst>
           </a:prstGeom>
           <a:solidFill>
-            <a:srgbClr val="0B2A3F"/>
+            <a:srgbClr val="1B3A5F"/>
           </a:solidFill>
           <a:ln>
             <a:noFill/>
@@ -7068,14 +7488,14 @@
       </p:sp>
       <p:sp>
         <p:nvSpPr>
-          <p:cNvPr id="6" name="TextBox 5"/>
+          <p:cNvPr id="8" name="TextBox 7"/>
           <p:cNvSpPr txBox="1"/>
           <p:nvPr/>
         </p:nvSpPr>
         <p:spPr>
           <a:xfrm>
-            <a:off x="914400" y="1188720"/>
-            <a:ext cx="10515600" cy="457200"/>
+            <a:off x="6355080" y="685800"/>
+            <a:ext cx="5212080" cy="274320"/>
           </a:xfrm>
           <a:prstGeom prst="rect">
             <a:avLst/>
@@ -7090,28 +7510,100 @@
           <a:p>
             <a:pPr algn="l"/>
             <a:r>
-              <a:rPr sz="1600" b="1">
-                <a:solidFill>
-                  <a:srgbClr val="0B2A3F"/>
+              <a:rPr sz="1300" b="1">
+                <a:solidFill>
+                  <a:srgbClr val="FFFFFF"/>
                 </a:solidFill>
                 <a:latin typeface="Microsoft YaHei"/>
                 <a:ea typeface="Microsoft YaHei"/>
               </a:rPr>
-              <a:t>01 对标研学：被动学习 → 对标赶超；三维对标 + 月度整改闭环</a:t>
-            </a:r>
-          </a:p>
-        </p:txBody>
-      </p:sp>
-      <p:sp>
-        <p:nvSpPr>
-          <p:cNvPr id="7" name="Rounded Rectangle 6"/>
+              <a:t>2026下半年｜全域放大与价值兑现（1→N）</a:t>
+            </a:r>
+          </a:p>
+        </p:txBody>
+      </p:sp>
+      <p:sp>
+        <p:nvSpPr>
+          <p:cNvPr id="9" name="TextBox 8"/>
+          <p:cNvSpPr txBox="1"/>
+          <p:nvPr/>
+        </p:nvSpPr>
+        <p:spPr>
+          <a:xfrm>
+            <a:off x="6355080" y="1005840"/>
+            <a:ext cx="5212080" cy="228600"/>
+          </a:xfrm>
+          <a:prstGeom prst="rect">
+            <a:avLst/>
+          </a:prstGeom>
+          <a:noFill/>
+        </p:spPr>
+        <p:txBody>
+          <a:bodyPr wrap="square">
+            <a:spAutoFit/>
+          </a:bodyPr>
+          <a:lstStyle/>
+          <a:p>
+            <a:pPr algn="l"/>
+            <a:r>
+              <a:rPr sz="1100" b="0">
+                <a:solidFill>
+                  <a:srgbClr val="A8C5D4"/>
+                </a:solidFill>
+                <a:latin typeface="Microsoft YaHei"/>
+                <a:ea typeface="Microsoft YaHei"/>
+              </a:rPr>
+              <a:t>标杆复制、痛点攻坚、机制固化、产能效益兑现</a:t>
+            </a:r>
+          </a:p>
+        </p:txBody>
+      </p:sp>
+      <p:sp>
+        <p:nvSpPr>
+          <p:cNvPr id="10" name="TextBox 9"/>
+          <p:cNvSpPr txBox="1"/>
+          <p:nvPr/>
+        </p:nvSpPr>
+        <p:spPr>
+          <a:xfrm>
+            <a:off x="411480" y="1463040"/>
+            <a:ext cx="9144000" cy="274320"/>
+          </a:xfrm>
+          <a:prstGeom prst="rect">
+            <a:avLst/>
+          </a:prstGeom>
+          <a:noFill/>
+        </p:spPr>
+        <p:txBody>
+          <a:bodyPr wrap="square">
+            <a:spAutoFit/>
+          </a:bodyPr>
+          <a:lstStyle/>
+          <a:p>
+            <a:pPr algn="l"/>
+            <a:r>
+              <a:rPr sz="1200" b="1">
+                <a:solidFill>
+                  <a:srgbClr val="E87A2E"/>
+                </a:solidFill>
+                <a:latin typeface="Microsoft YaHei"/>
+                <a:ea typeface="Microsoft YaHei"/>
+              </a:rPr>
+              <a:t>实施路径：三阶段推进，层层递进</a:t>
+            </a:r>
+          </a:p>
+        </p:txBody>
+      </p:sp>
+      <p:sp>
+        <p:nvSpPr>
+          <p:cNvPr id="11" name="Rounded Rectangle 10"/>
           <p:cNvSpPr/>
           <p:nvPr/>
         </p:nvSpPr>
         <p:spPr>
           <a:xfrm>
-            <a:off x="457200" y="1965960"/>
-            <a:ext cx="11247120" cy="914400"/>
+            <a:off x="365760" y="1828800"/>
+            <a:ext cx="3749039" cy="4663440"/>
           </a:xfrm>
           <a:prstGeom prst="roundRect">
             <a:avLst>
@@ -7121,9 +7613,9 @@
           <a:solidFill>
             <a:srgbClr val="FFFFFF"/>
           </a:solidFill>
-          <a:ln w="12700">
+          <a:ln w="15875">
             <a:solidFill>
-              <a:srgbClr val="D5DEE7"/>
+              <a:srgbClr val="E8EEF2"/>
             </a:solidFill>
           </a:ln>
         </p:spPr>
@@ -7151,14 +7643,14 @@
       </p:sp>
       <p:sp>
         <p:nvSpPr>
-          <p:cNvPr id="8" name="Rounded Rectangle 7"/>
+          <p:cNvPr id="12" name="Rounded Rectangle 11"/>
           <p:cNvSpPr/>
           <p:nvPr/>
         </p:nvSpPr>
         <p:spPr>
           <a:xfrm>
-            <a:off x="457200" y="1965960"/>
-            <a:ext cx="228600" cy="914400"/>
+            <a:off x="365760" y="1828800"/>
+            <a:ext cx="3749039" cy="1051560"/>
           </a:xfrm>
           <a:prstGeom prst="roundRect">
             <a:avLst>
@@ -7166,7 +7658,7 @@
             </a:avLst>
           </a:prstGeom>
           <a:solidFill>
-            <a:srgbClr val="0B2A3F"/>
+            <a:srgbClr val="1B3A5F"/>
           </a:solidFill>
           <a:ln>
             <a:noFill/>
@@ -7196,14 +7688,14 @@
       </p:sp>
       <p:sp>
         <p:nvSpPr>
-          <p:cNvPr id="9" name="TextBox 8"/>
+          <p:cNvPr id="13" name="TextBox 12"/>
           <p:cNvSpPr txBox="1"/>
           <p:nvPr/>
         </p:nvSpPr>
         <p:spPr>
           <a:xfrm>
-            <a:off x="914400" y="2240280"/>
-            <a:ext cx="10515600" cy="457200"/>
+            <a:off x="548640" y="1965960"/>
+            <a:ext cx="3383280" cy="274320"/>
           </a:xfrm>
           <a:prstGeom prst="rect">
             <a:avLst/>
@@ -7218,28 +7710,102 @@
           <a:p>
             <a:pPr algn="l"/>
             <a:r>
-              <a:rPr sz="1600" b="1">
-                <a:solidFill>
-                  <a:srgbClr val="0B2A3F"/>
+              <a:rPr sz="1200" b="1">
+                <a:solidFill>
+                  <a:srgbClr val="FFFFFF"/>
                 </a:solidFill>
                 <a:latin typeface="Microsoft YaHei"/>
                 <a:ea typeface="Microsoft YaHei"/>
               </a:rPr>
-              <a:t>02 标杆复制：单点标杆 → 全域标准化；SOP 拆解复制与标杆升级</a:t>
-            </a:r>
-          </a:p>
-        </p:txBody>
-      </p:sp>
-      <p:sp>
-        <p:nvSpPr>
-          <p:cNvPr id="10" name="Rounded Rectangle 9"/>
+              <a:t>01  7–8月</a:t>
+            </a:r>
+          </a:p>
+        </p:txBody>
+      </p:sp>
+      <p:sp>
+        <p:nvSpPr>
+          <p:cNvPr id="14" name="TextBox 13"/>
+          <p:cNvSpPr txBox="1"/>
+          <p:nvPr/>
+        </p:nvSpPr>
+        <p:spPr>
+          <a:xfrm>
+            <a:off x="548640" y="2331720"/>
+            <a:ext cx="3383280" cy="320040"/>
+          </a:xfrm>
+          <a:prstGeom prst="rect">
+            <a:avLst/>
+          </a:prstGeom>
+          <a:noFill/>
+        </p:spPr>
+        <p:txBody>
+          <a:bodyPr wrap="square">
+            <a:spAutoFit/>
+          </a:bodyPr>
+          <a:lstStyle/>
+          <a:p>
+            <a:pPr algn="l"/>
+            <a:r>
+              <a:rPr sz="1400" b="1">
+                <a:solidFill>
+                  <a:srgbClr val="FFFFFF"/>
+                </a:solidFill>
+                <a:latin typeface="Microsoft YaHei"/>
+                <a:ea typeface="Microsoft YaHei"/>
+              </a:rPr>
+              <a:t>标杆认证 · 统一执行标准</a:t>
+            </a:r>
+          </a:p>
+        </p:txBody>
+      </p:sp>
+      <p:sp>
+        <p:nvSpPr>
+          <p:cNvPr id="15" name="TextBox 14"/>
+          <p:cNvSpPr txBox="1"/>
+          <p:nvPr/>
+        </p:nvSpPr>
+        <p:spPr>
+          <a:xfrm>
+            <a:off x="548640" y="3108960"/>
+            <a:ext cx="3383280" cy="2194560"/>
+          </a:xfrm>
+          <a:prstGeom prst="rect">
+            <a:avLst/>
+          </a:prstGeom>
+          <a:noFill/>
+        </p:spPr>
+        <p:txBody>
+          <a:bodyPr wrap="square">
+            <a:spAutoFit/>
+          </a:bodyPr>
+          <a:lstStyle/>
+          <a:p>
+            <a:pPr algn="l"/>
+            <a:r>
+              <a:rPr sz="1100" b="0">
+                <a:solidFill>
+                  <a:srgbClr val="5D6D7E"/>
+                </a:solidFill>
+                <a:latin typeface="Microsoft YaHei"/>
+                <a:ea typeface="Microsoft YaHei"/>
+              </a:rPr>
+              <a:t>· 标杆车间/产线认证；8月明确复制进度，全工序夯实管理基础。
+· 系统输出工具方法论；识别各基地短板，形成工序精益标准手册。
+· 启动组件DMS，实现Andon在线响应与问题闭环。</a:t>
+            </a:r>
+          </a:p>
+        </p:txBody>
+      </p:sp>
+      <p:sp>
+        <p:nvSpPr>
+          <p:cNvPr id="16" name="Rounded Rectangle 15"/>
           <p:cNvSpPr/>
           <p:nvPr/>
         </p:nvSpPr>
         <p:spPr>
           <a:xfrm>
-            <a:off x="457200" y="3017520"/>
-            <a:ext cx="11247120" cy="914400"/>
+            <a:off x="502920" y="5394960"/>
+            <a:ext cx="3474720" cy="914400"/>
           </a:xfrm>
           <a:prstGeom prst="roundRect">
             <a:avLst>
@@ -7247,12 +7813,10 @@
             </a:avLst>
           </a:prstGeom>
           <a:solidFill>
-            <a:srgbClr val="FFFFFF"/>
+            <a:srgbClr val="FFF4EB"/>
           </a:solidFill>
-          <a:ln w="12700">
-            <a:solidFill>
-              <a:srgbClr val="D5DEE7"/>
-            </a:solidFill>
+          <a:ln>
+            <a:noFill/>
           </a:ln>
         </p:spPr>
         <p:style>
@@ -7279,14 +7843,50 @@
       </p:sp>
       <p:sp>
         <p:nvSpPr>
-          <p:cNvPr id="11" name="Rounded Rectangle 10"/>
+          <p:cNvPr id="17" name="TextBox 16"/>
+          <p:cNvSpPr txBox="1"/>
+          <p:nvPr/>
+        </p:nvSpPr>
+        <p:spPr>
+          <a:xfrm>
+            <a:off x="640080" y="5532120"/>
+            <a:ext cx="3200400" cy="685800"/>
+          </a:xfrm>
+          <a:prstGeom prst="rect">
+            <a:avLst/>
+          </a:prstGeom>
+          <a:noFill/>
+        </p:spPr>
+        <p:txBody>
+          <a:bodyPr wrap="square">
+            <a:spAutoFit/>
+          </a:bodyPr>
+          <a:lstStyle/>
+          <a:p>
+            <a:pPr algn="l"/>
+            <a:r>
+              <a:rPr sz="1100" b="1">
+                <a:solidFill>
+                  <a:srgbClr val="1B3A5F"/>
+                </a:solidFill>
+                <a:latin typeface="Microsoft YaHei"/>
+                <a:ea typeface="Microsoft YaHei"/>
+              </a:rPr>
+              <a:t>目标：统一执行标准，消除产线基础差距，实现标准化作业</a:t>
+            </a:r>
+          </a:p>
+        </p:txBody>
+      </p:sp>
+      <p:sp>
+        <p:nvSpPr>
+          <p:cNvPr id="18" name="Rounded Rectangle 17"/>
           <p:cNvSpPr/>
           <p:nvPr/>
         </p:nvSpPr>
         <p:spPr>
           <a:xfrm>
-            <a:off x="457200" y="3017520"/>
-            <a:ext cx="228600" cy="914400"/>
+            <a:off x="4297680" y="1828800"/>
+            <a:ext cx="3749039" cy="4663440"/>
           </a:xfrm>
           <a:prstGeom prst="roundRect">
             <a:avLst>
@@ -7294,10 +7894,12 @@
             </a:avLst>
           </a:prstGeom>
           <a:solidFill>
-            <a:srgbClr val="0B2A3F"/>
+            <a:srgbClr val="FFFFFF"/>
           </a:solidFill>
-          <a:ln>
-            <a:noFill/>
+          <a:ln w="15875">
+            <a:solidFill>
+              <a:srgbClr val="E8EEF2"/>
+            </a:solidFill>
           </a:ln>
         </p:spPr>
         <p:style>
@@ -7324,50 +7926,14 @@
       </p:sp>
       <p:sp>
         <p:nvSpPr>
-          <p:cNvPr id="12" name="TextBox 11"/>
-          <p:cNvSpPr txBox="1"/>
-          <p:nvPr/>
-        </p:nvSpPr>
-        <p:spPr>
-          <a:xfrm>
-            <a:off x="914400" y="3291840"/>
-            <a:ext cx="10515600" cy="457200"/>
-          </a:xfrm>
-          <a:prstGeom prst="rect">
-            <a:avLst/>
-          </a:prstGeom>
-          <a:noFill/>
-        </p:spPr>
-        <p:txBody>
-          <a:bodyPr wrap="square">
-            <a:spAutoFit/>
-          </a:bodyPr>
-          <a:lstStyle/>
-          <a:p>
-            <a:pPr algn="l"/>
-            <a:r>
-              <a:rPr sz="1600" b="1">
-                <a:solidFill>
-                  <a:srgbClr val="0B2A3F"/>
-                </a:solidFill>
-                <a:latin typeface="Microsoft YaHei"/>
-                <a:ea typeface="Microsoft YaHei"/>
-              </a:rPr>
-              <a:t>03 人才育成：基础普及 → 精英赋能；三级梯队 + 利益深度绑定</a:t>
-            </a:r>
-          </a:p>
-        </p:txBody>
-      </p:sp>
-      <p:sp>
-        <p:nvSpPr>
-          <p:cNvPr id="13" name="Rounded Rectangle 12"/>
+          <p:cNvPr id="19" name="Rounded Rectangle 18"/>
           <p:cNvSpPr/>
           <p:nvPr/>
         </p:nvSpPr>
         <p:spPr>
           <a:xfrm>
-            <a:off x="457200" y="4069079"/>
-            <a:ext cx="11247120" cy="914400"/>
+            <a:off x="4297680" y="1828800"/>
+            <a:ext cx="3749039" cy="1051560"/>
           </a:xfrm>
           <a:prstGeom prst="roundRect">
             <a:avLst>
@@ -7375,12 +7941,10 @@
             </a:avLst>
           </a:prstGeom>
           <a:solidFill>
-            <a:srgbClr val="FFFFFF"/>
+            <a:srgbClr val="E87A2E"/>
           </a:solidFill>
-          <a:ln w="12700">
-            <a:solidFill>
-              <a:srgbClr val="D5DEE7"/>
-            </a:solidFill>
+          <a:ln>
+            <a:noFill/>
           </a:ln>
         </p:spPr>
         <p:style>
@@ -7407,14 +7971,124 @@
       </p:sp>
       <p:sp>
         <p:nvSpPr>
-          <p:cNvPr id="14" name="Rounded Rectangle 13"/>
+          <p:cNvPr id="20" name="TextBox 19"/>
+          <p:cNvSpPr txBox="1"/>
+          <p:nvPr/>
+        </p:nvSpPr>
+        <p:spPr>
+          <a:xfrm>
+            <a:off x="4480560" y="1965960"/>
+            <a:ext cx="3383280" cy="274320"/>
+          </a:xfrm>
+          <a:prstGeom prst="rect">
+            <a:avLst/>
+          </a:prstGeom>
+          <a:noFill/>
+        </p:spPr>
+        <p:txBody>
+          <a:bodyPr wrap="square">
+            <a:spAutoFit/>
+          </a:bodyPr>
+          <a:lstStyle/>
+          <a:p>
+            <a:pPr algn="l"/>
+            <a:r>
+              <a:rPr sz="1200" b="1">
+                <a:solidFill>
+                  <a:srgbClr val="FFFFFF"/>
+                </a:solidFill>
+                <a:latin typeface="Microsoft YaHei"/>
+                <a:ea typeface="Microsoft YaHei"/>
+              </a:rPr>
+              <a:t>02  9–10月</a:t>
+            </a:r>
+          </a:p>
+        </p:txBody>
+      </p:sp>
+      <p:sp>
+        <p:nvSpPr>
+          <p:cNvPr id="21" name="TextBox 20"/>
+          <p:cNvSpPr txBox="1"/>
+          <p:nvPr/>
+        </p:nvSpPr>
+        <p:spPr>
+          <a:xfrm>
+            <a:off x="4480560" y="2331720"/>
+            <a:ext cx="3383280" cy="320040"/>
+          </a:xfrm>
+          <a:prstGeom prst="rect">
+            <a:avLst/>
+          </a:prstGeom>
+          <a:noFill/>
+        </p:spPr>
+        <p:txBody>
+          <a:bodyPr wrap="square">
+            <a:spAutoFit/>
+          </a:bodyPr>
+          <a:lstStyle/>
+          <a:p>
+            <a:pPr algn="l"/>
+            <a:r>
+              <a:rPr sz="1400" b="1">
+                <a:solidFill>
+                  <a:srgbClr val="FFFFFF"/>
+                </a:solidFill>
+                <a:latin typeface="Microsoft YaHei"/>
+                <a:ea typeface="Microsoft YaHei"/>
+              </a:rPr>
+              <a:t>专项攻坚 · 文化激活</a:t>
+            </a:r>
+          </a:p>
+        </p:txBody>
+      </p:sp>
+      <p:sp>
+        <p:nvSpPr>
+          <p:cNvPr id="22" name="TextBox 21"/>
+          <p:cNvSpPr txBox="1"/>
+          <p:nvPr/>
+        </p:nvSpPr>
+        <p:spPr>
+          <a:xfrm>
+            <a:off x="4480560" y="3108960"/>
+            <a:ext cx="3383280" cy="2194560"/>
+          </a:xfrm>
+          <a:prstGeom prst="rect">
+            <a:avLst/>
+          </a:prstGeom>
+          <a:noFill/>
+        </p:spPr>
+        <p:txBody>
+          <a:bodyPr wrap="square">
+            <a:spAutoFit/>
+          </a:bodyPr>
+          <a:lstStyle/>
+          <a:p>
+            <a:pPr algn="l"/>
+            <a:r>
+              <a:rPr sz="1100" b="0">
+                <a:solidFill>
+                  <a:srgbClr val="5D6D7E"/>
+                </a:solidFill>
+                <a:latin typeface="Microsoft YaHei"/>
+                <a:ea typeface="Microsoft YaHei"/>
+              </a:rPr>
+              <a:t>· 拉晶专项：降硅损、断线、碎片与能耗。
+· 加速组件「改善周」；黑带人才聚焦日常管理、TPM与品质改善。
+· 落地人才赋能体系；绩效与改善成果、人才培养硬挂钩。</a:t>
+            </a:r>
+          </a:p>
+        </p:txBody>
+      </p:sp>
+      <p:sp>
+        <p:nvSpPr>
+          <p:cNvPr id="23" name="Rounded Rectangle 22"/>
           <p:cNvSpPr/>
           <p:nvPr/>
         </p:nvSpPr>
         <p:spPr>
           <a:xfrm>
-            <a:off x="457200" y="4069079"/>
-            <a:ext cx="228600" cy="914400"/>
+            <a:off x="4434840" y="5394960"/>
+            <a:ext cx="3474720" cy="914400"/>
           </a:xfrm>
           <a:prstGeom prst="roundRect">
             <a:avLst>
@@ -7422,7 +8096,7 @@
             </a:avLst>
           </a:prstGeom>
           <a:solidFill>
-            <a:srgbClr val="0B2A3F"/>
+            <a:srgbClr val="FFF4EB"/>
           </a:solidFill>
           <a:ln>
             <a:noFill/>
@@ -7452,14 +8126,14 @@
       </p:sp>
       <p:sp>
         <p:nvSpPr>
-          <p:cNvPr id="15" name="TextBox 14"/>
+          <p:cNvPr id="24" name="TextBox 23"/>
           <p:cNvSpPr txBox="1"/>
           <p:nvPr/>
         </p:nvSpPr>
         <p:spPr>
           <a:xfrm>
-            <a:off x="914400" y="4343399"/>
-            <a:ext cx="10515600" cy="457200"/>
+            <a:off x="4572000" y="5532120"/>
+            <a:ext cx="3200400" cy="685800"/>
           </a:xfrm>
           <a:prstGeom prst="rect">
             <a:avLst/>
@@ -7474,28 +8148,28 @@
           <a:p>
             <a:pPr algn="l"/>
             <a:r>
-              <a:rPr sz="1600" b="1">
-                <a:solidFill>
-                  <a:srgbClr val="0B2A3F"/>
+              <a:rPr sz="1100" b="1">
+                <a:solidFill>
+                  <a:srgbClr val="1B3A5F"/>
                 </a:solidFill>
                 <a:latin typeface="Microsoft YaHei"/>
                 <a:ea typeface="Microsoft YaHei"/>
               </a:rPr>
-              <a:t>04 考核管控：柔性要求 → 刚性闭环；指标入考核 + 红黑榜</a:t>
-            </a:r>
-          </a:p>
-        </p:txBody>
-      </p:sp>
-      <p:sp>
-        <p:nvSpPr>
-          <p:cNvPr id="16" name="Rounded Rectangle 15"/>
+              <a:t>目标：攻克生产瓶颈，激发组织内生动力，形成全员参与氛围</a:t>
+            </a:r>
+          </a:p>
+        </p:txBody>
+      </p:sp>
+      <p:sp>
+        <p:nvSpPr>
+          <p:cNvPr id="25" name="Rounded Rectangle 24"/>
           <p:cNvSpPr/>
           <p:nvPr/>
         </p:nvSpPr>
         <p:spPr>
           <a:xfrm>
-            <a:off x="457200" y="5120640"/>
-            <a:ext cx="11247120" cy="914400"/>
+            <a:off x="8229600" y="1828800"/>
+            <a:ext cx="3749039" cy="4663440"/>
           </a:xfrm>
           <a:prstGeom prst="roundRect">
             <a:avLst>
@@ -7505,9 +8179,9 @@
           <a:solidFill>
             <a:srgbClr val="FFFFFF"/>
           </a:solidFill>
-          <a:ln w="12700">
+          <a:ln w="15875">
             <a:solidFill>
-              <a:srgbClr val="D5DEE7"/>
+              <a:srgbClr val="E8EEF2"/>
             </a:solidFill>
           </a:ln>
         </p:spPr>
@@ -7535,14 +8209,14 @@
       </p:sp>
       <p:sp>
         <p:nvSpPr>
-          <p:cNvPr id="17" name="Rounded Rectangle 16"/>
+          <p:cNvPr id="26" name="Rounded Rectangle 25"/>
           <p:cNvSpPr/>
           <p:nvPr/>
         </p:nvSpPr>
         <p:spPr>
           <a:xfrm>
-            <a:off x="457200" y="5120640"/>
-            <a:ext cx="228600" cy="914400"/>
+            <a:off x="8229600" y="1828800"/>
+            <a:ext cx="3749039" cy="1051560"/>
           </a:xfrm>
           <a:prstGeom prst="roundRect">
             <a:avLst>
@@ -7550,7 +8224,7 @@
             </a:avLst>
           </a:prstGeom>
           <a:solidFill>
-            <a:srgbClr val="E07A2F"/>
+            <a:srgbClr val="1B3A5F"/>
           </a:solidFill>
           <a:ln>
             <a:noFill/>
@@ -7580,14 +8254,14 @@
       </p:sp>
       <p:sp>
         <p:nvSpPr>
-          <p:cNvPr id="18" name="TextBox 17"/>
+          <p:cNvPr id="27" name="TextBox 26"/>
           <p:cNvSpPr txBox="1"/>
           <p:nvPr/>
         </p:nvSpPr>
         <p:spPr>
           <a:xfrm>
-            <a:off x="914400" y="5394960"/>
-            <a:ext cx="10515600" cy="457200"/>
+            <a:off x="8412480" y="1965960"/>
+            <a:ext cx="3383280" cy="274320"/>
           </a:xfrm>
           <a:prstGeom prst="rect">
             <a:avLst/>
@@ -7602,14 +8276,169 @@
           <a:p>
             <a:pPr algn="l"/>
             <a:r>
-              <a:rPr sz="1600" b="1">
-                <a:solidFill>
-                  <a:srgbClr val="0B2A3F"/>
+              <a:rPr sz="1200" b="1">
+                <a:solidFill>
+                  <a:srgbClr val="FFFFFF"/>
                 </a:solidFill>
                 <a:latin typeface="Microsoft YaHei"/>
                 <a:ea typeface="Microsoft YaHei"/>
               </a:rPr>
-              <a:t>05 价值生产力：以精益锚定核心课题，突破生产瓶颈、助力价值增长</a:t>
+              <a:t>03  11–12月</a:t>
+            </a:r>
+          </a:p>
+        </p:txBody>
+      </p:sp>
+      <p:sp>
+        <p:nvSpPr>
+          <p:cNvPr id="28" name="TextBox 27"/>
+          <p:cNvSpPr txBox="1"/>
+          <p:nvPr/>
+        </p:nvSpPr>
+        <p:spPr>
+          <a:xfrm>
+            <a:off x="8412480" y="2331720"/>
+            <a:ext cx="3383280" cy="320040"/>
+          </a:xfrm>
+          <a:prstGeom prst="rect">
+            <a:avLst/>
+          </a:prstGeom>
+          <a:noFill/>
+        </p:spPr>
+        <p:txBody>
+          <a:bodyPr wrap="square">
+            <a:spAutoFit/>
+          </a:bodyPr>
+          <a:lstStyle/>
+          <a:p>
+            <a:pPr algn="l"/>
+            <a:r>
+              <a:rPr sz="1400" b="1">
+                <a:solidFill>
+                  <a:srgbClr val="FFFFFF"/>
+                </a:solidFill>
+                <a:latin typeface="Microsoft YaHei"/>
+                <a:ea typeface="Microsoft YaHei"/>
+              </a:rPr>
+              <a:t>成果固化 · 价值兑现</a:t>
+            </a:r>
+          </a:p>
+        </p:txBody>
+      </p:sp>
+      <p:sp>
+        <p:nvSpPr>
+          <p:cNvPr id="29" name="TextBox 28"/>
+          <p:cNvSpPr txBox="1"/>
+          <p:nvPr/>
+        </p:nvSpPr>
+        <p:spPr>
+          <a:xfrm>
+            <a:off x="8412480" y="3108960"/>
+            <a:ext cx="3383280" cy="2194560"/>
+          </a:xfrm>
+          <a:prstGeom prst="rect">
+            <a:avLst/>
+          </a:prstGeom>
+          <a:noFill/>
+        </p:spPr>
+        <p:txBody>
+          <a:bodyPr wrap="square">
+            <a:spAutoFit/>
+          </a:bodyPr>
+          <a:lstStyle/>
+          <a:p>
+            <a:pPr algn="l"/>
+            <a:r>
+              <a:rPr sz="1100" b="0">
+                <a:solidFill>
+                  <a:srgbClr val="5D6D7E"/>
+                </a:solidFill>
+                <a:latin typeface="Microsoft YaHei"/>
+                <a:ea typeface="Microsoft YaHei"/>
+              </a:rPr>
+              <a:t>· 开展半年度精益人才认证与项目成果发布。
+· 复盘全年精益改善成果，建设标准体系与最佳实践案例库。
+· 量化降本、提质、增效的经济价值，完成价值闭环。</a:t>
+            </a:r>
+          </a:p>
+        </p:txBody>
+      </p:sp>
+      <p:sp>
+        <p:nvSpPr>
+          <p:cNvPr id="30" name="Rounded Rectangle 29"/>
+          <p:cNvSpPr/>
+          <p:nvPr/>
+        </p:nvSpPr>
+        <p:spPr>
+          <a:xfrm>
+            <a:off x="8366760" y="5394960"/>
+            <a:ext cx="3474720" cy="914400"/>
+          </a:xfrm>
+          <a:prstGeom prst="roundRect">
+            <a:avLst>
+              <a:gd name="adj" fmla="val 8000"/>
+            </a:avLst>
+          </a:prstGeom>
+          <a:solidFill>
+            <a:srgbClr val="FFF4EB"/>
+          </a:solidFill>
+          <a:ln>
+            <a:noFill/>
+          </a:ln>
+        </p:spPr>
+        <p:style>
+          <a:lnRef idx="1">
+            <a:schemeClr val="accent1"/>
+          </a:lnRef>
+          <a:fillRef idx="3">
+            <a:schemeClr val="accent1"/>
+          </a:fillRef>
+          <a:effectRef idx="2">
+            <a:schemeClr val="accent1"/>
+          </a:effectRef>
+          <a:fontRef idx="minor">
+            <a:schemeClr val="lt1"/>
+          </a:fontRef>
+        </p:style>
+        <p:txBody>
+          <a:bodyPr rtlCol="0" anchor="ctr"/>
+          <a:lstStyle/>
+          <a:p>
+            <a:pPr algn="ctr"/>
+          </a:p>
+        </p:txBody>
+      </p:sp>
+      <p:sp>
+        <p:nvSpPr>
+          <p:cNvPr id="31" name="TextBox 30"/>
+          <p:cNvSpPr txBox="1"/>
+          <p:nvPr/>
+        </p:nvSpPr>
+        <p:spPr>
+          <a:xfrm>
+            <a:off x="8503920" y="5532120"/>
+            <a:ext cx="3200400" cy="685800"/>
+          </a:xfrm>
+          <a:prstGeom prst="rect">
+            <a:avLst/>
+          </a:prstGeom>
+          <a:noFill/>
+        </p:spPr>
+        <p:txBody>
+          <a:bodyPr wrap="square">
+            <a:spAutoFit/>
+          </a:bodyPr>
+          <a:lstStyle/>
+          <a:p>
+            <a:pPr algn="l"/>
+            <a:r>
+              <a:rPr sz="1100" b="1">
+                <a:solidFill>
+                  <a:srgbClr val="1B3A5F"/>
+                </a:solidFill>
+                <a:latin typeface="Microsoft YaHei"/>
+                <a:ea typeface="Microsoft YaHei"/>
+              </a:rPr>
+              <a:t>目标：形成长效精益管理机制，管理成果固化、价值清晰可见</a:t>
             </a:r>
           </a:p>
         </p:txBody>
@@ -7649,7 +8478,7 @@
             </a:avLst>
           </a:prstGeom>
           <a:solidFill>
-            <a:srgbClr val="F5F7FA"/>
+            <a:srgbClr val="FFFFFF"/>
           </a:solidFill>
           <a:ln>
             <a:noFill/>
@@ -7685,8 +8514,8 @@
         </p:nvSpPr>
         <p:spPr>
           <a:xfrm>
-            <a:off x="457200" y="228600"/>
-            <a:ext cx="10972800" cy="365760"/>
+            <a:off x="365760" y="137160"/>
+            <a:ext cx="11430000" cy="320040"/>
           </a:xfrm>
           <a:prstGeom prst="rect">
             <a:avLst/>
@@ -7701,28 +8530,64 @@
           <a:p>
             <a:pPr algn="l"/>
             <a:r>
-              <a:rPr sz="2200" b="1">
-                <a:solidFill>
-                  <a:srgbClr val="0B2A3F"/>
+              <a:rPr sz="1800" b="1">
+                <a:solidFill>
+                  <a:srgbClr val="1B3A5F"/>
                 </a:solidFill>
                 <a:latin typeface="Microsoft YaHei"/>
                 <a:ea typeface="Microsoft YaHei"/>
               </a:rPr>
-              <a:t>五大体系详解｜01–04 管理支撑系统</a:t>
-            </a:r>
-          </a:p>
-        </p:txBody>
-      </p:sp>
-      <p:sp>
-        <p:nvSpPr>
-          <p:cNvPr id="4" name="Rounded Rectangle 3"/>
+              <a:t>精益全域落地｜以「真善美」锚定改善底层逻辑</a:t>
+            </a:r>
+          </a:p>
+        </p:txBody>
+      </p:sp>
+      <p:sp>
+        <p:nvSpPr>
+          <p:cNvPr id="4" name="TextBox 3"/>
+          <p:cNvSpPr txBox="1"/>
+          <p:nvPr/>
+        </p:nvSpPr>
+        <p:spPr>
+          <a:xfrm>
+            <a:off x="365760" y="502920"/>
+            <a:ext cx="11430000" cy="320040"/>
+          </a:xfrm>
+          <a:prstGeom prst="rect">
+            <a:avLst/>
+          </a:prstGeom>
+          <a:noFill/>
+        </p:spPr>
+        <p:txBody>
+          <a:bodyPr wrap="square">
+            <a:spAutoFit/>
+          </a:bodyPr>
+          <a:lstStyle/>
+          <a:p>
+            <a:pPr algn="l"/>
+            <a:r>
+              <a:rPr sz="1100" b="0">
+                <a:solidFill>
+                  <a:srgbClr val="5D6D7E"/>
+                </a:solidFill>
+                <a:latin typeface="Microsoft YaHei"/>
+                <a:ea typeface="Microsoft YaHei"/>
+              </a:rPr>
+              <a:t>所有精益课题、现场改善、体系运行统一对标公司核心价值主张，构建可信、有效、长效的改善闭环</a:t>
+            </a:r>
+          </a:p>
+        </p:txBody>
+      </p:sp>
+      <p:sp>
+        <p:nvSpPr>
+          <p:cNvPr id="5" name="Rounded Rectangle 4"/>
           <p:cNvSpPr/>
           <p:nvPr/>
         </p:nvSpPr>
         <p:spPr>
           <a:xfrm>
-            <a:off x="457200" y="914400"/>
-            <a:ext cx="5577840" cy="2468880"/>
+            <a:off x="365760" y="960120"/>
+            <a:ext cx="3749039" cy="5486400"/>
           </a:xfrm>
           <a:prstGeom prst="roundRect">
             <a:avLst>
@@ -7732,9 +8597,9 @@
           <a:solidFill>
             <a:srgbClr val="FFFFFF"/>
           </a:solidFill>
-          <a:ln w="12700">
+          <a:ln w="15875">
             <a:solidFill>
-              <a:srgbClr val="D5DEE7"/>
+              <a:srgbClr val="E8EEF2"/>
             </a:solidFill>
           </a:ln>
         </p:spPr>
@@ -7762,14 +8627,14 @@
       </p:sp>
       <p:sp>
         <p:nvSpPr>
-          <p:cNvPr id="5" name="Rounded Rectangle 4"/>
+          <p:cNvPr id="6" name="Rounded Rectangle 5"/>
           <p:cNvSpPr/>
           <p:nvPr/>
         </p:nvSpPr>
         <p:spPr>
           <a:xfrm>
-            <a:off x="457200" y="914400"/>
-            <a:ext cx="5577840" cy="640080"/>
+            <a:off x="365760" y="960120"/>
+            <a:ext cx="3749039" cy="1097280"/>
           </a:xfrm>
           <a:prstGeom prst="roundRect">
             <a:avLst>
@@ -7777,7 +8642,7 @@
             </a:avLst>
           </a:prstGeom>
           <a:solidFill>
-            <a:srgbClr val="0B2A3F"/>
+            <a:srgbClr val="1B3A5F"/>
           </a:solidFill>
           <a:ln>
             <a:noFill/>
@@ -7807,14 +8672,14 @@
       </p:sp>
       <p:sp>
         <p:nvSpPr>
-          <p:cNvPr id="6" name="TextBox 5"/>
+          <p:cNvPr id="7" name="TextBox 6"/>
           <p:cNvSpPr txBox="1"/>
           <p:nvPr/>
         </p:nvSpPr>
         <p:spPr>
           <a:xfrm>
-            <a:off x="685800" y="1097280"/>
-            <a:ext cx="5029200" cy="365760"/>
+            <a:off x="548640" y="1143000"/>
+            <a:ext cx="3383280" cy="365760"/>
           </a:xfrm>
           <a:prstGeom prst="rect">
             <a:avLst/>
@@ -7829,28 +8694,28 @@
           <a:p>
             <a:pPr algn="l"/>
             <a:r>
-              <a:rPr sz="1600" b="1">
+              <a:rPr sz="2000" b="1">
                 <a:solidFill>
                   <a:srgbClr val="FFFFFF"/>
                 </a:solidFill>
                 <a:latin typeface="Microsoft YaHei"/>
                 <a:ea typeface="Microsoft YaHei"/>
               </a:rPr>
-              <a:t>01 对标研学</a:t>
-            </a:r>
-          </a:p>
-        </p:txBody>
-      </p:sp>
-      <p:sp>
-        <p:nvSpPr>
-          <p:cNvPr id="7" name="TextBox 6"/>
+              <a:t>守「真」</a:t>
+            </a:r>
+          </a:p>
+        </p:txBody>
+      </p:sp>
+      <p:sp>
+        <p:nvSpPr>
+          <p:cNvPr id="8" name="TextBox 7"/>
           <p:cNvSpPr txBox="1"/>
           <p:nvPr/>
         </p:nvSpPr>
         <p:spPr>
           <a:xfrm>
-            <a:off x="685800" y="1920240"/>
-            <a:ext cx="5029200" cy="1188720"/>
+            <a:off x="548640" y="1600200"/>
+            <a:ext cx="3383280" cy="274320"/>
           </a:xfrm>
           <a:prstGeom prst="rect">
             <a:avLst/>
@@ -7865,28 +8730,66 @@
           <a:p>
             <a:pPr algn="l"/>
             <a:r>
-              <a:rPr sz="1400" b="0">
-                <a:solidFill>
-                  <a:srgbClr val="5A6A7A"/>
+              <a:rPr sz="1200" b="0">
+                <a:solidFill>
+                  <a:srgbClr val="A8C5D4"/>
                 </a:solidFill>
                 <a:latin typeface="Microsoft YaHei"/>
                 <a:ea typeface="Microsoft YaHei"/>
               </a:rPr>
-              <a:t>三维对标找差距；能耗/良率/OEE 月度差距清单与整改计划。</a:t>
-            </a:r>
-          </a:p>
-        </p:txBody>
-      </p:sp>
-      <p:sp>
-        <p:nvSpPr>
-          <p:cNvPr id="8" name="Rounded Rectangle 7"/>
+              <a:t>数据驱动、过程可控</a:t>
+            </a:r>
+          </a:p>
+        </p:txBody>
+      </p:sp>
+      <p:sp>
+        <p:nvSpPr>
+          <p:cNvPr id="9" name="TextBox 8"/>
+          <p:cNvSpPr txBox="1"/>
+          <p:nvPr/>
+        </p:nvSpPr>
+        <p:spPr>
+          <a:xfrm>
+            <a:off x="548640" y="2331720"/>
+            <a:ext cx="3383280" cy="2560320"/>
+          </a:xfrm>
+          <a:prstGeom prst="rect">
+            <a:avLst/>
+          </a:prstGeom>
+          <a:noFill/>
+        </p:spPr>
+        <p:txBody>
+          <a:bodyPr wrap="square">
+            <a:spAutoFit/>
+          </a:bodyPr>
+          <a:lstStyle/>
+          <a:p>
+            <a:pPr algn="l"/>
+            <a:r>
+              <a:rPr sz="1200" b="0">
+                <a:solidFill>
+                  <a:srgbClr val="5D6D7E"/>
+                </a:solidFill>
+                <a:latin typeface="Microsoft YaHei"/>
+                <a:ea typeface="Microsoft YaHei"/>
+              </a:rPr>
+              <a:t>全流程可追溯：损耗/OEE实时采集，量化收益。
+SPC底线：工艺参数设限，异常自动预警。
+根因分析：以真实缺陷为依据，拒绝主观归因。</a:t>
+            </a:r>
+          </a:p>
+        </p:txBody>
+      </p:sp>
+      <p:sp>
+        <p:nvSpPr>
+          <p:cNvPr id="10" name="Rounded Rectangle 9"/>
           <p:cNvSpPr/>
           <p:nvPr/>
         </p:nvSpPr>
         <p:spPr>
           <a:xfrm>
-            <a:off x="6309360" y="914400"/>
-            <a:ext cx="5577840" cy="2468880"/>
+            <a:off x="502920" y="5120640"/>
+            <a:ext cx="3474720" cy="1097280"/>
           </a:xfrm>
           <a:prstGeom prst="roundRect">
             <a:avLst>
@@ -7894,12 +8797,10 @@
             </a:avLst>
           </a:prstGeom>
           <a:solidFill>
-            <a:srgbClr val="FFFFFF"/>
+            <a:srgbClr val="FFF4EB"/>
           </a:solidFill>
-          <a:ln w="12700">
-            <a:solidFill>
-              <a:srgbClr val="D5DEE7"/>
-            </a:solidFill>
+          <a:ln>
+            <a:noFill/>
           </a:ln>
         </p:spPr>
         <p:style>
@@ -7926,14 +8827,50 @@
       </p:sp>
       <p:sp>
         <p:nvSpPr>
-          <p:cNvPr id="9" name="Rounded Rectangle 8"/>
+          <p:cNvPr id="11" name="TextBox 10"/>
+          <p:cNvSpPr txBox="1"/>
+          <p:nvPr/>
+        </p:nvSpPr>
+        <p:spPr>
+          <a:xfrm>
+            <a:off x="640080" y="5303520"/>
+            <a:ext cx="3200400" cy="777240"/>
+          </a:xfrm>
+          <a:prstGeom prst="rect">
+            <a:avLst/>
+          </a:prstGeom>
+          <a:noFill/>
+        </p:spPr>
+        <p:txBody>
+          <a:bodyPr wrap="square">
+            <a:spAutoFit/>
+          </a:bodyPr>
+          <a:lstStyle/>
+          <a:p>
+            <a:pPr algn="l"/>
+            <a:r>
+              <a:rPr sz="1200" b="1">
+                <a:solidFill>
+                  <a:srgbClr val="1B3A5F"/>
+                </a:solidFill>
+                <a:latin typeface="Microsoft YaHei"/>
+                <a:ea typeface="Microsoft YaHei"/>
+              </a:rPr>
+              <a:t>可信改善：客观数据支撑，拒绝假成果，让改善可见</a:t>
+            </a:r>
+          </a:p>
+        </p:txBody>
+      </p:sp>
+      <p:sp>
+        <p:nvSpPr>
+          <p:cNvPr id="12" name="Rounded Rectangle 11"/>
           <p:cNvSpPr/>
           <p:nvPr/>
         </p:nvSpPr>
         <p:spPr>
           <a:xfrm>
-            <a:off x="6309360" y="914400"/>
-            <a:ext cx="5577840" cy="640080"/>
+            <a:off x="4297680" y="960120"/>
+            <a:ext cx="3749039" cy="5486400"/>
           </a:xfrm>
           <a:prstGeom prst="roundRect">
             <a:avLst>
@@ -7941,10 +8878,12 @@
             </a:avLst>
           </a:prstGeom>
           <a:solidFill>
-            <a:srgbClr val="0B2A3F"/>
+            <a:srgbClr val="FFFFFF"/>
           </a:solidFill>
-          <a:ln>
-            <a:noFill/>
+          <a:ln w="15875">
+            <a:solidFill>
+              <a:srgbClr val="E8EEF2"/>
+            </a:solidFill>
           </a:ln>
         </p:spPr>
         <p:style>
@@ -7971,2335 +8910,14 @@
       </p:sp>
       <p:sp>
         <p:nvSpPr>
-          <p:cNvPr id="10" name="TextBox 9"/>
-          <p:cNvSpPr txBox="1"/>
-          <p:nvPr/>
-        </p:nvSpPr>
-        <p:spPr>
-          <a:xfrm>
-            <a:off x="6537960" y="1097280"/>
-            <a:ext cx="5029200" cy="365760"/>
-          </a:xfrm>
-          <a:prstGeom prst="rect">
-            <a:avLst/>
-          </a:prstGeom>
-          <a:noFill/>
-        </p:spPr>
-        <p:txBody>
-          <a:bodyPr wrap="square">
-            <a:spAutoFit/>
-          </a:bodyPr>
-          <a:lstStyle/>
-          <a:p>
-            <a:pPr algn="l"/>
-            <a:r>
-              <a:rPr sz="1600" b="1">
-                <a:solidFill>
-                  <a:srgbClr val="FFFFFF"/>
-                </a:solidFill>
-                <a:latin typeface="Microsoft YaHei"/>
-                <a:ea typeface="Microsoft YaHei"/>
-              </a:rPr>
-              <a:t>02 标杆复制</a:t>
-            </a:r>
-          </a:p>
-        </p:txBody>
-      </p:sp>
-      <p:sp>
-        <p:nvSpPr>
-          <p:cNvPr id="11" name="TextBox 10"/>
-          <p:cNvSpPr txBox="1"/>
-          <p:nvPr/>
-        </p:nvSpPr>
-        <p:spPr>
-          <a:xfrm>
-            <a:off x="6537960" y="1920240"/>
-            <a:ext cx="5029200" cy="1188720"/>
-          </a:xfrm>
-          <a:prstGeom prst="rect">
-            <a:avLst/>
-          </a:prstGeom>
-          <a:noFill/>
-        </p:spPr>
-        <p:txBody>
-          <a:bodyPr wrap="square">
-            <a:spAutoFit/>
-          </a:bodyPr>
-          <a:lstStyle/>
-          <a:p>
-            <a:pPr algn="l"/>
-            <a:r>
-              <a:rPr sz="1400" b="0">
-                <a:solidFill>
-                  <a:srgbClr val="5A6A7A"/>
-                </a:solidFill>
-                <a:latin typeface="Microsoft YaHei"/>
-                <a:ea typeface="Microsoft YaHei"/>
-              </a:rPr>
-              <a:t>标杆经验沉淀 SOP 跨线复制；从 5S 升级到提质降本零缺陷。</a:t>
-            </a:r>
-          </a:p>
-        </p:txBody>
-      </p:sp>
-      <p:sp>
-        <p:nvSpPr>
-          <p:cNvPr id="12" name="Rounded Rectangle 11"/>
-          <p:cNvSpPr/>
-          <p:nvPr/>
-        </p:nvSpPr>
-        <p:spPr>
-          <a:xfrm>
-            <a:off x="457200" y="3657600"/>
-            <a:ext cx="5577840" cy="2468880"/>
-          </a:xfrm>
-          <a:prstGeom prst="roundRect">
-            <a:avLst>
-              <a:gd name="adj" fmla="val 8000"/>
-            </a:avLst>
-          </a:prstGeom>
-          <a:solidFill>
-            <a:srgbClr val="FFFFFF"/>
-          </a:solidFill>
-          <a:ln w="12700">
-            <a:solidFill>
-              <a:srgbClr val="D5DEE7"/>
-            </a:solidFill>
-          </a:ln>
-        </p:spPr>
-        <p:style>
-          <a:lnRef idx="1">
-            <a:schemeClr val="accent1"/>
-          </a:lnRef>
-          <a:fillRef idx="3">
-            <a:schemeClr val="accent1"/>
-          </a:fillRef>
-          <a:effectRef idx="2">
-            <a:schemeClr val="accent1"/>
-          </a:effectRef>
-          <a:fontRef idx="minor">
-            <a:schemeClr val="lt1"/>
-          </a:fontRef>
-        </p:style>
-        <p:txBody>
-          <a:bodyPr rtlCol="0" anchor="ctr"/>
-          <a:lstStyle/>
-          <a:p>
-            <a:pPr algn="ctr"/>
-          </a:p>
-        </p:txBody>
-      </p:sp>
-      <p:sp>
-        <p:nvSpPr>
           <p:cNvPr id="13" name="Rounded Rectangle 12"/>
           <p:cNvSpPr/>
           <p:nvPr/>
         </p:nvSpPr>
         <p:spPr>
           <a:xfrm>
-            <a:off x="457200" y="3657600"/>
-            <a:ext cx="5577840" cy="640080"/>
-          </a:xfrm>
-          <a:prstGeom prst="roundRect">
-            <a:avLst>
-              <a:gd name="adj" fmla="val 8000"/>
-            </a:avLst>
-          </a:prstGeom>
-          <a:solidFill>
-            <a:srgbClr val="0B2A3F"/>
-          </a:solidFill>
-          <a:ln>
-            <a:noFill/>
-          </a:ln>
-        </p:spPr>
-        <p:style>
-          <a:lnRef idx="1">
-            <a:schemeClr val="accent1"/>
-          </a:lnRef>
-          <a:fillRef idx="3">
-            <a:schemeClr val="accent1"/>
-          </a:fillRef>
-          <a:effectRef idx="2">
-            <a:schemeClr val="accent1"/>
-          </a:effectRef>
-          <a:fontRef idx="minor">
-            <a:schemeClr val="lt1"/>
-          </a:fontRef>
-        </p:style>
-        <p:txBody>
-          <a:bodyPr rtlCol="0" anchor="ctr"/>
-          <a:lstStyle/>
-          <a:p>
-            <a:pPr algn="ctr"/>
-          </a:p>
-        </p:txBody>
-      </p:sp>
-      <p:sp>
-        <p:nvSpPr>
-          <p:cNvPr id="14" name="TextBox 13"/>
-          <p:cNvSpPr txBox="1"/>
-          <p:nvPr/>
-        </p:nvSpPr>
-        <p:spPr>
-          <a:xfrm>
-            <a:off x="685800" y="3840480"/>
-            <a:ext cx="5029200" cy="365760"/>
-          </a:xfrm>
-          <a:prstGeom prst="rect">
-            <a:avLst/>
-          </a:prstGeom>
-          <a:noFill/>
-        </p:spPr>
-        <p:txBody>
-          <a:bodyPr wrap="square">
-            <a:spAutoFit/>
-          </a:bodyPr>
-          <a:lstStyle/>
-          <a:p>
-            <a:pPr algn="l"/>
-            <a:r>
-              <a:rPr sz="1600" b="1">
-                <a:solidFill>
-                  <a:srgbClr val="FFFFFF"/>
-                </a:solidFill>
-                <a:latin typeface="Microsoft YaHei"/>
-                <a:ea typeface="Microsoft YaHei"/>
-              </a:rPr>
-              <a:t>03 人才育成</a:t>
-            </a:r>
-          </a:p>
-        </p:txBody>
-      </p:sp>
-      <p:sp>
-        <p:nvSpPr>
-          <p:cNvPr id="15" name="TextBox 14"/>
-          <p:cNvSpPr txBox="1"/>
-          <p:nvPr/>
-        </p:nvSpPr>
-        <p:spPr>
-          <a:xfrm>
-            <a:off x="685800" y="4663440"/>
-            <a:ext cx="5029200" cy="1188720"/>
-          </a:xfrm>
-          <a:prstGeom prst="rect">
-            <a:avLst/>
-          </a:prstGeom>
-          <a:noFill/>
-        </p:spPr>
-        <p:txBody>
-          <a:bodyPr wrap="square">
-            <a:spAutoFit/>
-          </a:bodyPr>
-          <a:lstStyle/>
-          <a:p>
-            <a:pPr algn="l"/>
-            <a:r>
-              <a:rPr sz="1400" b="0">
-                <a:solidFill>
-                  <a:srgbClr val="5A6A7A"/>
-                </a:solidFill>
-                <a:latin typeface="Microsoft YaHei"/>
-                <a:ea typeface="Microsoft YaHei"/>
-              </a:rPr>
-              <a:t>骨干 + 内训师 + 专班三级梯队；认证与晋升/激励挂钩。</a:t>
-            </a:r>
-          </a:p>
-        </p:txBody>
-      </p:sp>
-      <p:sp>
-        <p:nvSpPr>
-          <p:cNvPr id="16" name="Rounded Rectangle 15"/>
-          <p:cNvSpPr/>
-          <p:nvPr/>
-        </p:nvSpPr>
-        <p:spPr>
-          <a:xfrm>
-            <a:off x="6309360" y="3657600"/>
-            <a:ext cx="5577840" cy="2468880"/>
-          </a:xfrm>
-          <a:prstGeom prst="roundRect">
-            <a:avLst>
-              <a:gd name="adj" fmla="val 8000"/>
-            </a:avLst>
-          </a:prstGeom>
-          <a:solidFill>
-            <a:srgbClr val="FFFFFF"/>
-          </a:solidFill>
-          <a:ln w="12700">
-            <a:solidFill>
-              <a:srgbClr val="D5DEE7"/>
-            </a:solidFill>
-          </a:ln>
-        </p:spPr>
-        <p:style>
-          <a:lnRef idx="1">
-            <a:schemeClr val="accent1"/>
-          </a:lnRef>
-          <a:fillRef idx="3">
-            <a:schemeClr val="accent1"/>
-          </a:fillRef>
-          <a:effectRef idx="2">
-            <a:schemeClr val="accent1"/>
-          </a:effectRef>
-          <a:fontRef idx="minor">
-            <a:schemeClr val="lt1"/>
-          </a:fontRef>
-        </p:style>
-        <p:txBody>
-          <a:bodyPr rtlCol="0" anchor="ctr"/>
-          <a:lstStyle/>
-          <a:p>
-            <a:pPr algn="ctr"/>
-          </a:p>
-        </p:txBody>
-      </p:sp>
-      <p:sp>
-        <p:nvSpPr>
-          <p:cNvPr id="17" name="Rounded Rectangle 16"/>
-          <p:cNvSpPr/>
-          <p:nvPr/>
-        </p:nvSpPr>
-        <p:spPr>
-          <a:xfrm>
-            <a:off x="6309360" y="3657600"/>
-            <a:ext cx="5577840" cy="640080"/>
-          </a:xfrm>
-          <a:prstGeom prst="roundRect">
-            <a:avLst>
-              <a:gd name="adj" fmla="val 8000"/>
-            </a:avLst>
-          </a:prstGeom>
-          <a:solidFill>
-            <a:srgbClr val="0B2A3F"/>
-          </a:solidFill>
-          <a:ln>
-            <a:noFill/>
-          </a:ln>
-        </p:spPr>
-        <p:style>
-          <a:lnRef idx="1">
-            <a:schemeClr val="accent1"/>
-          </a:lnRef>
-          <a:fillRef idx="3">
-            <a:schemeClr val="accent1"/>
-          </a:fillRef>
-          <a:effectRef idx="2">
-            <a:schemeClr val="accent1"/>
-          </a:effectRef>
-          <a:fontRef idx="minor">
-            <a:schemeClr val="lt1"/>
-          </a:fontRef>
-        </p:style>
-        <p:txBody>
-          <a:bodyPr rtlCol="0" anchor="ctr"/>
-          <a:lstStyle/>
-          <a:p>
-            <a:pPr algn="ctr"/>
-          </a:p>
-        </p:txBody>
-      </p:sp>
-      <p:sp>
-        <p:nvSpPr>
-          <p:cNvPr id="18" name="TextBox 17"/>
-          <p:cNvSpPr txBox="1"/>
-          <p:nvPr/>
-        </p:nvSpPr>
-        <p:spPr>
-          <a:xfrm>
-            <a:off x="6537960" y="3840480"/>
-            <a:ext cx="5029200" cy="365760"/>
-          </a:xfrm>
-          <a:prstGeom prst="rect">
-            <a:avLst/>
-          </a:prstGeom>
-          <a:noFill/>
-        </p:spPr>
-        <p:txBody>
-          <a:bodyPr wrap="square">
-            <a:spAutoFit/>
-          </a:bodyPr>
-          <a:lstStyle/>
-          <a:p>
-            <a:pPr algn="l"/>
-            <a:r>
-              <a:rPr sz="1600" b="1">
-                <a:solidFill>
-                  <a:srgbClr val="FFFFFF"/>
-                </a:solidFill>
-                <a:latin typeface="Microsoft YaHei"/>
-                <a:ea typeface="Microsoft YaHei"/>
-              </a:rPr>
-              <a:t>04 考核管控</a:t>
-            </a:r>
-          </a:p>
-        </p:txBody>
-      </p:sp>
-      <p:sp>
-        <p:nvSpPr>
-          <p:cNvPr id="19" name="TextBox 18"/>
-          <p:cNvSpPr txBox="1"/>
-          <p:nvPr/>
-        </p:nvSpPr>
-        <p:spPr>
-          <a:xfrm>
-            <a:off x="6537960" y="4663440"/>
-            <a:ext cx="5029200" cy="1188720"/>
-          </a:xfrm>
-          <a:prstGeom prst="rect">
-            <a:avLst/>
-          </a:prstGeom>
-          <a:noFill/>
-        </p:spPr>
-        <p:txBody>
-          <a:bodyPr wrap="square">
-            <a:spAutoFit/>
-          </a:bodyPr>
-          <a:lstStyle/>
-          <a:p>
-            <a:pPr algn="l"/>
-            <a:r>
-              <a:rPr sz="1400" b="0">
-                <a:solidFill>
-                  <a:srgbClr val="5A6A7A"/>
-                </a:solidFill>
-                <a:latin typeface="Microsoft YaHei"/>
-                <a:ea typeface="Microsoft YaHei"/>
-              </a:rPr>
-              <a:t>精益指标入正式考核；负责人主责，红黑榜公示闭环。</a:t>
-            </a:r>
-          </a:p>
-        </p:txBody>
-      </p:sp>
-    </p:spTree>
-  </p:cSld>
-  <p:clrMapOvr>
-    <a:masterClrMapping/>
-  </p:clrMapOvr>
-</p:sld>
-</file>
-
-<file path=ppt/slides/slide7.xml><?xml version="1.0" encoding="utf-8"?>
-<p:sld xmlns:a="http://schemas.openxmlformats.org/drawingml/2006/main" xmlns:p="http://schemas.openxmlformats.org/presentationml/2006/main" xmlns:r="http://schemas.openxmlformats.org/officeDocument/2006/relationships">
-  <p:cSld>
-    <p:spTree>
-      <p:nvGrpSpPr>
-        <p:cNvPr id="1" name=""/>
-        <p:cNvGrpSpPr/>
-        <p:nvPr/>
-      </p:nvGrpSpPr>
-      <p:grpSpPr/>
-      <p:sp>
-        <p:nvSpPr>
-          <p:cNvPr id="2" name="Rounded Rectangle 1"/>
-          <p:cNvSpPr/>
-          <p:nvPr/>
-        </p:nvSpPr>
-        <p:spPr>
-          <a:xfrm>
-            <a:off x="0" y="0"/>
-            <a:ext cx="12191695" cy="6858000"/>
-          </a:xfrm>
-          <a:prstGeom prst="roundRect">
-            <a:avLst>
-              <a:gd name="adj" fmla="val 8000"/>
-            </a:avLst>
-          </a:prstGeom>
-          <a:solidFill>
-            <a:srgbClr val="F5F7FA"/>
-          </a:solidFill>
-          <a:ln>
-            <a:noFill/>
-          </a:ln>
-        </p:spPr>
-        <p:style>
-          <a:lnRef idx="1">
-            <a:schemeClr val="accent1"/>
-          </a:lnRef>
-          <a:fillRef idx="3">
-            <a:schemeClr val="accent1"/>
-          </a:fillRef>
-          <a:effectRef idx="2">
-            <a:schemeClr val="accent1"/>
-          </a:effectRef>
-          <a:fontRef idx="minor">
-            <a:schemeClr val="lt1"/>
-          </a:fontRef>
-        </p:style>
-        <p:txBody>
-          <a:bodyPr rtlCol="0" anchor="ctr"/>
-          <a:lstStyle/>
-          <a:p>
-            <a:pPr algn="ctr"/>
-          </a:p>
-        </p:txBody>
-      </p:sp>
-      <p:sp>
-        <p:nvSpPr>
-          <p:cNvPr id="3" name="TextBox 2"/>
-          <p:cNvSpPr txBox="1"/>
-          <p:nvPr/>
-        </p:nvSpPr>
-        <p:spPr>
-          <a:xfrm>
-            <a:off x="457200" y="228600"/>
-            <a:ext cx="10972800" cy="365760"/>
-          </a:xfrm>
-          <a:prstGeom prst="rect">
-            <a:avLst/>
-          </a:prstGeom>
-          <a:noFill/>
-        </p:spPr>
-        <p:txBody>
-          <a:bodyPr wrap="square">
-            <a:spAutoFit/>
-          </a:bodyPr>
-          <a:lstStyle/>
-          <a:p>
-            <a:pPr algn="l"/>
-            <a:r>
-              <a:rPr sz="2200" b="1">
-                <a:solidFill>
-                  <a:srgbClr val="0B2A3F"/>
-                </a:solidFill>
-                <a:latin typeface="Microsoft YaHei"/>
-                <a:ea typeface="Microsoft YaHei"/>
-              </a:rPr>
-              <a:t>05 价值生产力体系｜五大核心课题</a:t>
-            </a:r>
-          </a:p>
-        </p:txBody>
-      </p:sp>
-      <p:sp>
-        <p:nvSpPr>
-          <p:cNvPr id="4" name="Rounded Rectangle 3"/>
-          <p:cNvSpPr/>
-          <p:nvPr/>
-        </p:nvSpPr>
-        <p:spPr>
-          <a:xfrm>
-            <a:off x="457200" y="822960"/>
-            <a:ext cx="3657600" cy="5029200"/>
-          </a:xfrm>
-          <a:prstGeom prst="roundRect">
-            <a:avLst>
-              <a:gd name="adj" fmla="val 8000"/>
-            </a:avLst>
-          </a:prstGeom>
-          <a:solidFill>
-            <a:srgbClr val="0B2A3F"/>
-          </a:solidFill>
-          <a:ln>
-            <a:noFill/>
-          </a:ln>
-        </p:spPr>
-        <p:style>
-          <a:lnRef idx="1">
-            <a:schemeClr val="accent1"/>
-          </a:lnRef>
-          <a:fillRef idx="3">
-            <a:schemeClr val="accent1"/>
-          </a:fillRef>
-          <a:effectRef idx="2">
-            <a:schemeClr val="accent1"/>
-          </a:effectRef>
-          <a:fontRef idx="minor">
-            <a:schemeClr val="lt1"/>
-          </a:fontRef>
-        </p:style>
-        <p:txBody>
-          <a:bodyPr rtlCol="0" anchor="ctr"/>
-          <a:lstStyle/>
-          <a:p>
-            <a:pPr algn="ctr"/>
-          </a:p>
-        </p:txBody>
-      </p:sp>
-      <p:sp>
-        <p:nvSpPr>
-          <p:cNvPr id="5" name="TextBox 4"/>
-          <p:cNvSpPr txBox="1"/>
-          <p:nvPr/>
-        </p:nvSpPr>
-        <p:spPr>
-          <a:xfrm>
-            <a:off x="731520" y="1280160"/>
-            <a:ext cx="3108960" cy="365760"/>
-          </a:xfrm>
-          <a:prstGeom prst="rect">
-            <a:avLst/>
-          </a:prstGeom>
-          <a:noFill/>
-        </p:spPr>
-        <p:txBody>
-          <a:bodyPr wrap="square">
-            <a:spAutoFit/>
-          </a:bodyPr>
-          <a:lstStyle/>
-          <a:p>
-            <a:pPr algn="l"/>
-            <a:r>
-              <a:rPr sz="1400" b="1">
-                <a:solidFill>
-                  <a:srgbClr val="E07A2F"/>
-                </a:solidFill>
-                <a:latin typeface="Microsoft YaHei"/>
-                <a:ea typeface="Microsoft YaHei"/>
-              </a:rPr>
-              <a:t>第二生产力</a:t>
-            </a:r>
-          </a:p>
-        </p:txBody>
-      </p:sp>
-      <p:sp>
-        <p:nvSpPr>
-          <p:cNvPr id="6" name="TextBox 5"/>
-          <p:cNvSpPr txBox="1"/>
-          <p:nvPr/>
-        </p:nvSpPr>
-        <p:spPr>
-          <a:xfrm>
-            <a:off x="731520" y="1828800"/>
-            <a:ext cx="3108960" cy="1097280"/>
-          </a:xfrm>
-          <a:prstGeom prst="rect">
-            <a:avLst/>
-          </a:prstGeom>
-          <a:noFill/>
-        </p:spPr>
-        <p:txBody>
-          <a:bodyPr wrap="square">
-            <a:spAutoFit/>
-          </a:bodyPr>
-          <a:lstStyle/>
-          <a:p>
-            <a:pPr algn="l"/>
-            <a:r>
-              <a:rPr sz="2600" b="1">
-                <a:solidFill>
-                  <a:srgbClr val="FFFFFF"/>
-                </a:solidFill>
-                <a:latin typeface="Microsoft YaHei"/>
-                <a:ea typeface="Microsoft YaHei"/>
-              </a:rPr>
-              <a:t>管理 × 产能
-双增长引擎</a:t>
-            </a:r>
-          </a:p>
-        </p:txBody>
-      </p:sp>
-      <p:sp>
-        <p:nvSpPr>
-          <p:cNvPr id="7" name="TextBox 6"/>
-          <p:cNvSpPr txBox="1"/>
-          <p:nvPr/>
-        </p:nvSpPr>
-        <p:spPr>
-          <a:xfrm>
-            <a:off x="731520" y="3291840"/>
-            <a:ext cx="3108960" cy="1371600"/>
-          </a:xfrm>
-          <a:prstGeom prst="rect">
-            <a:avLst/>
-          </a:prstGeom>
-          <a:noFill/>
-        </p:spPr>
-        <p:txBody>
-          <a:bodyPr wrap="square">
-            <a:spAutoFit/>
-          </a:bodyPr>
-          <a:lstStyle/>
-          <a:p>
-            <a:pPr algn="l"/>
-            <a:r>
-              <a:rPr sz="1300" b="0">
-                <a:solidFill>
-                  <a:srgbClr val="A8C5D4"/>
-                </a:solidFill>
-                <a:latin typeface="Microsoft YaHei"/>
-                <a:ea typeface="Microsoft YaHei"/>
-              </a:rPr>
-              <a:t>转化为产能增量、良率增量、效益增量，支撑规模化高质量发展。</a:t>
-            </a:r>
-          </a:p>
-        </p:txBody>
-      </p:sp>
-      <p:sp>
-        <p:nvSpPr>
-          <p:cNvPr id="8" name="Rounded Rectangle 7"/>
-          <p:cNvSpPr/>
-          <p:nvPr/>
-        </p:nvSpPr>
-        <p:spPr>
-          <a:xfrm>
-            <a:off x="4389120" y="822960"/>
-            <a:ext cx="7315200" cy="868680"/>
-          </a:xfrm>
-          <a:prstGeom prst="roundRect">
-            <a:avLst>
-              <a:gd name="adj" fmla="val 8000"/>
-            </a:avLst>
-          </a:prstGeom>
-          <a:solidFill>
-            <a:srgbClr val="FFFFFF"/>
-          </a:solidFill>
-          <a:ln w="12700">
-            <a:solidFill>
-              <a:srgbClr val="D5DEE7"/>
-            </a:solidFill>
-          </a:ln>
-        </p:spPr>
-        <p:style>
-          <a:lnRef idx="1">
-            <a:schemeClr val="accent1"/>
-          </a:lnRef>
-          <a:fillRef idx="3">
-            <a:schemeClr val="accent1"/>
-          </a:fillRef>
-          <a:effectRef idx="2">
-            <a:schemeClr val="accent1"/>
-          </a:effectRef>
-          <a:fontRef idx="minor">
-            <a:schemeClr val="lt1"/>
-          </a:fontRef>
-        </p:style>
-        <p:txBody>
-          <a:bodyPr rtlCol="0" anchor="ctr"/>
-          <a:lstStyle/>
-          <a:p>
-            <a:pPr algn="ctr"/>
-          </a:p>
-        </p:txBody>
-      </p:sp>
-      <p:sp>
-        <p:nvSpPr>
-          <p:cNvPr id="9" name="TextBox 8"/>
-          <p:cNvSpPr txBox="1"/>
-          <p:nvPr/>
-        </p:nvSpPr>
-        <p:spPr>
-          <a:xfrm>
-            <a:off x="4663440" y="1078992"/>
-            <a:ext cx="6858000" cy="457200"/>
-          </a:xfrm>
-          <a:prstGeom prst="rect">
-            <a:avLst/>
-          </a:prstGeom>
-          <a:noFill/>
-        </p:spPr>
-        <p:txBody>
-          <a:bodyPr wrap="square">
-            <a:spAutoFit/>
-          </a:bodyPr>
-          <a:lstStyle/>
-          <a:p>
-            <a:pPr algn="l"/>
-            <a:r>
-              <a:rPr sz="1500" b="1">
-                <a:solidFill>
-                  <a:srgbClr val="0B2A3F"/>
-                </a:solidFill>
-                <a:latin typeface="Microsoft YaHei"/>
-                <a:ea typeface="Microsoft YaHei"/>
-              </a:rPr>
-              <a:t>01 拉晶硅损优化 — 厘清浪费点，提升硅料利用率</a:t>
-            </a:r>
-          </a:p>
-        </p:txBody>
-      </p:sp>
-      <p:sp>
-        <p:nvSpPr>
-          <p:cNvPr id="10" name="Rounded Rectangle 9"/>
-          <p:cNvSpPr/>
-          <p:nvPr/>
-        </p:nvSpPr>
-        <p:spPr>
-          <a:xfrm>
-            <a:off x="4389120" y="1828800"/>
-            <a:ext cx="7315200" cy="868680"/>
-          </a:xfrm>
-          <a:prstGeom prst="roundRect">
-            <a:avLst>
-              <a:gd name="adj" fmla="val 8000"/>
-            </a:avLst>
-          </a:prstGeom>
-          <a:solidFill>
-            <a:srgbClr val="FFFFFF"/>
-          </a:solidFill>
-          <a:ln w="12700">
-            <a:solidFill>
-              <a:srgbClr val="D5DEE7"/>
-            </a:solidFill>
-          </a:ln>
-        </p:spPr>
-        <p:style>
-          <a:lnRef idx="1">
-            <a:schemeClr val="accent1"/>
-          </a:lnRef>
-          <a:fillRef idx="3">
-            <a:schemeClr val="accent1"/>
-          </a:fillRef>
-          <a:effectRef idx="2">
-            <a:schemeClr val="accent1"/>
-          </a:effectRef>
-          <a:fontRef idx="minor">
-            <a:schemeClr val="lt1"/>
-          </a:fontRef>
-        </p:style>
-        <p:txBody>
-          <a:bodyPr rtlCol="0" anchor="ctr"/>
-          <a:lstStyle/>
-          <a:p>
-            <a:pPr algn="ctr"/>
-          </a:p>
-        </p:txBody>
-      </p:sp>
-      <p:sp>
-        <p:nvSpPr>
-          <p:cNvPr id="11" name="TextBox 10"/>
-          <p:cNvSpPr txBox="1"/>
-          <p:nvPr/>
-        </p:nvSpPr>
-        <p:spPr>
-          <a:xfrm>
-            <a:off x="4663440" y="2084832"/>
-            <a:ext cx="6858000" cy="457200"/>
-          </a:xfrm>
-          <a:prstGeom prst="rect">
-            <a:avLst/>
-          </a:prstGeom>
-          <a:noFill/>
-        </p:spPr>
-        <p:txBody>
-          <a:bodyPr wrap="square">
-            <a:spAutoFit/>
-          </a:bodyPr>
-          <a:lstStyle/>
-          <a:p>
-            <a:pPr algn="l"/>
-            <a:r>
-              <a:rPr sz="1500" b="1">
-                <a:solidFill>
-                  <a:srgbClr val="0B2A3F"/>
-                </a:solidFill>
-                <a:latin typeface="Microsoft YaHei"/>
-                <a:ea typeface="Microsoft YaHei"/>
-              </a:rPr>
-              <a:t>02 切片损耗管控 — 攻克断线碎片，提升优品率</a:t>
-            </a:r>
-          </a:p>
-        </p:txBody>
-      </p:sp>
-      <p:sp>
-        <p:nvSpPr>
-          <p:cNvPr id="12" name="Rounded Rectangle 11"/>
-          <p:cNvSpPr/>
-          <p:nvPr/>
-        </p:nvSpPr>
-        <p:spPr>
-          <a:xfrm>
-            <a:off x="4389120" y="2834640"/>
-            <a:ext cx="7315200" cy="868680"/>
-          </a:xfrm>
-          <a:prstGeom prst="roundRect">
-            <a:avLst>
-              <a:gd name="adj" fmla="val 8000"/>
-            </a:avLst>
-          </a:prstGeom>
-          <a:solidFill>
-            <a:srgbClr val="FFFFFF"/>
-          </a:solidFill>
-          <a:ln w="12700">
-            <a:solidFill>
-              <a:srgbClr val="D5DEE7"/>
-            </a:solidFill>
-          </a:ln>
-        </p:spPr>
-        <p:style>
-          <a:lnRef idx="1">
-            <a:schemeClr val="accent1"/>
-          </a:lnRef>
-          <a:fillRef idx="3">
-            <a:schemeClr val="accent1"/>
-          </a:fillRef>
-          <a:effectRef idx="2">
-            <a:schemeClr val="accent1"/>
-          </a:effectRef>
-          <a:fontRef idx="minor">
-            <a:schemeClr val="lt1"/>
-          </a:fontRef>
-        </p:style>
-        <p:txBody>
-          <a:bodyPr rtlCol="0" anchor="ctr"/>
-          <a:lstStyle/>
-          <a:p>
-            <a:pPr algn="ctr"/>
-          </a:p>
-        </p:txBody>
-      </p:sp>
-      <p:sp>
-        <p:nvSpPr>
-          <p:cNvPr id="13" name="TextBox 12"/>
-          <p:cNvSpPr txBox="1"/>
-          <p:nvPr/>
-        </p:nvSpPr>
-        <p:spPr>
-          <a:xfrm>
-            <a:off x="4663440" y="3090672"/>
-            <a:ext cx="6858000" cy="457200"/>
-          </a:xfrm>
-          <a:prstGeom prst="rect">
-            <a:avLst/>
-          </a:prstGeom>
-          <a:noFill/>
-        </p:spPr>
-        <p:txBody>
-          <a:bodyPr wrap="square">
-            <a:spAutoFit/>
-          </a:bodyPr>
-          <a:lstStyle/>
-          <a:p>
-            <a:pPr algn="l"/>
-            <a:r>
-              <a:rPr sz="1500" b="1">
-                <a:solidFill>
-                  <a:srgbClr val="0B2A3F"/>
-                </a:solidFill>
-                <a:latin typeface="Microsoft YaHei"/>
-                <a:ea typeface="Microsoft YaHei"/>
-              </a:rPr>
-              <a:t>03 组件质量攻坚 — 隐裂/虚焊/层压缺陷与可靠性</a:t>
-            </a:r>
-          </a:p>
-        </p:txBody>
-      </p:sp>
-      <p:sp>
-        <p:nvSpPr>
-          <p:cNvPr id="14" name="Rounded Rectangle 13"/>
-          <p:cNvSpPr/>
-          <p:nvPr/>
-        </p:nvSpPr>
-        <p:spPr>
-          <a:xfrm>
-            <a:off x="4389120" y="3840480"/>
-            <a:ext cx="7315200" cy="868680"/>
-          </a:xfrm>
-          <a:prstGeom prst="roundRect">
-            <a:avLst>
-              <a:gd name="adj" fmla="val 8000"/>
-            </a:avLst>
-          </a:prstGeom>
-          <a:solidFill>
-            <a:srgbClr val="FFFFFF"/>
-          </a:solidFill>
-          <a:ln w="12700">
-            <a:solidFill>
-              <a:srgbClr val="D5DEE7"/>
-            </a:solidFill>
-          </a:ln>
-        </p:spPr>
-        <p:style>
-          <a:lnRef idx="1">
-            <a:schemeClr val="accent1"/>
-          </a:lnRef>
-          <a:fillRef idx="3">
-            <a:schemeClr val="accent1"/>
-          </a:fillRef>
-          <a:effectRef idx="2">
-            <a:schemeClr val="accent1"/>
-          </a:effectRef>
-          <a:fontRef idx="minor">
-            <a:schemeClr val="lt1"/>
-          </a:fontRef>
-        </p:style>
-        <p:txBody>
-          <a:bodyPr rtlCol="0" anchor="ctr"/>
-          <a:lstStyle/>
-          <a:p>
-            <a:pPr algn="ctr"/>
-          </a:p>
-        </p:txBody>
-      </p:sp>
-      <p:sp>
-        <p:nvSpPr>
-          <p:cNvPr id="15" name="TextBox 14"/>
-          <p:cNvSpPr txBox="1"/>
-          <p:nvPr/>
-        </p:nvSpPr>
-        <p:spPr>
-          <a:xfrm>
-            <a:off x="4663440" y="4096512"/>
-            <a:ext cx="6858000" cy="457200"/>
-          </a:xfrm>
-          <a:prstGeom prst="rect">
-            <a:avLst/>
-          </a:prstGeom>
-          <a:noFill/>
-        </p:spPr>
-        <p:txBody>
-          <a:bodyPr wrap="square">
-            <a:spAutoFit/>
-          </a:bodyPr>
-          <a:lstStyle/>
-          <a:p>
-            <a:pPr algn="l"/>
-            <a:r>
-              <a:rPr sz="1500" b="1">
-                <a:solidFill>
-                  <a:srgbClr val="0B2A3F"/>
-                </a:solidFill>
-                <a:latin typeface="Microsoft YaHei"/>
-                <a:ea typeface="Microsoft YaHei"/>
-              </a:rPr>
-              <a:t>04 设备效能跃升 — TPM + OEE，保障连续稳定</a:t>
-            </a:r>
-          </a:p>
-        </p:txBody>
-      </p:sp>
-      <p:sp>
-        <p:nvSpPr>
-          <p:cNvPr id="16" name="Rounded Rectangle 15"/>
-          <p:cNvSpPr/>
-          <p:nvPr/>
-        </p:nvSpPr>
-        <p:spPr>
-          <a:xfrm>
-            <a:off x="4389120" y="4846320"/>
-            <a:ext cx="7315200" cy="868680"/>
-          </a:xfrm>
-          <a:prstGeom prst="roundRect">
-            <a:avLst>
-              <a:gd name="adj" fmla="val 8000"/>
-            </a:avLst>
-          </a:prstGeom>
-          <a:solidFill>
-            <a:srgbClr val="FFFFFF"/>
-          </a:solidFill>
-          <a:ln w="12700">
-            <a:solidFill>
-              <a:srgbClr val="D5DEE7"/>
-            </a:solidFill>
-          </a:ln>
-        </p:spPr>
-        <p:style>
-          <a:lnRef idx="1">
-            <a:schemeClr val="accent1"/>
-          </a:lnRef>
-          <a:fillRef idx="3">
-            <a:schemeClr val="accent1"/>
-          </a:fillRef>
-          <a:effectRef idx="2">
-            <a:schemeClr val="accent1"/>
-          </a:effectRef>
-          <a:fontRef idx="minor">
-            <a:schemeClr val="lt1"/>
-          </a:fontRef>
-        </p:style>
-        <p:txBody>
-          <a:bodyPr rtlCol="0" anchor="ctr"/>
-          <a:lstStyle/>
-          <a:p>
-            <a:pPr algn="ctr"/>
-          </a:p>
-        </p:txBody>
-      </p:sp>
-      <p:sp>
-        <p:nvSpPr>
-          <p:cNvPr id="17" name="TextBox 16"/>
-          <p:cNvSpPr txBox="1"/>
-          <p:nvPr/>
-        </p:nvSpPr>
-        <p:spPr>
-          <a:xfrm>
-            <a:off x="4663440" y="5102352"/>
-            <a:ext cx="6858000" cy="457200"/>
-          </a:xfrm>
-          <a:prstGeom prst="rect">
-            <a:avLst/>
-          </a:prstGeom>
-          <a:noFill/>
-        </p:spPr>
-        <p:txBody>
-          <a:bodyPr wrap="square">
-            <a:spAutoFit/>
-          </a:bodyPr>
-          <a:lstStyle/>
-          <a:p>
-            <a:pPr algn="l"/>
-            <a:r>
-              <a:rPr sz="1500" b="1">
-                <a:solidFill>
-                  <a:srgbClr val="0B2A3F"/>
-                </a:solidFill>
-                <a:latin typeface="Microsoft YaHei"/>
-                <a:ea typeface="Microsoft YaHei"/>
-              </a:rPr>
-              <a:t>05 精益数字化+ — 贯通 DMS / TPMS / QMS</a:t>
-            </a:r>
-          </a:p>
-        </p:txBody>
-      </p:sp>
-    </p:spTree>
-  </p:cSld>
-  <p:clrMapOvr>
-    <a:masterClrMapping/>
-  </p:clrMapOvr>
-</p:sld>
-</file>
-
-<file path=ppt/slides/slide8.xml><?xml version="1.0" encoding="utf-8"?>
-<p:sld xmlns:a="http://schemas.openxmlformats.org/drawingml/2006/main" xmlns:p="http://schemas.openxmlformats.org/presentationml/2006/main" xmlns:r="http://schemas.openxmlformats.org/officeDocument/2006/relationships">
-  <p:cSld>
-    <p:spTree>
-      <p:nvGrpSpPr>
-        <p:cNvPr id="1" name=""/>
-        <p:cNvGrpSpPr/>
-        <p:nvPr/>
-      </p:nvGrpSpPr>
-      <p:grpSpPr/>
-      <p:sp>
-        <p:nvSpPr>
-          <p:cNvPr id="2" name="Rounded Rectangle 1"/>
-          <p:cNvSpPr/>
-          <p:nvPr/>
-        </p:nvSpPr>
-        <p:spPr>
-          <a:xfrm>
-            <a:off x="0" y="0"/>
-            <a:ext cx="12191695" cy="6858000"/>
-          </a:xfrm>
-          <a:prstGeom prst="roundRect">
-            <a:avLst>
-              <a:gd name="adj" fmla="val 8000"/>
-            </a:avLst>
-          </a:prstGeom>
-          <a:solidFill>
-            <a:srgbClr val="F5F7FA"/>
-          </a:solidFill>
-          <a:ln>
-            <a:noFill/>
-          </a:ln>
-        </p:spPr>
-        <p:style>
-          <a:lnRef idx="1">
-            <a:schemeClr val="accent1"/>
-          </a:lnRef>
-          <a:fillRef idx="3">
-            <a:schemeClr val="accent1"/>
-          </a:fillRef>
-          <a:effectRef idx="2">
-            <a:schemeClr val="accent1"/>
-          </a:effectRef>
-          <a:fontRef idx="minor">
-            <a:schemeClr val="lt1"/>
-          </a:fontRef>
-        </p:style>
-        <p:txBody>
-          <a:bodyPr rtlCol="0" anchor="ctr"/>
-          <a:lstStyle/>
-          <a:p>
-            <a:pPr algn="ctr"/>
-          </a:p>
-        </p:txBody>
-      </p:sp>
-      <p:sp>
-        <p:nvSpPr>
-          <p:cNvPr id="3" name="TextBox 2"/>
-          <p:cNvSpPr txBox="1"/>
-          <p:nvPr/>
-        </p:nvSpPr>
-        <p:spPr>
-          <a:xfrm>
-            <a:off x="457200" y="228600"/>
-            <a:ext cx="10972800" cy="365760"/>
-          </a:xfrm>
-          <a:prstGeom prst="rect">
-            <a:avLst/>
-          </a:prstGeom>
-          <a:noFill/>
-        </p:spPr>
-        <p:txBody>
-          <a:bodyPr wrap="square">
-            <a:spAutoFit/>
-          </a:bodyPr>
-          <a:lstStyle/>
-          <a:p>
-            <a:pPr algn="l"/>
-            <a:r>
-              <a:rPr sz="2200" b="1">
-                <a:solidFill>
-                  <a:srgbClr val="0B2A3F"/>
-                </a:solidFill>
-                <a:latin typeface="Microsoft YaHei"/>
-                <a:ea typeface="Microsoft YaHei"/>
-              </a:rPr>
-              <a:t>三个阶段｜层层递进的实施路径</a:t>
-            </a:r>
-          </a:p>
-        </p:txBody>
-      </p:sp>
-      <p:sp>
-        <p:nvSpPr>
-          <p:cNvPr id="4" name="Rounded Rectangle 3"/>
-          <p:cNvSpPr/>
-          <p:nvPr/>
-        </p:nvSpPr>
-        <p:spPr>
-          <a:xfrm>
-            <a:off x="411480" y="914400"/>
-            <a:ext cx="3703320" cy="5303520"/>
-          </a:xfrm>
-          <a:prstGeom prst="roundRect">
-            <a:avLst>
-              <a:gd name="adj" fmla="val 8000"/>
-            </a:avLst>
-          </a:prstGeom>
-          <a:solidFill>
-            <a:srgbClr val="FFFFFF"/>
-          </a:solidFill>
-          <a:ln w="12700">
-            <a:solidFill>
-              <a:srgbClr val="D5DEE7"/>
-            </a:solidFill>
-          </a:ln>
-        </p:spPr>
-        <p:style>
-          <a:lnRef idx="1">
-            <a:schemeClr val="accent1"/>
-          </a:lnRef>
-          <a:fillRef idx="3">
-            <a:schemeClr val="accent1"/>
-          </a:fillRef>
-          <a:effectRef idx="2">
-            <a:schemeClr val="accent1"/>
-          </a:effectRef>
-          <a:fontRef idx="minor">
-            <a:schemeClr val="lt1"/>
-          </a:fontRef>
-        </p:style>
-        <p:txBody>
-          <a:bodyPr rtlCol="0" anchor="ctr"/>
-          <a:lstStyle/>
-          <a:p>
-            <a:pPr algn="ctr"/>
-          </a:p>
-        </p:txBody>
-      </p:sp>
-      <p:sp>
-        <p:nvSpPr>
-          <p:cNvPr id="5" name="Rounded Rectangle 4"/>
-          <p:cNvSpPr/>
-          <p:nvPr/>
-        </p:nvSpPr>
-        <p:spPr>
-          <a:xfrm>
-            <a:off x="411480" y="914400"/>
-            <a:ext cx="3703320" cy="1188720"/>
-          </a:xfrm>
-          <a:prstGeom prst="roundRect">
-            <a:avLst>
-              <a:gd name="adj" fmla="val 8000"/>
-            </a:avLst>
-          </a:prstGeom>
-          <a:solidFill>
-            <a:srgbClr val="0B2A3F"/>
-          </a:solidFill>
-          <a:ln>
-            <a:noFill/>
-          </a:ln>
-        </p:spPr>
-        <p:style>
-          <a:lnRef idx="1">
-            <a:schemeClr val="accent1"/>
-          </a:lnRef>
-          <a:fillRef idx="3">
-            <a:schemeClr val="accent1"/>
-          </a:fillRef>
-          <a:effectRef idx="2">
-            <a:schemeClr val="accent1"/>
-          </a:effectRef>
-          <a:fontRef idx="minor">
-            <a:schemeClr val="lt1"/>
-          </a:fontRef>
-        </p:style>
-        <p:txBody>
-          <a:bodyPr rtlCol="0" anchor="ctr"/>
-          <a:lstStyle/>
-          <a:p>
-            <a:pPr algn="ctr"/>
-          </a:p>
-        </p:txBody>
-      </p:sp>
-      <p:sp>
-        <p:nvSpPr>
-          <p:cNvPr id="6" name="TextBox 5"/>
-          <p:cNvSpPr txBox="1"/>
-          <p:nvPr/>
-        </p:nvSpPr>
-        <p:spPr>
-          <a:xfrm>
-            <a:off x="594360" y="1097280"/>
-            <a:ext cx="3291840" cy="320040"/>
-          </a:xfrm>
-          <a:prstGeom prst="rect">
-            <a:avLst/>
-          </a:prstGeom>
-          <a:noFill/>
-        </p:spPr>
-        <p:txBody>
-          <a:bodyPr wrap="square">
-            <a:spAutoFit/>
-          </a:bodyPr>
-          <a:lstStyle/>
-          <a:p>
-            <a:pPr algn="l"/>
-            <a:r>
-              <a:rPr sz="1400" b="1">
-                <a:solidFill>
-                  <a:srgbClr val="FFFFFF"/>
-                </a:solidFill>
-                <a:latin typeface="Microsoft YaHei"/>
-                <a:ea typeface="Microsoft YaHei"/>
-              </a:rPr>
-              <a:t>01  7–8月</a:t>
-            </a:r>
-          </a:p>
-        </p:txBody>
-      </p:sp>
-      <p:sp>
-        <p:nvSpPr>
-          <p:cNvPr id="7" name="TextBox 6"/>
-          <p:cNvSpPr txBox="1"/>
-          <p:nvPr/>
-        </p:nvSpPr>
-        <p:spPr>
-          <a:xfrm>
-            <a:off x="594360" y="1508760"/>
-            <a:ext cx="3291840" cy="365760"/>
-          </a:xfrm>
-          <a:prstGeom prst="rect">
-            <a:avLst/>
-          </a:prstGeom>
-          <a:noFill/>
-        </p:spPr>
-        <p:txBody>
-          <a:bodyPr wrap="square">
-            <a:spAutoFit/>
-          </a:bodyPr>
-          <a:lstStyle/>
-          <a:p>
-            <a:pPr algn="l"/>
-            <a:r>
-              <a:rPr sz="1600" b="1">
-                <a:solidFill>
-                  <a:srgbClr val="FFFFFF"/>
-                </a:solidFill>
-                <a:latin typeface="Microsoft YaHei"/>
-                <a:ea typeface="Microsoft YaHei"/>
-              </a:rPr>
-              <a:t>标杆认证·统一标准</a:t>
-            </a:r>
-          </a:p>
-        </p:txBody>
-      </p:sp>
-      <p:sp>
-        <p:nvSpPr>
-          <p:cNvPr id="8" name="TextBox 7"/>
-          <p:cNvSpPr txBox="1"/>
-          <p:nvPr/>
-        </p:nvSpPr>
-        <p:spPr>
-          <a:xfrm>
-            <a:off x="594360" y="2377440"/>
-            <a:ext cx="3291840" cy="2011680"/>
-          </a:xfrm>
-          <a:prstGeom prst="rect">
-            <a:avLst/>
-          </a:prstGeom>
-          <a:noFill/>
-        </p:spPr>
-        <p:txBody>
-          <a:bodyPr wrap="square">
-            <a:spAutoFit/>
-          </a:bodyPr>
-          <a:lstStyle/>
-          <a:p>
-            <a:pPr algn="l"/>
-            <a:r>
-              <a:rPr sz="1400" b="0">
-                <a:solidFill>
-                  <a:srgbClr val="5A6A7A"/>
-                </a:solidFill>
-                <a:latin typeface="Microsoft YaHei"/>
-                <a:ea typeface="Microsoft YaHei"/>
-              </a:rPr>
-              <a:t>认证复制、方法论手册、组件 DMS/Andon 闭环</a:t>
-            </a:r>
-          </a:p>
-        </p:txBody>
-      </p:sp>
-      <p:sp>
-        <p:nvSpPr>
-          <p:cNvPr id="9" name="Rounded Rectangle 8"/>
-          <p:cNvSpPr/>
-          <p:nvPr/>
-        </p:nvSpPr>
-        <p:spPr>
-          <a:xfrm>
-            <a:off x="594360" y="5029200"/>
-            <a:ext cx="3337560" cy="914400"/>
-          </a:xfrm>
-          <a:prstGeom prst="roundRect">
-            <a:avLst>
-              <a:gd name="adj" fmla="val 8000"/>
-            </a:avLst>
-          </a:prstGeom>
-          <a:solidFill>
-            <a:srgbClr val="F3E6D8"/>
-          </a:solidFill>
-          <a:ln>
-            <a:noFill/>
-          </a:ln>
-        </p:spPr>
-        <p:style>
-          <a:lnRef idx="1">
-            <a:schemeClr val="accent1"/>
-          </a:lnRef>
-          <a:fillRef idx="3">
-            <a:schemeClr val="accent1"/>
-          </a:fillRef>
-          <a:effectRef idx="2">
-            <a:schemeClr val="accent1"/>
-          </a:effectRef>
-          <a:fontRef idx="minor">
-            <a:schemeClr val="lt1"/>
-          </a:fontRef>
-        </p:style>
-        <p:txBody>
-          <a:bodyPr rtlCol="0" anchor="ctr"/>
-          <a:lstStyle/>
-          <a:p>
-            <a:pPr algn="ctr"/>
-          </a:p>
-        </p:txBody>
-      </p:sp>
-      <p:sp>
-        <p:nvSpPr>
-          <p:cNvPr id="10" name="TextBox 9"/>
-          <p:cNvSpPr txBox="1"/>
-          <p:nvPr/>
-        </p:nvSpPr>
-        <p:spPr>
-          <a:xfrm>
-            <a:off x="731520" y="5212080"/>
-            <a:ext cx="3108960" cy="640080"/>
-          </a:xfrm>
-          <a:prstGeom prst="rect">
-            <a:avLst/>
-          </a:prstGeom>
-          <a:noFill/>
-        </p:spPr>
-        <p:txBody>
-          <a:bodyPr wrap="square">
-            <a:spAutoFit/>
-          </a:bodyPr>
-          <a:lstStyle/>
-          <a:p>
-            <a:pPr algn="l"/>
-            <a:r>
-              <a:rPr sz="1300" b="1">
-                <a:solidFill>
-                  <a:srgbClr val="0B2A3F"/>
-                </a:solidFill>
-                <a:latin typeface="Microsoft YaHei"/>
-                <a:ea typeface="Microsoft YaHei"/>
-              </a:rPr>
-              <a:t>目标：统一执行标准，消除基础差距</a:t>
-            </a:r>
-          </a:p>
-        </p:txBody>
-      </p:sp>
-      <p:sp>
-        <p:nvSpPr>
-          <p:cNvPr id="11" name="Rounded Rectangle 10"/>
-          <p:cNvSpPr/>
-          <p:nvPr/>
-        </p:nvSpPr>
-        <p:spPr>
-          <a:xfrm>
-            <a:off x="4297680" y="914400"/>
-            <a:ext cx="3703320" cy="5303520"/>
-          </a:xfrm>
-          <a:prstGeom prst="roundRect">
-            <a:avLst>
-              <a:gd name="adj" fmla="val 8000"/>
-            </a:avLst>
-          </a:prstGeom>
-          <a:solidFill>
-            <a:srgbClr val="FFFFFF"/>
-          </a:solidFill>
-          <a:ln w="12700">
-            <a:solidFill>
-              <a:srgbClr val="D5DEE7"/>
-            </a:solidFill>
-          </a:ln>
-        </p:spPr>
-        <p:style>
-          <a:lnRef idx="1">
-            <a:schemeClr val="accent1"/>
-          </a:lnRef>
-          <a:fillRef idx="3">
-            <a:schemeClr val="accent1"/>
-          </a:fillRef>
-          <a:effectRef idx="2">
-            <a:schemeClr val="accent1"/>
-          </a:effectRef>
-          <a:fontRef idx="minor">
-            <a:schemeClr val="lt1"/>
-          </a:fontRef>
-        </p:style>
-        <p:txBody>
-          <a:bodyPr rtlCol="0" anchor="ctr"/>
-          <a:lstStyle/>
-          <a:p>
-            <a:pPr algn="ctr"/>
-          </a:p>
-        </p:txBody>
-      </p:sp>
-      <p:sp>
-        <p:nvSpPr>
-          <p:cNvPr id="12" name="Rounded Rectangle 11"/>
-          <p:cNvSpPr/>
-          <p:nvPr/>
-        </p:nvSpPr>
-        <p:spPr>
-          <a:xfrm>
-            <a:off x="4297680" y="914400"/>
-            <a:ext cx="3703320" cy="1188720"/>
-          </a:xfrm>
-          <a:prstGeom prst="roundRect">
-            <a:avLst>
-              <a:gd name="adj" fmla="val 8000"/>
-            </a:avLst>
-          </a:prstGeom>
-          <a:solidFill>
-            <a:srgbClr val="E07A2F"/>
-          </a:solidFill>
-          <a:ln>
-            <a:noFill/>
-          </a:ln>
-        </p:spPr>
-        <p:style>
-          <a:lnRef idx="1">
-            <a:schemeClr val="accent1"/>
-          </a:lnRef>
-          <a:fillRef idx="3">
-            <a:schemeClr val="accent1"/>
-          </a:fillRef>
-          <a:effectRef idx="2">
-            <a:schemeClr val="accent1"/>
-          </a:effectRef>
-          <a:fontRef idx="minor">
-            <a:schemeClr val="lt1"/>
-          </a:fontRef>
-        </p:style>
-        <p:txBody>
-          <a:bodyPr rtlCol="0" anchor="ctr"/>
-          <a:lstStyle/>
-          <a:p>
-            <a:pPr algn="ctr"/>
-          </a:p>
-        </p:txBody>
-      </p:sp>
-      <p:sp>
-        <p:nvSpPr>
-          <p:cNvPr id="13" name="TextBox 12"/>
-          <p:cNvSpPr txBox="1"/>
-          <p:nvPr/>
-        </p:nvSpPr>
-        <p:spPr>
-          <a:xfrm>
-            <a:off x="4480560" y="1097280"/>
-            <a:ext cx="3291840" cy="320040"/>
-          </a:xfrm>
-          <a:prstGeom prst="rect">
-            <a:avLst/>
-          </a:prstGeom>
-          <a:noFill/>
-        </p:spPr>
-        <p:txBody>
-          <a:bodyPr wrap="square">
-            <a:spAutoFit/>
-          </a:bodyPr>
-          <a:lstStyle/>
-          <a:p>
-            <a:pPr algn="l"/>
-            <a:r>
-              <a:rPr sz="1400" b="1">
-                <a:solidFill>
-                  <a:srgbClr val="FFFFFF"/>
-                </a:solidFill>
-                <a:latin typeface="Microsoft YaHei"/>
-                <a:ea typeface="Microsoft YaHei"/>
-              </a:rPr>
-              <a:t>02  9–10月</a:t>
-            </a:r>
-          </a:p>
-        </p:txBody>
-      </p:sp>
-      <p:sp>
-        <p:nvSpPr>
-          <p:cNvPr id="14" name="TextBox 13"/>
-          <p:cNvSpPr txBox="1"/>
-          <p:nvPr/>
-        </p:nvSpPr>
-        <p:spPr>
-          <a:xfrm>
-            <a:off x="4480560" y="1508760"/>
-            <a:ext cx="3291840" cy="365760"/>
-          </a:xfrm>
-          <a:prstGeom prst="rect">
-            <a:avLst/>
-          </a:prstGeom>
-          <a:noFill/>
-        </p:spPr>
-        <p:txBody>
-          <a:bodyPr wrap="square">
-            <a:spAutoFit/>
-          </a:bodyPr>
-          <a:lstStyle/>
-          <a:p>
-            <a:pPr algn="l"/>
-            <a:r>
-              <a:rPr sz="1600" b="1">
-                <a:solidFill>
-                  <a:srgbClr val="FFFFFF"/>
-                </a:solidFill>
-                <a:latin typeface="Microsoft YaHei"/>
-                <a:ea typeface="Microsoft YaHei"/>
-              </a:rPr>
-              <a:t>专项攻坚·文化激活</a:t>
-            </a:r>
-          </a:p>
-        </p:txBody>
-      </p:sp>
-      <p:sp>
-        <p:nvSpPr>
-          <p:cNvPr id="15" name="TextBox 14"/>
-          <p:cNvSpPr txBox="1"/>
-          <p:nvPr/>
-        </p:nvSpPr>
-        <p:spPr>
-          <a:xfrm>
-            <a:off x="4480560" y="2377440"/>
-            <a:ext cx="3291840" cy="2011680"/>
-          </a:xfrm>
-          <a:prstGeom prst="rect">
-            <a:avLst/>
-          </a:prstGeom>
-          <a:noFill/>
-        </p:spPr>
-        <p:txBody>
-          <a:bodyPr wrap="square">
-            <a:spAutoFit/>
-          </a:bodyPr>
-          <a:lstStyle/>
-          <a:p>
-            <a:pPr algn="l"/>
-            <a:r>
-              <a:rPr sz="1400" b="0">
-                <a:solidFill>
-                  <a:srgbClr val="5A6A7A"/>
-                </a:solidFill>
-                <a:latin typeface="Microsoft YaHei"/>
-                <a:ea typeface="Microsoft YaHei"/>
-              </a:rPr>
-              <a:t>拉晶专项、组件改善周、黑带赋能与绩效挂钩</a:t>
-            </a:r>
-          </a:p>
-        </p:txBody>
-      </p:sp>
-      <p:sp>
-        <p:nvSpPr>
-          <p:cNvPr id="16" name="Rounded Rectangle 15"/>
-          <p:cNvSpPr/>
-          <p:nvPr/>
-        </p:nvSpPr>
-        <p:spPr>
-          <a:xfrm>
-            <a:off x="4480560" y="5029200"/>
-            <a:ext cx="3337560" cy="914400"/>
-          </a:xfrm>
-          <a:prstGeom prst="roundRect">
-            <a:avLst>
-              <a:gd name="adj" fmla="val 8000"/>
-            </a:avLst>
-          </a:prstGeom>
-          <a:solidFill>
-            <a:srgbClr val="F3E6D8"/>
-          </a:solidFill>
-          <a:ln>
-            <a:noFill/>
-          </a:ln>
-        </p:spPr>
-        <p:style>
-          <a:lnRef idx="1">
-            <a:schemeClr val="accent1"/>
-          </a:lnRef>
-          <a:fillRef idx="3">
-            <a:schemeClr val="accent1"/>
-          </a:fillRef>
-          <a:effectRef idx="2">
-            <a:schemeClr val="accent1"/>
-          </a:effectRef>
-          <a:fontRef idx="minor">
-            <a:schemeClr val="lt1"/>
-          </a:fontRef>
-        </p:style>
-        <p:txBody>
-          <a:bodyPr rtlCol="0" anchor="ctr"/>
-          <a:lstStyle/>
-          <a:p>
-            <a:pPr algn="ctr"/>
-          </a:p>
-        </p:txBody>
-      </p:sp>
-      <p:sp>
-        <p:nvSpPr>
-          <p:cNvPr id="17" name="TextBox 16"/>
-          <p:cNvSpPr txBox="1"/>
-          <p:nvPr/>
-        </p:nvSpPr>
-        <p:spPr>
-          <a:xfrm>
-            <a:off x="4617720" y="5212080"/>
-            <a:ext cx="3108960" cy="640080"/>
-          </a:xfrm>
-          <a:prstGeom prst="rect">
-            <a:avLst/>
-          </a:prstGeom>
-          <a:noFill/>
-        </p:spPr>
-        <p:txBody>
-          <a:bodyPr wrap="square">
-            <a:spAutoFit/>
-          </a:bodyPr>
-          <a:lstStyle/>
-          <a:p>
-            <a:pPr algn="l"/>
-            <a:r>
-              <a:rPr sz="1300" b="1">
-                <a:solidFill>
-                  <a:srgbClr val="0B2A3F"/>
-                </a:solidFill>
-                <a:latin typeface="Microsoft YaHei"/>
-                <a:ea typeface="Microsoft YaHei"/>
-              </a:rPr>
-              <a:t>目标：攻克瓶颈，激发全员参与</a:t>
-            </a:r>
-          </a:p>
-        </p:txBody>
-      </p:sp>
-      <p:sp>
-        <p:nvSpPr>
-          <p:cNvPr id="18" name="Rounded Rectangle 17"/>
-          <p:cNvSpPr/>
-          <p:nvPr/>
-        </p:nvSpPr>
-        <p:spPr>
-          <a:xfrm>
-            <a:off x="8183879" y="914400"/>
-            <a:ext cx="3703320" cy="5303520"/>
-          </a:xfrm>
-          <a:prstGeom prst="roundRect">
-            <a:avLst>
-              <a:gd name="adj" fmla="val 8000"/>
-            </a:avLst>
-          </a:prstGeom>
-          <a:solidFill>
-            <a:srgbClr val="FFFFFF"/>
-          </a:solidFill>
-          <a:ln w="12700">
-            <a:solidFill>
-              <a:srgbClr val="D5DEE7"/>
-            </a:solidFill>
-          </a:ln>
-        </p:spPr>
-        <p:style>
-          <a:lnRef idx="1">
-            <a:schemeClr val="accent1"/>
-          </a:lnRef>
-          <a:fillRef idx="3">
-            <a:schemeClr val="accent1"/>
-          </a:fillRef>
-          <a:effectRef idx="2">
-            <a:schemeClr val="accent1"/>
-          </a:effectRef>
-          <a:fontRef idx="minor">
-            <a:schemeClr val="lt1"/>
-          </a:fontRef>
-        </p:style>
-        <p:txBody>
-          <a:bodyPr rtlCol="0" anchor="ctr"/>
-          <a:lstStyle/>
-          <a:p>
-            <a:pPr algn="ctr"/>
-          </a:p>
-        </p:txBody>
-      </p:sp>
-      <p:sp>
-        <p:nvSpPr>
-          <p:cNvPr id="19" name="Rounded Rectangle 18"/>
-          <p:cNvSpPr/>
-          <p:nvPr/>
-        </p:nvSpPr>
-        <p:spPr>
-          <a:xfrm>
-            <a:off x="8183879" y="914400"/>
-            <a:ext cx="3703320" cy="1188720"/>
-          </a:xfrm>
-          <a:prstGeom prst="roundRect">
-            <a:avLst>
-              <a:gd name="adj" fmla="val 8000"/>
-            </a:avLst>
-          </a:prstGeom>
-          <a:solidFill>
-            <a:srgbClr val="0B2A3F"/>
-          </a:solidFill>
-          <a:ln>
-            <a:noFill/>
-          </a:ln>
-        </p:spPr>
-        <p:style>
-          <a:lnRef idx="1">
-            <a:schemeClr val="accent1"/>
-          </a:lnRef>
-          <a:fillRef idx="3">
-            <a:schemeClr val="accent1"/>
-          </a:fillRef>
-          <a:effectRef idx="2">
-            <a:schemeClr val="accent1"/>
-          </a:effectRef>
-          <a:fontRef idx="minor">
-            <a:schemeClr val="lt1"/>
-          </a:fontRef>
-        </p:style>
-        <p:txBody>
-          <a:bodyPr rtlCol="0" anchor="ctr"/>
-          <a:lstStyle/>
-          <a:p>
-            <a:pPr algn="ctr"/>
-          </a:p>
-        </p:txBody>
-      </p:sp>
-      <p:sp>
-        <p:nvSpPr>
-          <p:cNvPr id="20" name="TextBox 19"/>
-          <p:cNvSpPr txBox="1"/>
-          <p:nvPr/>
-        </p:nvSpPr>
-        <p:spPr>
-          <a:xfrm>
-            <a:off x="8366759" y="1097280"/>
-            <a:ext cx="3291840" cy="320040"/>
-          </a:xfrm>
-          <a:prstGeom prst="rect">
-            <a:avLst/>
-          </a:prstGeom>
-          <a:noFill/>
-        </p:spPr>
-        <p:txBody>
-          <a:bodyPr wrap="square">
-            <a:spAutoFit/>
-          </a:bodyPr>
-          <a:lstStyle/>
-          <a:p>
-            <a:pPr algn="l"/>
-            <a:r>
-              <a:rPr sz="1400" b="1">
-                <a:solidFill>
-                  <a:srgbClr val="FFFFFF"/>
-                </a:solidFill>
-                <a:latin typeface="Microsoft YaHei"/>
-                <a:ea typeface="Microsoft YaHei"/>
-              </a:rPr>
-              <a:t>03  11–12月</a:t>
-            </a:r>
-          </a:p>
-        </p:txBody>
-      </p:sp>
-      <p:sp>
-        <p:nvSpPr>
-          <p:cNvPr id="21" name="TextBox 20"/>
-          <p:cNvSpPr txBox="1"/>
-          <p:nvPr/>
-        </p:nvSpPr>
-        <p:spPr>
-          <a:xfrm>
-            <a:off x="8366759" y="1508760"/>
-            <a:ext cx="3291840" cy="365760"/>
-          </a:xfrm>
-          <a:prstGeom prst="rect">
-            <a:avLst/>
-          </a:prstGeom>
-          <a:noFill/>
-        </p:spPr>
-        <p:txBody>
-          <a:bodyPr wrap="square">
-            <a:spAutoFit/>
-          </a:bodyPr>
-          <a:lstStyle/>
-          <a:p>
-            <a:pPr algn="l"/>
-            <a:r>
-              <a:rPr sz="1600" b="1">
-                <a:solidFill>
-                  <a:srgbClr val="FFFFFF"/>
-                </a:solidFill>
-                <a:latin typeface="Microsoft YaHei"/>
-                <a:ea typeface="Microsoft YaHei"/>
-              </a:rPr>
-              <a:t>成果固化·价值兑现</a:t>
-            </a:r>
-          </a:p>
-        </p:txBody>
-      </p:sp>
-      <p:sp>
-        <p:nvSpPr>
-          <p:cNvPr id="22" name="TextBox 21"/>
-          <p:cNvSpPr txBox="1"/>
-          <p:nvPr/>
-        </p:nvSpPr>
-        <p:spPr>
-          <a:xfrm>
-            <a:off x="8366759" y="2377440"/>
-            <a:ext cx="3291840" cy="2011680"/>
-          </a:xfrm>
-          <a:prstGeom prst="rect">
-            <a:avLst/>
-          </a:prstGeom>
-          <a:noFill/>
-        </p:spPr>
-        <p:txBody>
-          <a:bodyPr wrap="square">
-            <a:spAutoFit/>
-          </a:bodyPr>
-          <a:lstStyle/>
-          <a:p>
-            <a:pPr algn="l"/>
-            <a:r>
-              <a:rPr sz="1400" b="0">
-                <a:solidFill>
-                  <a:srgbClr val="5A6A7A"/>
-                </a:solidFill>
-                <a:latin typeface="Microsoft YaHei"/>
-                <a:ea typeface="Microsoft YaHei"/>
-              </a:rPr>
-              <a:t>人才认证、案例库、量化经济价值闭环</a:t>
-            </a:r>
-          </a:p>
-        </p:txBody>
-      </p:sp>
-      <p:sp>
-        <p:nvSpPr>
-          <p:cNvPr id="23" name="Rounded Rectangle 22"/>
-          <p:cNvSpPr/>
-          <p:nvPr/>
-        </p:nvSpPr>
-        <p:spPr>
-          <a:xfrm>
-            <a:off x="8366759" y="5029200"/>
-            <a:ext cx="3337560" cy="914400"/>
-          </a:xfrm>
-          <a:prstGeom prst="roundRect">
-            <a:avLst>
-              <a:gd name="adj" fmla="val 8000"/>
-            </a:avLst>
-          </a:prstGeom>
-          <a:solidFill>
-            <a:srgbClr val="F3E6D8"/>
-          </a:solidFill>
-          <a:ln>
-            <a:noFill/>
-          </a:ln>
-        </p:spPr>
-        <p:style>
-          <a:lnRef idx="1">
-            <a:schemeClr val="accent1"/>
-          </a:lnRef>
-          <a:fillRef idx="3">
-            <a:schemeClr val="accent1"/>
-          </a:fillRef>
-          <a:effectRef idx="2">
-            <a:schemeClr val="accent1"/>
-          </a:effectRef>
-          <a:fontRef idx="minor">
-            <a:schemeClr val="lt1"/>
-          </a:fontRef>
-        </p:style>
-        <p:txBody>
-          <a:bodyPr rtlCol="0" anchor="ctr"/>
-          <a:lstStyle/>
-          <a:p>
-            <a:pPr algn="ctr"/>
-          </a:p>
-        </p:txBody>
-      </p:sp>
-      <p:sp>
-        <p:nvSpPr>
-          <p:cNvPr id="24" name="TextBox 23"/>
-          <p:cNvSpPr txBox="1"/>
-          <p:nvPr/>
-        </p:nvSpPr>
-        <p:spPr>
-          <a:xfrm>
-            <a:off x="8503919" y="5212080"/>
-            <a:ext cx="3108960" cy="640080"/>
-          </a:xfrm>
-          <a:prstGeom prst="rect">
-            <a:avLst/>
-          </a:prstGeom>
-          <a:noFill/>
-        </p:spPr>
-        <p:txBody>
-          <a:bodyPr wrap="square">
-            <a:spAutoFit/>
-          </a:bodyPr>
-          <a:lstStyle/>
-          <a:p>
-            <a:pPr algn="l"/>
-            <a:r>
-              <a:rPr sz="1300" b="1">
-                <a:solidFill>
-                  <a:srgbClr val="0B2A3F"/>
-                </a:solidFill>
-                <a:latin typeface="Microsoft YaHei"/>
-                <a:ea typeface="Microsoft YaHei"/>
-              </a:rPr>
-              <a:t>目标：长效机制，价值清晰可见</a:t>
-            </a:r>
-          </a:p>
-        </p:txBody>
-      </p:sp>
-    </p:spTree>
-  </p:cSld>
-  <p:clrMapOvr>
-    <a:masterClrMapping/>
-  </p:clrMapOvr>
-</p:sld>
-</file>
-
-<file path=ppt/slides/slide9.xml><?xml version="1.0" encoding="utf-8"?>
-<p:sld xmlns:a="http://schemas.openxmlformats.org/drawingml/2006/main" xmlns:p="http://schemas.openxmlformats.org/presentationml/2006/main" xmlns:r="http://schemas.openxmlformats.org/officeDocument/2006/relationships">
-  <p:cSld>
-    <p:spTree>
-      <p:nvGrpSpPr>
-        <p:cNvPr id="1" name=""/>
-        <p:cNvGrpSpPr/>
-        <p:nvPr/>
-      </p:nvGrpSpPr>
-      <p:grpSpPr/>
-      <p:sp>
-        <p:nvSpPr>
-          <p:cNvPr id="2" name="Rounded Rectangle 1"/>
-          <p:cNvSpPr/>
-          <p:nvPr/>
-        </p:nvSpPr>
-        <p:spPr>
-          <a:xfrm>
-            <a:off x="0" y="0"/>
-            <a:ext cx="12191695" cy="6858000"/>
-          </a:xfrm>
-          <a:prstGeom prst="roundRect">
-            <a:avLst>
-              <a:gd name="adj" fmla="val 8000"/>
-            </a:avLst>
-          </a:prstGeom>
-          <a:solidFill>
-            <a:srgbClr val="F5F7FA"/>
-          </a:solidFill>
-          <a:ln>
-            <a:noFill/>
-          </a:ln>
-        </p:spPr>
-        <p:style>
-          <a:lnRef idx="1">
-            <a:schemeClr val="accent1"/>
-          </a:lnRef>
-          <a:fillRef idx="3">
-            <a:schemeClr val="accent1"/>
-          </a:fillRef>
-          <a:effectRef idx="2">
-            <a:schemeClr val="accent1"/>
-          </a:effectRef>
-          <a:fontRef idx="minor">
-            <a:schemeClr val="lt1"/>
-          </a:fontRef>
-        </p:style>
-        <p:txBody>
-          <a:bodyPr rtlCol="0" anchor="ctr"/>
-          <a:lstStyle/>
-          <a:p>
-            <a:pPr algn="ctr"/>
-          </a:p>
-        </p:txBody>
-      </p:sp>
-      <p:sp>
-        <p:nvSpPr>
-          <p:cNvPr id="3" name="TextBox 2"/>
-          <p:cNvSpPr txBox="1"/>
-          <p:nvPr/>
-        </p:nvSpPr>
-        <p:spPr>
-          <a:xfrm>
-            <a:off x="457200" y="228600"/>
-            <a:ext cx="10972800" cy="365760"/>
-          </a:xfrm>
-          <a:prstGeom prst="rect">
-            <a:avLst/>
-          </a:prstGeom>
-          <a:noFill/>
-        </p:spPr>
-        <p:txBody>
-          <a:bodyPr wrap="square">
-            <a:spAutoFit/>
-          </a:bodyPr>
-          <a:lstStyle/>
-          <a:p>
-            <a:pPr algn="l"/>
-            <a:r>
-              <a:rPr sz="2000" b="1">
-                <a:solidFill>
-                  <a:srgbClr val="0B2A3F"/>
-                </a:solidFill>
-                <a:latin typeface="Microsoft YaHei"/>
-                <a:ea typeface="Microsoft YaHei"/>
-              </a:rPr>
-              <a:t>精益全域落地｜以「真善美」锚定改善底层逻辑</a:t>
-            </a:r>
-          </a:p>
-        </p:txBody>
-      </p:sp>
-      <p:sp>
-        <p:nvSpPr>
-          <p:cNvPr id="4" name="Rounded Rectangle 3"/>
-          <p:cNvSpPr/>
-          <p:nvPr/>
-        </p:nvSpPr>
-        <p:spPr>
-          <a:xfrm>
-            <a:off x="457200" y="1005840"/>
-            <a:ext cx="3703320" cy="5029200"/>
-          </a:xfrm>
-          <a:prstGeom prst="roundRect">
-            <a:avLst>
-              <a:gd name="adj" fmla="val 8000"/>
-            </a:avLst>
-          </a:prstGeom>
-          <a:solidFill>
-            <a:srgbClr val="FFFFFF"/>
-          </a:solidFill>
-          <a:ln w="12700">
-            <a:solidFill>
-              <a:srgbClr val="D5DEE7"/>
-            </a:solidFill>
-          </a:ln>
-        </p:spPr>
-        <p:style>
-          <a:lnRef idx="1">
-            <a:schemeClr val="accent1"/>
-          </a:lnRef>
-          <a:fillRef idx="3">
-            <a:schemeClr val="accent1"/>
-          </a:fillRef>
-          <a:effectRef idx="2">
-            <a:schemeClr val="accent1"/>
-          </a:effectRef>
-          <a:fontRef idx="minor">
-            <a:schemeClr val="lt1"/>
-          </a:fontRef>
-        </p:style>
-        <p:txBody>
-          <a:bodyPr rtlCol="0" anchor="ctr"/>
-          <a:lstStyle/>
-          <a:p>
-            <a:pPr algn="ctr"/>
-          </a:p>
-        </p:txBody>
-      </p:sp>
-      <p:sp>
-        <p:nvSpPr>
-          <p:cNvPr id="5" name="Rounded Rectangle 4"/>
-          <p:cNvSpPr/>
-          <p:nvPr/>
-        </p:nvSpPr>
-        <p:spPr>
-          <a:xfrm>
-            <a:off x="457200" y="1005840"/>
-            <a:ext cx="3703320" cy="1097280"/>
-          </a:xfrm>
-          <a:prstGeom prst="roundRect">
-            <a:avLst>
-              <a:gd name="adj" fmla="val 8000"/>
-            </a:avLst>
-          </a:prstGeom>
-          <a:solidFill>
-            <a:srgbClr val="0B2A3F"/>
-          </a:solidFill>
-          <a:ln>
-            <a:noFill/>
-          </a:ln>
-        </p:spPr>
-        <p:style>
-          <a:lnRef idx="1">
-            <a:schemeClr val="accent1"/>
-          </a:lnRef>
-          <a:fillRef idx="3">
-            <a:schemeClr val="accent1"/>
-          </a:fillRef>
-          <a:effectRef idx="2">
-            <a:schemeClr val="accent1"/>
-          </a:effectRef>
-          <a:fontRef idx="minor">
-            <a:schemeClr val="lt1"/>
-          </a:fontRef>
-        </p:style>
-        <p:txBody>
-          <a:bodyPr rtlCol="0" anchor="ctr"/>
-          <a:lstStyle/>
-          <a:p>
-            <a:pPr algn="ctr"/>
-          </a:p>
-        </p:txBody>
-      </p:sp>
-      <p:sp>
-        <p:nvSpPr>
-          <p:cNvPr id="6" name="TextBox 5"/>
-          <p:cNvSpPr txBox="1"/>
-          <p:nvPr/>
-        </p:nvSpPr>
-        <p:spPr>
-          <a:xfrm>
-            <a:off x="685800" y="1325880"/>
-            <a:ext cx="3200400" cy="457200"/>
-          </a:xfrm>
-          <a:prstGeom prst="rect">
-            <a:avLst/>
-          </a:prstGeom>
-          <a:noFill/>
-        </p:spPr>
-        <p:txBody>
-          <a:bodyPr wrap="square">
-            <a:spAutoFit/>
-          </a:bodyPr>
-          <a:lstStyle/>
-          <a:p>
-            <a:pPr algn="l"/>
-            <a:r>
-              <a:rPr sz="1800" b="1">
-                <a:solidFill>
-                  <a:srgbClr val="FFFFFF"/>
-                </a:solidFill>
-                <a:latin typeface="Microsoft YaHei"/>
-                <a:ea typeface="Microsoft YaHei"/>
-              </a:rPr>
-              <a:t>守「真」· 可信改善</a:t>
-            </a:r>
-          </a:p>
-        </p:txBody>
-      </p:sp>
-      <p:sp>
-        <p:nvSpPr>
-          <p:cNvPr id="7" name="TextBox 6"/>
-          <p:cNvSpPr txBox="1"/>
-          <p:nvPr/>
-        </p:nvSpPr>
-        <p:spPr>
-          <a:xfrm>
-            <a:off x="685800" y="2468880"/>
-            <a:ext cx="3200400" cy="2926080"/>
-          </a:xfrm>
-          <a:prstGeom prst="rect">
-            <a:avLst/>
-          </a:prstGeom>
-          <a:noFill/>
-        </p:spPr>
-        <p:txBody>
-          <a:bodyPr wrap="square">
-            <a:spAutoFit/>
-          </a:bodyPr>
-          <a:lstStyle/>
-          <a:p>
-            <a:pPr algn="l"/>
-            <a:r>
-              <a:rPr sz="1500" b="0">
-                <a:solidFill>
-                  <a:srgbClr val="5A6A7A"/>
-                </a:solidFill>
-                <a:latin typeface="Microsoft YaHei"/>
-                <a:ea typeface="Microsoft YaHei"/>
-              </a:rPr>
-              <a:t>全流程追溯、SPC 底线、根因分析
-拒绝假改善，让改善可见</a:t>
-            </a:r>
-          </a:p>
-        </p:txBody>
-      </p:sp>
-      <p:sp>
-        <p:nvSpPr>
-          <p:cNvPr id="8" name="Rounded Rectangle 7"/>
-          <p:cNvSpPr/>
-          <p:nvPr/>
-        </p:nvSpPr>
-        <p:spPr>
-          <a:xfrm>
-            <a:off x="4343400" y="1005840"/>
-            <a:ext cx="3703320" cy="5029200"/>
-          </a:xfrm>
-          <a:prstGeom prst="roundRect">
-            <a:avLst>
-              <a:gd name="adj" fmla="val 8000"/>
-            </a:avLst>
-          </a:prstGeom>
-          <a:solidFill>
-            <a:srgbClr val="FFFFFF"/>
-          </a:solidFill>
-          <a:ln w="12700">
-            <a:solidFill>
-              <a:srgbClr val="D5DEE7"/>
-            </a:solidFill>
-          </a:ln>
-        </p:spPr>
-        <p:style>
-          <a:lnRef idx="1">
-            <a:schemeClr val="accent1"/>
-          </a:lnRef>
-          <a:fillRef idx="3">
-            <a:schemeClr val="accent1"/>
-          </a:fillRef>
-          <a:effectRef idx="2">
-            <a:schemeClr val="accent1"/>
-          </a:effectRef>
-          <a:fontRef idx="minor">
-            <a:schemeClr val="lt1"/>
-          </a:fontRef>
-        </p:style>
-        <p:txBody>
-          <a:bodyPr rtlCol="0" anchor="ctr"/>
-          <a:lstStyle/>
-          <a:p>
-            <a:pPr algn="ctr"/>
-          </a:p>
-        </p:txBody>
-      </p:sp>
-      <p:sp>
-        <p:nvSpPr>
-          <p:cNvPr id="9" name="Rounded Rectangle 8"/>
-          <p:cNvSpPr/>
-          <p:nvPr/>
-        </p:nvSpPr>
-        <p:spPr>
-          <a:xfrm>
-            <a:off x="4343400" y="1005840"/>
-            <a:ext cx="3703320" cy="1097280"/>
+            <a:off x="4297680" y="960120"/>
+            <a:ext cx="3749039" cy="1097280"/>
           </a:xfrm>
           <a:prstGeom prst="roundRect">
             <a:avLst>
@@ -10337,14 +8955,14 @@
       </p:sp>
       <p:sp>
         <p:nvSpPr>
-          <p:cNvPr id="10" name="TextBox 9"/>
+          <p:cNvPr id="14" name="TextBox 13"/>
           <p:cNvSpPr txBox="1"/>
           <p:nvPr/>
         </p:nvSpPr>
         <p:spPr>
           <a:xfrm>
-            <a:off x="4572000" y="1325880"/>
-            <a:ext cx="3200400" cy="457200"/>
+            <a:off x="4480560" y="1143000"/>
+            <a:ext cx="3383280" cy="365760"/>
           </a:xfrm>
           <a:prstGeom prst="rect">
             <a:avLst/>
@@ -10359,28 +8977,28 @@
           <a:p>
             <a:pPr algn="l"/>
             <a:r>
-              <a:rPr sz="1800" b="1">
+              <a:rPr sz="2000" b="1">
                 <a:solidFill>
                   <a:srgbClr val="FFFFFF"/>
                 </a:solidFill>
                 <a:latin typeface="Microsoft YaHei"/>
                 <a:ea typeface="Microsoft YaHei"/>
               </a:rPr>
-              <a:t>行「善」· 有效改善</a:t>
-            </a:r>
-          </a:p>
-        </p:txBody>
-      </p:sp>
-      <p:sp>
-        <p:nvSpPr>
-          <p:cNvPr id="11" name="TextBox 10"/>
+              <a:t>行「善」</a:t>
+            </a:r>
+          </a:p>
+        </p:txBody>
+      </p:sp>
+      <p:sp>
+        <p:nvSpPr>
+          <p:cNvPr id="15" name="TextBox 14"/>
           <p:cNvSpPr txBox="1"/>
           <p:nvPr/>
         </p:nvSpPr>
         <p:spPr>
           <a:xfrm>
-            <a:off x="4572000" y="2468880"/>
-            <a:ext cx="3200400" cy="2926080"/>
+            <a:off x="4480560" y="1600200"/>
+            <a:ext cx="3383280" cy="274320"/>
           </a:xfrm>
           <a:prstGeom prst="rect">
             <a:avLst/>
@@ -10395,29 +9013,66 @@
           <a:p>
             <a:pPr algn="l"/>
             <a:r>
-              <a:rPr sz="1500" b="0">
-                <a:solidFill>
-                  <a:srgbClr val="5A6A7A"/>
+              <a:rPr sz="1200" b="0">
+                <a:solidFill>
+                  <a:srgbClr val="A8C5D4"/>
                 </a:solidFill>
                 <a:latin typeface="Microsoft YaHei"/>
                 <a:ea typeface="Microsoft YaHei"/>
               </a:rPr>
-              <a:t>TPM/SMED 夯基、痛点攻坚、一地一策
-系统突破，让改善有价值</a:t>
-            </a:r>
-          </a:p>
-        </p:txBody>
-      </p:sp>
-      <p:sp>
-        <p:nvSpPr>
-          <p:cNvPr id="12" name="Rounded Rectangle 11"/>
+              <a:t>守正创新、系统攻坚</a:t>
+            </a:r>
+          </a:p>
+        </p:txBody>
+      </p:sp>
+      <p:sp>
+        <p:nvSpPr>
+          <p:cNvPr id="16" name="TextBox 15"/>
+          <p:cNvSpPr txBox="1"/>
+          <p:nvPr/>
+        </p:nvSpPr>
+        <p:spPr>
+          <a:xfrm>
+            <a:off x="4480560" y="2331720"/>
+            <a:ext cx="3383280" cy="2560320"/>
+          </a:xfrm>
+          <a:prstGeom prst="rect">
+            <a:avLst/>
+          </a:prstGeom>
+          <a:noFill/>
+        </p:spPr>
+        <p:txBody>
+          <a:bodyPr wrap="square">
+            <a:spAutoFit/>
+          </a:bodyPr>
+          <a:lstStyle/>
+          <a:p>
+            <a:pPr algn="l"/>
+            <a:r>
+              <a:rPr sz="1200" b="0">
+                <a:solidFill>
+                  <a:srgbClr val="5D6D7E"/>
+                </a:solidFill>
+                <a:latin typeface="Microsoft YaHei"/>
+                <a:ea typeface="Microsoft YaHei"/>
+              </a:rPr>
+              <a:t>夯实基础：推进TPM、SMED，闭环到一线。
+攻坚痛点：聚焦拉晶、切片、组件核心瓶颈。
+一地一策：适配不同基地特征定制策略。</a:t>
+            </a:r>
+          </a:p>
+        </p:txBody>
+      </p:sp>
+      <p:sp>
+        <p:nvSpPr>
+          <p:cNvPr id="17" name="Rounded Rectangle 16"/>
           <p:cNvSpPr/>
           <p:nvPr/>
         </p:nvSpPr>
         <p:spPr>
           <a:xfrm>
-            <a:off x="8229600" y="1005840"/>
-            <a:ext cx="3703320" cy="5029200"/>
+            <a:off x="4434840" y="5120640"/>
+            <a:ext cx="3474720" cy="1097280"/>
           </a:xfrm>
           <a:prstGeom prst="roundRect">
             <a:avLst>
@@ -10425,12 +9080,10 @@
             </a:avLst>
           </a:prstGeom>
           <a:solidFill>
-            <a:srgbClr val="FFFFFF"/>
+            <a:srgbClr val="FFF4EB"/>
           </a:solidFill>
-          <a:ln w="12700">
-            <a:solidFill>
-              <a:srgbClr val="D5DEE7"/>
-            </a:solidFill>
+          <a:ln>
+            <a:noFill/>
           </a:ln>
         </p:spPr>
         <p:style>
@@ -10457,14 +9110,50 @@
       </p:sp>
       <p:sp>
         <p:nvSpPr>
-          <p:cNvPr id="13" name="Rounded Rectangle 12"/>
+          <p:cNvPr id="18" name="TextBox 17"/>
+          <p:cNvSpPr txBox="1"/>
+          <p:nvPr/>
+        </p:nvSpPr>
+        <p:spPr>
+          <a:xfrm>
+            <a:off x="4572000" y="5303520"/>
+            <a:ext cx="3200400" cy="777240"/>
+          </a:xfrm>
+          <a:prstGeom prst="rect">
+            <a:avLst/>
+          </a:prstGeom>
+          <a:noFill/>
+        </p:spPr>
+        <p:txBody>
+          <a:bodyPr wrap="square">
+            <a:spAutoFit/>
+          </a:bodyPr>
+          <a:lstStyle/>
+          <a:p>
+            <a:pPr algn="l"/>
+            <a:r>
+              <a:rPr sz="1200" b="1">
+                <a:solidFill>
+                  <a:srgbClr val="1B3A5F"/>
+                </a:solidFill>
+                <a:latin typeface="Microsoft YaHei"/>
+                <a:ea typeface="Microsoft YaHei"/>
+              </a:rPr>
+              <a:t>有效改善：系统突破核心痛点，让改善有价值</a:t>
+            </a:r>
+          </a:p>
+        </p:txBody>
+      </p:sp>
+      <p:sp>
+        <p:nvSpPr>
+          <p:cNvPr id="19" name="Rounded Rectangle 18"/>
           <p:cNvSpPr/>
           <p:nvPr/>
         </p:nvSpPr>
         <p:spPr>
           <a:xfrm>
-            <a:off x="8229600" y="1005840"/>
-            <a:ext cx="3703320" cy="1097280"/>
+            <a:off x="8229600" y="960120"/>
+            <a:ext cx="3749039" cy="5486400"/>
           </a:xfrm>
           <a:prstGeom prst="roundRect">
             <a:avLst>
@@ -10472,10 +9161,12 @@
             </a:avLst>
           </a:prstGeom>
           <a:solidFill>
-            <a:srgbClr val="0B2A3F"/>
+            <a:srgbClr val="FFFFFF"/>
           </a:solidFill>
-          <a:ln>
-            <a:noFill/>
+          <a:ln w="15875">
+            <a:solidFill>
+              <a:srgbClr val="E8EEF2"/>
+            </a:solidFill>
           </a:ln>
         </p:spPr>
         <p:style>
@@ -10502,14 +9193,59 @@
       </p:sp>
       <p:sp>
         <p:nvSpPr>
-          <p:cNvPr id="14" name="TextBox 13"/>
+          <p:cNvPr id="20" name="Rounded Rectangle 19"/>
+          <p:cNvSpPr/>
+          <p:nvPr/>
+        </p:nvSpPr>
+        <p:spPr>
+          <a:xfrm>
+            <a:off x="8229600" y="960120"/>
+            <a:ext cx="3749039" cy="1097280"/>
+          </a:xfrm>
+          <a:prstGeom prst="roundRect">
+            <a:avLst>
+              <a:gd name="adj" fmla="val 8000"/>
+            </a:avLst>
+          </a:prstGeom>
+          <a:solidFill>
+            <a:srgbClr val="1B3A5F"/>
+          </a:solidFill>
+          <a:ln>
+            <a:noFill/>
+          </a:ln>
+        </p:spPr>
+        <p:style>
+          <a:lnRef idx="1">
+            <a:schemeClr val="accent1"/>
+          </a:lnRef>
+          <a:fillRef idx="3">
+            <a:schemeClr val="accent1"/>
+          </a:fillRef>
+          <a:effectRef idx="2">
+            <a:schemeClr val="accent1"/>
+          </a:effectRef>
+          <a:fontRef idx="minor">
+            <a:schemeClr val="lt1"/>
+          </a:fontRef>
+        </p:style>
+        <p:txBody>
+          <a:bodyPr rtlCol="0" anchor="ctr"/>
+          <a:lstStyle/>
+          <a:p>
+            <a:pPr algn="ctr"/>
+          </a:p>
+        </p:txBody>
+      </p:sp>
+      <p:sp>
+        <p:nvSpPr>
+          <p:cNvPr id="21" name="TextBox 20"/>
           <p:cNvSpPr txBox="1"/>
           <p:nvPr/>
         </p:nvSpPr>
         <p:spPr>
           <a:xfrm>
-            <a:off x="8458200" y="1325880"/>
-            <a:ext cx="3200400" cy="457200"/>
+            <a:off x="8412480" y="1143000"/>
+            <a:ext cx="3383280" cy="365760"/>
           </a:xfrm>
           <a:prstGeom prst="rect">
             <a:avLst/>
@@ -10524,28 +9260,28 @@
           <a:p>
             <a:pPr algn="l"/>
             <a:r>
-              <a:rPr sz="1800" b="1">
+              <a:rPr sz="2000" b="1">
                 <a:solidFill>
                   <a:srgbClr val="FFFFFF"/>
                 </a:solidFill>
                 <a:latin typeface="Microsoft YaHei"/>
                 <a:ea typeface="Microsoft YaHei"/>
               </a:rPr>
-              <a:t>求「美」· 长效改善</a:t>
-            </a:r>
-          </a:p>
-        </p:txBody>
-      </p:sp>
-      <p:sp>
-        <p:nvSpPr>
-          <p:cNvPr id="15" name="TextBox 14"/>
+              <a:t>求「美」</a:t>
+            </a:r>
+          </a:p>
+        </p:txBody>
+      </p:sp>
+      <p:sp>
+        <p:nvSpPr>
+          <p:cNvPr id="22" name="TextBox 21"/>
           <p:cNvSpPr txBox="1"/>
           <p:nvPr/>
         </p:nvSpPr>
         <p:spPr>
           <a:xfrm>
-            <a:off x="8458200" y="2468880"/>
-            <a:ext cx="3200400" cy="2926080"/>
+            <a:off x="8412480" y="1600200"/>
+            <a:ext cx="3383280" cy="274320"/>
           </a:xfrm>
           <a:prstGeom prst="rect">
             <a:avLst/>
@@ -10560,15 +9296,133 @@
           <a:p>
             <a:pPr algn="l"/>
             <a:r>
-              <a:rPr sz="1500" b="0">
-                <a:solidFill>
-                  <a:srgbClr val="5A6A7A"/>
+              <a:rPr sz="1200" b="0">
+                <a:solidFill>
+                  <a:srgbClr val="A8C5D4"/>
                 </a:solidFill>
                 <a:latin typeface="Microsoft YaHei"/>
                 <a:ea typeface="Microsoft YaHei"/>
               </a:rPr>
-              <a:t>6S 目视化、防错/EL、零缺陷
-成果固化，让改善成日常</a:t>
+              <a:t>极致现场、零缺陷品质</a:t>
+            </a:r>
+          </a:p>
+        </p:txBody>
+      </p:sp>
+      <p:sp>
+        <p:nvSpPr>
+          <p:cNvPr id="23" name="TextBox 22"/>
+          <p:cNvSpPr txBox="1"/>
+          <p:nvPr/>
+        </p:nvSpPr>
+        <p:spPr>
+          <a:xfrm>
+            <a:off x="8412480" y="2331720"/>
+            <a:ext cx="3383280" cy="2560320"/>
+          </a:xfrm>
+          <a:prstGeom prst="rect">
+            <a:avLst/>
+          </a:prstGeom>
+          <a:noFill/>
+        </p:spPr>
+        <p:txBody>
+          <a:bodyPr wrap="square">
+            <a:spAutoFit/>
+          </a:bodyPr>
+          <a:lstStyle/>
+          <a:p>
+            <a:pPr algn="l"/>
+            <a:r>
+              <a:rPr sz="1200" b="0">
+                <a:solidFill>
+                  <a:srgbClr val="5D6D7E"/>
+                </a:solidFill>
+                <a:latin typeface="Microsoft YaHei"/>
+                <a:ea typeface="Microsoft YaHei"/>
+              </a:rPr>
+              <a:t>现场之美：全域6S与目视化，消除隐形浪费。
+品质之美：防错、巡检、EL，严防不良流出。
+零缺陷：严控批次稳定性，降低客诉损失。</a:t>
+            </a:r>
+          </a:p>
+        </p:txBody>
+      </p:sp>
+      <p:sp>
+        <p:nvSpPr>
+          <p:cNvPr id="24" name="Rounded Rectangle 23"/>
+          <p:cNvSpPr/>
+          <p:nvPr/>
+        </p:nvSpPr>
+        <p:spPr>
+          <a:xfrm>
+            <a:off x="8366760" y="5120640"/>
+            <a:ext cx="3474720" cy="1097280"/>
+          </a:xfrm>
+          <a:prstGeom prst="roundRect">
+            <a:avLst>
+              <a:gd name="adj" fmla="val 8000"/>
+            </a:avLst>
+          </a:prstGeom>
+          <a:solidFill>
+            <a:srgbClr val="FFF4EB"/>
+          </a:solidFill>
+          <a:ln>
+            <a:noFill/>
+          </a:ln>
+        </p:spPr>
+        <p:style>
+          <a:lnRef idx="1">
+            <a:schemeClr val="accent1"/>
+          </a:lnRef>
+          <a:fillRef idx="3">
+            <a:schemeClr val="accent1"/>
+          </a:fillRef>
+          <a:effectRef idx="2">
+            <a:schemeClr val="accent1"/>
+          </a:effectRef>
+          <a:fontRef idx="minor">
+            <a:schemeClr val="lt1"/>
+          </a:fontRef>
+        </p:style>
+        <p:txBody>
+          <a:bodyPr rtlCol="0" anchor="ctr"/>
+          <a:lstStyle/>
+          <a:p>
+            <a:pPr algn="ctr"/>
+          </a:p>
+        </p:txBody>
+      </p:sp>
+      <p:sp>
+        <p:nvSpPr>
+          <p:cNvPr id="25" name="TextBox 24"/>
+          <p:cNvSpPr txBox="1"/>
+          <p:nvPr/>
+        </p:nvSpPr>
+        <p:spPr>
+          <a:xfrm>
+            <a:off x="8503920" y="5303520"/>
+            <a:ext cx="3200400" cy="777240"/>
+          </a:xfrm>
+          <a:prstGeom prst="rect">
+            <a:avLst/>
+          </a:prstGeom>
+          <a:noFill/>
+        </p:spPr>
+        <p:txBody>
+          <a:bodyPr wrap="square">
+            <a:spAutoFit/>
+          </a:bodyPr>
+          <a:lstStyle/>
+          <a:p>
+            <a:pPr algn="l"/>
+            <a:r>
+              <a:rPr sz="1200" b="1">
+                <a:solidFill>
+                  <a:srgbClr val="1B3A5F"/>
+                </a:solidFill>
+                <a:latin typeface="Microsoft YaHei"/>
+                <a:ea typeface="Microsoft YaHei"/>
+              </a:rPr>
+              <a:t>长效改善：成果标准化、持续精进，让改善成日常</a:t>
             </a:r>
           </a:p>
         </p:txBody>

--- a/examples/gps-lean-xiangzong/output/GPS精益_筑基势起_向总汇报.pptx
+++ b/examples/gps-lean-xiangzong/output/GPS精益_筑基势起_向总汇报.pptx
@@ -3095,7 +3095,7 @@
       <p:grpSpPr/>
       <p:sp>
         <p:nvSpPr>
-          <p:cNvPr id="2" name="Rounded Rectangle 1"/>
+          <p:cNvPr id="2" name="Rectangle 1"/>
           <p:cNvSpPr/>
           <p:nvPr/>
         </p:nvSpPr>
@@ -3104,13 +3104,11 @@
             <a:off x="0" y="0"/>
             <a:ext cx="12191695" cy="6858000"/>
           </a:xfrm>
-          <a:prstGeom prst="roundRect">
-            <a:avLst>
-              <a:gd name="adj" fmla="val 8000"/>
-            </a:avLst>
+          <a:prstGeom prst="rect">
+            <a:avLst/>
           </a:prstGeom>
           <a:solidFill>
-            <a:srgbClr val="FFFFFF"/>
+            <a:srgbClr val="F1F5F9"/>
           </a:solidFill>
           <a:ln>
             <a:noFill/>
@@ -3140,63 +3138,23 @@
       </p:sp>
       <p:sp>
         <p:nvSpPr>
-          <p:cNvPr id="3" name="TextBox 2"/>
-          <p:cNvSpPr txBox="1"/>
-          <p:nvPr/>
-        </p:nvSpPr>
-        <p:spPr>
-          <a:xfrm>
-            <a:off x="411480" y="228600"/>
-            <a:ext cx="10972800" cy="411480"/>
-          </a:xfrm>
-          <a:prstGeom prst="rect">
-            <a:avLst/>
-          </a:prstGeom>
-          <a:noFill/>
-        </p:spPr>
-        <p:txBody>
-          <a:bodyPr wrap="square">
-            <a:spAutoFit/>
-          </a:bodyPr>
-          <a:lstStyle/>
-          <a:p>
-            <a:pPr algn="l"/>
-            <a:r>
-              <a:rPr sz="2600" b="1">
-                <a:solidFill>
-                  <a:srgbClr val="1B3A5F"/>
-                </a:solidFill>
-                <a:latin typeface="Microsoft YaHei"/>
-                <a:ea typeface="Microsoft YaHei"/>
-              </a:rPr>
-              <a:t>当前精益推进现存真实痛点</a:t>
-            </a:r>
-          </a:p>
-        </p:txBody>
-      </p:sp>
-      <p:sp>
-        <p:nvSpPr>
-          <p:cNvPr id="4" name="Rounded Rectangle 3"/>
+          <p:cNvPr id="3" name="Rectangle 2"/>
           <p:cNvSpPr/>
           <p:nvPr/>
         </p:nvSpPr>
         <p:spPr>
           <a:xfrm>
-            <a:off x="365760" y="822960"/>
-            <a:ext cx="5669280" cy="1600200"/>
-          </a:xfrm>
-          <a:prstGeom prst="roundRect">
-            <a:avLst>
-              <a:gd name="adj" fmla="val 8000"/>
-            </a:avLst>
+            <a:off x="0" y="0"/>
+            <a:ext cx="12191695" cy="685800"/>
+          </a:xfrm>
+          <a:prstGeom prst="rect">
+            <a:avLst/>
           </a:prstGeom>
           <a:solidFill>
-            <a:srgbClr val="FFFFFF"/>
+            <a:srgbClr val="0F172A"/>
           </a:solidFill>
-          <a:ln w="15875">
-            <a:solidFill>
-              <a:srgbClr val="E8EEF2"/>
-            </a:solidFill>
+          <a:ln>
+            <a:noFill/>
           </a:ln>
         </p:spPr>
         <p:style>
@@ -3223,14 +3181,14 @@
       </p:sp>
       <p:sp>
         <p:nvSpPr>
-          <p:cNvPr id="5" name="TextBox 4"/>
+          <p:cNvPr id="4" name="TextBox 3"/>
           <p:cNvSpPr txBox="1"/>
           <p:nvPr/>
         </p:nvSpPr>
         <p:spPr>
           <a:xfrm>
-            <a:off x="548640" y="960120"/>
-            <a:ext cx="5303520" cy="320040"/>
+            <a:off x="411480" y="182880"/>
+            <a:ext cx="10058400" cy="365760"/>
           </a:xfrm>
           <a:prstGeom prst="rect">
             <a:avLst/>
@@ -3245,76 +3203,40 @@
           <a:p>
             <a:pPr algn="l"/>
             <a:r>
-              <a:rPr sz="1400" b="1">
-                <a:solidFill>
-                  <a:srgbClr val="E87A2E"/>
+              <a:rPr sz="2200" b="1">
+                <a:solidFill>
+                  <a:srgbClr val="FFFFFF"/>
                 </a:solidFill>
                 <a:latin typeface="Microsoft YaHei"/>
                 <a:ea typeface="Microsoft YaHei"/>
               </a:rPr>
-              <a:t>01 落地不均衡，标杆与常态两极分化</a:t>
-            </a:r>
-          </a:p>
-        </p:txBody>
-      </p:sp>
-      <p:sp>
-        <p:nvSpPr>
-          <p:cNvPr id="6" name="TextBox 5"/>
-          <p:cNvSpPr txBox="1"/>
-          <p:nvPr/>
-        </p:nvSpPr>
-        <p:spPr>
-          <a:xfrm>
-            <a:off x="548640" y="1325880"/>
-            <a:ext cx="5303520" cy="960120"/>
-          </a:xfrm>
-          <a:prstGeom prst="rect">
-            <a:avLst/>
-          </a:prstGeom>
-          <a:noFill/>
-        </p:spPr>
-        <p:txBody>
-          <a:bodyPr wrap="square">
-            <a:spAutoFit/>
-          </a:bodyPr>
-          <a:lstStyle/>
-          <a:p>
-            <a:pPr algn="l"/>
-            <a:r>
-              <a:rPr sz="1200" b="0">
-                <a:solidFill>
-                  <a:srgbClr val="5D6D7E"/>
-                </a:solidFill>
-                <a:latin typeface="Microsoft YaHei"/>
-                <a:ea typeface="Microsoft YaHei"/>
-              </a:rPr>
-              <a:t>标杆产线成果显著，但多数产线仍停留在表层5S整改；深层次浪费与工艺瓶颈未触及，存在「重展示、轻落地、难持续」的形式化问题。</a:t>
-            </a:r>
-          </a:p>
-        </p:txBody>
-      </p:sp>
-      <p:sp>
-        <p:nvSpPr>
-          <p:cNvPr id="7" name="Rounded Rectangle 6"/>
+              <a:t>当前精益推进现存真实痛点</a:t>
+            </a:r>
+          </a:p>
+        </p:txBody>
+      </p:sp>
+      <p:sp>
+        <p:nvSpPr>
+          <p:cNvPr id="5" name="Rounded Rectangle 4"/>
           <p:cNvSpPr/>
           <p:nvPr/>
         </p:nvSpPr>
         <p:spPr>
           <a:xfrm>
-            <a:off x="365760" y="2560320"/>
-            <a:ext cx="5669280" cy="1600200"/>
+            <a:off x="365760" y="914400"/>
+            <a:ext cx="5669280" cy="1554480"/>
           </a:xfrm>
           <a:prstGeom prst="roundRect">
             <a:avLst>
-              <a:gd name="adj" fmla="val 8000"/>
+              <a:gd name="adj" fmla="val 4000"/>
             </a:avLst>
           </a:prstGeom>
           <a:solidFill>
             <a:srgbClr val="FFFFFF"/>
           </a:solidFill>
-          <a:ln w="15875">
+          <a:ln w="12700">
             <a:solidFill>
-              <a:srgbClr val="E8EEF2"/>
+              <a:srgbClr val="CBD5E1"/>
             </a:solidFill>
           </a:ln>
         </p:spPr>
@@ -3342,13 +3264,13 @@
       </p:sp>
       <p:sp>
         <p:nvSpPr>
-          <p:cNvPr id="8" name="TextBox 7"/>
+          <p:cNvPr id="6" name="TextBox 5"/>
           <p:cNvSpPr txBox="1"/>
           <p:nvPr/>
         </p:nvSpPr>
         <p:spPr>
           <a:xfrm>
-            <a:off x="548640" y="2697480"/>
+            <a:off x="548640" y="1051560"/>
             <a:ext cx="5303520" cy="320040"/>
           </a:xfrm>
           <a:prstGeom prst="rect">
@@ -3364,28 +3286,28 @@
           <a:p>
             <a:pPr algn="l"/>
             <a:r>
-              <a:rPr sz="1400" b="1">
-                <a:solidFill>
-                  <a:srgbClr val="E87A2E"/>
+              <a:rPr sz="1300" b="1">
+                <a:solidFill>
+                  <a:srgbClr val="0F766E"/>
                 </a:solidFill>
                 <a:latin typeface="Microsoft YaHei"/>
                 <a:ea typeface="Microsoft YaHei"/>
               </a:rPr>
-              <a:t>02 改善偏单点，系统性攻坚能力不足</a:t>
-            </a:r>
-          </a:p>
-        </p:txBody>
-      </p:sp>
-      <p:sp>
-        <p:nvSpPr>
-          <p:cNvPr id="9" name="TextBox 8"/>
+              <a:t>01 落地不均衡，标杆与常态两极分化</a:t>
+            </a:r>
+          </a:p>
+        </p:txBody>
+      </p:sp>
+      <p:sp>
+        <p:nvSpPr>
+          <p:cNvPr id="7" name="TextBox 6"/>
           <p:cNvSpPr txBox="1"/>
           <p:nvPr/>
         </p:nvSpPr>
         <p:spPr>
           <a:xfrm>
-            <a:off x="548640" y="3063240"/>
-            <a:ext cx="5303520" cy="960120"/>
+            <a:off x="548640" y="1417320"/>
+            <a:ext cx="5303520" cy="914400"/>
           </a:xfrm>
           <a:prstGeom prst="rect">
             <a:avLst/>
@@ -3400,40 +3322,40 @@
           <a:p>
             <a:pPr algn="l"/>
             <a:r>
-              <a:rPr sz="1200" b="0">
-                <a:solidFill>
-                  <a:srgbClr val="5D6D7E"/>
+              <a:rPr sz="1100" b="0">
+                <a:solidFill>
+                  <a:srgbClr val="64748B"/>
                 </a:solidFill>
                 <a:latin typeface="Microsoft YaHei"/>
                 <a:ea typeface="Microsoft YaHei"/>
               </a:rPr>
-              <a:t>改善多为碎片化整改，对拉晶高能耗、切片断线损耗等核心技术痛点攻坚不够，难以从根本上拉动良率与成本等关键指标。</a:t>
-            </a:r>
-          </a:p>
-        </p:txBody>
-      </p:sp>
-      <p:sp>
-        <p:nvSpPr>
-          <p:cNvPr id="10" name="Rounded Rectangle 9"/>
+              <a:t>标杆产线成果显著，但多数产线仍停留在表层5S整改；深层次浪费与工艺瓶颈未触及，存在「重展示、轻落地、难持续」的形式化问题。</a:t>
+            </a:r>
+          </a:p>
+        </p:txBody>
+      </p:sp>
+      <p:sp>
+        <p:nvSpPr>
+          <p:cNvPr id="8" name="Rounded Rectangle 7"/>
           <p:cNvSpPr/>
           <p:nvPr/>
         </p:nvSpPr>
         <p:spPr>
           <a:xfrm>
-            <a:off x="365760" y="4297680"/>
-            <a:ext cx="5669280" cy="1600200"/>
+            <a:off x="365760" y="2606040"/>
+            <a:ext cx="5669280" cy="1554480"/>
           </a:xfrm>
           <a:prstGeom prst="roundRect">
             <a:avLst>
-              <a:gd name="adj" fmla="val 8000"/>
+              <a:gd name="adj" fmla="val 4000"/>
             </a:avLst>
           </a:prstGeom>
           <a:solidFill>
             <a:srgbClr val="FFFFFF"/>
           </a:solidFill>
-          <a:ln w="15875">
+          <a:ln w="12700">
             <a:solidFill>
-              <a:srgbClr val="E8EEF2"/>
+              <a:srgbClr val="CBD5E1"/>
             </a:solidFill>
           </a:ln>
         </p:spPr>
@@ -3461,13 +3383,13 @@
       </p:sp>
       <p:sp>
         <p:nvSpPr>
-          <p:cNvPr id="11" name="TextBox 10"/>
+          <p:cNvPr id="9" name="TextBox 8"/>
           <p:cNvSpPr txBox="1"/>
           <p:nvPr/>
         </p:nvSpPr>
         <p:spPr>
           <a:xfrm>
-            <a:off x="548640" y="4434840"/>
+            <a:off x="548640" y="2743200"/>
             <a:ext cx="5303520" cy="320040"/>
           </a:xfrm>
           <a:prstGeom prst="rect">
@@ -3483,28 +3405,28 @@
           <a:p>
             <a:pPr algn="l"/>
             <a:r>
-              <a:rPr sz="1400" b="1">
-                <a:solidFill>
-                  <a:srgbClr val="E87A2E"/>
+              <a:rPr sz="1300" b="1">
+                <a:solidFill>
+                  <a:srgbClr val="0F766E"/>
                 </a:solidFill>
                 <a:latin typeface="Microsoft YaHei"/>
                 <a:ea typeface="Microsoft YaHei"/>
               </a:rPr>
-              <a:t>03 全员氛围不足，自主改善意识薄弱</a:t>
-            </a:r>
-          </a:p>
-        </p:txBody>
-      </p:sp>
-      <p:sp>
-        <p:nvSpPr>
-          <p:cNvPr id="12" name="TextBox 11"/>
+              <a:t>02 改善偏单点，系统性攻坚能力不足</a:t>
+            </a:r>
+          </a:p>
+        </p:txBody>
+      </p:sp>
+      <p:sp>
+        <p:nvSpPr>
+          <p:cNvPr id="10" name="TextBox 9"/>
           <p:cNvSpPr txBox="1"/>
           <p:nvPr/>
         </p:nvSpPr>
         <p:spPr>
           <a:xfrm>
-            <a:off x="548640" y="4800600"/>
-            <a:ext cx="5303520" cy="960120"/>
+            <a:off x="548640" y="3108960"/>
+            <a:ext cx="5303520" cy="914400"/>
           </a:xfrm>
           <a:prstGeom prst="rect">
             <a:avLst/>
@@ -3519,40 +3441,40 @@
           <a:p>
             <a:pPr algn="l"/>
             <a:r>
-              <a:rPr sz="1200" b="0">
-                <a:solidFill>
-                  <a:srgbClr val="5D6D7E"/>
+              <a:rPr sz="1100" b="0">
+                <a:solidFill>
+                  <a:srgbClr val="64748B"/>
                 </a:solidFill>
                 <a:latin typeface="Microsoft YaHei"/>
                 <a:ea typeface="Microsoft YaHei"/>
               </a:rPr>
-              <a:t>推进仍依赖管理推动与专班督导，一线员工多为「被动执行」模式，尚未形成「主动找浪费、主动提改善、主动创价值」的精益文化。</a:t>
-            </a:r>
-          </a:p>
-        </p:txBody>
-      </p:sp>
-      <p:sp>
-        <p:nvSpPr>
-          <p:cNvPr id="13" name="Rounded Rectangle 12"/>
+              <a:t>改善多为碎片化整改，对拉晶高能耗、切片断线损耗等核心技术痛点攻坚不够，难以从根本上拉动良率与成本等关键指标。</a:t>
+            </a:r>
+          </a:p>
+        </p:txBody>
+      </p:sp>
+      <p:sp>
+        <p:nvSpPr>
+          <p:cNvPr id="11" name="Rounded Rectangle 10"/>
           <p:cNvSpPr/>
           <p:nvPr/>
         </p:nvSpPr>
         <p:spPr>
           <a:xfrm>
-            <a:off x="6263640" y="822960"/>
-            <a:ext cx="5669280" cy="1600200"/>
+            <a:off x="365760" y="4297680"/>
+            <a:ext cx="5669280" cy="1554480"/>
           </a:xfrm>
           <a:prstGeom prst="roundRect">
             <a:avLst>
-              <a:gd name="adj" fmla="val 8000"/>
+              <a:gd name="adj" fmla="val 4000"/>
             </a:avLst>
           </a:prstGeom>
           <a:solidFill>
             <a:srgbClr val="FFFFFF"/>
           </a:solidFill>
-          <a:ln w="15875">
+          <a:ln w="12700">
             <a:solidFill>
-              <a:srgbClr val="E8EEF2"/>
+              <a:srgbClr val="CBD5E1"/>
             </a:solidFill>
           </a:ln>
         </p:spPr>
@@ -3580,13 +3502,13 @@
       </p:sp>
       <p:sp>
         <p:nvSpPr>
-          <p:cNvPr id="14" name="TextBox 13"/>
+          <p:cNvPr id="12" name="TextBox 11"/>
           <p:cNvSpPr txBox="1"/>
           <p:nvPr/>
         </p:nvSpPr>
         <p:spPr>
           <a:xfrm>
-            <a:off x="6446520" y="960120"/>
+            <a:off x="548640" y="4434840"/>
             <a:ext cx="5303520" cy="320040"/>
           </a:xfrm>
           <a:prstGeom prst="rect">
@@ -3602,28 +3524,28 @@
           <a:p>
             <a:pPr algn="l"/>
             <a:r>
-              <a:rPr sz="1400" b="1">
-                <a:solidFill>
-                  <a:srgbClr val="E87A2E"/>
+              <a:rPr sz="1300" b="1">
+                <a:solidFill>
+                  <a:srgbClr val="0F766E"/>
                 </a:solidFill>
                 <a:latin typeface="Microsoft YaHei"/>
                 <a:ea typeface="Microsoft YaHei"/>
               </a:rPr>
-              <a:t>04 机制落地不彻底，考核未闭环</a:t>
-            </a:r>
-          </a:p>
-        </p:txBody>
-      </p:sp>
-      <p:sp>
-        <p:nvSpPr>
-          <p:cNvPr id="15" name="TextBox 14"/>
+              <a:t>03 全员氛围不足，自主改善意识薄弱</a:t>
+            </a:r>
+          </a:p>
+        </p:txBody>
+      </p:sp>
+      <p:sp>
+        <p:nvSpPr>
+          <p:cNvPr id="13" name="TextBox 12"/>
           <p:cNvSpPr txBox="1"/>
           <p:nvPr/>
         </p:nvSpPr>
         <p:spPr>
           <a:xfrm>
-            <a:off x="6446520" y="1325880"/>
-            <a:ext cx="5303520" cy="960120"/>
+            <a:off x="548640" y="4800600"/>
+            <a:ext cx="5303520" cy="914400"/>
           </a:xfrm>
           <a:prstGeom prst="rect">
             <a:avLst/>
@@ -3638,40 +3560,40 @@
           <a:p>
             <a:pPr algn="l"/>
             <a:r>
-              <a:rPr sz="1200" b="0">
-                <a:solidFill>
-                  <a:srgbClr val="5D6D7E"/>
+              <a:rPr sz="1100" b="0">
+                <a:solidFill>
+                  <a:srgbClr val="64748B"/>
                 </a:solidFill>
                 <a:latin typeface="Microsoft YaHei"/>
                 <a:ea typeface="Microsoft YaHei"/>
               </a:rPr>
-              <a:t>精益落地与人才晋升、基地评价挂钩常流于形式，缺乏量化指标支撑与清晰奖惩机制，导致管理关注度不一、基层执行驱动力不足。</a:t>
-            </a:r>
-          </a:p>
-        </p:txBody>
-      </p:sp>
-      <p:sp>
-        <p:nvSpPr>
-          <p:cNvPr id="16" name="Rounded Rectangle 15"/>
+              <a:t>推进仍依赖管理推动与专班督导，一线员工多为「被动执行」模式，尚未形成「主动找浪费、主动提改善、主动创价值」的精益文化。</a:t>
+            </a:r>
+          </a:p>
+        </p:txBody>
+      </p:sp>
+      <p:sp>
+        <p:nvSpPr>
+          <p:cNvPr id="14" name="Rounded Rectangle 13"/>
           <p:cNvSpPr/>
           <p:nvPr/>
         </p:nvSpPr>
         <p:spPr>
           <a:xfrm>
-            <a:off x="6263640" y="2560320"/>
-            <a:ext cx="5669280" cy="1600200"/>
+            <a:off x="6263640" y="914400"/>
+            <a:ext cx="5669280" cy="1554480"/>
           </a:xfrm>
           <a:prstGeom prst="roundRect">
             <a:avLst>
-              <a:gd name="adj" fmla="val 8000"/>
+              <a:gd name="adj" fmla="val 4000"/>
             </a:avLst>
           </a:prstGeom>
           <a:solidFill>
             <a:srgbClr val="FFFFFF"/>
           </a:solidFill>
-          <a:ln w="15875">
+          <a:ln w="12700">
             <a:solidFill>
-              <a:srgbClr val="E8EEF2"/>
+              <a:srgbClr val="CBD5E1"/>
             </a:solidFill>
           </a:ln>
         </p:spPr>
@@ -3699,13 +3621,13 @@
       </p:sp>
       <p:sp>
         <p:nvSpPr>
-          <p:cNvPr id="17" name="TextBox 16"/>
+          <p:cNvPr id="15" name="TextBox 14"/>
           <p:cNvSpPr txBox="1"/>
           <p:nvPr/>
         </p:nvSpPr>
         <p:spPr>
           <a:xfrm>
-            <a:off x="6446520" y="2697480"/>
+            <a:off x="6446520" y="1051560"/>
             <a:ext cx="5303520" cy="320040"/>
           </a:xfrm>
           <a:prstGeom prst="rect">
@@ -3721,28 +3643,28 @@
           <a:p>
             <a:pPr algn="l"/>
             <a:r>
-              <a:rPr sz="1400" b="1">
-                <a:solidFill>
-                  <a:srgbClr val="E87A2E"/>
+              <a:rPr sz="1300" b="1">
+                <a:solidFill>
+                  <a:srgbClr val="0F766E"/>
                 </a:solidFill>
                 <a:latin typeface="Microsoft YaHei"/>
                 <a:ea typeface="Microsoft YaHei"/>
               </a:rPr>
-              <a:t>05 精益信息化缺失，改善难沉淀</a:t>
-            </a:r>
-          </a:p>
-        </p:txBody>
-      </p:sp>
-      <p:sp>
-        <p:nvSpPr>
-          <p:cNvPr id="18" name="TextBox 17"/>
+              <a:t>04 机制落地不彻底，考核未闭环</a:t>
+            </a:r>
+          </a:p>
+        </p:txBody>
+      </p:sp>
+      <p:sp>
+        <p:nvSpPr>
+          <p:cNvPr id="16" name="TextBox 15"/>
           <p:cNvSpPr txBox="1"/>
           <p:nvPr/>
         </p:nvSpPr>
         <p:spPr>
           <a:xfrm>
-            <a:off x="6446520" y="3063240"/>
-            <a:ext cx="5303520" cy="960120"/>
+            <a:off x="6446520" y="1417320"/>
+            <a:ext cx="5303520" cy="914400"/>
           </a:xfrm>
           <a:prstGeom prst="rect">
             <a:avLst/>
@@ -3757,40 +3679,40 @@
           <a:p>
             <a:pPr algn="l"/>
             <a:r>
-              <a:rPr sz="1200" b="0">
-                <a:solidFill>
-                  <a:srgbClr val="5D6D7E"/>
+              <a:rPr sz="1100" b="0">
+                <a:solidFill>
+                  <a:srgbClr val="64748B"/>
                 </a:solidFill>
                 <a:latin typeface="Microsoft YaHei"/>
                 <a:ea typeface="Microsoft YaHei"/>
               </a:rPr>
-              <a:t>改善经验难沉淀、难复制，数据与现场脱节，缺少统一数字化看板与闭环系统，难以支撑精益从「运动式」走向「常态化」。</a:t>
-            </a:r>
-          </a:p>
-        </p:txBody>
-      </p:sp>
-      <p:sp>
-        <p:nvSpPr>
-          <p:cNvPr id="19" name="Rounded Rectangle 18"/>
+              <a:t>精益落地与人才晋升、基地评价挂钩常流于形式，缺乏量化指标支撑与清晰奖惩机制，导致管理关注度不一、基层执行驱动力不足。</a:t>
+            </a:r>
+          </a:p>
+        </p:txBody>
+      </p:sp>
+      <p:sp>
+        <p:nvSpPr>
+          <p:cNvPr id="17" name="Rounded Rectangle 16"/>
           <p:cNvSpPr/>
           <p:nvPr/>
         </p:nvSpPr>
         <p:spPr>
           <a:xfrm>
-            <a:off x="6263640" y="4297680"/>
-            <a:ext cx="5669280" cy="2148840"/>
+            <a:off x="6263640" y="2606040"/>
+            <a:ext cx="5669280" cy="1554480"/>
           </a:xfrm>
           <a:prstGeom prst="roundRect">
             <a:avLst>
-              <a:gd name="adj" fmla="val 8000"/>
+              <a:gd name="adj" fmla="val 4000"/>
             </a:avLst>
           </a:prstGeom>
           <a:solidFill>
-            <a:srgbClr val="FFF4EB"/>
+            <a:srgbClr val="FFFFFF"/>
           </a:solidFill>
-          <a:ln w="15875">
+          <a:ln w="12700">
             <a:solidFill>
-              <a:srgbClr val="E87A2E"/>
+              <a:srgbClr val="CBD5E1"/>
             </a:solidFill>
           </a:ln>
         </p:spPr>
@@ -3818,14 +3740,14 @@
       </p:sp>
       <p:sp>
         <p:nvSpPr>
-          <p:cNvPr id="20" name="TextBox 19"/>
+          <p:cNvPr id="18" name="TextBox 17"/>
           <p:cNvSpPr txBox="1"/>
           <p:nvPr/>
         </p:nvSpPr>
         <p:spPr>
           <a:xfrm>
-            <a:off x="6492240" y="4526280"/>
-            <a:ext cx="5212080" cy="1737360"/>
+            <a:off x="6446520" y="2743200"/>
+            <a:ext cx="5303520" cy="320040"/>
           </a:xfrm>
           <a:prstGeom prst="rect">
             <a:avLst/>
@@ -3840,14 +3762,132 @@
           <a:p>
             <a:pPr algn="l"/>
             <a:r>
-              <a:rPr sz="1200" b="0">
-                <a:solidFill>
-                  <a:srgbClr val="2C3E50"/>
+              <a:rPr sz="1300" b="1">
+                <a:solidFill>
+                  <a:srgbClr val="0F766E"/>
                 </a:solidFill>
                 <a:latin typeface="Microsoft YaHei"/>
                 <a:ea typeface="Microsoft YaHei"/>
               </a:rPr>
-              <a:t>精益生产本质是消除浪费与持续改善；实践中仍面临从表层整改到深层次攻坚的多重执行挑战。
+              <a:t>05 精益信息化缺失，改善难沉淀</a:t>
+            </a:r>
+          </a:p>
+        </p:txBody>
+      </p:sp>
+      <p:sp>
+        <p:nvSpPr>
+          <p:cNvPr id="19" name="TextBox 18"/>
+          <p:cNvSpPr txBox="1"/>
+          <p:nvPr/>
+        </p:nvSpPr>
+        <p:spPr>
+          <a:xfrm>
+            <a:off x="6446520" y="3108960"/>
+            <a:ext cx="5303520" cy="914400"/>
+          </a:xfrm>
+          <a:prstGeom prst="rect">
+            <a:avLst/>
+          </a:prstGeom>
+          <a:noFill/>
+        </p:spPr>
+        <p:txBody>
+          <a:bodyPr wrap="square">
+            <a:spAutoFit/>
+          </a:bodyPr>
+          <a:lstStyle/>
+          <a:p>
+            <a:pPr algn="l"/>
+            <a:r>
+              <a:rPr sz="1100" b="0">
+                <a:solidFill>
+                  <a:srgbClr val="64748B"/>
+                </a:solidFill>
+                <a:latin typeface="Microsoft YaHei"/>
+                <a:ea typeface="Microsoft YaHei"/>
+              </a:rPr>
+              <a:t>改善经验难沉淀、难复制，数据与现场脱节，缺少统一数字化看板与闭环系统，难以支撑精益从「运动式」走向「常态化」。</a:t>
+            </a:r>
+          </a:p>
+        </p:txBody>
+      </p:sp>
+      <p:sp>
+        <p:nvSpPr>
+          <p:cNvPr id="20" name="Rounded Rectangle 19"/>
+          <p:cNvSpPr/>
+          <p:nvPr/>
+        </p:nvSpPr>
+        <p:spPr>
+          <a:xfrm>
+            <a:off x="6263640" y="4297680"/>
+            <a:ext cx="5669280" cy="2148840"/>
+          </a:xfrm>
+          <a:prstGeom prst="roundRect">
+            <a:avLst>
+              <a:gd name="adj" fmla="val 4000"/>
+            </a:avLst>
+          </a:prstGeom>
+          <a:solidFill>
+            <a:srgbClr val="0F172A"/>
+          </a:solidFill>
+          <a:ln>
+            <a:noFill/>
+          </a:ln>
+        </p:spPr>
+        <p:style>
+          <a:lnRef idx="1">
+            <a:schemeClr val="accent1"/>
+          </a:lnRef>
+          <a:fillRef idx="3">
+            <a:schemeClr val="accent1"/>
+          </a:fillRef>
+          <a:effectRef idx="2">
+            <a:schemeClr val="accent1"/>
+          </a:effectRef>
+          <a:fontRef idx="minor">
+            <a:schemeClr val="lt1"/>
+          </a:fontRef>
+        </p:style>
+        <p:txBody>
+          <a:bodyPr rtlCol="0" anchor="ctr"/>
+          <a:lstStyle/>
+          <a:p>
+            <a:pPr algn="ctr"/>
+          </a:p>
+        </p:txBody>
+      </p:sp>
+      <p:sp>
+        <p:nvSpPr>
+          <p:cNvPr id="21" name="TextBox 20"/>
+          <p:cNvSpPr txBox="1"/>
+          <p:nvPr/>
+        </p:nvSpPr>
+        <p:spPr>
+          <a:xfrm>
+            <a:off x="6492240" y="4526280"/>
+            <a:ext cx="5212080" cy="1737360"/>
+          </a:xfrm>
+          <a:prstGeom prst="rect">
+            <a:avLst/>
+          </a:prstGeom>
+          <a:noFill/>
+        </p:spPr>
+        <p:txBody>
+          <a:bodyPr wrap="square">
+            <a:spAutoFit/>
+          </a:bodyPr>
+          <a:lstStyle/>
+          <a:p>
+            <a:pPr algn="l"/>
+            <a:r>
+              <a:rPr sz="1200" b="0">
+                <a:solidFill>
+                  <a:srgbClr val="FFFFFF"/>
+                </a:solidFill>
+                <a:latin typeface="Microsoft YaHei"/>
+                <a:ea typeface="Microsoft YaHei"/>
+              </a:rPr>
+              <a:t>关键判断
+精益生产本质是消除浪费与持续改善；实践中仍面临从表层整改到深层次攻坚的多重执行挑战。
 闭环机制与数据沉淀是精益从「运动式」走向「常态化」的关键，破除形式主义、回归价值创造。</a:t>
             </a:r>
           </a:p>
@@ -3873,7 +3913,7 @@
       <p:grpSpPr/>
       <p:sp>
         <p:nvSpPr>
-          <p:cNvPr id="2" name="Rounded Rectangle 1"/>
+          <p:cNvPr id="2" name="Rectangle 1"/>
           <p:cNvSpPr/>
           <p:nvPr/>
         </p:nvSpPr>
@@ -3882,13 +3922,11 @@
             <a:off x="0" y="0"/>
             <a:ext cx="12191695" cy="6858000"/>
           </a:xfrm>
-          <a:prstGeom prst="roundRect">
-            <a:avLst>
-              <a:gd name="adj" fmla="val 8000"/>
-            </a:avLst>
+          <a:prstGeom prst="rect">
+            <a:avLst/>
           </a:prstGeom>
           <a:solidFill>
-            <a:srgbClr val="FFFFFF"/>
+            <a:srgbClr val="F1F5F9"/>
           </a:solidFill>
           <a:ln>
             <a:noFill/>
@@ -3918,135 +3956,23 @@
       </p:sp>
       <p:sp>
         <p:nvSpPr>
-          <p:cNvPr id="3" name="TextBox 2"/>
-          <p:cNvSpPr txBox="1"/>
-          <p:nvPr/>
-        </p:nvSpPr>
-        <p:spPr>
-          <a:xfrm>
-            <a:off x="411480" y="182880"/>
-            <a:ext cx="10972800" cy="365760"/>
-          </a:xfrm>
-          <a:prstGeom prst="rect">
-            <a:avLst/>
-          </a:prstGeom>
-          <a:noFill/>
-        </p:spPr>
-        <p:txBody>
-          <a:bodyPr wrap="square">
-            <a:spAutoFit/>
-          </a:bodyPr>
-          <a:lstStyle/>
-          <a:p>
-            <a:pPr algn="l"/>
-            <a:r>
-              <a:rPr sz="2400" b="1">
-                <a:solidFill>
-                  <a:srgbClr val="1B3A5F"/>
-                </a:solidFill>
-                <a:latin typeface="Microsoft YaHei"/>
-                <a:ea typeface="Microsoft YaHei"/>
-              </a:rPr>
-              <a:t>筑基 →「势起」</a:t>
-            </a:r>
-          </a:p>
-        </p:txBody>
-      </p:sp>
-      <p:sp>
-        <p:nvSpPr>
-          <p:cNvPr id="4" name="TextBox 3"/>
-          <p:cNvSpPr txBox="1"/>
-          <p:nvPr/>
-        </p:nvSpPr>
-        <p:spPr>
-          <a:xfrm>
-            <a:off x="411480" y="594360"/>
-            <a:ext cx="11338560" cy="640080"/>
-          </a:xfrm>
-          <a:prstGeom prst="rect">
-            <a:avLst/>
-          </a:prstGeom>
-          <a:noFill/>
-        </p:spPr>
-        <p:txBody>
-          <a:bodyPr wrap="square">
-            <a:spAutoFit/>
-          </a:bodyPr>
-          <a:lstStyle/>
-          <a:p>
-            <a:pPr algn="l"/>
-            <a:r>
-              <a:rPr sz="1200" b="0">
-                <a:solidFill>
-                  <a:srgbClr val="5D6D7E"/>
-                </a:solidFill>
-                <a:latin typeface="Microsoft YaHei"/>
-                <a:ea typeface="Microsoft YaHei"/>
-              </a:rPr>
-              <a:t>自2025年9月以来，GPS精益体系已从「探索与单点整改」迈入「体系起势与机制落地」阶段。2026年为关键推进年：精益作为「第二生产力」，以「453」框架启航精益转型，践行「真善美」价值主张。</a:t>
-            </a:r>
-          </a:p>
-        </p:txBody>
-      </p:sp>
-      <p:sp>
-        <p:nvSpPr>
-          <p:cNvPr id="5" name="TextBox 4"/>
-          <p:cNvSpPr txBox="1"/>
-          <p:nvPr/>
-        </p:nvSpPr>
-        <p:spPr>
-          <a:xfrm>
-            <a:off x="411480" y="1280160"/>
-            <a:ext cx="3657600" cy="274320"/>
-          </a:xfrm>
-          <a:prstGeom prst="rect">
-            <a:avLst/>
-          </a:prstGeom>
-          <a:noFill/>
-        </p:spPr>
-        <p:txBody>
-          <a:bodyPr wrap="square">
-            <a:spAutoFit/>
-          </a:bodyPr>
-          <a:lstStyle/>
-          <a:p>
-            <a:pPr algn="l"/>
-            <a:r>
-              <a:rPr sz="1300" b="1">
-                <a:solidFill>
-                  <a:srgbClr val="E87A2E"/>
-                </a:solidFill>
-                <a:latin typeface="Microsoft YaHei"/>
-                <a:ea typeface="Microsoft YaHei"/>
-              </a:rPr>
-              <a:t>四级架构</a:t>
-            </a:r>
-          </a:p>
-        </p:txBody>
-      </p:sp>
-      <p:sp>
-        <p:nvSpPr>
-          <p:cNvPr id="6" name="Rounded Rectangle 5"/>
+          <p:cNvPr id="3" name="Rectangle 2"/>
           <p:cNvSpPr/>
           <p:nvPr/>
         </p:nvSpPr>
         <p:spPr>
           <a:xfrm>
-            <a:off x="411480" y="1600200"/>
-            <a:ext cx="2788920" cy="1051560"/>
-          </a:xfrm>
-          <a:prstGeom prst="roundRect">
-            <a:avLst>
-              <a:gd name="adj" fmla="val 8000"/>
-            </a:avLst>
+            <a:off x="0" y="0"/>
+            <a:ext cx="12191695" cy="685800"/>
+          </a:xfrm>
+          <a:prstGeom prst="rect">
+            <a:avLst/>
           </a:prstGeom>
           <a:solidFill>
-            <a:srgbClr val="FFFFFF"/>
+            <a:srgbClr val="0F172A"/>
           </a:solidFill>
-          <a:ln w="15875">
-            <a:solidFill>
-              <a:srgbClr val="E8EEF2"/>
-            </a:solidFill>
+          <a:ln>
+            <a:noFill/>
           </a:ln>
         </p:spPr>
         <p:style>
@@ -4073,14 +3999,14 @@
       </p:sp>
       <p:sp>
         <p:nvSpPr>
-          <p:cNvPr id="7" name="TextBox 6"/>
+          <p:cNvPr id="4" name="TextBox 3"/>
           <p:cNvSpPr txBox="1"/>
           <p:nvPr/>
         </p:nvSpPr>
         <p:spPr>
           <a:xfrm>
-            <a:off x="521208" y="1737360"/>
-            <a:ext cx="2560320" cy="274320"/>
+            <a:off x="411480" y="182880"/>
+            <a:ext cx="10972800" cy="365760"/>
           </a:xfrm>
           <a:prstGeom prst="rect">
             <a:avLst/>
@@ -4095,28 +4021,28 @@
           <a:p>
             <a:pPr algn="l"/>
             <a:r>
-              <a:rPr sz="1300" b="1">
-                <a:solidFill>
-                  <a:srgbClr val="1B3A5F"/>
+              <a:rPr sz="2200" b="1">
+                <a:solidFill>
+                  <a:srgbClr val="FFFFFF"/>
                 </a:solidFill>
                 <a:latin typeface="Microsoft YaHei"/>
                 <a:ea typeface="Microsoft YaHei"/>
               </a:rPr>
-              <a:t>决策层·战略引领</a:t>
-            </a:r>
-          </a:p>
-        </p:txBody>
-      </p:sp>
-      <p:sp>
-        <p:nvSpPr>
-          <p:cNvPr id="8" name="TextBox 7"/>
+              <a:t>筑基 →「势起」</a:t>
+            </a:r>
+          </a:p>
+        </p:txBody>
+      </p:sp>
+      <p:sp>
+        <p:nvSpPr>
+          <p:cNvPr id="5" name="TextBox 4"/>
           <p:cNvSpPr txBox="1"/>
           <p:nvPr/>
         </p:nvSpPr>
         <p:spPr>
           <a:xfrm>
-            <a:off x="521208" y="2103120"/>
-            <a:ext cx="2560320" cy="411480"/>
+            <a:off x="411480" y="822960"/>
+            <a:ext cx="11338560" cy="594360"/>
           </a:xfrm>
           <a:prstGeom prst="rect">
             <a:avLst/>
@@ -4133,38 +4059,74 @@
             <a:r>
               <a:rPr sz="1100" b="0">
                 <a:solidFill>
-                  <a:srgbClr val="5D6D7E"/>
+                  <a:srgbClr val="64748B"/>
                 </a:solidFill>
                 <a:latin typeface="Microsoft YaHei"/>
                 <a:ea typeface="Microsoft YaHei"/>
               </a:rPr>
-              <a:t>确立战略/审批课题/资源政策支持</a:t>
-            </a:r>
-          </a:p>
-        </p:txBody>
-      </p:sp>
-      <p:sp>
-        <p:nvSpPr>
-          <p:cNvPr id="9" name="Rounded Rectangle 8"/>
+              <a:t>自2025年9月以来，GPS精益体系已从「探索与单点整改」迈入「体系起势与机制落地」阶段。2026年为关键推进年：精益作为「第二生产力」，以「453」框架启航精益转型，践行「真善美」价值主张。</a:t>
+            </a:r>
+          </a:p>
+        </p:txBody>
+      </p:sp>
+      <p:sp>
+        <p:nvSpPr>
+          <p:cNvPr id="6" name="TextBox 5"/>
+          <p:cNvSpPr txBox="1"/>
+          <p:nvPr/>
+        </p:nvSpPr>
+        <p:spPr>
+          <a:xfrm>
+            <a:off x="411480" y="1463040"/>
+            <a:ext cx="3657600" cy="228600"/>
+          </a:xfrm>
+          <a:prstGeom prst="rect">
+            <a:avLst/>
+          </a:prstGeom>
+          <a:noFill/>
+        </p:spPr>
+        <p:txBody>
+          <a:bodyPr wrap="square">
+            <a:spAutoFit/>
+          </a:bodyPr>
+          <a:lstStyle/>
+          <a:p>
+            <a:pPr algn="l"/>
+            <a:r>
+              <a:rPr sz="1200" b="1">
+                <a:solidFill>
+                  <a:srgbClr val="0F766E"/>
+                </a:solidFill>
+                <a:latin typeface="Microsoft YaHei"/>
+                <a:ea typeface="Microsoft YaHei"/>
+              </a:rPr>
+              <a:t>四级架构</a:t>
+            </a:r>
+          </a:p>
+        </p:txBody>
+      </p:sp>
+      <p:sp>
+        <p:nvSpPr>
+          <p:cNvPr id="7" name="Rounded Rectangle 6"/>
           <p:cNvSpPr/>
           <p:nvPr/>
         </p:nvSpPr>
         <p:spPr>
           <a:xfrm>
-            <a:off x="3337560" y="1600200"/>
-            <a:ext cx="2788920" cy="1051560"/>
+            <a:off x="411480" y="1783080"/>
+            <a:ext cx="2788920" cy="1005840"/>
           </a:xfrm>
           <a:prstGeom prst="roundRect">
             <a:avLst>
-              <a:gd name="adj" fmla="val 8000"/>
+              <a:gd name="adj" fmla="val 4000"/>
             </a:avLst>
           </a:prstGeom>
           <a:solidFill>
             <a:srgbClr val="FFFFFF"/>
           </a:solidFill>
-          <a:ln w="15875">
+          <a:ln w="12700">
             <a:solidFill>
-              <a:srgbClr val="E8EEF2"/>
+              <a:srgbClr val="CBD5E1"/>
             </a:solidFill>
           </a:ln>
         </p:spPr>
@@ -4192,13 +4154,13 @@
       </p:sp>
       <p:sp>
         <p:nvSpPr>
-          <p:cNvPr id="10" name="TextBox 9"/>
+          <p:cNvPr id="8" name="TextBox 7"/>
           <p:cNvSpPr txBox="1"/>
           <p:nvPr/>
         </p:nvSpPr>
         <p:spPr>
           <a:xfrm>
-            <a:off x="3447288" y="1737360"/>
+            <a:off x="521208" y="1920240"/>
             <a:ext cx="2560320" cy="274320"/>
           </a:xfrm>
           <a:prstGeom prst="rect">
@@ -4214,28 +4176,28 @@
           <a:p>
             <a:pPr algn="l"/>
             <a:r>
-              <a:rPr sz="1300" b="1">
-                <a:solidFill>
-                  <a:srgbClr val="1B3A5F"/>
+              <a:rPr sz="1200" b="1">
+                <a:solidFill>
+                  <a:srgbClr val="0F172A"/>
                 </a:solidFill>
                 <a:latin typeface="Microsoft YaHei"/>
                 <a:ea typeface="Microsoft YaHei"/>
               </a:rPr>
-              <a:t>推进层·体系赋能</a:t>
-            </a:r>
-          </a:p>
-        </p:txBody>
-      </p:sp>
-      <p:sp>
-        <p:nvSpPr>
-          <p:cNvPr id="11" name="TextBox 10"/>
+              <a:t>决策层·战略引领</a:t>
+            </a:r>
+          </a:p>
+        </p:txBody>
+      </p:sp>
+      <p:sp>
+        <p:nvSpPr>
+          <p:cNvPr id="9" name="TextBox 8"/>
           <p:cNvSpPr txBox="1"/>
           <p:nvPr/>
         </p:nvSpPr>
         <p:spPr>
           <a:xfrm>
-            <a:off x="3447288" y="2103120"/>
-            <a:ext cx="2560320" cy="411480"/>
+            <a:off x="521208" y="2286000"/>
+            <a:ext cx="2560320" cy="365760"/>
           </a:xfrm>
           <a:prstGeom prst="rect">
             <a:avLst/>
@@ -4250,40 +4212,40 @@
           <a:p>
             <a:pPr algn="l"/>
             <a:r>
-              <a:rPr sz="1100" b="0">
-                <a:solidFill>
-                  <a:srgbClr val="5D6D7E"/>
+              <a:rPr sz="1000" b="0">
+                <a:solidFill>
+                  <a:srgbClr val="64748B"/>
                 </a:solidFill>
                 <a:latin typeface="Microsoft YaHei"/>
                 <a:ea typeface="Microsoft YaHei"/>
               </a:rPr>
-              <a:t>体系规划/方法导入/督导与育人</a:t>
-            </a:r>
-          </a:p>
-        </p:txBody>
-      </p:sp>
-      <p:sp>
-        <p:nvSpPr>
-          <p:cNvPr id="12" name="Rounded Rectangle 11"/>
+              <a:t>确立战略/审批课题/资源政策支持</a:t>
+            </a:r>
+          </a:p>
+        </p:txBody>
+      </p:sp>
+      <p:sp>
+        <p:nvSpPr>
+          <p:cNvPr id="10" name="Rounded Rectangle 9"/>
           <p:cNvSpPr/>
           <p:nvPr/>
         </p:nvSpPr>
         <p:spPr>
           <a:xfrm>
-            <a:off x="6263640" y="1600200"/>
-            <a:ext cx="2788920" cy="1051560"/>
+            <a:off x="3337560" y="1783080"/>
+            <a:ext cx="2788920" cy="1005840"/>
           </a:xfrm>
           <a:prstGeom prst="roundRect">
             <a:avLst>
-              <a:gd name="adj" fmla="val 8000"/>
+              <a:gd name="adj" fmla="val 4000"/>
             </a:avLst>
           </a:prstGeom>
           <a:solidFill>
             <a:srgbClr val="FFFFFF"/>
           </a:solidFill>
-          <a:ln w="15875">
+          <a:ln w="12700">
             <a:solidFill>
-              <a:srgbClr val="E8EEF2"/>
+              <a:srgbClr val="CBD5E1"/>
             </a:solidFill>
           </a:ln>
         </p:spPr>
@@ -4311,13 +4273,13 @@
       </p:sp>
       <p:sp>
         <p:nvSpPr>
-          <p:cNvPr id="13" name="TextBox 12"/>
+          <p:cNvPr id="11" name="TextBox 10"/>
           <p:cNvSpPr txBox="1"/>
           <p:nvPr/>
         </p:nvSpPr>
         <p:spPr>
           <a:xfrm>
-            <a:off x="6373368" y="1737360"/>
+            <a:off x="3447288" y="1920240"/>
             <a:ext cx="2560320" cy="274320"/>
           </a:xfrm>
           <a:prstGeom prst="rect">
@@ -4333,28 +4295,28 @@
           <a:p>
             <a:pPr algn="l"/>
             <a:r>
-              <a:rPr sz="1300" b="1">
-                <a:solidFill>
-                  <a:srgbClr val="1B3A5F"/>
+              <a:rPr sz="1200" b="1">
+                <a:solidFill>
+                  <a:srgbClr val="0F172A"/>
                 </a:solidFill>
                 <a:latin typeface="Microsoft YaHei"/>
                 <a:ea typeface="Microsoft YaHei"/>
               </a:rPr>
-              <a:t>执行层·攻坚落地</a:t>
-            </a:r>
-          </a:p>
-        </p:txBody>
-      </p:sp>
-      <p:sp>
-        <p:nvSpPr>
-          <p:cNvPr id="14" name="TextBox 13"/>
+              <a:t>推进层·体系赋能</a:t>
+            </a:r>
+          </a:p>
+        </p:txBody>
+      </p:sp>
+      <p:sp>
+        <p:nvSpPr>
+          <p:cNvPr id="12" name="TextBox 11"/>
           <p:cNvSpPr txBox="1"/>
           <p:nvPr/>
         </p:nvSpPr>
         <p:spPr>
           <a:xfrm>
-            <a:off x="6373368" y="2103120"/>
-            <a:ext cx="2560320" cy="411480"/>
+            <a:off x="3447288" y="2286000"/>
+            <a:ext cx="2560320" cy="365760"/>
           </a:xfrm>
           <a:prstGeom prst="rect">
             <a:avLst/>
@@ -4369,40 +4331,40 @@
           <a:p>
             <a:pPr algn="l"/>
             <a:r>
-              <a:rPr sz="1100" b="0">
-                <a:solidFill>
-                  <a:srgbClr val="5D6D7E"/>
+              <a:rPr sz="1000" b="0">
+                <a:solidFill>
+                  <a:srgbClr val="64748B"/>
                 </a:solidFill>
                 <a:latin typeface="Microsoft YaHei"/>
                 <a:ea typeface="Microsoft YaHei"/>
               </a:rPr>
-              <a:t>基地主责/目标分解/资源协同</a:t>
-            </a:r>
-          </a:p>
-        </p:txBody>
-      </p:sp>
-      <p:sp>
-        <p:nvSpPr>
-          <p:cNvPr id="15" name="Rounded Rectangle 14"/>
+              <a:t>体系规划/方法导入/督导与育人</a:t>
+            </a:r>
+          </a:p>
+        </p:txBody>
+      </p:sp>
+      <p:sp>
+        <p:nvSpPr>
+          <p:cNvPr id="13" name="Rounded Rectangle 12"/>
           <p:cNvSpPr/>
           <p:nvPr/>
         </p:nvSpPr>
         <p:spPr>
           <a:xfrm>
-            <a:off x="9189720" y="1600200"/>
-            <a:ext cx="2788920" cy="1051560"/>
+            <a:off x="6263640" y="1783080"/>
+            <a:ext cx="2788920" cy="1005840"/>
           </a:xfrm>
           <a:prstGeom prst="roundRect">
             <a:avLst>
-              <a:gd name="adj" fmla="val 8000"/>
+              <a:gd name="adj" fmla="val 4000"/>
             </a:avLst>
           </a:prstGeom>
           <a:solidFill>
             <a:srgbClr val="FFFFFF"/>
           </a:solidFill>
-          <a:ln w="15875">
+          <a:ln w="12700">
             <a:solidFill>
-              <a:srgbClr val="E8EEF2"/>
+              <a:srgbClr val="CBD5E1"/>
             </a:solidFill>
           </a:ln>
         </p:spPr>
@@ -4430,13 +4392,13 @@
       </p:sp>
       <p:sp>
         <p:nvSpPr>
-          <p:cNvPr id="16" name="TextBox 15"/>
+          <p:cNvPr id="14" name="TextBox 13"/>
           <p:cNvSpPr txBox="1"/>
           <p:nvPr/>
         </p:nvSpPr>
         <p:spPr>
           <a:xfrm>
-            <a:off x="9299448" y="1737360"/>
+            <a:off x="6373368" y="1920240"/>
             <a:ext cx="2560320" cy="274320"/>
           </a:xfrm>
           <a:prstGeom prst="rect">
@@ -4452,28 +4414,28 @@
           <a:p>
             <a:pPr algn="l"/>
             <a:r>
-              <a:rPr sz="1300" b="1">
-                <a:solidFill>
-                  <a:srgbClr val="1B3A5F"/>
+              <a:rPr sz="1200" b="1">
+                <a:solidFill>
+                  <a:srgbClr val="0F172A"/>
                 </a:solidFill>
                 <a:latin typeface="Microsoft YaHei"/>
                 <a:ea typeface="Microsoft YaHei"/>
               </a:rPr>
-              <a:t>落地层·现场改善</a:t>
-            </a:r>
-          </a:p>
-        </p:txBody>
-      </p:sp>
-      <p:sp>
-        <p:nvSpPr>
-          <p:cNvPr id="17" name="TextBox 16"/>
+              <a:t>执行层·攻坚落地</a:t>
+            </a:r>
+          </a:p>
+        </p:txBody>
+      </p:sp>
+      <p:sp>
+        <p:nvSpPr>
+          <p:cNvPr id="15" name="TextBox 14"/>
           <p:cNvSpPr txBox="1"/>
           <p:nvPr/>
         </p:nvSpPr>
         <p:spPr>
           <a:xfrm>
-            <a:off x="9299448" y="2103120"/>
-            <a:ext cx="2560320" cy="411480"/>
+            <a:off x="6373368" y="2286000"/>
+            <a:ext cx="2560320" cy="365760"/>
           </a:xfrm>
           <a:prstGeom prst="rect">
             <a:avLst/>
@@ -4488,76 +4450,40 @@
           <a:p>
             <a:pPr algn="l"/>
             <a:r>
-              <a:rPr sz="1100" b="0">
-                <a:solidFill>
-                  <a:srgbClr val="5D6D7E"/>
+              <a:rPr sz="1000" b="0">
+                <a:solidFill>
+                  <a:srgbClr val="64748B"/>
                 </a:solidFill>
                 <a:latin typeface="Microsoft YaHei"/>
                 <a:ea typeface="Microsoft YaHei"/>
               </a:rPr>
-              <a:t>班组SOP/现场提案改善</a:t>
-            </a:r>
-          </a:p>
-        </p:txBody>
-      </p:sp>
-      <p:sp>
-        <p:nvSpPr>
-          <p:cNvPr id="18" name="TextBox 17"/>
-          <p:cNvSpPr txBox="1"/>
-          <p:nvPr/>
-        </p:nvSpPr>
-        <p:spPr>
-          <a:xfrm>
-            <a:off x="411480" y="2880360"/>
-            <a:ext cx="3657600" cy="274320"/>
-          </a:xfrm>
-          <a:prstGeom prst="rect">
-            <a:avLst/>
-          </a:prstGeom>
-          <a:noFill/>
-        </p:spPr>
-        <p:txBody>
-          <a:bodyPr wrap="square">
-            <a:spAutoFit/>
-          </a:bodyPr>
-          <a:lstStyle/>
-          <a:p>
-            <a:pPr algn="l"/>
-            <a:r>
-              <a:rPr sz="1300" b="1">
-                <a:solidFill>
-                  <a:srgbClr val="E87A2E"/>
-                </a:solidFill>
-                <a:latin typeface="Microsoft YaHei"/>
-                <a:ea typeface="Microsoft YaHei"/>
-              </a:rPr>
-              <a:t>五大体系</a:t>
-            </a:r>
-          </a:p>
-        </p:txBody>
-      </p:sp>
-      <p:sp>
-        <p:nvSpPr>
-          <p:cNvPr id="19" name="Rounded Rectangle 18"/>
+              <a:t>基地主责/目标分解/资源协同</a:t>
+            </a:r>
+          </a:p>
+        </p:txBody>
+      </p:sp>
+      <p:sp>
+        <p:nvSpPr>
+          <p:cNvPr id="16" name="Rounded Rectangle 15"/>
           <p:cNvSpPr/>
           <p:nvPr/>
         </p:nvSpPr>
         <p:spPr>
           <a:xfrm>
-            <a:off x="411480" y="3200400"/>
-            <a:ext cx="2194560" cy="640080"/>
+            <a:off x="9189720" y="1783080"/>
+            <a:ext cx="2788920" cy="1005840"/>
           </a:xfrm>
           <a:prstGeom prst="roundRect">
             <a:avLst>
-              <a:gd name="adj" fmla="val 8000"/>
+              <a:gd name="adj" fmla="val 4000"/>
             </a:avLst>
           </a:prstGeom>
           <a:solidFill>
             <a:srgbClr val="FFFFFF"/>
           </a:solidFill>
-          <a:ln w="15875">
+          <a:ln w="12700">
             <a:solidFill>
-              <a:srgbClr val="E8EEF2"/>
+              <a:srgbClr val="CBD5E1"/>
             </a:solidFill>
           </a:ln>
         </p:spPr>
@@ -4585,14 +4511,14 @@
       </p:sp>
       <p:sp>
         <p:nvSpPr>
-          <p:cNvPr id="20" name="TextBox 19"/>
+          <p:cNvPr id="17" name="TextBox 16"/>
           <p:cNvSpPr txBox="1"/>
           <p:nvPr/>
         </p:nvSpPr>
         <p:spPr>
           <a:xfrm>
-            <a:off x="411480" y="3337560"/>
-            <a:ext cx="2194560" cy="365760"/>
+            <a:off x="9299448" y="1920240"/>
+            <a:ext cx="2560320" cy="274320"/>
           </a:xfrm>
           <a:prstGeom prst="rect">
             <a:avLst/>
@@ -4605,42 +4531,114 @@
           </a:bodyPr>
           <a:lstStyle/>
           <a:p>
-            <a:pPr algn="ctr"/>
-            <a:r>
-              <a:rPr sz="1300" b="1">
-                <a:solidFill>
-                  <a:srgbClr val="1B3A5F"/>
+            <a:pPr algn="l"/>
+            <a:r>
+              <a:rPr sz="1200" b="1">
+                <a:solidFill>
+                  <a:srgbClr val="0F172A"/>
                 </a:solidFill>
                 <a:latin typeface="Microsoft YaHei"/>
                 <a:ea typeface="Microsoft YaHei"/>
               </a:rPr>
-              <a:t>01对标研学</a:t>
-            </a:r>
-          </a:p>
-        </p:txBody>
-      </p:sp>
-      <p:sp>
-        <p:nvSpPr>
-          <p:cNvPr id="21" name="Rounded Rectangle 20"/>
+              <a:t>落地层·现场改善</a:t>
+            </a:r>
+          </a:p>
+        </p:txBody>
+      </p:sp>
+      <p:sp>
+        <p:nvSpPr>
+          <p:cNvPr id="18" name="TextBox 17"/>
+          <p:cNvSpPr txBox="1"/>
+          <p:nvPr/>
+        </p:nvSpPr>
+        <p:spPr>
+          <a:xfrm>
+            <a:off x="9299448" y="2286000"/>
+            <a:ext cx="2560320" cy="365760"/>
+          </a:xfrm>
+          <a:prstGeom prst="rect">
+            <a:avLst/>
+          </a:prstGeom>
+          <a:noFill/>
+        </p:spPr>
+        <p:txBody>
+          <a:bodyPr wrap="square">
+            <a:spAutoFit/>
+          </a:bodyPr>
+          <a:lstStyle/>
+          <a:p>
+            <a:pPr algn="l"/>
+            <a:r>
+              <a:rPr sz="1000" b="0">
+                <a:solidFill>
+                  <a:srgbClr val="64748B"/>
+                </a:solidFill>
+                <a:latin typeface="Microsoft YaHei"/>
+                <a:ea typeface="Microsoft YaHei"/>
+              </a:rPr>
+              <a:t>班组SOP/现场提案改善</a:t>
+            </a:r>
+          </a:p>
+        </p:txBody>
+      </p:sp>
+      <p:sp>
+        <p:nvSpPr>
+          <p:cNvPr id="19" name="TextBox 18"/>
+          <p:cNvSpPr txBox="1"/>
+          <p:nvPr/>
+        </p:nvSpPr>
+        <p:spPr>
+          <a:xfrm>
+            <a:off x="411480" y="2971800"/>
+            <a:ext cx="3657600" cy="228600"/>
+          </a:xfrm>
+          <a:prstGeom prst="rect">
+            <a:avLst/>
+          </a:prstGeom>
+          <a:noFill/>
+        </p:spPr>
+        <p:txBody>
+          <a:bodyPr wrap="square">
+            <a:spAutoFit/>
+          </a:bodyPr>
+          <a:lstStyle/>
+          <a:p>
+            <a:pPr algn="l"/>
+            <a:r>
+              <a:rPr sz="1200" b="1">
+                <a:solidFill>
+                  <a:srgbClr val="0F766E"/>
+                </a:solidFill>
+                <a:latin typeface="Microsoft YaHei"/>
+                <a:ea typeface="Microsoft YaHei"/>
+              </a:rPr>
+              <a:t>五大体系</a:t>
+            </a:r>
+          </a:p>
+        </p:txBody>
+      </p:sp>
+      <p:sp>
+        <p:nvSpPr>
+          <p:cNvPr id="20" name="Rounded Rectangle 19"/>
           <p:cNvSpPr/>
           <p:nvPr/>
         </p:nvSpPr>
         <p:spPr>
           <a:xfrm>
-            <a:off x="2743200" y="3200400"/>
-            <a:ext cx="2194560" cy="640080"/>
+            <a:off x="411480" y="3246120"/>
+            <a:ext cx="2194560" cy="594360"/>
           </a:xfrm>
           <a:prstGeom prst="roundRect">
             <a:avLst>
-              <a:gd name="adj" fmla="val 8000"/>
+              <a:gd name="adj" fmla="val 4000"/>
             </a:avLst>
           </a:prstGeom>
           <a:solidFill>
             <a:srgbClr val="FFFFFF"/>
           </a:solidFill>
-          <a:ln w="15875">
+          <a:ln w="12700">
             <a:solidFill>
-              <a:srgbClr val="E8EEF2"/>
+              <a:srgbClr val="CBD5E1"/>
             </a:solidFill>
           </a:ln>
         </p:spPr>
@@ -4668,14 +4666,14 @@
       </p:sp>
       <p:sp>
         <p:nvSpPr>
-          <p:cNvPr id="22" name="TextBox 21"/>
+          <p:cNvPr id="21" name="TextBox 20"/>
           <p:cNvSpPr txBox="1"/>
           <p:nvPr/>
         </p:nvSpPr>
         <p:spPr>
           <a:xfrm>
-            <a:off x="2743200" y="3337560"/>
-            <a:ext cx="2194560" cy="365760"/>
+            <a:off x="411480" y="3383280"/>
+            <a:ext cx="2194560" cy="320040"/>
           </a:xfrm>
           <a:prstGeom prst="rect">
             <a:avLst/>
@@ -4690,40 +4688,40 @@
           <a:p>
             <a:pPr algn="ctr"/>
             <a:r>
-              <a:rPr sz="1300" b="1">
-                <a:solidFill>
-                  <a:srgbClr val="1B3A5F"/>
+              <a:rPr sz="1200" b="1">
+                <a:solidFill>
+                  <a:srgbClr val="0F172A"/>
                 </a:solidFill>
                 <a:latin typeface="Microsoft YaHei"/>
                 <a:ea typeface="Microsoft YaHei"/>
               </a:rPr>
-              <a:t>02标杆复制</a:t>
-            </a:r>
-          </a:p>
-        </p:txBody>
-      </p:sp>
-      <p:sp>
-        <p:nvSpPr>
-          <p:cNvPr id="23" name="Rounded Rectangle 22"/>
+              <a:t>01对标研学</a:t>
+            </a:r>
+          </a:p>
+        </p:txBody>
+      </p:sp>
+      <p:sp>
+        <p:nvSpPr>
+          <p:cNvPr id="22" name="Rounded Rectangle 21"/>
           <p:cNvSpPr/>
           <p:nvPr/>
         </p:nvSpPr>
         <p:spPr>
           <a:xfrm>
-            <a:off x="5074920" y="3200400"/>
-            <a:ext cx="2194560" cy="640080"/>
+            <a:off x="2743200" y="3246120"/>
+            <a:ext cx="2194560" cy="594360"/>
           </a:xfrm>
           <a:prstGeom prst="roundRect">
             <a:avLst>
-              <a:gd name="adj" fmla="val 8000"/>
+              <a:gd name="adj" fmla="val 4000"/>
             </a:avLst>
           </a:prstGeom>
           <a:solidFill>
             <a:srgbClr val="FFFFFF"/>
           </a:solidFill>
-          <a:ln w="15875">
+          <a:ln w="12700">
             <a:solidFill>
-              <a:srgbClr val="E8EEF2"/>
+              <a:srgbClr val="CBD5E1"/>
             </a:solidFill>
           </a:ln>
         </p:spPr>
@@ -4751,14 +4749,14 @@
       </p:sp>
       <p:sp>
         <p:nvSpPr>
-          <p:cNvPr id="24" name="TextBox 23"/>
+          <p:cNvPr id="23" name="TextBox 22"/>
           <p:cNvSpPr txBox="1"/>
           <p:nvPr/>
         </p:nvSpPr>
         <p:spPr>
           <a:xfrm>
-            <a:off x="5074920" y="3337560"/>
-            <a:ext cx="2194560" cy="365760"/>
+            <a:off x="2743200" y="3383280"/>
+            <a:ext cx="2194560" cy="320040"/>
           </a:xfrm>
           <a:prstGeom prst="rect">
             <a:avLst/>
@@ -4773,40 +4771,40 @@
           <a:p>
             <a:pPr algn="ctr"/>
             <a:r>
-              <a:rPr sz="1300" b="1">
-                <a:solidFill>
-                  <a:srgbClr val="1B3A5F"/>
+              <a:rPr sz="1200" b="1">
+                <a:solidFill>
+                  <a:srgbClr val="0F172A"/>
                 </a:solidFill>
                 <a:latin typeface="Microsoft YaHei"/>
                 <a:ea typeface="Microsoft YaHei"/>
               </a:rPr>
-              <a:t>03人才育成</a:t>
-            </a:r>
-          </a:p>
-        </p:txBody>
-      </p:sp>
-      <p:sp>
-        <p:nvSpPr>
-          <p:cNvPr id="25" name="Rounded Rectangle 24"/>
+              <a:t>02标杆复制</a:t>
+            </a:r>
+          </a:p>
+        </p:txBody>
+      </p:sp>
+      <p:sp>
+        <p:nvSpPr>
+          <p:cNvPr id="24" name="Rounded Rectangle 23"/>
           <p:cNvSpPr/>
           <p:nvPr/>
         </p:nvSpPr>
         <p:spPr>
           <a:xfrm>
-            <a:off x="7406640" y="3200400"/>
-            <a:ext cx="2194560" cy="640080"/>
+            <a:off x="5074920" y="3246120"/>
+            <a:ext cx="2194560" cy="594360"/>
           </a:xfrm>
           <a:prstGeom prst="roundRect">
             <a:avLst>
-              <a:gd name="adj" fmla="val 8000"/>
+              <a:gd name="adj" fmla="val 4000"/>
             </a:avLst>
           </a:prstGeom>
           <a:solidFill>
             <a:srgbClr val="FFFFFF"/>
           </a:solidFill>
-          <a:ln w="15875">
+          <a:ln w="12700">
             <a:solidFill>
-              <a:srgbClr val="E8EEF2"/>
+              <a:srgbClr val="CBD5E1"/>
             </a:solidFill>
           </a:ln>
         </p:spPr>
@@ -4834,14 +4832,14 @@
       </p:sp>
       <p:sp>
         <p:nvSpPr>
-          <p:cNvPr id="26" name="TextBox 25"/>
+          <p:cNvPr id="25" name="TextBox 24"/>
           <p:cNvSpPr txBox="1"/>
           <p:nvPr/>
         </p:nvSpPr>
         <p:spPr>
           <a:xfrm>
-            <a:off x="7406640" y="3337560"/>
-            <a:ext cx="2194560" cy="365760"/>
+            <a:off x="5074920" y="3383280"/>
+            <a:ext cx="2194560" cy="320040"/>
           </a:xfrm>
           <a:prstGeom prst="rect">
             <a:avLst/>
@@ -4856,40 +4854,40 @@
           <a:p>
             <a:pPr algn="ctr"/>
             <a:r>
-              <a:rPr sz="1300" b="1">
-                <a:solidFill>
-                  <a:srgbClr val="1B3A5F"/>
+              <a:rPr sz="1200" b="1">
+                <a:solidFill>
+                  <a:srgbClr val="0F172A"/>
                 </a:solidFill>
                 <a:latin typeface="Microsoft YaHei"/>
                 <a:ea typeface="Microsoft YaHei"/>
               </a:rPr>
-              <a:t>04考核管控</a:t>
-            </a:r>
-          </a:p>
-        </p:txBody>
-      </p:sp>
-      <p:sp>
-        <p:nvSpPr>
-          <p:cNvPr id="27" name="Rounded Rectangle 26"/>
+              <a:t>03人才育成</a:t>
+            </a:r>
+          </a:p>
+        </p:txBody>
+      </p:sp>
+      <p:sp>
+        <p:nvSpPr>
+          <p:cNvPr id="26" name="Rounded Rectangle 25"/>
           <p:cNvSpPr/>
           <p:nvPr/>
         </p:nvSpPr>
         <p:spPr>
           <a:xfrm>
-            <a:off x="9738359" y="3200400"/>
-            <a:ext cx="2194560" cy="640080"/>
+            <a:off x="7406640" y="3246120"/>
+            <a:ext cx="2194560" cy="594360"/>
           </a:xfrm>
           <a:prstGeom prst="roundRect">
             <a:avLst>
-              <a:gd name="adj" fmla="val 8000"/>
+              <a:gd name="adj" fmla="val 4000"/>
             </a:avLst>
           </a:prstGeom>
           <a:solidFill>
-            <a:srgbClr val="FFF4EB"/>
+            <a:srgbClr val="FFFFFF"/>
           </a:solidFill>
-          <a:ln w="15875">
+          <a:ln w="12700">
             <a:solidFill>
-              <a:srgbClr val="E87A2E"/>
+              <a:srgbClr val="CBD5E1"/>
             </a:solidFill>
           </a:ln>
         </p:spPr>
@@ -4917,14 +4915,14 @@
       </p:sp>
       <p:sp>
         <p:nvSpPr>
-          <p:cNvPr id="28" name="TextBox 27"/>
+          <p:cNvPr id="27" name="TextBox 26"/>
           <p:cNvSpPr txBox="1"/>
           <p:nvPr/>
         </p:nvSpPr>
         <p:spPr>
           <a:xfrm>
-            <a:off x="9738359" y="3337560"/>
-            <a:ext cx="2194560" cy="365760"/>
+            <a:off x="7406640" y="3383280"/>
+            <a:ext cx="2194560" cy="320040"/>
           </a:xfrm>
           <a:prstGeom prst="rect">
             <a:avLst/>
@@ -4939,76 +4937,40 @@
           <a:p>
             <a:pPr algn="ctr"/>
             <a:r>
-              <a:rPr sz="1300" b="1">
-                <a:solidFill>
-                  <a:srgbClr val="1B3A5F"/>
+              <a:rPr sz="1200" b="1">
+                <a:solidFill>
+                  <a:srgbClr val="0F172A"/>
                 </a:solidFill>
                 <a:latin typeface="Microsoft YaHei"/>
                 <a:ea typeface="Microsoft YaHei"/>
               </a:rPr>
-              <a:t>05价值生产力</a:t>
-            </a:r>
-          </a:p>
-        </p:txBody>
-      </p:sp>
-      <p:sp>
-        <p:nvSpPr>
-          <p:cNvPr id="29" name="TextBox 28"/>
-          <p:cNvSpPr txBox="1"/>
-          <p:nvPr/>
-        </p:nvSpPr>
-        <p:spPr>
-          <a:xfrm>
-            <a:off x="411480" y="4069080"/>
-            <a:ext cx="7315200" cy="274320"/>
-          </a:xfrm>
-          <a:prstGeom prst="rect">
-            <a:avLst/>
-          </a:prstGeom>
-          <a:noFill/>
-        </p:spPr>
-        <p:txBody>
-          <a:bodyPr wrap="square">
-            <a:spAutoFit/>
-          </a:bodyPr>
-          <a:lstStyle/>
-          <a:p>
-            <a:pPr algn="l"/>
-            <a:r>
-              <a:rPr sz="1300" b="1">
-                <a:solidFill>
-                  <a:srgbClr val="E87A2E"/>
-                </a:solidFill>
-                <a:latin typeface="Microsoft YaHei"/>
-                <a:ea typeface="Microsoft YaHei"/>
-              </a:rPr>
-              <a:t>三阶段路径（2026下半年）</a:t>
-            </a:r>
-          </a:p>
-        </p:txBody>
-      </p:sp>
-      <p:sp>
-        <p:nvSpPr>
-          <p:cNvPr id="30" name="Rounded Rectangle 29"/>
+              <a:t>04考核管控</a:t>
+            </a:r>
+          </a:p>
+        </p:txBody>
+      </p:sp>
+      <p:sp>
+        <p:nvSpPr>
+          <p:cNvPr id="28" name="Rounded Rectangle 27"/>
           <p:cNvSpPr/>
           <p:nvPr/>
         </p:nvSpPr>
         <p:spPr>
           <a:xfrm>
-            <a:off x="411480" y="4434840"/>
-            <a:ext cx="3703320" cy="1097280"/>
+            <a:off x="9738359" y="3246120"/>
+            <a:ext cx="2194560" cy="594360"/>
           </a:xfrm>
           <a:prstGeom prst="roundRect">
             <a:avLst>
-              <a:gd name="adj" fmla="val 8000"/>
+              <a:gd name="adj" fmla="val 4000"/>
             </a:avLst>
           </a:prstGeom>
           <a:solidFill>
-            <a:srgbClr val="FFFFFF"/>
+            <a:srgbClr val="CCFBF1"/>
           </a:solidFill>
-          <a:ln w="15875">
+          <a:ln w="12700">
             <a:solidFill>
-              <a:srgbClr val="E8EEF2"/>
+              <a:srgbClr val="0F766E"/>
             </a:solidFill>
           </a:ln>
         </p:spPr>
@@ -5036,14 +4998,14 @@
       </p:sp>
       <p:sp>
         <p:nvSpPr>
-          <p:cNvPr id="31" name="TextBox 30"/>
+          <p:cNvPr id="29" name="TextBox 28"/>
           <p:cNvSpPr txBox="1"/>
           <p:nvPr/>
         </p:nvSpPr>
         <p:spPr>
           <a:xfrm>
-            <a:off x="548640" y="4572000"/>
-            <a:ext cx="3383280" cy="274320"/>
+            <a:off x="9738359" y="3383280"/>
+            <a:ext cx="2194560" cy="320040"/>
           </a:xfrm>
           <a:prstGeom prst="rect">
             <a:avLst/>
@@ -5056,30 +5018,30 @@
           </a:bodyPr>
           <a:lstStyle/>
           <a:p>
-            <a:pPr algn="l"/>
-            <a:r>
-              <a:rPr sz="1300" b="1">
-                <a:solidFill>
-                  <a:srgbClr val="1B3A5F"/>
+            <a:pPr algn="ctr"/>
+            <a:r>
+              <a:rPr sz="1200" b="1">
+                <a:solidFill>
+                  <a:srgbClr val="0F172A"/>
                 </a:solidFill>
                 <a:latin typeface="Microsoft YaHei"/>
                 <a:ea typeface="Microsoft YaHei"/>
               </a:rPr>
-              <a:t>7–8月 筑基巩固期</a:t>
-            </a:r>
-          </a:p>
-        </p:txBody>
-      </p:sp>
-      <p:sp>
-        <p:nvSpPr>
-          <p:cNvPr id="32" name="TextBox 31"/>
+              <a:t>05价值生产力</a:t>
+            </a:r>
+          </a:p>
+        </p:txBody>
+      </p:sp>
+      <p:sp>
+        <p:nvSpPr>
+          <p:cNvPr id="30" name="TextBox 29"/>
           <p:cNvSpPr txBox="1"/>
           <p:nvPr/>
         </p:nvSpPr>
         <p:spPr>
           <a:xfrm>
-            <a:off x="548640" y="4937760"/>
-            <a:ext cx="3383280" cy="365760"/>
+            <a:off x="411480" y="4069080"/>
+            <a:ext cx="7315200" cy="228600"/>
           </a:xfrm>
           <a:prstGeom prst="rect">
             <a:avLst/>
@@ -5094,40 +5056,40 @@
           <a:p>
             <a:pPr algn="l"/>
             <a:r>
-              <a:rPr sz="1200" b="0">
-                <a:solidFill>
-                  <a:srgbClr val="5D6D7E"/>
+              <a:rPr sz="1200" b="1">
+                <a:solidFill>
+                  <a:srgbClr val="0F766E"/>
                 </a:solidFill>
                 <a:latin typeface="Microsoft YaHei"/>
                 <a:ea typeface="Microsoft YaHei"/>
               </a:rPr>
-              <a:t>补短板、定标准、全员培训</a:t>
-            </a:r>
-          </a:p>
-        </p:txBody>
-      </p:sp>
-      <p:sp>
-        <p:nvSpPr>
-          <p:cNvPr id="33" name="Rounded Rectangle 32"/>
+              <a:t>三阶段路径（2026下半年）</a:t>
+            </a:r>
+          </a:p>
+        </p:txBody>
+      </p:sp>
+      <p:sp>
+        <p:nvSpPr>
+          <p:cNvPr id="31" name="Rounded Rectangle 30"/>
           <p:cNvSpPr/>
           <p:nvPr/>
         </p:nvSpPr>
         <p:spPr>
           <a:xfrm>
-            <a:off x="4297680" y="4434840"/>
-            <a:ext cx="3703320" cy="1097280"/>
+            <a:off x="411480" y="4389120"/>
+            <a:ext cx="3703320" cy="1005840"/>
           </a:xfrm>
           <a:prstGeom prst="roundRect">
             <a:avLst>
-              <a:gd name="adj" fmla="val 8000"/>
+              <a:gd name="adj" fmla="val 4000"/>
             </a:avLst>
           </a:prstGeom>
           <a:solidFill>
             <a:srgbClr val="FFFFFF"/>
           </a:solidFill>
-          <a:ln w="15875">
+          <a:ln w="12700">
             <a:solidFill>
-              <a:srgbClr val="E8EEF2"/>
+              <a:srgbClr val="CBD5E1"/>
             </a:solidFill>
           </a:ln>
         </p:spPr>
@@ -5155,13 +5117,13 @@
       </p:sp>
       <p:sp>
         <p:nvSpPr>
-          <p:cNvPr id="34" name="TextBox 33"/>
+          <p:cNvPr id="32" name="TextBox 31"/>
           <p:cNvSpPr txBox="1"/>
           <p:nvPr/>
         </p:nvSpPr>
         <p:spPr>
           <a:xfrm>
-            <a:off x="4434840" y="4572000"/>
+            <a:off x="548640" y="4526280"/>
             <a:ext cx="3383280" cy="274320"/>
           </a:xfrm>
           <a:prstGeom prst="rect">
@@ -5177,28 +5139,28 @@
           <a:p>
             <a:pPr algn="l"/>
             <a:r>
-              <a:rPr sz="1300" b="1">
-                <a:solidFill>
-                  <a:srgbClr val="1B3A5F"/>
+              <a:rPr sz="1200" b="1">
+                <a:solidFill>
+                  <a:srgbClr val="0F172A"/>
                 </a:solidFill>
                 <a:latin typeface="Microsoft YaHei"/>
                 <a:ea typeface="Microsoft YaHei"/>
               </a:rPr>
-              <a:t>9–10月 攻坚突破期</a:t>
-            </a:r>
-          </a:p>
-        </p:txBody>
-      </p:sp>
-      <p:sp>
-        <p:nvSpPr>
-          <p:cNvPr id="35" name="TextBox 34"/>
+              <a:t>7–8月 筑基巩固期</a:t>
+            </a:r>
+          </a:p>
+        </p:txBody>
+      </p:sp>
+      <p:sp>
+        <p:nvSpPr>
+          <p:cNvPr id="33" name="TextBox 32"/>
           <p:cNvSpPr txBox="1"/>
           <p:nvPr/>
         </p:nvSpPr>
         <p:spPr>
           <a:xfrm>
-            <a:off x="4434840" y="4937760"/>
-            <a:ext cx="3383280" cy="365760"/>
+            <a:off x="548640" y="4892040"/>
+            <a:ext cx="3383280" cy="320040"/>
           </a:xfrm>
           <a:prstGeom prst="rect">
             <a:avLst/>
@@ -5213,40 +5175,40 @@
           <a:p>
             <a:pPr algn="l"/>
             <a:r>
-              <a:rPr sz="1200" b="0">
-                <a:solidFill>
-                  <a:srgbClr val="5D6D7E"/>
+              <a:rPr sz="1100" b="0">
+                <a:solidFill>
+                  <a:srgbClr val="64748B"/>
                 </a:solidFill>
                 <a:latin typeface="Microsoft YaHei"/>
                 <a:ea typeface="Microsoft YaHei"/>
               </a:rPr>
-              <a:t>专项课题，解决核心痛点瓶颈</a:t>
-            </a:r>
-          </a:p>
-        </p:txBody>
-      </p:sp>
-      <p:sp>
-        <p:nvSpPr>
-          <p:cNvPr id="36" name="Rounded Rectangle 35"/>
+              <a:t>补短板、定标准、全员培训</a:t>
+            </a:r>
+          </a:p>
+        </p:txBody>
+      </p:sp>
+      <p:sp>
+        <p:nvSpPr>
+          <p:cNvPr id="34" name="Rounded Rectangle 33"/>
           <p:cNvSpPr/>
           <p:nvPr/>
         </p:nvSpPr>
         <p:spPr>
           <a:xfrm>
-            <a:off x="8183879" y="4434840"/>
-            <a:ext cx="3703320" cy="1097280"/>
+            <a:off x="4297680" y="4389120"/>
+            <a:ext cx="3703320" cy="1005840"/>
           </a:xfrm>
           <a:prstGeom prst="roundRect">
             <a:avLst>
-              <a:gd name="adj" fmla="val 8000"/>
+              <a:gd name="adj" fmla="val 4000"/>
             </a:avLst>
           </a:prstGeom>
           <a:solidFill>
             <a:srgbClr val="FFFFFF"/>
           </a:solidFill>
-          <a:ln w="15875">
+          <a:ln w="12700">
             <a:solidFill>
-              <a:srgbClr val="E8EEF2"/>
+              <a:srgbClr val="CBD5E1"/>
             </a:solidFill>
           </a:ln>
         </p:spPr>
@@ -5274,13 +5236,13 @@
       </p:sp>
       <p:sp>
         <p:nvSpPr>
-          <p:cNvPr id="37" name="TextBox 36"/>
+          <p:cNvPr id="35" name="TextBox 34"/>
           <p:cNvSpPr txBox="1"/>
           <p:nvPr/>
         </p:nvSpPr>
         <p:spPr>
           <a:xfrm>
-            <a:off x="8321039" y="4572000"/>
+            <a:off x="4434840" y="4526280"/>
             <a:ext cx="3383280" cy="274320"/>
           </a:xfrm>
           <a:prstGeom prst="rect">
@@ -5296,28 +5258,28 @@
           <a:p>
             <a:pPr algn="l"/>
             <a:r>
-              <a:rPr sz="1300" b="1">
-                <a:solidFill>
-                  <a:srgbClr val="1B3A5F"/>
+              <a:rPr sz="1200" b="1">
+                <a:solidFill>
+                  <a:srgbClr val="0F172A"/>
                 </a:solidFill>
                 <a:latin typeface="Microsoft YaHei"/>
                 <a:ea typeface="Microsoft YaHei"/>
               </a:rPr>
-              <a:t>11–12月 价值兑现期</a:t>
-            </a:r>
-          </a:p>
-        </p:txBody>
-      </p:sp>
-      <p:sp>
-        <p:nvSpPr>
-          <p:cNvPr id="38" name="TextBox 37"/>
+              <a:t>9–10月 攻坚突破期</a:t>
+            </a:r>
+          </a:p>
+        </p:txBody>
+      </p:sp>
+      <p:sp>
+        <p:nvSpPr>
+          <p:cNvPr id="36" name="TextBox 35"/>
           <p:cNvSpPr txBox="1"/>
           <p:nvPr/>
         </p:nvSpPr>
         <p:spPr>
           <a:xfrm>
-            <a:off x="8321039" y="4937760"/>
-            <a:ext cx="3383280" cy="365760"/>
+            <a:off x="4434840" y="4892040"/>
+            <a:ext cx="3383280" cy="320040"/>
           </a:xfrm>
           <a:prstGeom prst="rect">
             <a:avLst/>
@@ -5332,39 +5294,41 @@
           <a:p>
             <a:pPr algn="l"/>
             <a:r>
-              <a:rPr sz="1200" b="0">
-                <a:solidFill>
-                  <a:srgbClr val="5D6D7E"/>
+              <a:rPr sz="1100" b="0">
+                <a:solidFill>
+                  <a:srgbClr val="64748B"/>
                 </a:solidFill>
                 <a:latin typeface="Microsoft YaHei"/>
                 <a:ea typeface="Microsoft YaHei"/>
               </a:rPr>
-              <a:t>固化成果、长效机制、效益验证</a:t>
-            </a:r>
-          </a:p>
-        </p:txBody>
-      </p:sp>
-      <p:sp>
-        <p:nvSpPr>
-          <p:cNvPr id="39" name="Rounded Rectangle 38"/>
+              <a:t>专项课题，解决核心痛点瓶颈</a:t>
+            </a:r>
+          </a:p>
+        </p:txBody>
+      </p:sp>
+      <p:sp>
+        <p:nvSpPr>
+          <p:cNvPr id="37" name="Rounded Rectangle 36"/>
           <p:cNvSpPr/>
           <p:nvPr/>
         </p:nvSpPr>
         <p:spPr>
           <a:xfrm>
-            <a:off x="411480" y="5760720"/>
-            <a:ext cx="11338560" cy="777240"/>
+            <a:off x="8183879" y="4389120"/>
+            <a:ext cx="3703320" cy="1005840"/>
           </a:xfrm>
           <a:prstGeom prst="roundRect">
             <a:avLst>
-              <a:gd name="adj" fmla="val 8000"/>
+              <a:gd name="adj" fmla="val 4000"/>
             </a:avLst>
           </a:prstGeom>
           <a:solidFill>
-            <a:srgbClr val="1B3A5F"/>
+            <a:srgbClr val="FFFFFF"/>
           </a:solidFill>
-          <a:ln>
-            <a:noFill/>
+          <a:ln w="12700">
+            <a:solidFill>
+              <a:srgbClr val="CBD5E1"/>
+            </a:solidFill>
           </a:ln>
         </p:spPr>
         <p:style>
@@ -5391,14 +5355,14 @@
       </p:sp>
       <p:sp>
         <p:nvSpPr>
-          <p:cNvPr id="40" name="TextBox 39"/>
+          <p:cNvPr id="38" name="TextBox 37"/>
           <p:cNvSpPr txBox="1"/>
           <p:nvPr/>
         </p:nvSpPr>
         <p:spPr>
           <a:xfrm>
-            <a:off x="640080" y="5943600"/>
-            <a:ext cx="10972800" cy="457200"/>
+            <a:off x="8321039" y="4526280"/>
+            <a:ext cx="3383280" cy="274320"/>
           </a:xfrm>
           <a:prstGeom prst="rect">
             <a:avLst/>
@@ -5413,7 +5377,124 @@
           <a:p>
             <a:pPr algn="l"/>
             <a:r>
-              <a:rPr sz="1400" b="1">
+              <a:rPr sz="1200" b="1">
+                <a:solidFill>
+                  <a:srgbClr val="0F172A"/>
+                </a:solidFill>
+                <a:latin typeface="Microsoft YaHei"/>
+                <a:ea typeface="Microsoft YaHei"/>
+              </a:rPr>
+              <a:t>11–12月 价值兑现期</a:t>
+            </a:r>
+          </a:p>
+        </p:txBody>
+      </p:sp>
+      <p:sp>
+        <p:nvSpPr>
+          <p:cNvPr id="39" name="TextBox 38"/>
+          <p:cNvSpPr txBox="1"/>
+          <p:nvPr/>
+        </p:nvSpPr>
+        <p:spPr>
+          <a:xfrm>
+            <a:off x="8321039" y="4892040"/>
+            <a:ext cx="3383280" cy="320040"/>
+          </a:xfrm>
+          <a:prstGeom prst="rect">
+            <a:avLst/>
+          </a:prstGeom>
+          <a:noFill/>
+        </p:spPr>
+        <p:txBody>
+          <a:bodyPr wrap="square">
+            <a:spAutoFit/>
+          </a:bodyPr>
+          <a:lstStyle/>
+          <a:p>
+            <a:pPr algn="l"/>
+            <a:r>
+              <a:rPr sz="1100" b="0">
+                <a:solidFill>
+                  <a:srgbClr val="64748B"/>
+                </a:solidFill>
+                <a:latin typeface="Microsoft YaHei"/>
+                <a:ea typeface="Microsoft YaHei"/>
+              </a:rPr>
+              <a:t>固化成果、长效机制、效益验证</a:t>
+            </a:r>
+          </a:p>
+        </p:txBody>
+      </p:sp>
+      <p:sp>
+        <p:nvSpPr>
+          <p:cNvPr id="40" name="Rounded Rectangle 39"/>
+          <p:cNvSpPr/>
+          <p:nvPr/>
+        </p:nvSpPr>
+        <p:spPr>
+          <a:xfrm>
+            <a:off x="411480" y="5669280"/>
+            <a:ext cx="11338560" cy="822960"/>
+          </a:xfrm>
+          <a:prstGeom prst="roundRect">
+            <a:avLst>
+              <a:gd name="adj" fmla="val 4000"/>
+            </a:avLst>
+          </a:prstGeom>
+          <a:solidFill>
+            <a:srgbClr val="0F172A"/>
+          </a:solidFill>
+          <a:ln>
+            <a:noFill/>
+          </a:ln>
+        </p:spPr>
+        <p:style>
+          <a:lnRef idx="1">
+            <a:schemeClr val="accent1"/>
+          </a:lnRef>
+          <a:fillRef idx="3">
+            <a:schemeClr val="accent1"/>
+          </a:fillRef>
+          <a:effectRef idx="2">
+            <a:schemeClr val="accent1"/>
+          </a:effectRef>
+          <a:fontRef idx="minor">
+            <a:schemeClr val="lt1"/>
+          </a:fontRef>
+        </p:style>
+        <p:txBody>
+          <a:bodyPr rtlCol="0" anchor="ctr"/>
+          <a:lstStyle/>
+          <a:p>
+            <a:pPr algn="ctr"/>
+          </a:p>
+        </p:txBody>
+      </p:sp>
+      <p:sp>
+        <p:nvSpPr>
+          <p:cNvPr id="41" name="TextBox 40"/>
+          <p:cNvSpPr txBox="1"/>
+          <p:nvPr/>
+        </p:nvSpPr>
+        <p:spPr>
+          <a:xfrm>
+            <a:off x="640080" y="5897880"/>
+            <a:ext cx="10972800" cy="411480"/>
+          </a:xfrm>
+          <a:prstGeom prst="rect">
+            <a:avLst/>
+          </a:prstGeom>
+          <a:noFill/>
+        </p:spPr>
+        <p:txBody>
+          <a:bodyPr wrap="square">
+            <a:spAutoFit/>
+          </a:bodyPr>
+          <a:lstStyle/>
+          <a:p>
+            <a:pPr algn="l"/>
+            <a:r>
+              <a:rPr sz="1300" b="1">
                 <a:solidFill>
                   <a:srgbClr val="FFFFFF"/>
                 </a:solidFill>
@@ -5445,7 +5526,7 @@
       <p:grpSpPr/>
       <p:sp>
         <p:nvSpPr>
-          <p:cNvPr id="2" name="Rounded Rectangle 1"/>
+          <p:cNvPr id="2" name="Rectangle 1"/>
           <p:cNvSpPr/>
           <p:nvPr/>
         </p:nvSpPr>
@@ -5454,13 +5535,11 @@
             <a:off x="0" y="0"/>
             <a:ext cx="12191695" cy="6858000"/>
           </a:xfrm>
-          <a:prstGeom prst="roundRect">
-            <a:avLst>
-              <a:gd name="adj" fmla="val 8000"/>
-            </a:avLst>
+          <a:prstGeom prst="rect">
+            <a:avLst/>
           </a:prstGeom>
           <a:solidFill>
-            <a:srgbClr val="FFFFFF"/>
+            <a:srgbClr val="F1F5F9"/>
           </a:solidFill>
           <a:ln>
             <a:noFill/>
@@ -5490,99 +5569,23 @@
       </p:sp>
       <p:sp>
         <p:nvSpPr>
-          <p:cNvPr id="3" name="TextBox 2"/>
-          <p:cNvSpPr txBox="1"/>
-          <p:nvPr/>
-        </p:nvSpPr>
-        <p:spPr>
-          <a:xfrm>
-            <a:off x="411480" y="182880"/>
-            <a:ext cx="10972800" cy="365760"/>
-          </a:xfrm>
-          <a:prstGeom prst="rect">
-            <a:avLst/>
-          </a:prstGeom>
-          <a:noFill/>
-        </p:spPr>
-        <p:txBody>
-          <a:bodyPr wrap="square">
-            <a:spAutoFit/>
-          </a:bodyPr>
-          <a:lstStyle/>
-          <a:p>
-            <a:pPr algn="l"/>
-            <a:r>
-              <a:rPr sz="2400" b="1">
-                <a:solidFill>
-                  <a:srgbClr val="1B3A5F"/>
-                </a:solidFill>
-                <a:latin typeface="Microsoft YaHei"/>
-                <a:ea typeface="Microsoft YaHei"/>
-              </a:rPr>
-              <a:t>五大体系</a:t>
-            </a:r>
-          </a:p>
-        </p:txBody>
-      </p:sp>
-      <p:sp>
-        <p:nvSpPr>
-          <p:cNvPr id="4" name="TextBox 3"/>
-          <p:cNvSpPr txBox="1"/>
-          <p:nvPr/>
-        </p:nvSpPr>
-        <p:spPr>
-          <a:xfrm>
-            <a:off x="411480" y="548640"/>
-            <a:ext cx="10972800" cy="274320"/>
-          </a:xfrm>
-          <a:prstGeom prst="rect">
-            <a:avLst/>
-          </a:prstGeom>
-          <a:noFill/>
-        </p:spPr>
-        <p:txBody>
-          <a:bodyPr wrap="square">
-            <a:spAutoFit/>
-          </a:bodyPr>
-          <a:lstStyle/>
-          <a:p>
-            <a:pPr algn="l"/>
-            <a:r>
-              <a:rPr sz="1200" b="0">
-                <a:solidFill>
-                  <a:srgbClr val="5D6D7E"/>
-                </a:solidFill>
-                <a:latin typeface="Microsoft YaHei"/>
-                <a:ea typeface="Microsoft YaHei"/>
-              </a:rPr>
-              <a:t>管理支撑系统：对标 · 复制 · 育成 · 考核</a:t>
-            </a:r>
-          </a:p>
-        </p:txBody>
-      </p:sp>
-      <p:sp>
-        <p:nvSpPr>
-          <p:cNvPr id="5" name="Rounded Rectangle 4"/>
+          <p:cNvPr id="3" name="Rectangle 2"/>
           <p:cNvSpPr/>
           <p:nvPr/>
         </p:nvSpPr>
         <p:spPr>
           <a:xfrm>
-            <a:off x="365760" y="960120"/>
-            <a:ext cx="5715000" cy="2606040"/>
-          </a:xfrm>
-          <a:prstGeom prst="roundRect">
-            <a:avLst>
-              <a:gd name="adj" fmla="val 8000"/>
-            </a:avLst>
+            <a:off x="0" y="0"/>
+            <a:ext cx="12191695" cy="685800"/>
+          </a:xfrm>
+          <a:prstGeom prst="rect">
+            <a:avLst/>
           </a:prstGeom>
           <a:solidFill>
-            <a:srgbClr val="FFFFFF"/>
+            <a:srgbClr val="0F172A"/>
           </a:solidFill>
-          <a:ln w="15875">
-            <a:solidFill>
-              <a:srgbClr val="E8EEF2"/>
-            </a:solidFill>
+          <a:ln>
+            <a:noFill/>
           </a:ln>
         </p:spPr>
         <p:style>
@@ -5609,25 +5612,63 @@
       </p:sp>
       <p:sp>
         <p:nvSpPr>
-          <p:cNvPr id="6" name="Rounded Rectangle 5"/>
+          <p:cNvPr id="4" name="TextBox 3"/>
+          <p:cNvSpPr txBox="1"/>
+          <p:nvPr/>
+        </p:nvSpPr>
+        <p:spPr>
+          <a:xfrm>
+            <a:off x="411480" y="182880"/>
+            <a:ext cx="10972800" cy="365760"/>
+          </a:xfrm>
+          <a:prstGeom prst="rect">
+            <a:avLst/>
+          </a:prstGeom>
+          <a:noFill/>
+        </p:spPr>
+        <p:txBody>
+          <a:bodyPr wrap="square">
+            <a:spAutoFit/>
+          </a:bodyPr>
+          <a:lstStyle/>
+          <a:p>
+            <a:pPr algn="l"/>
+            <a:r>
+              <a:rPr sz="2200" b="1">
+                <a:solidFill>
+                  <a:srgbClr val="FFFFFF"/>
+                </a:solidFill>
+                <a:latin typeface="Microsoft YaHei"/>
+                <a:ea typeface="Microsoft YaHei"/>
+              </a:rPr>
+              <a:t>五大体系</a:t>
+            </a:r>
+          </a:p>
+        </p:txBody>
+      </p:sp>
+      <p:sp>
+        <p:nvSpPr>
+          <p:cNvPr id="5" name="Rounded Rectangle 4"/>
           <p:cNvSpPr/>
           <p:nvPr/>
         </p:nvSpPr>
         <p:spPr>
           <a:xfrm>
             <a:off x="365760" y="960120"/>
-            <a:ext cx="5715000" cy="777240"/>
+            <a:ext cx="5715000" cy="2606040"/>
           </a:xfrm>
           <a:prstGeom prst="roundRect">
             <a:avLst>
-              <a:gd name="adj" fmla="val 8000"/>
+              <a:gd name="adj" fmla="val 4000"/>
             </a:avLst>
           </a:prstGeom>
           <a:solidFill>
-            <a:srgbClr val="1B3A5F"/>
+            <a:srgbClr val="FFFFFF"/>
           </a:solidFill>
-          <a:ln>
-            <a:noFill/>
+          <a:ln w="12700">
+            <a:solidFill>
+              <a:srgbClr val="CBD5E1"/>
+            </a:solidFill>
           </a:ln>
         </p:spPr>
         <p:style>
@@ -5654,14 +5695,57 @@
       </p:sp>
       <p:sp>
         <p:nvSpPr>
+          <p:cNvPr id="6" name="Rectangle 5"/>
+          <p:cNvSpPr/>
+          <p:nvPr/>
+        </p:nvSpPr>
+        <p:spPr>
+          <a:xfrm>
+            <a:off x="365760" y="960120"/>
+            <a:ext cx="640080" cy="2606040"/>
+          </a:xfrm>
+          <a:prstGeom prst="rect">
+            <a:avLst/>
+          </a:prstGeom>
+          <a:solidFill>
+            <a:srgbClr val="0F172A"/>
+          </a:solidFill>
+          <a:ln>
+            <a:noFill/>
+          </a:ln>
+        </p:spPr>
+        <p:style>
+          <a:lnRef idx="1">
+            <a:schemeClr val="accent1"/>
+          </a:lnRef>
+          <a:fillRef idx="3">
+            <a:schemeClr val="accent1"/>
+          </a:fillRef>
+          <a:effectRef idx="2">
+            <a:schemeClr val="accent1"/>
+          </a:effectRef>
+          <a:fontRef idx="minor">
+            <a:schemeClr val="lt1"/>
+          </a:fontRef>
+        </p:style>
+        <p:txBody>
+          <a:bodyPr rtlCol="0" anchor="ctr"/>
+          <a:lstStyle/>
+          <a:p>
+            <a:pPr algn="ctr"/>
+          </a:p>
+        </p:txBody>
+      </p:sp>
+      <p:sp>
+        <p:nvSpPr>
           <p:cNvPr id="7" name="TextBox 6"/>
           <p:cNvSpPr txBox="1"/>
           <p:nvPr/>
         </p:nvSpPr>
         <p:spPr>
           <a:xfrm>
-            <a:off x="548640" y="1097280"/>
-            <a:ext cx="5303520" cy="274320"/>
+            <a:off x="457200" y="2011680"/>
+            <a:ext cx="457200" cy="365760"/>
           </a:xfrm>
           <a:prstGeom prst="rect">
             <a:avLst/>
@@ -5674,11 +5758,47 @@
           </a:bodyPr>
           <a:lstStyle/>
           <a:p>
+            <a:pPr algn="ctr"/>
+            <a:r>
+              <a:rPr sz="1400" b="1">
+                <a:solidFill>
+                  <a:srgbClr val="0F766E"/>
+                </a:solidFill>
+                <a:latin typeface="Microsoft YaHei"/>
+                <a:ea typeface="Microsoft YaHei"/>
+              </a:rPr>
+              <a:t>01</a:t>
+            </a:r>
+          </a:p>
+        </p:txBody>
+      </p:sp>
+      <p:sp>
+        <p:nvSpPr>
+          <p:cNvPr id="8" name="TextBox 7"/>
+          <p:cNvSpPr txBox="1"/>
+          <p:nvPr/>
+        </p:nvSpPr>
+        <p:spPr>
+          <a:xfrm>
+            <a:off x="1188720" y="1188720"/>
+            <a:ext cx="4663440" cy="320040"/>
+          </a:xfrm>
+          <a:prstGeom prst="rect">
+            <a:avLst/>
+          </a:prstGeom>
+          <a:noFill/>
+        </p:spPr>
+        <p:txBody>
+          <a:bodyPr wrap="square">
+            <a:spAutoFit/>
+          </a:bodyPr>
+          <a:lstStyle/>
+          <a:p>
             <a:pPr algn="l"/>
             <a:r>
-              <a:rPr sz="1500" b="1">
-                <a:solidFill>
-                  <a:srgbClr val="FFFFFF"/>
+              <a:rPr sz="1400" b="1">
+                <a:solidFill>
+                  <a:srgbClr val="0F172A"/>
                 </a:solidFill>
                 <a:latin typeface="Microsoft YaHei"/>
                 <a:ea typeface="Microsoft YaHei"/>
@@ -5690,14 +5810,14 @@
       </p:sp>
       <p:sp>
         <p:nvSpPr>
-          <p:cNvPr id="8" name="TextBox 7"/>
+          <p:cNvPr id="9" name="TextBox 8"/>
           <p:cNvSpPr txBox="1"/>
           <p:nvPr/>
         </p:nvSpPr>
         <p:spPr>
           <a:xfrm>
-            <a:off x="548640" y="1399032"/>
-            <a:ext cx="5303520" cy="274320"/>
+            <a:off x="1188720" y="1554480"/>
+            <a:ext cx="4663440" cy="274320"/>
           </a:xfrm>
           <a:prstGeom prst="rect">
             <a:avLst/>
@@ -5714,7 +5834,7 @@
             <a:r>
               <a:rPr sz="1100" b="0">
                 <a:solidFill>
-                  <a:srgbClr val="E87A2E"/>
+                  <a:srgbClr val="0F766E"/>
                 </a:solidFill>
                 <a:latin typeface="Microsoft YaHei"/>
                 <a:ea typeface="Microsoft YaHei"/>
@@ -5726,14 +5846,14 @@
       </p:sp>
       <p:sp>
         <p:nvSpPr>
-          <p:cNvPr id="9" name="TextBox 8"/>
+          <p:cNvPr id="10" name="TextBox 9"/>
           <p:cNvSpPr txBox="1"/>
           <p:nvPr/>
         </p:nvSpPr>
         <p:spPr>
           <a:xfrm>
-            <a:off x="548640" y="1965960"/>
-            <a:ext cx="5303520" cy="1371600"/>
+            <a:off x="1188720" y="2011680"/>
+            <a:ext cx="4663440" cy="1280160"/>
           </a:xfrm>
           <a:prstGeom prst="rect">
             <a:avLst/>
@@ -5748,9 +5868,9 @@
           <a:p>
             <a:pPr algn="l"/>
             <a:r>
-              <a:rPr sz="1200" b="0">
-                <a:solidFill>
-                  <a:srgbClr val="5D6D7E"/>
+              <a:rPr sz="1100" b="0">
+                <a:solidFill>
+                  <a:srgbClr val="64748B"/>
                 </a:solidFill>
                 <a:latin typeface="Microsoft YaHei"/>
                 <a:ea typeface="Microsoft YaHei"/>
@@ -5763,7 +5883,7 @@
       </p:sp>
       <p:sp>
         <p:nvSpPr>
-          <p:cNvPr id="10" name="Rounded Rectangle 9"/>
+          <p:cNvPr id="11" name="Rounded Rectangle 10"/>
           <p:cNvSpPr/>
           <p:nvPr/>
         </p:nvSpPr>
@@ -5774,15 +5894,15 @@
           </a:xfrm>
           <a:prstGeom prst="roundRect">
             <a:avLst>
-              <a:gd name="adj" fmla="val 8000"/>
+              <a:gd name="adj" fmla="val 4000"/>
             </a:avLst>
           </a:prstGeom>
           <a:solidFill>
             <a:srgbClr val="FFFFFF"/>
           </a:solidFill>
-          <a:ln w="15875">
+          <a:ln w="12700">
             <a:solidFill>
-              <a:srgbClr val="E8EEF2"/>
+              <a:srgbClr val="CBD5E1"/>
             </a:solidFill>
           </a:ln>
         </p:spPr>
@@ -5810,22 +5930,20 @@
       </p:sp>
       <p:sp>
         <p:nvSpPr>
-          <p:cNvPr id="11" name="Rounded Rectangle 10"/>
+          <p:cNvPr id="12" name="Rectangle 11"/>
           <p:cNvSpPr/>
           <p:nvPr/>
         </p:nvSpPr>
         <p:spPr>
           <a:xfrm>
             <a:off x="6309360" y="960120"/>
-            <a:ext cx="5715000" cy="777240"/>
-          </a:xfrm>
-          <a:prstGeom prst="roundRect">
-            <a:avLst>
-              <a:gd name="adj" fmla="val 8000"/>
-            </a:avLst>
+            <a:ext cx="640080" cy="2606040"/>
+          </a:xfrm>
+          <a:prstGeom prst="rect">
+            <a:avLst/>
           </a:prstGeom>
           <a:solidFill>
-            <a:srgbClr val="1B3A5F"/>
+            <a:srgbClr val="0F172A"/>
           </a:solidFill>
           <a:ln>
             <a:noFill/>
@@ -5855,14 +5973,14 @@
       </p:sp>
       <p:sp>
         <p:nvSpPr>
-          <p:cNvPr id="12" name="TextBox 11"/>
+          <p:cNvPr id="13" name="TextBox 12"/>
           <p:cNvSpPr txBox="1"/>
           <p:nvPr/>
         </p:nvSpPr>
         <p:spPr>
           <a:xfrm>
-            <a:off x="6492240" y="1097280"/>
-            <a:ext cx="5303520" cy="274320"/>
+            <a:off x="6400800" y="2011680"/>
+            <a:ext cx="457200" cy="365760"/>
           </a:xfrm>
           <a:prstGeom prst="rect">
             <a:avLst/>
@@ -5875,11 +5993,47 @@
           </a:bodyPr>
           <a:lstStyle/>
           <a:p>
+            <a:pPr algn="ctr"/>
+            <a:r>
+              <a:rPr sz="1400" b="1">
+                <a:solidFill>
+                  <a:srgbClr val="0F766E"/>
+                </a:solidFill>
+                <a:latin typeface="Microsoft YaHei"/>
+                <a:ea typeface="Microsoft YaHei"/>
+              </a:rPr>
+              <a:t>02</a:t>
+            </a:r>
+          </a:p>
+        </p:txBody>
+      </p:sp>
+      <p:sp>
+        <p:nvSpPr>
+          <p:cNvPr id="14" name="TextBox 13"/>
+          <p:cNvSpPr txBox="1"/>
+          <p:nvPr/>
+        </p:nvSpPr>
+        <p:spPr>
+          <a:xfrm>
+            <a:off x="7132320" y="1188720"/>
+            <a:ext cx="4663440" cy="320040"/>
+          </a:xfrm>
+          <a:prstGeom prst="rect">
+            <a:avLst/>
+          </a:prstGeom>
+          <a:noFill/>
+        </p:spPr>
+        <p:txBody>
+          <a:bodyPr wrap="square">
+            <a:spAutoFit/>
+          </a:bodyPr>
+          <a:lstStyle/>
+          <a:p>
             <a:pPr algn="l"/>
             <a:r>
-              <a:rPr sz="1500" b="1">
-                <a:solidFill>
-                  <a:srgbClr val="FFFFFF"/>
+              <a:rPr sz="1400" b="1">
+                <a:solidFill>
+                  <a:srgbClr val="0F172A"/>
                 </a:solidFill>
                 <a:latin typeface="Microsoft YaHei"/>
                 <a:ea typeface="Microsoft YaHei"/>
@@ -5891,14 +6045,14 @@
       </p:sp>
       <p:sp>
         <p:nvSpPr>
-          <p:cNvPr id="13" name="TextBox 12"/>
+          <p:cNvPr id="15" name="TextBox 14"/>
           <p:cNvSpPr txBox="1"/>
           <p:nvPr/>
         </p:nvSpPr>
         <p:spPr>
           <a:xfrm>
-            <a:off x="6492240" y="1399032"/>
-            <a:ext cx="5303520" cy="274320"/>
+            <a:off x="7132320" y="1554480"/>
+            <a:ext cx="4663440" cy="274320"/>
           </a:xfrm>
           <a:prstGeom prst="rect">
             <a:avLst/>
@@ -5915,7 +6069,7 @@
             <a:r>
               <a:rPr sz="1100" b="0">
                 <a:solidFill>
-                  <a:srgbClr val="E87A2E"/>
+                  <a:srgbClr val="0F766E"/>
                 </a:solidFill>
                 <a:latin typeface="Microsoft YaHei"/>
                 <a:ea typeface="Microsoft YaHei"/>
@@ -5927,14 +6081,14 @@
       </p:sp>
       <p:sp>
         <p:nvSpPr>
-          <p:cNvPr id="14" name="TextBox 13"/>
+          <p:cNvPr id="16" name="TextBox 15"/>
           <p:cNvSpPr txBox="1"/>
           <p:nvPr/>
         </p:nvSpPr>
         <p:spPr>
           <a:xfrm>
-            <a:off x="6492240" y="1965960"/>
-            <a:ext cx="5303520" cy="1371600"/>
+            <a:off x="7132320" y="2011680"/>
+            <a:ext cx="4663440" cy="1280160"/>
           </a:xfrm>
           <a:prstGeom prst="rect">
             <a:avLst/>
@@ -5949,9 +6103,9 @@
           <a:p>
             <a:pPr algn="l"/>
             <a:r>
-              <a:rPr sz="1200" b="0">
-                <a:solidFill>
-                  <a:srgbClr val="5D6D7E"/>
+              <a:rPr sz="1100" b="0">
+                <a:solidFill>
+                  <a:srgbClr val="64748B"/>
                 </a:solidFill>
                 <a:latin typeface="Microsoft YaHei"/>
                 <a:ea typeface="Microsoft YaHei"/>
@@ -5964,7 +6118,7 @@
       </p:sp>
       <p:sp>
         <p:nvSpPr>
-          <p:cNvPr id="15" name="Rounded Rectangle 14"/>
+          <p:cNvPr id="17" name="Rounded Rectangle 16"/>
           <p:cNvSpPr/>
           <p:nvPr/>
         </p:nvSpPr>
@@ -5975,15 +6129,15 @@
           </a:xfrm>
           <a:prstGeom prst="roundRect">
             <a:avLst>
-              <a:gd name="adj" fmla="val 8000"/>
+              <a:gd name="adj" fmla="val 4000"/>
             </a:avLst>
           </a:prstGeom>
           <a:solidFill>
             <a:srgbClr val="FFFFFF"/>
           </a:solidFill>
-          <a:ln w="15875">
+          <a:ln w="12700">
             <a:solidFill>
-              <a:srgbClr val="E8EEF2"/>
+              <a:srgbClr val="CBD5E1"/>
             </a:solidFill>
           </a:ln>
         </p:spPr>
@@ -6011,22 +6165,20 @@
       </p:sp>
       <p:sp>
         <p:nvSpPr>
-          <p:cNvPr id="16" name="Rounded Rectangle 15"/>
+          <p:cNvPr id="18" name="Rectangle 17"/>
           <p:cNvSpPr/>
           <p:nvPr/>
         </p:nvSpPr>
         <p:spPr>
           <a:xfrm>
             <a:off x="365760" y="3749039"/>
-            <a:ext cx="5715000" cy="777240"/>
-          </a:xfrm>
-          <a:prstGeom prst="roundRect">
-            <a:avLst>
-              <a:gd name="adj" fmla="val 8000"/>
-            </a:avLst>
+            <a:ext cx="640080" cy="2606040"/>
+          </a:xfrm>
+          <a:prstGeom prst="rect">
+            <a:avLst/>
           </a:prstGeom>
           <a:solidFill>
-            <a:srgbClr val="1B3A5F"/>
+            <a:srgbClr val="0F172A"/>
           </a:solidFill>
           <a:ln>
             <a:noFill/>
@@ -6056,14 +6208,14 @@
       </p:sp>
       <p:sp>
         <p:nvSpPr>
-          <p:cNvPr id="17" name="TextBox 16"/>
+          <p:cNvPr id="19" name="TextBox 18"/>
           <p:cNvSpPr txBox="1"/>
           <p:nvPr/>
         </p:nvSpPr>
         <p:spPr>
           <a:xfrm>
-            <a:off x="548640" y="3886199"/>
-            <a:ext cx="5303520" cy="274320"/>
+            <a:off x="457200" y="4800599"/>
+            <a:ext cx="457200" cy="365760"/>
           </a:xfrm>
           <a:prstGeom prst="rect">
             <a:avLst/>
@@ -6076,11 +6228,47 @@
           </a:bodyPr>
           <a:lstStyle/>
           <a:p>
+            <a:pPr algn="ctr"/>
+            <a:r>
+              <a:rPr sz="1400" b="1">
+                <a:solidFill>
+                  <a:srgbClr val="0F766E"/>
+                </a:solidFill>
+                <a:latin typeface="Microsoft YaHei"/>
+                <a:ea typeface="Microsoft YaHei"/>
+              </a:rPr>
+              <a:t>03</a:t>
+            </a:r>
+          </a:p>
+        </p:txBody>
+      </p:sp>
+      <p:sp>
+        <p:nvSpPr>
+          <p:cNvPr id="20" name="TextBox 19"/>
+          <p:cNvSpPr txBox="1"/>
+          <p:nvPr/>
+        </p:nvSpPr>
+        <p:spPr>
+          <a:xfrm>
+            <a:off x="1188720" y="3977639"/>
+            <a:ext cx="4663440" cy="320040"/>
+          </a:xfrm>
+          <a:prstGeom prst="rect">
+            <a:avLst/>
+          </a:prstGeom>
+          <a:noFill/>
+        </p:spPr>
+        <p:txBody>
+          <a:bodyPr wrap="square">
+            <a:spAutoFit/>
+          </a:bodyPr>
+          <a:lstStyle/>
+          <a:p>
             <a:pPr algn="l"/>
             <a:r>
-              <a:rPr sz="1500" b="1">
-                <a:solidFill>
-                  <a:srgbClr val="FFFFFF"/>
+              <a:rPr sz="1400" b="1">
+                <a:solidFill>
+                  <a:srgbClr val="0F172A"/>
                 </a:solidFill>
                 <a:latin typeface="Microsoft YaHei"/>
                 <a:ea typeface="Microsoft YaHei"/>
@@ -6092,14 +6280,14 @@
       </p:sp>
       <p:sp>
         <p:nvSpPr>
-          <p:cNvPr id="18" name="TextBox 17"/>
+          <p:cNvPr id="21" name="TextBox 20"/>
           <p:cNvSpPr txBox="1"/>
           <p:nvPr/>
         </p:nvSpPr>
         <p:spPr>
           <a:xfrm>
-            <a:off x="548640" y="4187951"/>
-            <a:ext cx="5303520" cy="274320"/>
+            <a:off x="1188720" y="4343399"/>
+            <a:ext cx="4663440" cy="274320"/>
           </a:xfrm>
           <a:prstGeom prst="rect">
             <a:avLst/>
@@ -6116,7 +6304,7 @@
             <a:r>
               <a:rPr sz="1100" b="0">
                 <a:solidFill>
-                  <a:srgbClr val="E87A2E"/>
+                  <a:srgbClr val="0F766E"/>
                 </a:solidFill>
                 <a:latin typeface="Microsoft YaHei"/>
                 <a:ea typeface="Microsoft YaHei"/>
@@ -6128,14 +6316,14 @@
       </p:sp>
       <p:sp>
         <p:nvSpPr>
-          <p:cNvPr id="19" name="TextBox 18"/>
+          <p:cNvPr id="22" name="TextBox 21"/>
           <p:cNvSpPr txBox="1"/>
           <p:nvPr/>
         </p:nvSpPr>
         <p:spPr>
           <a:xfrm>
-            <a:off x="548640" y="4754879"/>
-            <a:ext cx="5303520" cy="1371600"/>
+            <a:off x="1188720" y="4800599"/>
+            <a:ext cx="4663440" cy="1280160"/>
           </a:xfrm>
           <a:prstGeom prst="rect">
             <a:avLst/>
@@ -6150,9 +6338,9 @@
           <a:p>
             <a:pPr algn="l"/>
             <a:r>
-              <a:rPr sz="1200" b="0">
-                <a:solidFill>
-                  <a:srgbClr val="5D6D7E"/>
+              <a:rPr sz="1100" b="0">
+                <a:solidFill>
+                  <a:srgbClr val="64748B"/>
                 </a:solidFill>
                 <a:latin typeface="Microsoft YaHei"/>
                 <a:ea typeface="Microsoft YaHei"/>
@@ -6165,7 +6353,7 @@
       </p:sp>
       <p:sp>
         <p:nvSpPr>
-          <p:cNvPr id="20" name="Rounded Rectangle 19"/>
+          <p:cNvPr id="23" name="Rounded Rectangle 22"/>
           <p:cNvSpPr/>
           <p:nvPr/>
         </p:nvSpPr>
@@ -6176,15 +6364,15 @@
           </a:xfrm>
           <a:prstGeom prst="roundRect">
             <a:avLst>
-              <a:gd name="adj" fmla="val 8000"/>
+              <a:gd name="adj" fmla="val 4000"/>
             </a:avLst>
           </a:prstGeom>
           <a:solidFill>
             <a:srgbClr val="FFFFFF"/>
           </a:solidFill>
-          <a:ln w="15875">
+          <a:ln w="12700">
             <a:solidFill>
-              <a:srgbClr val="E8EEF2"/>
+              <a:srgbClr val="CBD5E1"/>
             </a:solidFill>
           </a:ln>
         </p:spPr>
@@ -6212,22 +6400,20 @@
       </p:sp>
       <p:sp>
         <p:nvSpPr>
-          <p:cNvPr id="21" name="Rounded Rectangle 20"/>
+          <p:cNvPr id="24" name="Rectangle 23"/>
           <p:cNvSpPr/>
           <p:nvPr/>
         </p:nvSpPr>
         <p:spPr>
           <a:xfrm>
             <a:off x="6309360" y="3749039"/>
-            <a:ext cx="5715000" cy="777240"/>
-          </a:xfrm>
-          <a:prstGeom prst="roundRect">
-            <a:avLst>
-              <a:gd name="adj" fmla="val 8000"/>
-            </a:avLst>
+            <a:ext cx="640080" cy="2606040"/>
+          </a:xfrm>
+          <a:prstGeom prst="rect">
+            <a:avLst/>
           </a:prstGeom>
           <a:solidFill>
-            <a:srgbClr val="1B3A5F"/>
+            <a:srgbClr val="0F172A"/>
           </a:solidFill>
           <a:ln>
             <a:noFill/>
@@ -6257,14 +6443,14 @@
       </p:sp>
       <p:sp>
         <p:nvSpPr>
-          <p:cNvPr id="22" name="TextBox 21"/>
+          <p:cNvPr id="25" name="TextBox 24"/>
           <p:cNvSpPr txBox="1"/>
           <p:nvPr/>
         </p:nvSpPr>
         <p:spPr>
           <a:xfrm>
-            <a:off x="6492240" y="3886199"/>
-            <a:ext cx="5303520" cy="274320"/>
+            <a:off x="6400800" y="4800599"/>
+            <a:ext cx="457200" cy="365760"/>
           </a:xfrm>
           <a:prstGeom prst="rect">
             <a:avLst/>
@@ -6277,11 +6463,47 @@
           </a:bodyPr>
           <a:lstStyle/>
           <a:p>
+            <a:pPr algn="ctr"/>
+            <a:r>
+              <a:rPr sz="1400" b="1">
+                <a:solidFill>
+                  <a:srgbClr val="0F766E"/>
+                </a:solidFill>
+                <a:latin typeface="Microsoft YaHei"/>
+                <a:ea typeface="Microsoft YaHei"/>
+              </a:rPr>
+              <a:t>04</a:t>
+            </a:r>
+          </a:p>
+        </p:txBody>
+      </p:sp>
+      <p:sp>
+        <p:nvSpPr>
+          <p:cNvPr id="26" name="TextBox 25"/>
+          <p:cNvSpPr txBox="1"/>
+          <p:nvPr/>
+        </p:nvSpPr>
+        <p:spPr>
+          <a:xfrm>
+            <a:off x="7132320" y="3977639"/>
+            <a:ext cx="4663440" cy="320040"/>
+          </a:xfrm>
+          <a:prstGeom prst="rect">
+            <a:avLst/>
+          </a:prstGeom>
+          <a:noFill/>
+        </p:spPr>
+        <p:txBody>
+          <a:bodyPr wrap="square">
+            <a:spAutoFit/>
+          </a:bodyPr>
+          <a:lstStyle/>
+          <a:p>
             <a:pPr algn="l"/>
             <a:r>
-              <a:rPr sz="1500" b="1">
-                <a:solidFill>
-                  <a:srgbClr val="FFFFFF"/>
+              <a:rPr sz="1400" b="1">
+                <a:solidFill>
+                  <a:srgbClr val="0F172A"/>
                 </a:solidFill>
                 <a:latin typeface="Microsoft YaHei"/>
                 <a:ea typeface="Microsoft YaHei"/>
@@ -6293,14 +6515,14 @@
       </p:sp>
       <p:sp>
         <p:nvSpPr>
-          <p:cNvPr id="23" name="TextBox 22"/>
+          <p:cNvPr id="27" name="TextBox 26"/>
           <p:cNvSpPr txBox="1"/>
           <p:nvPr/>
         </p:nvSpPr>
         <p:spPr>
           <a:xfrm>
-            <a:off x="6492240" y="4187951"/>
-            <a:ext cx="5303520" cy="274320"/>
+            <a:off x="7132320" y="4343399"/>
+            <a:ext cx="4663440" cy="274320"/>
           </a:xfrm>
           <a:prstGeom prst="rect">
             <a:avLst/>
@@ -6317,7 +6539,7 @@
             <a:r>
               <a:rPr sz="1100" b="0">
                 <a:solidFill>
-                  <a:srgbClr val="E87A2E"/>
+                  <a:srgbClr val="0F766E"/>
                 </a:solidFill>
                 <a:latin typeface="Microsoft YaHei"/>
                 <a:ea typeface="Microsoft YaHei"/>
@@ -6329,14 +6551,14 @@
       </p:sp>
       <p:sp>
         <p:nvSpPr>
-          <p:cNvPr id="24" name="TextBox 23"/>
+          <p:cNvPr id="28" name="TextBox 27"/>
           <p:cNvSpPr txBox="1"/>
           <p:nvPr/>
         </p:nvSpPr>
         <p:spPr>
           <a:xfrm>
-            <a:off x="6492240" y="4754879"/>
-            <a:ext cx="5303520" cy="1371600"/>
+            <a:off x="7132320" y="4800599"/>
+            <a:ext cx="4663440" cy="1280160"/>
           </a:xfrm>
           <a:prstGeom prst="rect">
             <a:avLst/>
@@ -6351,9 +6573,9 @@
           <a:p>
             <a:pPr algn="l"/>
             <a:r>
-              <a:rPr sz="1200" b="0">
-                <a:solidFill>
-                  <a:srgbClr val="5D6D7E"/>
+              <a:rPr sz="1100" b="0">
+                <a:solidFill>
+                  <a:srgbClr val="64748B"/>
                 </a:solidFill>
                 <a:latin typeface="Microsoft YaHei"/>
                 <a:ea typeface="Microsoft YaHei"/>
@@ -6384,7 +6606,7 @@
       <p:grpSpPr/>
       <p:sp>
         <p:nvSpPr>
-          <p:cNvPr id="2" name="Rounded Rectangle 1"/>
+          <p:cNvPr id="2" name="Rectangle 1"/>
           <p:cNvSpPr/>
           <p:nvPr/>
         </p:nvSpPr>
@@ -6393,13 +6615,11 @@
             <a:off x="0" y="0"/>
             <a:ext cx="12191695" cy="6858000"/>
           </a:xfrm>
-          <a:prstGeom prst="roundRect">
-            <a:avLst>
-              <a:gd name="adj" fmla="val 8000"/>
-            </a:avLst>
+          <a:prstGeom prst="rect">
+            <a:avLst/>
           </a:prstGeom>
           <a:solidFill>
-            <a:srgbClr val="FFFFFF"/>
+            <a:srgbClr val="F1F5F9"/>
           </a:solidFill>
           <a:ln>
             <a:noFill/>
@@ -6429,94 +6649,20 @@
       </p:sp>
       <p:sp>
         <p:nvSpPr>
-          <p:cNvPr id="3" name="TextBox 2"/>
-          <p:cNvSpPr txBox="1"/>
-          <p:nvPr/>
-        </p:nvSpPr>
-        <p:spPr>
-          <a:xfrm>
-            <a:off x="411480" y="182880"/>
-            <a:ext cx="10972800" cy="320040"/>
-          </a:xfrm>
-          <a:prstGeom prst="rect">
-            <a:avLst/>
-          </a:prstGeom>
-          <a:noFill/>
-        </p:spPr>
-        <p:txBody>
-          <a:bodyPr wrap="square">
-            <a:spAutoFit/>
-          </a:bodyPr>
-          <a:lstStyle/>
-          <a:p>
-            <a:pPr algn="l"/>
-            <a:r>
-              <a:rPr sz="2000" b="1">
-                <a:solidFill>
-                  <a:srgbClr val="1B3A5F"/>
-                </a:solidFill>
-                <a:latin typeface="Microsoft YaHei"/>
-                <a:ea typeface="Microsoft YaHei"/>
-              </a:rPr>
-              <a:t>五大体系</a:t>
-            </a:r>
-          </a:p>
-        </p:txBody>
-      </p:sp>
-      <p:sp>
-        <p:nvSpPr>
-          <p:cNvPr id="4" name="TextBox 3"/>
-          <p:cNvSpPr txBox="1"/>
-          <p:nvPr/>
-        </p:nvSpPr>
-        <p:spPr>
-          <a:xfrm>
-            <a:off x="411480" y="502920"/>
-            <a:ext cx="10972800" cy="320040"/>
-          </a:xfrm>
-          <a:prstGeom prst="rect">
-            <a:avLst/>
-          </a:prstGeom>
-          <a:noFill/>
-        </p:spPr>
-        <p:txBody>
-          <a:bodyPr wrap="square">
-            <a:spAutoFit/>
-          </a:bodyPr>
-          <a:lstStyle/>
-          <a:p>
-            <a:pPr algn="l"/>
-            <a:r>
-              <a:rPr sz="1400" b="1">
-                <a:solidFill>
-                  <a:srgbClr val="E87A2E"/>
-                </a:solidFill>
-                <a:latin typeface="Microsoft YaHei"/>
-                <a:ea typeface="Microsoft YaHei"/>
-              </a:rPr>
-              <a:t>＞ 价值生产力体系：以精益锚定核心课题、助力价值增长</a:t>
-            </a:r>
-          </a:p>
-        </p:txBody>
-      </p:sp>
-      <p:sp>
-        <p:nvSpPr>
-          <p:cNvPr id="5" name="Rounded Rectangle 4"/>
+          <p:cNvPr id="3" name="Rectangle 2"/>
           <p:cNvSpPr/>
           <p:nvPr/>
         </p:nvSpPr>
         <p:spPr>
           <a:xfrm>
-            <a:off x="365760" y="960120"/>
-            <a:ext cx="3657600" cy="4297680"/>
-          </a:xfrm>
-          <a:prstGeom prst="roundRect">
-            <a:avLst>
-              <a:gd name="adj" fmla="val 8000"/>
-            </a:avLst>
+            <a:off x="0" y="0"/>
+            <a:ext cx="12191695" cy="685800"/>
+          </a:xfrm>
+          <a:prstGeom prst="rect">
+            <a:avLst/>
           </a:prstGeom>
           <a:solidFill>
-            <a:srgbClr val="1B3A5F"/>
+            <a:srgbClr val="0F172A"/>
           </a:solidFill>
           <a:ln>
             <a:noFill/>
@@ -6546,14 +6692,14 @@
       </p:sp>
       <p:sp>
         <p:nvSpPr>
-          <p:cNvPr id="6" name="TextBox 5"/>
+          <p:cNvPr id="4" name="TextBox 3"/>
           <p:cNvSpPr txBox="1"/>
           <p:nvPr/>
         </p:nvSpPr>
         <p:spPr>
           <a:xfrm>
-            <a:off x="640080" y="1371600"/>
-            <a:ext cx="3108960" cy="365760"/>
+            <a:off x="411480" y="137160"/>
+            <a:ext cx="10972800" cy="228600"/>
           </a:xfrm>
           <a:prstGeom prst="rect">
             <a:avLst/>
@@ -6568,9 +6714,126 @@
           <a:p>
             <a:pPr algn="l"/>
             <a:r>
+              <a:rPr sz="1400" b="0">
+                <a:solidFill>
+                  <a:srgbClr val="94A3B8"/>
+                </a:solidFill>
+                <a:latin typeface="Microsoft YaHei"/>
+                <a:ea typeface="Microsoft YaHei"/>
+              </a:rPr>
+              <a:t>五大体系</a:t>
+            </a:r>
+          </a:p>
+        </p:txBody>
+      </p:sp>
+      <p:sp>
+        <p:nvSpPr>
+          <p:cNvPr id="5" name="TextBox 4"/>
+          <p:cNvSpPr txBox="1"/>
+          <p:nvPr/>
+        </p:nvSpPr>
+        <p:spPr>
+          <a:xfrm>
+            <a:off x="411480" y="365760"/>
+            <a:ext cx="10972800" cy="274320"/>
+          </a:xfrm>
+          <a:prstGeom prst="rect">
+            <a:avLst/>
+          </a:prstGeom>
+          <a:noFill/>
+        </p:spPr>
+        <p:txBody>
+          <a:bodyPr wrap="square">
+            <a:spAutoFit/>
+          </a:bodyPr>
+          <a:lstStyle/>
+          <a:p>
+            <a:pPr algn="l"/>
+            <a:r>
+              <a:rPr sz="1400" b="1">
+                <a:solidFill>
+                  <a:srgbClr val="0F766E"/>
+                </a:solidFill>
+                <a:latin typeface="Microsoft YaHei"/>
+                <a:ea typeface="Microsoft YaHei"/>
+              </a:rPr>
+              <a:t>价值生产力体系：以精益锚定核心课题、助力价值增长</a:t>
+            </a:r>
+          </a:p>
+        </p:txBody>
+      </p:sp>
+      <p:sp>
+        <p:nvSpPr>
+          <p:cNvPr id="6" name="Rounded Rectangle 5"/>
+          <p:cNvSpPr/>
+          <p:nvPr/>
+        </p:nvSpPr>
+        <p:spPr>
+          <a:xfrm>
+            <a:off x="365760" y="960120"/>
+            <a:ext cx="3657600" cy="4206240"/>
+          </a:xfrm>
+          <a:prstGeom prst="roundRect">
+            <a:avLst>
+              <a:gd name="adj" fmla="val 4000"/>
+            </a:avLst>
+          </a:prstGeom>
+          <a:solidFill>
+            <a:srgbClr val="0F172A"/>
+          </a:solidFill>
+          <a:ln>
+            <a:noFill/>
+          </a:ln>
+        </p:spPr>
+        <p:style>
+          <a:lnRef idx="1">
+            <a:schemeClr val="accent1"/>
+          </a:lnRef>
+          <a:fillRef idx="3">
+            <a:schemeClr val="accent1"/>
+          </a:fillRef>
+          <a:effectRef idx="2">
+            <a:schemeClr val="accent1"/>
+          </a:effectRef>
+          <a:fontRef idx="minor">
+            <a:schemeClr val="lt1"/>
+          </a:fontRef>
+        </p:style>
+        <p:txBody>
+          <a:bodyPr rtlCol="0" anchor="ctr"/>
+          <a:lstStyle/>
+          <a:p>
+            <a:pPr algn="ctr"/>
+          </a:p>
+        </p:txBody>
+      </p:sp>
+      <p:sp>
+        <p:nvSpPr>
+          <p:cNvPr id="7" name="TextBox 6"/>
+          <p:cNvSpPr txBox="1"/>
+          <p:nvPr/>
+        </p:nvSpPr>
+        <p:spPr>
+          <a:xfrm>
+            <a:off x="640080" y="1371600"/>
+            <a:ext cx="3108960" cy="365760"/>
+          </a:xfrm>
+          <a:prstGeom prst="rect">
+            <a:avLst/>
+          </a:prstGeom>
+          <a:noFill/>
+        </p:spPr>
+        <p:txBody>
+          <a:bodyPr wrap="square">
+            <a:spAutoFit/>
+          </a:bodyPr>
+          <a:lstStyle/>
+          <a:p>
+            <a:pPr algn="l"/>
+            <a:r>
               <a:rPr sz="2800" b="1">
                 <a:solidFill>
-                  <a:srgbClr val="E87A2E"/>
+                  <a:srgbClr val="0F766E"/>
                 </a:solidFill>
                 <a:latin typeface="Microsoft YaHei"/>
                 <a:ea typeface="Microsoft YaHei"/>
@@ -6582,7 +6845,7 @@
       </p:sp>
       <p:sp>
         <p:nvSpPr>
-          <p:cNvPr id="7" name="TextBox 6"/>
+          <p:cNvPr id="8" name="TextBox 7"/>
           <p:cNvSpPr txBox="1"/>
           <p:nvPr/>
         </p:nvSpPr>
@@ -6604,7 +6867,7 @@
           <a:p>
             <a:pPr algn="l"/>
             <a:r>
-              <a:rPr sz="2400" b="1">
+              <a:rPr sz="2200" b="1">
                 <a:solidFill>
                   <a:srgbClr val="FFFFFF"/>
                 </a:solidFill>
@@ -6619,14 +6882,14 @@
       </p:sp>
       <p:sp>
         <p:nvSpPr>
-          <p:cNvPr id="8" name="TextBox 7"/>
+          <p:cNvPr id="9" name="TextBox 8"/>
           <p:cNvSpPr txBox="1"/>
           <p:nvPr/>
         </p:nvSpPr>
         <p:spPr>
           <a:xfrm>
             <a:off x="640080" y="3200400"/>
-            <a:ext cx="3108960" cy="365760"/>
+            <a:ext cx="3108960" cy="320040"/>
           </a:xfrm>
           <a:prstGeom prst="rect">
             <a:avLst/>
@@ -6641,9 +6904,9 @@
           <a:p>
             <a:pPr algn="l"/>
             <a:r>
-              <a:rPr sz="1400" b="0">
-                <a:solidFill>
-                  <a:srgbClr val="A8C5D4"/>
+              <a:rPr sz="1200" b="0">
+                <a:solidFill>
+                  <a:srgbClr val="94A3B8"/>
                 </a:solidFill>
                 <a:latin typeface="Microsoft YaHei"/>
                 <a:ea typeface="Microsoft YaHei"/>
@@ -6655,14 +6918,14 @@
       </p:sp>
       <p:sp>
         <p:nvSpPr>
-          <p:cNvPr id="9" name="TextBox 8"/>
+          <p:cNvPr id="10" name="TextBox 9"/>
           <p:cNvSpPr txBox="1"/>
           <p:nvPr/>
         </p:nvSpPr>
         <p:spPr>
           <a:xfrm>
-            <a:off x="640080" y="3840480"/>
-            <a:ext cx="3108960" cy="1097280"/>
+            <a:off x="640080" y="3749039"/>
+            <a:ext cx="3108960" cy="1005840"/>
           </a:xfrm>
           <a:prstGeom prst="rect">
             <a:avLst/>
@@ -6677,9 +6940,9 @@
           <a:p>
             <a:pPr algn="l"/>
             <a:r>
-              <a:rPr sz="1200" b="0">
-                <a:solidFill>
-                  <a:srgbClr val="A8C5D4"/>
+              <a:rPr sz="1100" b="0">
+                <a:solidFill>
+                  <a:srgbClr val="CBD5E1"/>
                 </a:solidFill>
                 <a:latin typeface="Microsoft YaHei"/>
                 <a:ea typeface="Microsoft YaHei"/>
@@ -6691,26 +6954,26 @@
       </p:sp>
       <p:sp>
         <p:nvSpPr>
-          <p:cNvPr id="10" name="Rounded Rectangle 9"/>
+          <p:cNvPr id="11" name="Rounded Rectangle 10"/>
           <p:cNvSpPr/>
           <p:nvPr/>
         </p:nvSpPr>
         <p:spPr>
           <a:xfrm>
             <a:off x="4251960" y="960120"/>
-            <a:ext cx="7543800" cy="777240"/>
+            <a:ext cx="7543800" cy="749808"/>
           </a:xfrm>
           <a:prstGeom prst="roundRect">
             <a:avLst>
-              <a:gd name="adj" fmla="val 8000"/>
+              <a:gd name="adj" fmla="val 4000"/>
             </a:avLst>
           </a:prstGeom>
           <a:solidFill>
             <a:srgbClr val="FFFFFF"/>
           </a:solidFill>
-          <a:ln w="15875">
+          <a:ln w="12700">
             <a:solidFill>
-              <a:srgbClr val="E8EEF2"/>
+              <a:srgbClr val="CBD5E1"/>
             </a:solidFill>
           </a:ln>
         </p:spPr>
@@ -6738,13 +7001,13 @@
       </p:sp>
       <p:sp>
         <p:nvSpPr>
-          <p:cNvPr id="11" name="TextBox 10"/>
+          <p:cNvPr id="12" name="TextBox 11"/>
           <p:cNvSpPr txBox="1"/>
           <p:nvPr/>
         </p:nvSpPr>
         <p:spPr>
           <a:xfrm>
-            <a:off x="4480560" y="1161288"/>
+            <a:off x="4480560" y="1143000"/>
             <a:ext cx="7132320" cy="457200"/>
           </a:xfrm>
           <a:prstGeom prst="rect">
@@ -6760,9 +7023,9 @@
           <a:p>
             <a:pPr algn="l"/>
             <a:r>
-              <a:rPr sz="1200" b="1">
-                <a:solidFill>
-                  <a:srgbClr val="1B3A5F"/>
+              <a:rPr sz="1100" b="1">
+                <a:solidFill>
+                  <a:srgbClr val="0F172A"/>
                 </a:solidFill>
                 <a:latin typeface="Microsoft YaHei"/>
                 <a:ea typeface="Microsoft YaHei"/>
@@ -6774,26 +7037,26 @@
       </p:sp>
       <p:sp>
         <p:nvSpPr>
-          <p:cNvPr id="12" name="Rounded Rectangle 11"/>
+          <p:cNvPr id="13" name="Rounded Rectangle 12"/>
           <p:cNvSpPr/>
           <p:nvPr/>
         </p:nvSpPr>
         <p:spPr>
           <a:xfrm>
-            <a:off x="4251960" y="1828800"/>
-            <a:ext cx="7543800" cy="777240"/>
+            <a:off x="4251960" y="1801368"/>
+            <a:ext cx="7543800" cy="749808"/>
           </a:xfrm>
           <a:prstGeom prst="roundRect">
             <a:avLst>
-              <a:gd name="adj" fmla="val 8000"/>
+              <a:gd name="adj" fmla="val 4000"/>
             </a:avLst>
           </a:prstGeom>
           <a:solidFill>
             <a:srgbClr val="FFFFFF"/>
           </a:solidFill>
-          <a:ln w="15875">
+          <a:ln w="12700">
             <a:solidFill>
-              <a:srgbClr val="E8EEF2"/>
+              <a:srgbClr val="CBD5E1"/>
             </a:solidFill>
           </a:ln>
         </p:spPr>
@@ -6821,13 +7084,13 @@
       </p:sp>
       <p:sp>
         <p:nvSpPr>
-          <p:cNvPr id="13" name="TextBox 12"/>
+          <p:cNvPr id="14" name="TextBox 13"/>
           <p:cNvSpPr txBox="1"/>
           <p:nvPr/>
         </p:nvSpPr>
         <p:spPr>
           <a:xfrm>
-            <a:off x="4480560" y="2029968"/>
+            <a:off x="4480560" y="1984248"/>
             <a:ext cx="7132320" cy="457200"/>
           </a:xfrm>
           <a:prstGeom prst="rect">
@@ -6843,9 +7106,9 @@
           <a:p>
             <a:pPr algn="l"/>
             <a:r>
-              <a:rPr sz="1200" b="1">
-                <a:solidFill>
-                  <a:srgbClr val="1B3A5F"/>
+              <a:rPr sz="1100" b="1">
+                <a:solidFill>
+                  <a:srgbClr val="0F172A"/>
                 </a:solidFill>
                 <a:latin typeface="Microsoft YaHei"/>
                 <a:ea typeface="Microsoft YaHei"/>
@@ -6857,26 +7120,26 @@
       </p:sp>
       <p:sp>
         <p:nvSpPr>
-          <p:cNvPr id="14" name="Rounded Rectangle 13"/>
+          <p:cNvPr id="15" name="Rounded Rectangle 14"/>
           <p:cNvSpPr/>
           <p:nvPr/>
         </p:nvSpPr>
         <p:spPr>
           <a:xfrm>
-            <a:off x="4251960" y="2697480"/>
-            <a:ext cx="7543800" cy="777240"/>
+            <a:off x="4251960" y="2642616"/>
+            <a:ext cx="7543800" cy="749808"/>
           </a:xfrm>
           <a:prstGeom prst="roundRect">
             <a:avLst>
-              <a:gd name="adj" fmla="val 8000"/>
+              <a:gd name="adj" fmla="val 4000"/>
             </a:avLst>
           </a:prstGeom>
           <a:solidFill>
             <a:srgbClr val="FFFFFF"/>
           </a:solidFill>
-          <a:ln w="15875">
+          <a:ln w="12700">
             <a:solidFill>
-              <a:srgbClr val="E8EEF2"/>
+              <a:srgbClr val="CBD5E1"/>
             </a:solidFill>
           </a:ln>
         </p:spPr>
@@ -6904,13 +7167,13 @@
       </p:sp>
       <p:sp>
         <p:nvSpPr>
-          <p:cNvPr id="15" name="TextBox 14"/>
+          <p:cNvPr id="16" name="TextBox 15"/>
           <p:cNvSpPr txBox="1"/>
           <p:nvPr/>
         </p:nvSpPr>
         <p:spPr>
           <a:xfrm>
-            <a:off x="4480560" y="2898648"/>
+            <a:off x="4480560" y="2825496"/>
             <a:ext cx="7132320" cy="457200"/>
           </a:xfrm>
           <a:prstGeom prst="rect">
@@ -6926,9 +7189,9 @@
           <a:p>
             <a:pPr algn="l"/>
             <a:r>
-              <a:rPr sz="1200" b="1">
-                <a:solidFill>
-                  <a:srgbClr val="1B3A5F"/>
+              <a:rPr sz="1100" b="1">
+                <a:solidFill>
+                  <a:srgbClr val="0F172A"/>
                 </a:solidFill>
                 <a:latin typeface="Microsoft YaHei"/>
                 <a:ea typeface="Microsoft YaHei"/>
@@ -6940,26 +7203,26 @@
       </p:sp>
       <p:sp>
         <p:nvSpPr>
-          <p:cNvPr id="16" name="Rounded Rectangle 15"/>
+          <p:cNvPr id="17" name="Rounded Rectangle 16"/>
           <p:cNvSpPr/>
           <p:nvPr/>
         </p:nvSpPr>
         <p:spPr>
           <a:xfrm>
-            <a:off x="4251960" y="3566159"/>
-            <a:ext cx="7543800" cy="777240"/>
+            <a:off x="4251960" y="3483864"/>
+            <a:ext cx="7543800" cy="749808"/>
           </a:xfrm>
           <a:prstGeom prst="roundRect">
             <a:avLst>
-              <a:gd name="adj" fmla="val 8000"/>
+              <a:gd name="adj" fmla="val 4000"/>
             </a:avLst>
           </a:prstGeom>
           <a:solidFill>
             <a:srgbClr val="FFFFFF"/>
           </a:solidFill>
-          <a:ln w="15875">
+          <a:ln w="12700">
             <a:solidFill>
-              <a:srgbClr val="E8EEF2"/>
+              <a:srgbClr val="CBD5E1"/>
             </a:solidFill>
           </a:ln>
         </p:spPr>
@@ -6987,13 +7250,13 @@
       </p:sp>
       <p:sp>
         <p:nvSpPr>
-          <p:cNvPr id="17" name="TextBox 16"/>
+          <p:cNvPr id="18" name="TextBox 17"/>
           <p:cNvSpPr txBox="1"/>
           <p:nvPr/>
         </p:nvSpPr>
         <p:spPr>
           <a:xfrm>
-            <a:off x="4480560" y="3767327"/>
+            <a:off x="4480560" y="3666744"/>
             <a:ext cx="7132320" cy="457200"/>
           </a:xfrm>
           <a:prstGeom prst="rect">
@@ -7009,9 +7272,9 @@
           <a:p>
             <a:pPr algn="l"/>
             <a:r>
-              <a:rPr sz="1200" b="1">
-                <a:solidFill>
-                  <a:srgbClr val="1B3A5F"/>
+              <a:rPr sz="1100" b="1">
+                <a:solidFill>
+                  <a:srgbClr val="0F172A"/>
                 </a:solidFill>
                 <a:latin typeface="Microsoft YaHei"/>
                 <a:ea typeface="Microsoft YaHei"/>
@@ -7023,26 +7286,26 @@
       </p:sp>
       <p:sp>
         <p:nvSpPr>
-          <p:cNvPr id="18" name="Rounded Rectangle 17"/>
+          <p:cNvPr id="19" name="Rounded Rectangle 18"/>
           <p:cNvSpPr/>
           <p:nvPr/>
         </p:nvSpPr>
         <p:spPr>
           <a:xfrm>
-            <a:off x="4251960" y="4434840"/>
-            <a:ext cx="7543800" cy="777240"/>
+            <a:off x="4251960" y="4325112"/>
+            <a:ext cx="7543800" cy="749808"/>
           </a:xfrm>
           <a:prstGeom prst="roundRect">
             <a:avLst>
-              <a:gd name="adj" fmla="val 8000"/>
+              <a:gd name="adj" fmla="val 4000"/>
             </a:avLst>
           </a:prstGeom>
           <a:solidFill>
             <a:srgbClr val="FFFFFF"/>
           </a:solidFill>
-          <a:ln w="15875">
+          <a:ln w="12700">
             <a:solidFill>
-              <a:srgbClr val="E8EEF2"/>
+              <a:srgbClr val="CBD5E1"/>
             </a:solidFill>
           </a:ln>
         </p:spPr>
@@ -7070,13 +7333,13 @@
       </p:sp>
       <p:sp>
         <p:nvSpPr>
-          <p:cNvPr id="19" name="TextBox 18"/>
+          <p:cNvPr id="20" name="TextBox 19"/>
           <p:cNvSpPr txBox="1"/>
           <p:nvPr/>
         </p:nvSpPr>
         <p:spPr>
           <a:xfrm>
-            <a:off x="4480560" y="4636008"/>
+            <a:off x="4480560" y="4507992"/>
             <a:ext cx="7132320" cy="457200"/>
           </a:xfrm>
           <a:prstGeom prst="rect">
@@ -7092,9 +7355,9 @@
           <a:p>
             <a:pPr algn="l"/>
             <a:r>
-              <a:rPr sz="1200" b="1">
-                <a:solidFill>
-                  <a:srgbClr val="1B3A5F"/>
+              <a:rPr sz="1100" b="1">
+                <a:solidFill>
+                  <a:srgbClr val="0F172A"/>
                 </a:solidFill>
                 <a:latin typeface="Microsoft YaHei"/>
                 <a:ea typeface="Microsoft YaHei"/>
@@ -7106,26 +7369,26 @@
       </p:sp>
       <p:sp>
         <p:nvSpPr>
-          <p:cNvPr id="20" name="Rounded Rectangle 19"/>
+          <p:cNvPr id="21" name="Rounded Rectangle 20"/>
           <p:cNvSpPr/>
           <p:nvPr/>
         </p:nvSpPr>
         <p:spPr>
           <a:xfrm>
-            <a:off x="365760" y="5486400"/>
-            <a:ext cx="11430000" cy="1051560"/>
+            <a:off x="365760" y="5394960"/>
+            <a:ext cx="11430000" cy="1097280"/>
           </a:xfrm>
           <a:prstGeom prst="roundRect">
             <a:avLst>
-              <a:gd name="adj" fmla="val 8000"/>
+              <a:gd name="adj" fmla="val 4000"/>
             </a:avLst>
           </a:prstGeom>
           <a:solidFill>
-            <a:srgbClr val="FFF4EB"/>
+            <a:srgbClr val="CCFBF1"/>
           </a:solidFill>
-          <a:ln w="15875">
+          <a:ln w="12700">
             <a:solidFill>
-              <a:srgbClr val="E87A2E"/>
+              <a:srgbClr val="0F766E"/>
             </a:solidFill>
           </a:ln>
         </p:spPr>
@@ -7153,13 +7416,13 @@
       </p:sp>
       <p:sp>
         <p:nvSpPr>
-          <p:cNvPr id="21" name="TextBox 20"/>
+          <p:cNvPr id="22" name="TextBox 21"/>
           <p:cNvSpPr txBox="1"/>
           <p:nvPr/>
         </p:nvSpPr>
         <p:spPr>
           <a:xfrm>
-            <a:off x="640080" y="5669280"/>
+            <a:off x="640080" y="5577840"/>
             <a:ext cx="10972800" cy="274320"/>
           </a:xfrm>
           <a:prstGeom prst="rect">
@@ -7175,27 +7438,27 @@
           <a:p>
             <a:pPr algn="l"/>
             <a:r>
-              <a:rPr sz="1400" b="1">
-                <a:solidFill>
-                  <a:srgbClr val="E87A2E"/>
+              <a:rPr sz="1300" b="1">
+                <a:solidFill>
+                  <a:srgbClr val="0F766E"/>
                 </a:solidFill>
                 <a:latin typeface="Microsoft YaHei"/>
                 <a:ea typeface="Microsoft YaHei"/>
               </a:rPr>
-              <a:t>＞ 实现管理与产能双增长</a:t>
-            </a:r>
-          </a:p>
-        </p:txBody>
-      </p:sp>
-      <p:sp>
-        <p:nvSpPr>
-          <p:cNvPr id="22" name="TextBox 21"/>
+              <a:t>实现管理与产能双增长</a:t>
+            </a:r>
+          </a:p>
+        </p:txBody>
+      </p:sp>
+      <p:sp>
+        <p:nvSpPr>
+          <p:cNvPr id="23" name="TextBox 22"/>
           <p:cNvSpPr txBox="1"/>
           <p:nvPr/>
         </p:nvSpPr>
         <p:spPr>
           <a:xfrm>
-            <a:off x="640080" y="5989320"/>
+            <a:off x="640080" y="5897880"/>
             <a:ext cx="10972800" cy="411480"/>
           </a:xfrm>
           <a:prstGeom prst="rect">
@@ -7211,9 +7474,9 @@
           <a:p>
             <a:pPr algn="l"/>
             <a:r>
-              <a:rPr sz="1200" b="0">
-                <a:solidFill>
-                  <a:srgbClr val="2C3E50"/>
+              <a:rPr sz="1100" b="0">
+                <a:solidFill>
+                  <a:srgbClr val="0F172A"/>
                 </a:solidFill>
                 <a:latin typeface="Microsoft YaHei"/>
                 <a:ea typeface="Microsoft YaHei"/>
@@ -7243,7 +7506,7 @@
       <p:grpSpPr/>
       <p:sp>
         <p:nvSpPr>
-          <p:cNvPr id="2" name="Rounded Rectangle 1"/>
+          <p:cNvPr id="2" name="Rectangle 1"/>
           <p:cNvSpPr/>
           <p:nvPr/>
         </p:nvSpPr>
@@ -7252,13 +7515,11 @@
             <a:off x="0" y="0"/>
             <a:ext cx="12191695" cy="6858000"/>
           </a:xfrm>
-          <a:prstGeom prst="roundRect">
-            <a:avLst>
-              <a:gd name="adj" fmla="val 8000"/>
-            </a:avLst>
+          <a:prstGeom prst="rect">
+            <a:avLst/>
           </a:prstGeom>
           <a:solidFill>
-            <a:srgbClr val="FFFFFF"/>
+            <a:srgbClr val="F1F5F9"/>
           </a:solidFill>
           <a:ln>
             <a:noFill/>
@@ -7288,63 +7549,23 @@
       </p:sp>
       <p:sp>
         <p:nvSpPr>
-          <p:cNvPr id="3" name="TextBox 2"/>
-          <p:cNvSpPr txBox="1"/>
-          <p:nvPr/>
-        </p:nvSpPr>
-        <p:spPr>
-          <a:xfrm>
-            <a:off x="411480" y="137160"/>
-            <a:ext cx="10972800" cy="320040"/>
-          </a:xfrm>
-          <a:prstGeom prst="rect">
-            <a:avLst/>
-          </a:prstGeom>
-          <a:noFill/>
-        </p:spPr>
-        <p:txBody>
-          <a:bodyPr wrap="square">
-            <a:spAutoFit/>
-          </a:bodyPr>
-          <a:lstStyle/>
-          <a:p>
-            <a:pPr algn="l"/>
-            <a:r>
-              <a:rPr sz="2200" b="1">
-                <a:solidFill>
-                  <a:srgbClr val="1B3A5F"/>
-                </a:solidFill>
-                <a:latin typeface="Microsoft YaHei"/>
-                <a:ea typeface="Microsoft YaHei"/>
-              </a:rPr>
-              <a:t>三个阶段</a:t>
-            </a:r>
-          </a:p>
-        </p:txBody>
-      </p:sp>
-      <p:sp>
-        <p:nvSpPr>
-          <p:cNvPr id="4" name="Rounded Rectangle 3"/>
+          <p:cNvPr id="3" name="Rectangle 2"/>
           <p:cNvSpPr/>
           <p:nvPr/>
         </p:nvSpPr>
         <p:spPr>
           <a:xfrm>
-            <a:off x="365760" y="548640"/>
-            <a:ext cx="5577840" cy="777240"/>
-          </a:xfrm>
-          <a:prstGeom prst="roundRect">
-            <a:avLst>
-              <a:gd name="adj" fmla="val 8000"/>
-            </a:avLst>
+            <a:off x="0" y="0"/>
+            <a:ext cx="12191695" cy="685800"/>
+          </a:xfrm>
+          <a:prstGeom prst="rect">
+            <a:avLst/>
           </a:prstGeom>
           <a:solidFill>
-            <a:srgbClr val="FFFFFF"/>
+            <a:srgbClr val="0F172A"/>
           </a:solidFill>
-          <a:ln w="15875">
-            <a:solidFill>
-              <a:srgbClr val="E8EEF2"/>
-            </a:solidFill>
+          <a:ln>
+            <a:noFill/>
           </a:ln>
         </p:spPr>
         <p:style>
@@ -7371,14 +7592,14 @@
       </p:sp>
       <p:sp>
         <p:nvSpPr>
-          <p:cNvPr id="5" name="TextBox 4"/>
+          <p:cNvPr id="4" name="TextBox 3"/>
           <p:cNvSpPr txBox="1"/>
           <p:nvPr/>
         </p:nvSpPr>
         <p:spPr>
           <a:xfrm>
-            <a:off x="548640" y="685800"/>
-            <a:ext cx="5212080" cy="274320"/>
+            <a:off x="411480" y="182880"/>
+            <a:ext cx="10972800" cy="365760"/>
           </a:xfrm>
           <a:prstGeom prst="rect">
             <a:avLst/>
@@ -7393,75 +7614,41 @@
           <a:p>
             <a:pPr algn="l"/>
             <a:r>
-              <a:rPr sz="1300" b="1">
-                <a:solidFill>
-                  <a:srgbClr val="1B3A5F"/>
+              <a:rPr sz="2200" b="1">
+                <a:solidFill>
+                  <a:srgbClr val="FFFFFF"/>
                 </a:solidFill>
                 <a:latin typeface="Microsoft YaHei"/>
                 <a:ea typeface="Microsoft YaHei"/>
               </a:rPr>
-              <a:t>2026上半年｜筑基起势（0→1）</a:t>
-            </a:r>
-          </a:p>
-        </p:txBody>
-      </p:sp>
-      <p:sp>
-        <p:nvSpPr>
-          <p:cNvPr id="6" name="TextBox 5"/>
-          <p:cNvSpPr txBox="1"/>
-          <p:nvPr/>
-        </p:nvSpPr>
-        <p:spPr>
-          <a:xfrm>
-            <a:off x="548640" y="1005840"/>
-            <a:ext cx="5212080" cy="228600"/>
-          </a:xfrm>
-          <a:prstGeom prst="rect">
-            <a:avLst/>
-          </a:prstGeom>
-          <a:noFill/>
-        </p:spPr>
-        <p:txBody>
-          <a:bodyPr wrap="square">
-            <a:spAutoFit/>
-          </a:bodyPr>
-          <a:lstStyle/>
-          <a:p>
-            <a:pPr algn="l"/>
-            <a:r>
-              <a:rPr sz="1100" b="0">
-                <a:solidFill>
-                  <a:srgbClr val="5D6D7E"/>
-                </a:solidFill>
-                <a:latin typeface="Microsoft YaHei"/>
-                <a:ea typeface="Microsoft YaHei"/>
-              </a:rPr>
-              <a:t>建体系、树标杆、统一组织认知</a:t>
-            </a:r>
-          </a:p>
-        </p:txBody>
-      </p:sp>
-      <p:sp>
-        <p:nvSpPr>
-          <p:cNvPr id="7" name="Rounded Rectangle 6"/>
+              <a:t>三个阶段</a:t>
+            </a:r>
+          </a:p>
+        </p:txBody>
+      </p:sp>
+      <p:sp>
+        <p:nvSpPr>
+          <p:cNvPr id="5" name="Rounded Rectangle 4"/>
           <p:cNvSpPr/>
           <p:nvPr/>
         </p:nvSpPr>
         <p:spPr>
           <a:xfrm>
-            <a:off x="6172200" y="548640"/>
-            <a:ext cx="5577840" cy="777240"/>
+            <a:off x="365760" y="868680"/>
+            <a:ext cx="5577840" cy="731520"/>
           </a:xfrm>
           <a:prstGeom prst="roundRect">
             <a:avLst>
-              <a:gd name="adj" fmla="val 8000"/>
+              <a:gd name="adj" fmla="val 4000"/>
             </a:avLst>
           </a:prstGeom>
           <a:solidFill>
-            <a:srgbClr val="1B3A5F"/>
+            <a:srgbClr val="FFFFFF"/>
           </a:solidFill>
-          <a:ln>
-            <a:noFill/>
+          <a:ln w="12700">
+            <a:solidFill>
+              <a:srgbClr val="CBD5E1"/>
+            </a:solidFill>
           </a:ln>
         </p:spPr>
         <p:style>
@@ -7488,13 +7675,13 @@
       </p:sp>
       <p:sp>
         <p:nvSpPr>
-          <p:cNvPr id="8" name="TextBox 7"/>
+          <p:cNvPr id="6" name="TextBox 5"/>
           <p:cNvSpPr txBox="1"/>
           <p:nvPr/>
         </p:nvSpPr>
         <p:spPr>
           <a:xfrm>
-            <a:off x="6355080" y="685800"/>
+            <a:off x="548640" y="960120"/>
             <a:ext cx="5212080" cy="274320"/>
           </a:xfrm>
           <a:prstGeom prst="rect">
@@ -7510,27 +7697,27 @@
           <a:p>
             <a:pPr algn="l"/>
             <a:r>
-              <a:rPr sz="1300" b="1">
-                <a:solidFill>
-                  <a:srgbClr val="FFFFFF"/>
+              <a:rPr sz="1200" b="1">
+                <a:solidFill>
+                  <a:srgbClr val="0F172A"/>
                 </a:solidFill>
                 <a:latin typeface="Microsoft YaHei"/>
                 <a:ea typeface="Microsoft YaHei"/>
               </a:rPr>
-              <a:t>2026下半年｜全域放大与价值兑现（1→N）</a:t>
-            </a:r>
-          </a:p>
-        </p:txBody>
-      </p:sp>
-      <p:sp>
-        <p:nvSpPr>
-          <p:cNvPr id="9" name="TextBox 8"/>
+              <a:t>2026上半年｜筑基起势（0→1）</a:t>
+            </a:r>
+          </a:p>
+        </p:txBody>
+      </p:sp>
+      <p:sp>
+        <p:nvSpPr>
+          <p:cNvPr id="7" name="TextBox 6"/>
           <p:cNvSpPr txBox="1"/>
           <p:nvPr/>
         </p:nvSpPr>
         <p:spPr>
           <a:xfrm>
-            <a:off x="6355080" y="1005840"/>
+            <a:off x="548640" y="1280160"/>
             <a:ext cx="5212080" cy="228600"/>
           </a:xfrm>
           <a:prstGeom prst="rect">
@@ -7546,77 +7733,39 @@
           <a:p>
             <a:pPr algn="l"/>
             <a:r>
-              <a:rPr sz="1100" b="0">
-                <a:solidFill>
-                  <a:srgbClr val="A8C5D4"/>
+              <a:rPr sz="1000" b="0">
+                <a:solidFill>
+                  <a:srgbClr val="64748B"/>
                 </a:solidFill>
                 <a:latin typeface="Microsoft YaHei"/>
                 <a:ea typeface="Microsoft YaHei"/>
               </a:rPr>
-              <a:t>标杆复制、痛点攻坚、机制固化、产能效益兑现</a:t>
-            </a:r>
-          </a:p>
-        </p:txBody>
-      </p:sp>
-      <p:sp>
-        <p:nvSpPr>
-          <p:cNvPr id="10" name="TextBox 9"/>
-          <p:cNvSpPr txBox="1"/>
-          <p:nvPr/>
-        </p:nvSpPr>
-        <p:spPr>
-          <a:xfrm>
-            <a:off x="411480" y="1463040"/>
-            <a:ext cx="9144000" cy="274320"/>
-          </a:xfrm>
-          <a:prstGeom prst="rect">
-            <a:avLst/>
-          </a:prstGeom>
-          <a:noFill/>
-        </p:spPr>
-        <p:txBody>
-          <a:bodyPr wrap="square">
-            <a:spAutoFit/>
-          </a:bodyPr>
-          <a:lstStyle/>
-          <a:p>
-            <a:pPr algn="l"/>
-            <a:r>
-              <a:rPr sz="1200" b="1">
-                <a:solidFill>
-                  <a:srgbClr val="E87A2E"/>
-                </a:solidFill>
-                <a:latin typeface="Microsoft YaHei"/>
-                <a:ea typeface="Microsoft YaHei"/>
-              </a:rPr>
-              <a:t>实施路径：三阶段推进，层层递进</a:t>
-            </a:r>
-          </a:p>
-        </p:txBody>
-      </p:sp>
-      <p:sp>
-        <p:nvSpPr>
-          <p:cNvPr id="11" name="Rounded Rectangle 10"/>
+              <a:t>建体系、树标杆、统一组织认知</a:t>
+            </a:r>
+          </a:p>
+        </p:txBody>
+      </p:sp>
+      <p:sp>
+        <p:nvSpPr>
+          <p:cNvPr id="8" name="Rounded Rectangle 7"/>
           <p:cNvSpPr/>
           <p:nvPr/>
         </p:nvSpPr>
         <p:spPr>
           <a:xfrm>
-            <a:off x="365760" y="1828800"/>
-            <a:ext cx="3749039" cy="4663440"/>
+            <a:off x="6172200" y="868680"/>
+            <a:ext cx="5577840" cy="731520"/>
           </a:xfrm>
           <a:prstGeom prst="roundRect">
             <a:avLst>
-              <a:gd name="adj" fmla="val 8000"/>
+              <a:gd name="adj" fmla="val 4000"/>
             </a:avLst>
           </a:prstGeom>
           <a:solidFill>
-            <a:srgbClr val="FFFFFF"/>
+            <a:srgbClr val="0F172A"/>
           </a:solidFill>
-          <a:ln w="15875">
-            <a:solidFill>
-              <a:srgbClr val="E8EEF2"/>
-            </a:solidFill>
+          <a:ln>
+            <a:noFill/>
           </a:ln>
         </p:spPr>
         <p:style>
@@ -7643,25 +7792,135 @@
       </p:sp>
       <p:sp>
         <p:nvSpPr>
+          <p:cNvPr id="9" name="TextBox 8"/>
+          <p:cNvSpPr txBox="1"/>
+          <p:nvPr/>
+        </p:nvSpPr>
+        <p:spPr>
+          <a:xfrm>
+            <a:off x="6355080" y="960120"/>
+            <a:ext cx="5212080" cy="274320"/>
+          </a:xfrm>
+          <a:prstGeom prst="rect">
+            <a:avLst/>
+          </a:prstGeom>
+          <a:noFill/>
+        </p:spPr>
+        <p:txBody>
+          <a:bodyPr wrap="square">
+            <a:spAutoFit/>
+          </a:bodyPr>
+          <a:lstStyle/>
+          <a:p>
+            <a:pPr algn="l"/>
+            <a:r>
+              <a:rPr sz="1200" b="1">
+                <a:solidFill>
+                  <a:srgbClr val="FFFFFF"/>
+                </a:solidFill>
+                <a:latin typeface="Microsoft YaHei"/>
+                <a:ea typeface="Microsoft YaHei"/>
+              </a:rPr>
+              <a:t>2026下半年｜全域放大与价值兑现（1→N）</a:t>
+            </a:r>
+          </a:p>
+        </p:txBody>
+      </p:sp>
+      <p:sp>
+        <p:nvSpPr>
+          <p:cNvPr id="10" name="TextBox 9"/>
+          <p:cNvSpPr txBox="1"/>
+          <p:nvPr/>
+        </p:nvSpPr>
+        <p:spPr>
+          <a:xfrm>
+            <a:off x="6355080" y="1280160"/>
+            <a:ext cx="5212080" cy="228600"/>
+          </a:xfrm>
+          <a:prstGeom prst="rect">
+            <a:avLst/>
+          </a:prstGeom>
+          <a:noFill/>
+        </p:spPr>
+        <p:txBody>
+          <a:bodyPr wrap="square">
+            <a:spAutoFit/>
+          </a:bodyPr>
+          <a:lstStyle/>
+          <a:p>
+            <a:pPr algn="l"/>
+            <a:r>
+              <a:rPr sz="1000" b="0">
+                <a:solidFill>
+                  <a:srgbClr val="94A3B8"/>
+                </a:solidFill>
+                <a:latin typeface="Microsoft YaHei"/>
+                <a:ea typeface="Microsoft YaHei"/>
+              </a:rPr>
+              <a:t>标杆复制、痛点攻坚、机制固化、产能效益兑现</a:t>
+            </a:r>
+          </a:p>
+        </p:txBody>
+      </p:sp>
+      <p:sp>
+        <p:nvSpPr>
+          <p:cNvPr id="11" name="TextBox 10"/>
+          <p:cNvSpPr txBox="1"/>
+          <p:nvPr/>
+        </p:nvSpPr>
+        <p:spPr>
+          <a:xfrm>
+            <a:off x="411480" y="1783080"/>
+            <a:ext cx="9144000" cy="228600"/>
+          </a:xfrm>
+          <a:prstGeom prst="rect">
+            <a:avLst/>
+          </a:prstGeom>
+          <a:noFill/>
+        </p:spPr>
+        <p:txBody>
+          <a:bodyPr wrap="square">
+            <a:spAutoFit/>
+          </a:bodyPr>
+          <a:lstStyle/>
+          <a:p>
+            <a:pPr algn="l"/>
+            <a:r>
+              <a:rPr sz="1200" b="1">
+                <a:solidFill>
+                  <a:srgbClr val="0F766E"/>
+                </a:solidFill>
+                <a:latin typeface="Microsoft YaHei"/>
+                <a:ea typeface="Microsoft YaHei"/>
+              </a:rPr>
+              <a:t>实施路径：三阶段推进，层层递进</a:t>
+            </a:r>
+          </a:p>
+        </p:txBody>
+      </p:sp>
+      <p:sp>
+        <p:nvSpPr>
           <p:cNvPr id="12" name="Rounded Rectangle 11"/>
           <p:cNvSpPr/>
           <p:nvPr/>
         </p:nvSpPr>
         <p:spPr>
           <a:xfrm>
-            <a:off x="365760" y="1828800"/>
-            <a:ext cx="3749039" cy="1051560"/>
+            <a:off x="365760" y="2148840"/>
+            <a:ext cx="3749039" cy="4297680"/>
           </a:xfrm>
           <a:prstGeom prst="roundRect">
             <a:avLst>
-              <a:gd name="adj" fmla="val 8000"/>
+              <a:gd name="adj" fmla="val 4000"/>
             </a:avLst>
           </a:prstGeom>
           <a:solidFill>
-            <a:srgbClr val="1B3A5F"/>
+            <a:srgbClr val="FFFFFF"/>
           </a:solidFill>
-          <a:ln>
-            <a:noFill/>
+          <a:ln w="12700">
+            <a:solidFill>
+              <a:srgbClr val="CBD5E1"/>
+            </a:solidFill>
           </a:ln>
         </p:spPr>
         <p:style>
@@ -7688,13 +7947,58 @@
       </p:sp>
       <p:sp>
         <p:nvSpPr>
-          <p:cNvPr id="13" name="TextBox 12"/>
+          <p:cNvPr id="13" name="Rounded Rectangle 12"/>
+          <p:cNvSpPr/>
+          <p:nvPr/>
+        </p:nvSpPr>
+        <p:spPr>
+          <a:xfrm>
+            <a:off x="365760" y="2148840"/>
+            <a:ext cx="3749039" cy="1005840"/>
+          </a:xfrm>
+          <a:prstGeom prst="roundRect">
+            <a:avLst>
+              <a:gd name="adj" fmla="val 4000"/>
+            </a:avLst>
+          </a:prstGeom>
+          <a:solidFill>
+            <a:srgbClr val="0F172A"/>
+          </a:solidFill>
+          <a:ln>
+            <a:noFill/>
+          </a:ln>
+        </p:spPr>
+        <p:style>
+          <a:lnRef idx="1">
+            <a:schemeClr val="accent1"/>
+          </a:lnRef>
+          <a:fillRef idx="3">
+            <a:schemeClr val="accent1"/>
+          </a:fillRef>
+          <a:effectRef idx="2">
+            <a:schemeClr val="accent1"/>
+          </a:effectRef>
+          <a:fontRef idx="minor">
+            <a:schemeClr val="lt1"/>
+          </a:fontRef>
+        </p:style>
+        <p:txBody>
+          <a:bodyPr rtlCol="0" anchor="ctr"/>
+          <a:lstStyle/>
+          <a:p>
+            <a:pPr algn="ctr"/>
+          </a:p>
+        </p:txBody>
+      </p:sp>
+      <p:sp>
+        <p:nvSpPr>
+          <p:cNvPr id="14" name="TextBox 13"/>
           <p:cNvSpPr txBox="1"/>
           <p:nvPr/>
         </p:nvSpPr>
         <p:spPr>
           <a:xfrm>
-            <a:off x="548640" y="1965960"/>
+            <a:off x="548640" y="2286000"/>
             <a:ext cx="3383280" cy="274320"/>
           </a:xfrm>
           <a:prstGeom prst="rect">
@@ -7710,7 +8014,7 @@
           <a:p>
             <a:pPr algn="l"/>
             <a:r>
-              <a:rPr sz="1200" b="1">
+              <a:rPr sz="1100" b="1">
                 <a:solidFill>
                   <a:srgbClr val="FFFFFF"/>
                 </a:solidFill>
@@ -7724,13 +8028,13 @@
       </p:sp>
       <p:sp>
         <p:nvSpPr>
-          <p:cNvPr id="14" name="TextBox 13"/>
+          <p:cNvPr id="15" name="TextBox 14"/>
           <p:cNvSpPr txBox="1"/>
           <p:nvPr/>
         </p:nvSpPr>
         <p:spPr>
           <a:xfrm>
-            <a:off x="548640" y="2331720"/>
+            <a:off x="548640" y="2651760"/>
             <a:ext cx="3383280" cy="320040"/>
           </a:xfrm>
           <a:prstGeom prst="rect">
@@ -7746,7 +8050,7 @@
           <a:p>
             <a:pPr algn="l"/>
             <a:r>
-              <a:rPr sz="1400" b="1">
+              <a:rPr sz="1300" b="1">
                 <a:solidFill>
                   <a:srgbClr val="FFFFFF"/>
                 </a:solidFill>
@@ -7760,14 +8064,14 @@
       </p:sp>
       <p:sp>
         <p:nvSpPr>
-          <p:cNvPr id="15" name="TextBox 14"/>
+          <p:cNvPr id="16" name="TextBox 15"/>
           <p:cNvSpPr txBox="1"/>
           <p:nvPr/>
         </p:nvSpPr>
         <p:spPr>
           <a:xfrm>
-            <a:off x="548640" y="3108960"/>
-            <a:ext cx="3383280" cy="2194560"/>
+            <a:off x="548640" y="3383280"/>
+            <a:ext cx="3383280" cy="2011680"/>
           </a:xfrm>
           <a:prstGeom prst="rect">
             <a:avLst/>
@@ -7784,7 +8088,7 @@
             <a:r>
               <a:rPr sz="1100" b="0">
                 <a:solidFill>
-                  <a:srgbClr val="5D6D7E"/>
+                  <a:srgbClr val="64748B"/>
                 </a:solidFill>
                 <a:latin typeface="Microsoft YaHei"/>
                 <a:ea typeface="Microsoft YaHei"/>
@@ -7798,22 +8102,22 @@
       </p:sp>
       <p:sp>
         <p:nvSpPr>
-          <p:cNvPr id="16" name="Rounded Rectangle 15"/>
+          <p:cNvPr id="17" name="Rounded Rectangle 16"/>
           <p:cNvSpPr/>
           <p:nvPr/>
         </p:nvSpPr>
         <p:spPr>
           <a:xfrm>
             <a:off x="502920" y="5394960"/>
-            <a:ext cx="3474720" cy="914400"/>
+            <a:ext cx="3474720" cy="868680"/>
           </a:xfrm>
           <a:prstGeom prst="roundRect">
             <a:avLst>
-              <a:gd name="adj" fmla="val 8000"/>
+              <a:gd name="adj" fmla="val 4000"/>
             </a:avLst>
           </a:prstGeom>
           <a:solidFill>
-            <a:srgbClr val="FFF4EB"/>
+            <a:srgbClr val="CCFBF1"/>
           </a:solidFill>
           <a:ln>
             <a:noFill/>
@@ -7843,14 +8147,14 @@
       </p:sp>
       <p:sp>
         <p:nvSpPr>
-          <p:cNvPr id="17" name="TextBox 16"/>
+          <p:cNvPr id="18" name="TextBox 17"/>
           <p:cNvSpPr txBox="1"/>
           <p:nvPr/>
         </p:nvSpPr>
         <p:spPr>
           <a:xfrm>
             <a:off x="640080" y="5532120"/>
-            <a:ext cx="3200400" cy="685800"/>
+            <a:ext cx="3200400" cy="640080"/>
           </a:xfrm>
           <a:prstGeom prst="rect">
             <a:avLst/>
@@ -7865,9 +8169,9 @@
           <a:p>
             <a:pPr algn="l"/>
             <a:r>
-              <a:rPr sz="1100" b="1">
-                <a:solidFill>
-                  <a:srgbClr val="1B3A5F"/>
+              <a:rPr sz="1000" b="1">
+                <a:solidFill>
+                  <a:srgbClr val="0F172A"/>
                 </a:solidFill>
                 <a:latin typeface="Microsoft YaHei"/>
                 <a:ea typeface="Microsoft YaHei"/>
@@ -7879,26 +8183,26 @@
       </p:sp>
       <p:sp>
         <p:nvSpPr>
-          <p:cNvPr id="18" name="Rounded Rectangle 17"/>
+          <p:cNvPr id="19" name="Rounded Rectangle 18"/>
           <p:cNvSpPr/>
           <p:nvPr/>
         </p:nvSpPr>
         <p:spPr>
           <a:xfrm>
-            <a:off x="4297680" y="1828800"/>
-            <a:ext cx="3749039" cy="4663440"/>
+            <a:off x="4297680" y="2148840"/>
+            <a:ext cx="3749039" cy="4297680"/>
           </a:xfrm>
           <a:prstGeom prst="roundRect">
             <a:avLst>
-              <a:gd name="adj" fmla="val 8000"/>
+              <a:gd name="adj" fmla="val 4000"/>
             </a:avLst>
           </a:prstGeom>
           <a:solidFill>
             <a:srgbClr val="FFFFFF"/>
           </a:solidFill>
-          <a:ln w="15875">
+          <a:ln w="12700">
             <a:solidFill>
-              <a:srgbClr val="E8EEF2"/>
+              <a:srgbClr val="CBD5E1"/>
             </a:solidFill>
           </a:ln>
         </p:spPr>
@@ -7926,22 +8230,22 @@
       </p:sp>
       <p:sp>
         <p:nvSpPr>
-          <p:cNvPr id="19" name="Rounded Rectangle 18"/>
+          <p:cNvPr id="20" name="Rounded Rectangle 19"/>
           <p:cNvSpPr/>
           <p:nvPr/>
         </p:nvSpPr>
         <p:spPr>
           <a:xfrm>
-            <a:off x="4297680" y="1828800"/>
-            <a:ext cx="3749039" cy="1051560"/>
+            <a:off x="4297680" y="2148840"/>
+            <a:ext cx="3749039" cy="1005840"/>
           </a:xfrm>
           <a:prstGeom prst="roundRect">
             <a:avLst>
-              <a:gd name="adj" fmla="val 8000"/>
+              <a:gd name="adj" fmla="val 4000"/>
             </a:avLst>
           </a:prstGeom>
           <a:solidFill>
-            <a:srgbClr val="E87A2E"/>
+            <a:srgbClr val="0F766E"/>
           </a:solidFill>
           <a:ln>
             <a:noFill/>
@@ -7971,13 +8275,13 @@
       </p:sp>
       <p:sp>
         <p:nvSpPr>
-          <p:cNvPr id="20" name="TextBox 19"/>
+          <p:cNvPr id="21" name="TextBox 20"/>
           <p:cNvSpPr txBox="1"/>
           <p:nvPr/>
         </p:nvSpPr>
         <p:spPr>
           <a:xfrm>
-            <a:off x="4480560" y="1965960"/>
+            <a:off x="4480560" y="2286000"/>
             <a:ext cx="3383280" cy="274320"/>
           </a:xfrm>
           <a:prstGeom prst="rect">
@@ -7993,7 +8297,7 @@
           <a:p>
             <a:pPr algn="l"/>
             <a:r>
-              <a:rPr sz="1200" b="1">
+              <a:rPr sz="1100" b="1">
                 <a:solidFill>
                   <a:srgbClr val="FFFFFF"/>
                 </a:solidFill>
@@ -8007,13 +8311,13 @@
       </p:sp>
       <p:sp>
         <p:nvSpPr>
-          <p:cNvPr id="21" name="TextBox 20"/>
+          <p:cNvPr id="22" name="TextBox 21"/>
           <p:cNvSpPr txBox="1"/>
           <p:nvPr/>
         </p:nvSpPr>
         <p:spPr>
           <a:xfrm>
-            <a:off x="4480560" y="2331720"/>
+            <a:off x="4480560" y="2651760"/>
             <a:ext cx="3383280" cy="320040"/>
           </a:xfrm>
           <a:prstGeom prst="rect">
@@ -8029,7 +8333,7 @@
           <a:p>
             <a:pPr algn="l"/>
             <a:r>
-              <a:rPr sz="1400" b="1">
+              <a:rPr sz="1300" b="1">
                 <a:solidFill>
                   <a:srgbClr val="FFFFFF"/>
                 </a:solidFill>
@@ -8043,14 +8347,14 @@
       </p:sp>
       <p:sp>
         <p:nvSpPr>
-          <p:cNvPr id="22" name="TextBox 21"/>
+          <p:cNvPr id="23" name="TextBox 22"/>
           <p:cNvSpPr txBox="1"/>
           <p:nvPr/>
         </p:nvSpPr>
         <p:spPr>
           <a:xfrm>
-            <a:off x="4480560" y="3108960"/>
-            <a:ext cx="3383280" cy="2194560"/>
+            <a:off x="4480560" y="3383280"/>
+            <a:ext cx="3383280" cy="2011680"/>
           </a:xfrm>
           <a:prstGeom prst="rect">
             <a:avLst/>
@@ -8067,7 +8371,7 @@
             <a:r>
               <a:rPr sz="1100" b="0">
                 <a:solidFill>
-                  <a:srgbClr val="5D6D7E"/>
+                  <a:srgbClr val="64748B"/>
                 </a:solidFill>
                 <a:latin typeface="Microsoft YaHei"/>
                 <a:ea typeface="Microsoft YaHei"/>
@@ -8081,22 +8385,22 @@
       </p:sp>
       <p:sp>
         <p:nvSpPr>
-          <p:cNvPr id="23" name="Rounded Rectangle 22"/>
+          <p:cNvPr id="24" name="Rounded Rectangle 23"/>
           <p:cNvSpPr/>
           <p:nvPr/>
         </p:nvSpPr>
         <p:spPr>
           <a:xfrm>
             <a:off x="4434840" y="5394960"/>
-            <a:ext cx="3474720" cy="914400"/>
+            <a:ext cx="3474720" cy="868680"/>
           </a:xfrm>
           <a:prstGeom prst="roundRect">
             <a:avLst>
-              <a:gd name="adj" fmla="val 8000"/>
+              <a:gd name="adj" fmla="val 4000"/>
             </a:avLst>
           </a:prstGeom>
           <a:solidFill>
-            <a:srgbClr val="FFF4EB"/>
+            <a:srgbClr val="CCFBF1"/>
           </a:solidFill>
           <a:ln>
             <a:noFill/>
@@ -8126,14 +8430,14 @@
       </p:sp>
       <p:sp>
         <p:nvSpPr>
-          <p:cNvPr id="24" name="TextBox 23"/>
+          <p:cNvPr id="25" name="TextBox 24"/>
           <p:cNvSpPr txBox="1"/>
           <p:nvPr/>
         </p:nvSpPr>
         <p:spPr>
           <a:xfrm>
             <a:off x="4572000" y="5532120"/>
-            <a:ext cx="3200400" cy="685800"/>
+            <a:ext cx="3200400" cy="640080"/>
           </a:xfrm>
           <a:prstGeom prst="rect">
             <a:avLst/>
@@ -8148,9 +8452,9 @@
           <a:p>
             <a:pPr algn="l"/>
             <a:r>
-              <a:rPr sz="1100" b="1">
-                <a:solidFill>
-                  <a:srgbClr val="1B3A5F"/>
+              <a:rPr sz="1000" b="1">
+                <a:solidFill>
+                  <a:srgbClr val="0F172A"/>
                 </a:solidFill>
                 <a:latin typeface="Microsoft YaHei"/>
                 <a:ea typeface="Microsoft YaHei"/>
@@ -8162,26 +8466,26 @@
       </p:sp>
       <p:sp>
         <p:nvSpPr>
-          <p:cNvPr id="25" name="Rounded Rectangle 24"/>
+          <p:cNvPr id="26" name="Rounded Rectangle 25"/>
           <p:cNvSpPr/>
           <p:nvPr/>
         </p:nvSpPr>
         <p:spPr>
           <a:xfrm>
-            <a:off x="8229600" y="1828800"/>
-            <a:ext cx="3749039" cy="4663440"/>
+            <a:off x="8229600" y="2148840"/>
+            <a:ext cx="3749039" cy="4297680"/>
           </a:xfrm>
           <a:prstGeom prst="roundRect">
             <a:avLst>
-              <a:gd name="adj" fmla="val 8000"/>
+              <a:gd name="adj" fmla="val 4000"/>
             </a:avLst>
           </a:prstGeom>
           <a:solidFill>
             <a:srgbClr val="FFFFFF"/>
           </a:solidFill>
-          <a:ln w="15875">
+          <a:ln w="12700">
             <a:solidFill>
-              <a:srgbClr val="E8EEF2"/>
+              <a:srgbClr val="CBD5E1"/>
             </a:solidFill>
           </a:ln>
         </p:spPr>
@@ -8209,22 +8513,22 @@
       </p:sp>
       <p:sp>
         <p:nvSpPr>
-          <p:cNvPr id="26" name="Rounded Rectangle 25"/>
+          <p:cNvPr id="27" name="Rounded Rectangle 26"/>
           <p:cNvSpPr/>
           <p:nvPr/>
         </p:nvSpPr>
         <p:spPr>
           <a:xfrm>
-            <a:off x="8229600" y="1828800"/>
-            <a:ext cx="3749039" cy="1051560"/>
+            <a:off x="8229600" y="2148840"/>
+            <a:ext cx="3749039" cy="1005840"/>
           </a:xfrm>
           <a:prstGeom prst="roundRect">
             <a:avLst>
-              <a:gd name="adj" fmla="val 8000"/>
+              <a:gd name="adj" fmla="val 4000"/>
             </a:avLst>
           </a:prstGeom>
           <a:solidFill>
-            <a:srgbClr val="1B3A5F"/>
+            <a:srgbClr val="0F172A"/>
           </a:solidFill>
           <a:ln>
             <a:noFill/>
@@ -8254,13 +8558,13 @@
       </p:sp>
       <p:sp>
         <p:nvSpPr>
-          <p:cNvPr id="27" name="TextBox 26"/>
+          <p:cNvPr id="28" name="TextBox 27"/>
           <p:cNvSpPr txBox="1"/>
           <p:nvPr/>
         </p:nvSpPr>
         <p:spPr>
           <a:xfrm>
-            <a:off x="8412480" y="1965960"/>
+            <a:off x="8412480" y="2286000"/>
             <a:ext cx="3383280" cy="274320"/>
           </a:xfrm>
           <a:prstGeom prst="rect">
@@ -8276,7 +8580,7 @@
           <a:p>
             <a:pPr algn="l"/>
             <a:r>
-              <a:rPr sz="1200" b="1">
+              <a:rPr sz="1100" b="1">
                 <a:solidFill>
                   <a:srgbClr val="FFFFFF"/>
                 </a:solidFill>
@@ -8290,13 +8594,13 @@
       </p:sp>
       <p:sp>
         <p:nvSpPr>
-          <p:cNvPr id="28" name="TextBox 27"/>
+          <p:cNvPr id="29" name="TextBox 28"/>
           <p:cNvSpPr txBox="1"/>
           <p:nvPr/>
         </p:nvSpPr>
         <p:spPr>
           <a:xfrm>
-            <a:off x="8412480" y="2331720"/>
+            <a:off x="8412480" y="2651760"/>
             <a:ext cx="3383280" cy="320040"/>
           </a:xfrm>
           <a:prstGeom prst="rect">
@@ -8312,7 +8616,7 @@
           <a:p>
             <a:pPr algn="l"/>
             <a:r>
-              <a:rPr sz="1400" b="1">
+              <a:rPr sz="1300" b="1">
                 <a:solidFill>
                   <a:srgbClr val="FFFFFF"/>
                 </a:solidFill>
@@ -8326,14 +8630,14 @@
       </p:sp>
       <p:sp>
         <p:nvSpPr>
-          <p:cNvPr id="29" name="TextBox 28"/>
+          <p:cNvPr id="30" name="TextBox 29"/>
           <p:cNvSpPr txBox="1"/>
           <p:nvPr/>
         </p:nvSpPr>
         <p:spPr>
           <a:xfrm>
-            <a:off x="8412480" y="3108960"/>
-            <a:ext cx="3383280" cy="2194560"/>
+            <a:off x="8412480" y="3383280"/>
+            <a:ext cx="3383280" cy="2011680"/>
           </a:xfrm>
           <a:prstGeom prst="rect">
             <a:avLst/>
@@ -8350,7 +8654,7 @@
             <a:r>
               <a:rPr sz="1100" b="0">
                 <a:solidFill>
-                  <a:srgbClr val="5D6D7E"/>
+                  <a:srgbClr val="64748B"/>
                 </a:solidFill>
                 <a:latin typeface="Microsoft YaHei"/>
                 <a:ea typeface="Microsoft YaHei"/>
@@ -8364,22 +8668,22 @@
       </p:sp>
       <p:sp>
         <p:nvSpPr>
-          <p:cNvPr id="30" name="Rounded Rectangle 29"/>
+          <p:cNvPr id="31" name="Rounded Rectangle 30"/>
           <p:cNvSpPr/>
           <p:nvPr/>
         </p:nvSpPr>
         <p:spPr>
           <a:xfrm>
             <a:off x="8366760" y="5394960"/>
-            <a:ext cx="3474720" cy="914400"/>
+            <a:ext cx="3474720" cy="868680"/>
           </a:xfrm>
           <a:prstGeom prst="roundRect">
             <a:avLst>
-              <a:gd name="adj" fmla="val 8000"/>
+              <a:gd name="adj" fmla="val 4000"/>
             </a:avLst>
           </a:prstGeom>
           <a:solidFill>
-            <a:srgbClr val="FFF4EB"/>
+            <a:srgbClr val="CCFBF1"/>
           </a:solidFill>
           <a:ln>
             <a:noFill/>
@@ -8409,14 +8713,14 @@
       </p:sp>
       <p:sp>
         <p:nvSpPr>
-          <p:cNvPr id="31" name="TextBox 30"/>
+          <p:cNvPr id="32" name="TextBox 31"/>
           <p:cNvSpPr txBox="1"/>
           <p:nvPr/>
         </p:nvSpPr>
         <p:spPr>
           <a:xfrm>
             <a:off x="8503920" y="5532120"/>
-            <a:ext cx="3200400" cy="685800"/>
+            <a:ext cx="3200400" cy="640080"/>
           </a:xfrm>
           <a:prstGeom prst="rect">
             <a:avLst/>
@@ -8431,9 +8735,9 @@
           <a:p>
             <a:pPr algn="l"/>
             <a:r>
-              <a:rPr sz="1100" b="1">
-                <a:solidFill>
-                  <a:srgbClr val="1B3A5F"/>
+              <a:rPr sz="1000" b="1">
+                <a:solidFill>
+                  <a:srgbClr val="0F172A"/>
                 </a:solidFill>
                 <a:latin typeface="Microsoft YaHei"/>
                 <a:ea typeface="Microsoft YaHei"/>
@@ -8463,7 +8767,7 @@
       <p:grpSpPr/>
       <p:sp>
         <p:nvSpPr>
-          <p:cNvPr id="2" name="Rounded Rectangle 1"/>
+          <p:cNvPr id="2" name="Rectangle 1"/>
           <p:cNvSpPr/>
           <p:nvPr/>
         </p:nvSpPr>
@@ -8472,13 +8776,11 @@
             <a:off x="0" y="0"/>
             <a:ext cx="12191695" cy="6858000"/>
           </a:xfrm>
-          <a:prstGeom prst="roundRect">
-            <a:avLst>
-              <a:gd name="adj" fmla="val 8000"/>
-            </a:avLst>
+          <a:prstGeom prst="rect">
+            <a:avLst/>
           </a:prstGeom>
           <a:solidFill>
-            <a:srgbClr val="FFFFFF"/>
+            <a:srgbClr val="F1F5F9"/>
           </a:solidFill>
           <a:ln>
             <a:noFill/>
@@ -8508,99 +8810,23 @@
       </p:sp>
       <p:sp>
         <p:nvSpPr>
-          <p:cNvPr id="3" name="TextBox 2"/>
-          <p:cNvSpPr txBox="1"/>
-          <p:nvPr/>
-        </p:nvSpPr>
-        <p:spPr>
-          <a:xfrm>
-            <a:off x="365760" y="137160"/>
-            <a:ext cx="11430000" cy="320040"/>
-          </a:xfrm>
-          <a:prstGeom prst="rect">
-            <a:avLst/>
-          </a:prstGeom>
-          <a:noFill/>
-        </p:spPr>
-        <p:txBody>
-          <a:bodyPr wrap="square">
-            <a:spAutoFit/>
-          </a:bodyPr>
-          <a:lstStyle/>
-          <a:p>
-            <a:pPr algn="l"/>
-            <a:r>
-              <a:rPr sz="1800" b="1">
-                <a:solidFill>
-                  <a:srgbClr val="1B3A5F"/>
-                </a:solidFill>
-                <a:latin typeface="Microsoft YaHei"/>
-                <a:ea typeface="Microsoft YaHei"/>
-              </a:rPr>
-              <a:t>精益全域落地｜以「真善美」锚定改善底层逻辑</a:t>
-            </a:r>
-          </a:p>
-        </p:txBody>
-      </p:sp>
-      <p:sp>
-        <p:nvSpPr>
-          <p:cNvPr id="4" name="TextBox 3"/>
-          <p:cNvSpPr txBox="1"/>
-          <p:nvPr/>
-        </p:nvSpPr>
-        <p:spPr>
-          <a:xfrm>
-            <a:off x="365760" y="502920"/>
-            <a:ext cx="11430000" cy="320040"/>
-          </a:xfrm>
-          <a:prstGeom prst="rect">
-            <a:avLst/>
-          </a:prstGeom>
-          <a:noFill/>
-        </p:spPr>
-        <p:txBody>
-          <a:bodyPr wrap="square">
-            <a:spAutoFit/>
-          </a:bodyPr>
-          <a:lstStyle/>
-          <a:p>
-            <a:pPr algn="l"/>
-            <a:r>
-              <a:rPr sz="1100" b="0">
-                <a:solidFill>
-                  <a:srgbClr val="5D6D7E"/>
-                </a:solidFill>
-                <a:latin typeface="Microsoft YaHei"/>
-                <a:ea typeface="Microsoft YaHei"/>
-              </a:rPr>
-              <a:t>所有精益课题、现场改善、体系运行统一对标公司核心价值主张，构建可信、有效、长效的改善闭环</a:t>
-            </a:r>
-          </a:p>
-        </p:txBody>
-      </p:sp>
-      <p:sp>
-        <p:nvSpPr>
-          <p:cNvPr id="5" name="Rounded Rectangle 4"/>
+          <p:cNvPr id="3" name="Rectangle 2"/>
           <p:cNvSpPr/>
           <p:nvPr/>
         </p:nvSpPr>
         <p:spPr>
           <a:xfrm>
-            <a:off x="365760" y="960120"/>
-            <a:ext cx="3749039" cy="5486400"/>
-          </a:xfrm>
-          <a:prstGeom prst="roundRect">
-            <a:avLst>
-              <a:gd name="adj" fmla="val 8000"/>
-            </a:avLst>
+            <a:off x="0" y="0"/>
+            <a:ext cx="12191695" cy="685800"/>
+          </a:xfrm>
+          <a:prstGeom prst="rect">
+            <a:avLst/>
           </a:prstGeom>
           <a:solidFill>
-            <a:srgbClr val="FFFFFF"/>
+            <a:srgbClr val="0F172A"/>
           </a:solidFill>
-          <a:ln w="15875">
-            <a:solidFill>
-              <a:srgbClr val="E8EEF2"/>
-            </a:solidFill>
+          <a:ln>
+            <a:noFill/>
           </a:ln>
         </p:spPr>
         <p:style>
@@ -8627,25 +8853,99 @@
       </p:sp>
       <p:sp>
         <p:nvSpPr>
+          <p:cNvPr id="4" name="TextBox 3"/>
+          <p:cNvSpPr txBox="1"/>
+          <p:nvPr/>
+        </p:nvSpPr>
+        <p:spPr>
+          <a:xfrm>
+            <a:off x="365760" y="137160"/>
+            <a:ext cx="11430000" cy="274320"/>
+          </a:xfrm>
+          <a:prstGeom prst="rect">
+            <a:avLst/>
+          </a:prstGeom>
+          <a:noFill/>
+        </p:spPr>
+        <p:txBody>
+          <a:bodyPr wrap="square">
+            <a:spAutoFit/>
+          </a:bodyPr>
+          <a:lstStyle/>
+          <a:p>
+            <a:pPr algn="l"/>
+            <a:r>
+              <a:rPr sz="1600" b="1">
+                <a:solidFill>
+                  <a:srgbClr val="FFFFFF"/>
+                </a:solidFill>
+                <a:latin typeface="Microsoft YaHei"/>
+                <a:ea typeface="Microsoft YaHei"/>
+              </a:rPr>
+              <a:t>精益全域落地｜以「真善美」锚定改善底层逻辑</a:t>
+            </a:r>
+          </a:p>
+        </p:txBody>
+      </p:sp>
+      <p:sp>
+        <p:nvSpPr>
+          <p:cNvPr id="5" name="TextBox 4"/>
+          <p:cNvSpPr txBox="1"/>
+          <p:nvPr/>
+        </p:nvSpPr>
+        <p:spPr>
+          <a:xfrm>
+            <a:off x="365760" y="411480"/>
+            <a:ext cx="11430000" cy="228600"/>
+          </a:xfrm>
+          <a:prstGeom prst="rect">
+            <a:avLst/>
+          </a:prstGeom>
+          <a:noFill/>
+        </p:spPr>
+        <p:txBody>
+          <a:bodyPr wrap="square">
+            <a:spAutoFit/>
+          </a:bodyPr>
+          <a:lstStyle/>
+          <a:p>
+            <a:pPr algn="l"/>
+            <a:r>
+              <a:rPr sz="1000" b="0">
+                <a:solidFill>
+                  <a:srgbClr val="94A3B8"/>
+                </a:solidFill>
+                <a:latin typeface="Microsoft YaHei"/>
+                <a:ea typeface="Microsoft YaHei"/>
+              </a:rPr>
+              <a:t>所有精益课题、现场改善、体系运行统一对标公司核心价值主张，构建可信、有效、长效的改善闭环</a:t>
+            </a:r>
+          </a:p>
+        </p:txBody>
+      </p:sp>
+      <p:sp>
+        <p:nvSpPr>
           <p:cNvPr id="6" name="Rounded Rectangle 5"/>
           <p:cNvSpPr/>
           <p:nvPr/>
         </p:nvSpPr>
         <p:spPr>
           <a:xfrm>
-            <a:off x="365760" y="960120"/>
-            <a:ext cx="3749039" cy="1097280"/>
+            <a:off x="365760" y="914400"/>
+            <a:ext cx="3749039" cy="5532120"/>
           </a:xfrm>
           <a:prstGeom prst="roundRect">
             <a:avLst>
-              <a:gd name="adj" fmla="val 8000"/>
+              <a:gd name="adj" fmla="val 4000"/>
             </a:avLst>
           </a:prstGeom>
           <a:solidFill>
-            <a:srgbClr val="1B3A5F"/>
+            <a:srgbClr val="FFFFFF"/>
           </a:solidFill>
-          <a:ln>
-            <a:noFill/>
+          <a:ln w="12700">
+            <a:solidFill>
+              <a:srgbClr val="CBD5E1"/>
+            </a:solidFill>
           </a:ln>
         </p:spPr>
         <p:style>
@@ -8672,13 +8972,58 @@
       </p:sp>
       <p:sp>
         <p:nvSpPr>
-          <p:cNvPr id="7" name="TextBox 6"/>
+          <p:cNvPr id="7" name="Rounded Rectangle 6"/>
+          <p:cNvSpPr/>
+          <p:nvPr/>
+        </p:nvSpPr>
+        <p:spPr>
+          <a:xfrm>
+            <a:off x="365760" y="914400"/>
+            <a:ext cx="3749039" cy="1051560"/>
+          </a:xfrm>
+          <a:prstGeom prst="roundRect">
+            <a:avLst>
+              <a:gd name="adj" fmla="val 4000"/>
+            </a:avLst>
+          </a:prstGeom>
+          <a:solidFill>
+            <a:srgbClr val="0F172A"/>
+          </a:solidFill>
+          <a:ln>
+            <a:noFill/>
+          </a:ln>
+        </p:spPr>
+        <p:style>
+          <a:lnRef idx="1">
+            <a:schemeClr val="accent1"/>
+          </a:lnRef>
+          <a:fillRef idx="3">
+            <a:schemeClr val="accent1"/>
+          </a:fillRef>
+          <a:effectRef idx="2">
+            <a:schemeClr val="accent1"/>
+          </a:effectRef>
+          <a:fontRef idx="minor">
+            <a:schemeClr val="lt1"/>
+          </a:fontRef>
+        </p:style>
+        <p:txBody>
+          <a:bodyPr rtlCol="0" anchor="ctr"/>
+          <a:lstStyle/>
+          <a:p>
+            <a:pPr algn="ctr"/>
+          </a:p>
+        </p:txBody>
+      </p:sp>
+      <p:sp>
+        <p:nvSpPr>
+          <p:cNvPr id="8" name="TextBox 7"/>
           <p:cNvSpPr txBox="1"/>
           <p:nvPr/>
         </p:nvSpPr>
         <p:spPr>
           <a:xfrm>
-            <a:off x="548640" y="1143000"/>
+            <a:off x="548640" y="1097280"/>
             <a:ext cx="3383280" cy="365760"/>
           </a:xfrm>
           <a:prstGeom prst="rect">
@@ -8694,7 +9039,7 @@
           <a:p>
             <a:pPr algn="l"/>
             <a:r>
-              <a:rPr sz="2000" b="1">
+              <a:rPr sz="1800" b="1">
                 <a:solidFill>
                   <a:srgbClr val="FFFFFF"/>
                 </a:solidFill>
@@ -8708,13 +9053,13 @@
       </p:sp>
       <p:sp>
         <p:nvSpPr>
-          <p:cNvPr id="8" name="TextBox 7"/>
+          <p:cNvPr id="9" name="TextBox 8"/>
           <p:cNvSpPr txBox="1"/>
           <p:nvPr/>
         </p:nvSpPr>
         <p:spPr>
           <a:xfrm>
-            <a:off x="548640" y="1600200"/>
+            <a:off x="548640" y="1554480"/>
             <a:ext cx="3383280" cy="274320"/>
           </a:xfrm>
           <a:prstGeom prst="rect">
@@ -8730,9 +9075,9 @@
           <a:p>
             <a:pPr algn="l"/>
             <a:r>
-              <a:rPr sz="1200" b="0">
-                <a:solidFill>
-                  <a:srgbClr val="A8C5D4"/>
+              <a:rPr sz="1100" b="0">
+                <a:solidFill>
+                  <a:srgbClr val="94A3B8"/>
                 </a:solidFill>
                 <a:latin typeface="Microsoft YaHei"/>
                 <a:ea typeface="Microsoft YaHei"/>
@@ -8744,13 +9089,13 @@
       </p:sp>
       <p:sp>
         <p:nvSpPr>
-          <p:cNvPr id="9" name="TextBox 8"/>
+          <p:cNvPr id="10" name="TextBox 9"/>
           <p:cNvSpPr txBox="1"/>
           <p:nvPr/>
         </p:nvSpPr>
         <p:spPr>
           <a:xfrm>
-            <a:off x="548640" y="2331720"/>
+            <a:off x="548640" y="2286000"/>
             <a:ext cx="3383280" cy="2560320"/>
           </a:xfrm>
           <a:prstGeom prst="rect">
@@ -8766,9 +9111,9 @@
           <a:p>
             <a:pPr algn="l"/>
             <a:r>
-              <a:rPr sz="1200" b="0">
-                <a:solidFill>
-                  <a:srgbClr val="5D6D7E"/>
+              <a:rPr sz="1100" b="0">
+                <a:solidFill>
+                  <a:srgbClr val="64748B"/>
                 </a:solidFill>
                 <a:latin typeface="Microsoft YaHei"/>
                 <a:ea typeface="Microsoft YaHei"/>
@@ -8782,22 +9127,22 @@
       </p:sp>
       <p:sp>
         <p:nvSpPr>
-          <p:cNvPr id="10" name="Rounded Rectangle 9"/>
+          <p:cNvPr id="11" name="Rounded Rectangle 10"/>
           <p:cNvSpPr/>
           <p:nvPr/>
         </p:nvSpPr>
         <p:spPr>
           <a:xfrm>
-            <a:off x="502920" y="5120640"/>
-            <a:ext cx="3474720" cy="1097280"/>
+            <a:off x="502920" y="5074920"/>
+            <a:ext cx="3474720" cy="1143000"/>
           </a:xfrm>
           <a:prstGeom prst="roundRect">
             <a:avLst>
-              <a:gd name="adj" fmla="val 8000"/>
+              <a:gd name="adj" fmla="val 4000"/>
             </a:avLst>
           </a:prstGeom>
           <a:solidFill>
-            <a:srgbClr val="FFF4EB"/>
+            <a:srgbClr val="CCFBF1"/>
           </a:solidFill>
           <a:ln>
             <a:noFill/>
@@ -8827,14 +9172,14 @@
       </p:sp>
       <p:sp>
         <p:nvSpPr>
-          <p:cNvPr id="11" name="TextBox 10"/>
+          <p:cNvPr id="12" name="TextBox 11"/>
           <p:cNvSpPr txBox="1"/>
           <p:nvPr/>
         </p:nvSpPr>
         <p:spPr>
           <a:xfrm>
-            <a:off x="640080" y="5303520"/>
-            <a:ext cx="3200400" cy="777240"/>
+            <a:off x="640080" y="5257800"/>
+            <a:ext cx="3200400" cy="822960"/>
           </a:xfrm>
           <a:prstGeom prst="rect">
             <a:avLst/>
@@ -8849,9 +9194,9 @@
           <a:p>
             <a:pPr algn="l"/>
             <a:r>
-              <a:rPr sz="1200" b="1">
-                <a:solidFill>
-                  <a:srgbClr val="1B3A5F"/>
+              <a:rPr sz="1100" b="1">
+                <a:solidFill>
+                  <a:srgbClr val="0F172A"/>
                 </a:solidFill>
                 <a:latin typeface="Microsoft YaHei"/>
                 <a:ea typeface="Microsoft YaHei"/>
@@ -8863,26 +9208,26 @@
       </p:sp>
       <p:sp>
         <p:nvSpPr>
-          <p:cNvPr id="12" name="Rounded Rectangle 11"/>
+          <p:cNvPr id="13" name="Rounded Rectangle 12"/>
           <p:cNvSpPr/>
           <p:nvPr/>
         </p:nvSpPr>
         <p:spPr>
           <a:xfrm>
-            <a:off x="4297680" y="960120"/>
-            <a:ext cx="3749039" cy="5486400"/>
+            <a:off x="4297680" y="914400"/>
+            <a:ext cx="3749039" cy="5532120"/>
           </a:xfrm>
           <a:prstGeom prst="roundRect">
             <a:avLst>
-              <a:gd name="adj" fmla="val 8000"/>
+              <a:gd name="adj" fmla="val 4000"/>
             </a:avLst>
           </a:prstGeom>
           <a:solidFill>
             <a:srgbClr val="FFFFFF"/>
           </a:solidFill>
-          <a:ln w="15875">
+          <a:ln w="12700">
             <a:solidFill>
-              <a:srgbClr val="E8EEF2"/>
+              <a:srgbClr val="CBD5E1"/>
             </a:solidFill>
           </a:ln>
         </p:spPr>
@@ -8910,22 +9255,22 @@
       </p:sp>
       <p:sp>
         <p:nvSpPr>
-          <p:cNvPr id="13" name="Rounded Rectangle 12"/>
+          <p:cNvPr id="14" name="Rounded Rectangle 13"/>
           <p:cNvSpPr/>
           <p:nvPr/>
         </p:nvSpPr>
         <p:spPr>
           <a:xfrm>
-            <a:off x="4297680" y="960120"/>
-            <a:ext cx="3749039" cy="1097280"/>
+            <a:off x="4297680" y="914400"/>
+            <a:ext cx="3749039" cy="1051560"/>
           </a:xfrm>
           <a:prstGeom prst="roundRect">
             <a:avLst>
-              <a:gd name="adj" fmla="val 8000"/>
+              <a:gd name="adj" fmla="val 4000"/>
             </a:avLst>
           </a:prstGeom>
           <a:solidFill>
-            <a:srgbClr val="0D8A7A"/>
+            <a:srgbClr val="0F766E"/>
           </a:solidFill>
           <a:ln>
             <a:noFill/>
@@ -8955,13 +9300,13 @@
       </p:sp>
       <p:sp>
         <p:nvSpPr>
-          <p:cNvPr id="14" name="TextBox 13"/>
+          <p:cNvPr id="15" name="TextBox 14"/>
           <p:cNvSpPr txBox="1"/>
           <p:nvPr/>
         </p:nvSpPr>
         <p:spPr>
           <a:xfrm>
-            <a:off x="4480560" y="1143000"/>
+            <a:off x="4480560" y="1097280"/>
             <a:ext cx="3383280" cy="365760"/>
           </a:xfrm>
           <a:prstGeom prst="rect">
@@ -8977,7 +9322,7 @@
           <a:p>
             <a:pPr algn="l"/>
             <a:r>
-              <a:rPr sz="2000" b="1">
+              <a:rPr sz="1800" b="1">
                 <a:solidFill>
                   <a:srgbClr val="FFFFFF"/>
                 </a:solidFill>
@@ -8991,13 +9336,13 @@
       </p:sp>
       <p:sp>
         <p:nvSpPr>
-          <p:cNvPr id="15" name="TextBox 14"/>
+          <p:cNvPr id="16" name="TextBox 15"/>
           <p:cNvSpPr txBox="1"/>
           <p:nvPr/>
         </p:nvSpPr>
         <p:spPr>
           <a:xfrm>
-            <a:off x="4480560" y="1600200"/>
+            <a:off x="4480560" y="1554480"/>
             <a:ext cx="3383280" cy="274320"/>
           </a:xfrm>
           <a:prstGeom prst="rect">
@@ -9013,9 +9358,9 @@
           <a:p>
             <a:pPr algn="l"/>
             <a:r>
-              <a:rPr sz="1200" b="0">
-                <a:solidFill>
-                  <a:srgbClr val="A8C5D4"/>
+              <a:rPr sz="1100" b="0">
+                <a:solidFill>
+                  <a:srgbClr val="94A3B8"/>
                 </a:solidFill>
                 <a:latin typeface="Microsoft YaHei"/>
                 <a:ea typeface="Microsoft YaHei"/>
@@ -9027,13 +9372,13 @@
       </p:sp>
       <p:sp>
         <p:nvSpPr>
-          <p:cNvPr id="16" name="TextBox 15"/>
+          <p:cNvPr id="17" name="TextBox 16"/>
           <p:cNvSpPr txBox="1"/>
           <p:nvPr/>
         </p:nvSpPr>
         <p:spPr>
           <a:xfrm>
-            <a:off x="4480560" y="2331720"/>
+            <a:off x="4480560" y="2286000"/>
             <a:ext cx="3383280" cy="2560320"/>
           </a:xfrm>
           <a:prstGeom prst="rect">
@@ -9049,9 +9394,9 @@
           <a:p>
             <a:pPr algn="l"/>
             <a:r>
-              <a:rPr sz="1200" b="0">
-                <a:solidFill>
-                  <a:srgbClr val="5D6D7E"/>
+              <a:rPr sz="1100" b="0">
+                <a:solidFill>
+                  <a:srgbClr val="64748B"/>
                 </a:solidFill>
                 <a:latin typeface="Microsoft YaHei"/>
                 <a:ea typeface="Microsoft YaHei"/>
@@ -9065,22 +9410,22 @@
       </p:sp>
       <p:sp>
         <p:nvSpPr>
-          <p:cNvPr id="17" name="Rounded Rectangle 16"/>
+          <p:cNvPr id="18" name="Rounded Rectangle 17"/>
           <p:cNvSpPr/>
           <p:nvPr/>
         </p:nvSpPr>
         <p:spPr>
           <a:xfrm>
-            <a:off x="4434840" y="5120640"/>
-            <a:ext cx="3474720" cy="1097280"/>
+            <a:off x="4434840" y="5074920"/>
+            <a:ext cx="3474720" cy="1143000"/>
           </a:xfrm>
           <a:prstGeom prst="roundRect">
             <a:avLst>
-              <a:gd name="adj" fmla="val 8000"/>
+              <a:gd name="adj" fmla="val 4000"/>
             </a:avLst>
           </a:prstGeom>
           <a:solidFill>
-            <a:srgbClr val="FFF4EB"/>
+            <a:srgbClr val="CCFBF1"/>
           </a:solidFill>
           <a:ln>
             <a:noFill/>
@@ -9110,14 +9455,14 @@
       </p:sp>
       <p:sp>
         <p:nvSpPr>
-          <p:cNvPr id="18" name="TextBox 17"/>
+          <p:cNvPr id="19" name="TextBox 18"/>
           <p:cNvSpPr txBox="1"/>
           <p:nvPr/>
         </p:nvSpPr>
         <p:spPr>
           <a:xfrm>
-            <a:off x="4572000" y="5303520"/>
-            <a:ext cx="3200400" cy="777240"/>
+            <a:off x="4572000" y="5257800"/>
+            <a:ext cx="3200400" cy="822960"/>
           </a:xfrm>
           <a:prstGeom prst="rect">
             <a:avLst/>
@@ -9132,9 +9477,9 @@
           <a:p>
             <a:pPr algn="l"/>
             <a:r>
-              <a:rPr sz="1200" b="1">
-                <a:solidFill>
-                  <a:srgbClr val="1B3A5F"/>
+              <a:rPr sz="1100" b="1">
+                <a:solidFill>
+                  <a:srgbClr val="0F172A"/>
                 </a:solidFill>
                 <a:latin typeface="Microsoft YaHei"/>
                 <a:ea typeface="Microsoft YaHei"/>
@@ -9146,26 +9491,26 @@
       </p:sp>
       <p:sp>
         <p:nvSpPr>
-          <p:cNvPr id="19" name="Rounded Rectangle 18"/>
+          <p:cNvPr id="20" name="Rounded Rectangle 19"/>
           <p:cNvSpPr/>
           <p:nvPr/>
         </p:nvSpPr>
         <p:spPr>
           <a:xfrm>
-            <a:off x="8229600" y="960120"/>
-            <a:ext cx="3749039" cy="5486400"/>
+            <a:off x="8229600" y="914400"/>
+            <a:ext cx="3749039" cy="5532120"/>
           </a:xfrm>
           <a:prstGeom prst="roundRect">
             <a:avLst>
-              <a:gd name="adj" fmla="val 8000"/>
+              <a:gd name="adj" fmla="val 4000"/>
             </a:avLst>
           </a:prstGeom>
           <a:solidFill>
             <a:srgbClr val="FFFFFF"/>
           </a:solidFill>
-          <a:ln w="15875">
+          <a:ln w="12700">
             <a:solidFill>
-              <a:srgbClr val="E8EEF2"/>
+              <a:srgbClr val="CBD5E1"/>
             </a:solidFill>
           </a:ln>
         </p:spPr>
@@ -9193,22 +9538,22 @@
       </p:sp>
       <p:sp>
         <p:nvSpPr>
-          <p:cNvPr id="20" name="Rounded Rectangle 19"/>
+          <p:cNvPr id="21" name="Rounded Rectangle 20"/>
           <p:cNvSpPr/>
           <p:nvPr/>
         </p:nvSpPr>
         <p:spPr>
           <a:xfrm>
-            <a:off x="8229600" y="960120"/>
-            <a:ext cx="3749039" cy="1097280"/>
+            <a:off x="8229600" y="914400"/>
+            <a:ext cx="3749039" cy="1051560"/>
           </a:xfrm>
           <a:prstGeom prst="roundRect">
             <a:avLst>
-              <a:gd name="adj" fmla="val 8000"/>
+              <a:gd name="adj" fmla="val 4000"/>
             </a:avLst>
           </a:prstGeom>
           <a:solidFill>
-            <a:srgbClr val="1B3A5F"/>
+            <a:srgbClr val="0F172A"/>
           </a:solidFill>
           <a:ln>
             <a:noFill/>
@@ -9238,13 +9583,13 @@
       </p:sp>
       <p:sp>
         <p:nvSpPr>
-          <p:cNvPr id="21" name="TextBox 20"/>
+          <p:cNvPr id="22" name="TextBox 21"/>
           <p:cNvSpPr txBox="1"/>
           <p:nvPr/>
         </p:nvSpPr>
         <p:spPr>
           <a:xfrm>
-            <a:off x="8412480" y="1143000"/>
+            <a:off x="8412480" y="1097280"/>
             <a:ext cx="3383280" cy="365760"/>
           </a:xfrm>
           <a:prstGeom prst="rect">
@@ -9260,7 +9605,7 @@
           <a:p>
             <a:pPr algn="l"/>
             <a:r>
-              <a:rPr sz="2000" b="1">
+              <a:rPr sz="1800" b="1">
                 <a:solidFill>
                   <a:srgbClr val="FFFFFF"/>
                 </a:solidFill>
@@ -9274,13 +9619,13 @@
       </p:sp>
       <p:sp>
         <p:nvSpPr>
-          <p:cNvPr id="22" name="TextBox 21"/>
+          <p:cNvPr id="23" name="TextBox 22"/>
           <p:cNvSpPr txBox="1"/>
           <p:nvPr/>
         </p:nvSpPr>
         <p:spPr>
           <a:xfrm>
-            <a:off x="8412480" y="1600200"/>
+            <a:off x="8412480" y="1554480"/>
             <a:ext cx="3383280" cy="274320"/>
           </a:xfrm>
           <a:prstGeom prst="rect">
@@ -9296,9 +9641,9 @@
           <a:p>
             <a:pPr algn="l"/>
             <a:r>
-              <a:rPr sz="1200" b="0">
-                <a:solidFill>
-                  <a:srgbClr val="A8C5D4"/>
+              <a:rPr sz="1100" b="0">
+                <a:solidFill>
+                  <a:srgbClr val="94A3B8"/>
                 </a:solidFill>
                 <a:latin typeface="Microsoft YaHei"/>
                 <a:ea typeface="Microsoft YaHei"/>
@@ -9310,13 +9655,13 @@
       </p:sp>
       <p:sp>
         <p:nvSpPr>
-          <p:cNvPr id="23" name="TextBox 22"/>
+          <p:cNvPr id="24" name="TextBox 23"/>
           <p:cNvSpPr txBox="1"/>
           <p:nvPr/>
         </p:nvSpPr>
         <p:spPr>
           <a:xfrm>
-            <a:off x="8412480" y="2331720"/>
+            <a:off x="8412480" y="2286000"/>
             <a:ext cx="3383280" cy="2560320"/>
           </a:xfrm>
           <a:prstGeom prst="rect">
@@ -9332,9 +9677,9 @@
           <a:p>
             <a:pPr algn="l"/>
             <a:r>
-              <a:rPr sz="1200" b="0">
-                <a:solidFill>
-                  <a:srgbClr val="5D6D7E"/>
+              <a:rPr sz="1100" b="0">
+                <a:solidFill>
+                  <a:srgbClr val="64748B"/>
                 </a:solidFill>
                 <a:latin typeface="Microsoft YaHei"/>
                 <a:ea typeface="Microsoft YaHei"/>
@@ -9348,22 +9693,22 @@
       </p:sp>
       <p:sp>
         <p:nvSpPr>
-          <p:cNvPr id="24" name="Rounded Rectangle 23"/>
+          <p:cNvPr id="25" name="Rounded Rectangle 24"/>
           <p:cNvSpPr/>
           <p:nvPr/>
         </p:nvSpPr>
         <p:spPr>
           <a:xfrm>
-            <a:off x="8366760" y="5120640"/>
-            <a:ext cx="3474720" cy="1097280"/>
+            <a:off x="8366760" y="5074920"/>
+            <a:ext cx="3474720" cy="1143000"/>
           </a:xfrm>
           <a:prstGeom prst="roundRect">
             <a:avLst>
-              <a:gd name="adj" fmla="val 8000"/>
+              <a:gd name="adj" fmla="val 4000"/>
             </a:avLst>
           </a:prstGeom>
           <a:solidFill>
-            <a:srgbClr val="FFF4EB"/>
+            <a:srgbClr val="CCFBF1"/>
           </a:solidFill>
           <a:ln>
             <a:noFill/>
@@ -9393,14 +9738,14 @@
       </p:sp>
       <p:sp>
         <p:nvSpPr>
-          <p:cNvPr id="25" name="TextBox 24"/>
+          <p:cNvPr id="26" name="TextBox 25"/>
           <p:cNvSpPr txBox="1"/>
           <p:nvPr/>
         </p:nvSpPr>
         <p:spPr>
           <a:xfrm>
-            <a:off x="8503920" y="5303520"/>
-            <a:ext cx="3200400" cy="777240"/>
+            <a:off x="8503920" y="5257800"/>
+            <a:ext cx="3200400" cy="822960"/>
           </a:xfrm>
           <a:prstGeom prst="rect">
             <a:avLst/>
@@ -9415,9 +9760,9 @@
           <a:p>
             <a:pPr algn="l"/>
             <a:r>
-              <a:rPr sz="1200" b="1">
-                <a:solidFill>
-                  <a:srgbClr val="1B3A5F"/>
+              <a:rPr sz="1100" b="1">
+                <a:solidFill>
+                  <a:srgbClr val="0F172A"/>
                 </a:solidFill>
                 <a:latin typeface="Microsoft YaHei"/>
                 <a:ea typeface="Microsoft YaHei"/>
